--- a/05_web_app/5.1 - web intro enchanted (1).pptx
+++ b/05_web_app/5.1 - web intro enchanted (1).pptx
@@ -1,28 +1,28 @@
 
 <file path=ppt/presentation.xml><?xml version="1.0" encoding="utf-8"?>
-<p:presentation xmlns:a="http://schemas.openxmlformats.org/drawingml/2006/main" xmlns:r="http://schemas.openxmlformats.org/officeDocument/2006/relationships" xmlns:mc="http://schemas.openxmlformats.org/markup-compatibility/2006" xmlns:mv="urn:schemas-microsoft-com:mac:vml" xmlns:p="http://schemas.openxmlformats.org/presentationml/2006/main" xmlns:c="http://schemas.openxmlformats.org/drawingml/2006/chart" xmlns:dgm="http://schemas.openxmlformats.org/drawingml/2006/diagram" xmlns:o="urn:schemas-microsoft-com:office:office" xmlns:v="urn:schemas-microsoft-com:vml" xmlns:pvml="urn:schemas-microsoft-com:office:powerpoint" xmlns:com="http://schemas.openxmlformats.org/drawingml/2006/compatibility" xmlns:p14="http://schemas.microsoft.com/office/powerpoint/2010/main" xmlns:p15="http://schemas.microsoft.com/office/powerpoint/2012/main" xmlns:ahyp="http://schemas.microsoft.com/office/drawing/2018/hyperlinkcolor" autoCompressPictures="0" strictFirstAndLastChars="0" saveSubsetFonts="1">
+<p:presentation xmlns:a="http://schemas.openxmlformats.org/drawingml/2006/main" xmlns:r="http://schemas.openxmlformats.org/officeDocument/2006/relationships" xmlns:p="http://schemas.openxmlformats.org/presentationml/2006/main" strictFirstAndLastChars="0" saveSubsetFonts="1" autoCompressPictures="0">
   <p:sldMasterIdLst>
-    <p:sldMasterId id="2147483659" r:id="rId3"/>
+    <p:sldMasterId id="2147483659" r:id="rId1"/>
   </p:sldMasterIdLst>
   <p:notesMasterIdLst>
-    <p:notesMasterId r:id="rId4"/>
+    <p:notesMasterId r:id="rId12"/>
   </p:notesMasterIdLst>
   <p:sldIdLst>
+    <p:sldId id="264" r:id="rId2"/>
+    <p:sldId id="259" r:id="rId3"/>
+    <p:sldId id="257" r:id="rId4"/>
     <p:sldId id="256" r:id="rId5"/>
-    <p:sldId id="257" r:id="rId6"/>
+    <p:sldId id="260" r:id="rId6"/>
     <p:sldId id="258" r:id="rId7"/>
-    <p:sldId id="259" r:id="rId8"/>
-    <p:sldId id="260" r:id="rId9"/>
-    <p:sldId id="261" r:id="rId10"/>
-    <p:sldId id="262" r:id="rId11"/>
-    <p:sldId id="263" r:id="rId12"/>
-    <p:sldId id="264" r:id="rId13"/>
-    <p:sldId id="265" r:id="rId14"/>
+    <p:sldId id="261" r:id="rId8"/>
+    <p:sldId id="263" r:id="rId9"/>
+    <p:sldId id="262" r:id="rId10"/>
+    <p:sldId id="265" r:id="rId11"/>
   </p:sldIdLst>
-  <p:sldSz cy="9144000" cx="9144000"/>
+  <p:sldSz cx="9144000" cy="9144000"/>
   <p:notesSz cx="6858000" cy="9144000"/>
   <p:defaultTextStyle>
-    <a:defPPr lvl="0" marR="0" rtl="0" algn="l">
+    <a:defPPr marR="0" lvl="0" algn="l" rtl="0">
       <a:lnSpc>
         <a:spcPct val="100000"/>
       </a:lnSpc>
@@ -33,7 +33,7 @@
         <a:spcPts val="0"/>
       </a:spcAft>
     </a:defPPr>
-    <a:lvl1pPr lvl="0" marR="0" rtl="0" algn="l">
+    <a:lvl1pPr marR="0" lvl="0" algn="l" rtl="0">
       <a:lnSpc>
         <a:spcPct val="100000"/>
       </a:lnSpc>
@@ -47,7 +47,7 @@
         <a:srgbClr val="000000"/>
       </a:buClr>
       <a:buFont typeface="Arial"/>
-      <a:defRPr b="0" i="0" sz="1400" u="none" cap="none" strike="noStrike">
+      <a:defRPr sz="1400" b="0" i="0" u="none" strike="noStrike" cap="none">
         <a:solidFill>
           <a:srgbClr val="000000"/>
         </a:solidFill>
@@ -57,7 +57,7 @@
         <a:sym typeface="Arial"/>
       </a:defRPr>
     </a:lvl1pPr>
-    <a:lvl2pPr lvl="1" marR="0" rtl="0" algn="l">
+    <a:lvl2pPr marR="0" lvl="1" algn="l" rtl="0">
       <a:lnSpc>
         <a:spcPct val="100000"/>
       </a:lnSpc>
@@ -71,7 +71,7 @@
         <a:srgbClr val="000000"/>
       </a:buClr>
       <a:buFont typeface="Arial"/>
-      <a:defRPr b="0" i="0" sz="1400" u="none" cap="none" strike="noStrike">
+      <a:defRPr sz="1400" b="0" i="0" u="none" strike="noStrike" cap="none">
         <a:solidFill>
           <a:srgbClr val="000000"/>
         </a:solidFill>
@@ -81,7 +81,7 @@
         <a:sym typeface="Arial"/>
       </a:defRPr>
     </a:lvl2pPr>
-    <a:lvl3pPr lvl="2" marR="0" rtl="0" algn="l">
+    <a:lvl3pPr marR="0" lvl="2" algn="l" rtl="0">
       <a:lnSpc>
         <a:spcPct val="100000"/>
       </a:lnSpc>
@@ -95,7 +95,7 @@
         <a:srgbClr val="000000"/>
       </a:buClr>
       <a:buFont typeface="Arial"/>
-      <a:defRPr b="0" i="0" sz="1400" u="none" cap="none" strike="noStrike">
+      <a:defRPr sz="1400" b="0" i="0" u="none" strike="noStrike" cap="none">
         <a:solidFill>
           <a:srgbClr val="000000"/>
         </a:solidFill>
@@ -105,7 +105,7 @@
         <a:sym typeface="Arial"/>
       </a:defRPr>
     </a:lvl3pPr>
-    <a:lvl4pPr lvl="3" marR="0" rtl="0" algn="l">
+    <a:lvl4pPr marR="0" lvl="3" algn="l" rtl="0">
       <a:lnSpc>
         <a:spcPct val="100000"/>
       </a:lnSpc>
@@ -119,7 +119,7 @@
         <a:srgbClr val="000000"/>
       </a:buClr>
       <a:buFont typeface="Arial"/>
-      <a:defRPr b="0" i="0" sz="1400" u="none" cap="none" strike="noStrike">
+      <a:defRPr sz="1400" b="0" i="0" u="none" strike="noStrike" cap="none">
         <a:solidFill>
           <a:srgbClr val="000000"/>
         </a:solidFill>
@@ -129,7 +129,7 @@
         <a:sym typeface="Arial"/>
       </a:defRPr>
     </a:lvl4pPr>
-    <a:lvl5pPr lvl="4" marR="0" rtl="0" algn="l">
+    <a:lvl5pPr marR="0" lvl="4" algn="l" rtl="0">
       <a:lnSpc>
         <a:spcPct val="100000"/>
       </a:lnSpc>
@@ -143,7 +143,7 @@
         <a:srgbClr val="000000"/>
       </a:buClr>
       <a:buFont typeface="Arial"/>
-      <a:defRPr b="0" i="0" sz="1400" u="none" cap="none" strike="noStrike">
+      <a:defRPr sz="1400" b="0" i="0" u="none" strike="noStrike" cap="none">
         <a:solidFill>
           <a:srgbClr val="000000"/>
         </a:solidFill>
@@ -153,7 +153,7 @@
         <a:sym typeface="Arial"/>
       </a:defRPr>
     </a:lvl5pPr>
-    <a:lvl6pPr lvl="5" marR="0" rtl="0" algn="l">
+    <a:lvl6pPr marR="0" lvl="5" algn="l" rtl="0">
       <a:lnSpc>
         <a:spcPct val="100000"/>
       </a:lnSpc>
@@ -167,7 +167,7 @@
         <a:srgbClr val="000000"/>
       </a:buClr>
       <a:buFont typeface="Arial"/>
-      <a:defRPr b="0" i="0" sz="1400" u="none" cap="none" strike="noStrike">
+      <a:defRPr sz="1400" b="0" i="0" u="none" strike="noStrike" cap="none">
         <a:solidFill>
           <a:srgbClr val="000000"/>
         </a:solidFill>
@@ -177,7 +177,7 @@
         <a:sym typeface="Arial"/>
       </a:defRPr>
     </a:lvl6pPr>
-    <a:lvl7pPr lvl="6" marR="0" rtl="0" algn="l">
+    <a:lvl7pPr marR="0" lvl="6" algn="l" rtl="0">
       <a:lnSpc>
         <a:spcPct val="100000"/>
       </a:lnSpc>
@@ -191,7 +191,7 @@
         <a:srgbClr val="000000"/>
       </a:buClr>
       <a:buFont typeface="Arial"/>
-      <a:defRPr b="0" i="0" sz="1400" u="none" cap="none" strike="noStrike">
+      <a:defRPr sz="1400" b="0" i="0" u="none" strike="noStrike" cap="none">
         <a:solidFill>
           <a:srgbClr val="000000"/>
         </a:solidFill>
@@ -201,7 +201,7 @@
         <a:sym typeface="Arial"/>
       </a:defRPr>
     </a:lvl7pPr>
-    <a:lvl8pPr lvl="7" marR="0" rtl="0" algn="l">
+    <a:lvl8pPr marR="0" lvl="7" algn="l" rtl="0">
       <a:lnSpc>
         <a:spcPct val="100000"/>
       </a:lnSpc>
@@ -215,7 +215,7 @@
         <a:srgbClr val="000000"/>
       </a:buClr>
       <a:buFont typeface="Arial"/>
-      <a:defRPr b="0" i="0" sz="1400" u="none" cap="none" strike="noStrike">
+      <a:defRPr sz="1400" b="0" i="0" u="none" strike="noStrike" cap="none">
         <a:solidFill>
           <a:srgbClr val="000000"/>
         </a:solidFill>
@@ -225,7 +225,7 @@
         <a:sym typeface="Arial"/>
       </a:defRPr>
     </a:lvl8pPr>
-    <a:lvl9pPr lvl="8" marR="0" rtl="0" algn="l">
+    <a:lvl9pPr marR="0" lvl="8" algn="l" rtl="0">
       <a:lnSpc>
         <a:spcPct val="100000"/>
       </a:lnSpc>
@@ -239,7 +239,7 @@
         <a:srgbClr val="000000"/>
       </a:buClr>
       <a:buFont typeface="Arial"/>
-      <a:defRPr b="0" i="0" sz="1400" u="none" cap="none" strike="noStrike">
+      <a:defRPr sz="1400" b="0" i="0" u="none" strike="noStrike" cap="none">
         <a:solidFill>
           <a:srgbClr val="000000"/>
         </a:solidFill>
@@ -250,15 +250,25 @@
       </a:defRPr>
     </a:lvl9pPr>
   </p:defaultTextStyle>
+  <p:extLst>
+    <p:ext uri="{EFAFB233-063F-42B5-8137-9DF3F51BA10A}">
+      <p15:sldGuideLst xmlns:p15="http://schemas.microsoft.com/office/powerpoint/2012/main"/>
+    </p:ext>
+  </p:extLst>
 </p:presentation>
 </file>
 
 <file path=ppt/notesMasters/notesMaster1.xml><?xml version="1.0" encoding="utf-8"?>
-<p:notesMaster xmlns:a="http://schemas.openxmlformats.org/drawingml/2006/main" xmlns:r="http://schemas.openxmlformats.org/officeDocument/2006/relationships" xmlns:mc="http://schemas.openxmlformats.org/markup-compatibility/2006" xmlns:mv="urn:schemas-microsoft-com:mac:vml" xmlns:p="http://schemas.openxmlformats.org/presentationml/2006/main" xmlns:c="http://schemas.openxmlformats.org/drawingml/2006/chart" xmlns:dgm="http://schemas.openxmlformats.org/drawingml/2006/diagram" xmlns:o="urn:schemas-microsoft-com:office:office" xmlns:v="urn:schemas-microsoft-com:vml" xmlns:pvml="urn:schemas-microsoft-com:office:powerpoint" xmlns:com="http://schemas.openxmlformats.org/drawingml/2006/compatibility" xmlns:p14="http://schemas.microsoft.com/office/powerpoint/2010/main" xmlns:p15="http://schemas.microsoft.com/office/powerpoint/2012/main" xmlns:ahyp="http://schemas.microsoft.com/office/drawing/2018/hyperlinkcolor">
+<p:notesMaster xmlns:a="http://schemas.openxmlformats.org/drawingml/2006/main" xmlns:r="http://schemas.openxmlformats.org/officeDocument/2006/relationships" xmlns:p="http://schemas.openxmlformats.org/presentationml/2006/main">
   <p:cSld>
+    <p:bg>
+      <p:bgRef idx="1001">
+        <a:schemeClr val="bg1"/>
+      </p:bgRef>
+    </p:bg>
     <p:spTree>
       <p:nvGrpSpPr>
-        <p:cNvPr id="2" name="Shape 2"/>
+        <p:cNvPr id="1" name="Shape 2"/>
         <p:cNvGrpSpPr/>
         <p:nvPr/>
       </p:nvGrpSpPr>
@@ -273,9 +283,11 @@
       <p:sp>
         <p:nvSpPr>
           <p:cNvPr id="3" name="Google Shape;3;n"/>
-          <p:cNvSpPr/>
+          <p:cNvSpPr>
+            <a:spLocks noGrp="1" noRot="1" noChangeAspect="1"/>
+          </p:cNvSpPr>
           <p:nvPr>
-            <p:ph idx="2" type="sldImg"/>
+            <p:ph type="sldImg" idx="2"/>
           </p:nvPr>
         </p:nvSpPr>
         <p:spPr>
@@ -284,9 +296,13 @@
             <a:ext cx="3429000" cy="3429000"/>
           </a:xfrm>
           <a:custGeom>
-            <a:rect b="b" l="l" r="r" t="t"/>
+            <a:avLst/>
+            <a:gdLst/>
+            <a:ahLst/>
+            <a:cxnLst/>
+            <a:rect l="l" t="t" r="r" b="b"/>
             <a:pathLst>
-              <a:path extrusionOk="0" h="120000" w="120000">
+              <a:path w="120000" h="120000" extrusionOk="0">
                 <a:moveTo>
                   <a:pt x="0" y="0"/>
                 </a:moveTo>
@@ -304,23 +320,25 @@
             </a:pathLst>
           </a:custGeom>
           <a:noFill/>
-          <a:ln cap="flat" cmpd="sng" w="9525">
+          <a:ln w="9525" cap="flat" cmpd="sng">
             <a:solidFill>
               <a:srgbClr val="000000"/>
             </a:solidFill>
             <a:prstDash val="solid"/>
             <a:round/>
-            <a:headEnd len="sm" w="sm" type="none"/>
-            <a:tailEnd len="sm" w="sm" type="none"/>
+            <a:headEnd type="none" w="sm" len="sm"/>
+            <a:tailEnd type="none" w="sm" len="sm"/>
           </a:ln>
         </p:spPr>
       </p:sp>
       <p:sp>
         <p:nvSpPr>
           <p:cNvPr id="4" name="Google Shape;4;n"/>
-          <p:cNvSpPr txBox="1"/>
+          <p:cNvSpPr txBox="1">
+            <a:spLocks noGrp="1"/>
+          </p:cNvSpPr>
           <p:nvPr>
-            <p:ph idx="1" type="body"/>
+            <p:ph type="body" idx="1"/>
           </p:nvPr>
         </p:nvSpPr>
         <p:spPr>
@@ -337,11 +355,11 @@
           </a:ln>
         </p:spPr>
         <p:txBody>
-          <a:bodyPr anchorCtr="0" anchor="t" bIns="91425" lIns="91425" spcFirstLastPara="1" rIns="91425" wrap="square" tIns="91425">
+          <a:bodyPr spcFirstLastPara="1" wrap="square" lIns="91425" tIns="91425" rIns="91425" bIns="91425" anchor="t" anchorCtr="0">
             <a:noAutofit/>
           </a:bodyPr>
           <a:lstStyle>
-            <a:lvl1pPr indent="-298450" lvl="0" marL="457200">
+            <a:lvl1pPr marL="457200" lvl="0" indent="-298450">
               <a:spcBef>
                 <a:spcPts val="0"/>
               </a:spcBef>
@@ -352,7 +370,7 @@
               <a:buChar char="●"/>
               <a:defRPr sz="1100"/>
             </a:lvl1pPr>
-            <a:lvl2pPr indent="-298450" lvl="1" marL="914400">
+            <a:lvl2pPr marL="914400" lvl="1" indent="-298450">
               <a:spcBef>
                 <a:spcPts val="0"/>
               </a:spcBef>
@@ -363,7 +381,7 @@
               <a:buChar char="○"/>
               <a:defRPr sz="1100"/>
             </a:lvl2pPr>
-            <a:lvl3pPr indent="-298450" lvl="2" marL="1371600">
+            <a:lvl3pPr marL="1371600" lvl="2" indent="-298450">
               <a:spcBef>
                 <a:spcPts val="0"/>
               </a:spcBef>
@@ -374,7 +392,7 @@
               <a:buChar char="■"/>
               <a:defRPr sz="1100"/>
             </a:lvl3pPr>
-            <a:lvl4pPr indent="-298450" lvl="3" marL="1828800">
+            <a:lvl4pPr marL="1828800" lvl="3" indent="-298450">
               <a:spcBef>
                 <a:spcPts val="0"/>
               </a:spcBef>
@@ -385,7 +403,7 @@
               <a:buChar char="●"/>
               <a:defRPr sz="1100"/>
             </a:lvl4pPr>
-            <a:lvl5pPr indent="-298450" lvl="4" marL="2286000">
+            <a:lvl5pPr marL="2286000" lvl="4" indent="-298450">
               <a:spcBef>
                 <a:spcPts val="0"/>
               </a:spcBef>
@@ -396,7 +414,7 @@
               <a:buChar char="○"/>
               <a:defRPr sz="1100"/>
             </a:lvl5pPr>
-            <a:lvl6pPr indent="-298450" lvl="5" marL="2743200">
+            <a:lvl6pPr marL="2743200" lvl="5" indent="-298450">
               <a:spcBef>
                 <a:spcPts val="0"/>
               </a:spcBef>
@@ -407,7 +425,7 @@
               <a:buChar char="■"/>
               <a:defRPr sz="1100"/>
             </a:lvl6pPr>
-            <a:lvl7pPr indent="-298450" lvl="6" marL="3200400">
+            <a:lvl7pPr marL="3200400" lvl="6" indent="-298450">
               <a:spcBef>
                 <a:spcPts val="0"/>
               </a:spcBef>
@@ -418,7 +436,7 @@
               <a:buChar char="●"/>
               <a:defRPr sz="1100"/>
             </a:lvl7pPr>
-            <a:lvl8pPr indent="-298450" lvl="7" marL="3657600">
+            <a:lvl8pPr marL="3657600" lvl="7" indent="-298450">
               <a:spcBef>
                 <a:spcPts val="0"/>
               </a:spcBef>
@@ -429,7 +447,7 @@
               <a:buChar char="○"/>
               <a:defRPr sz="1100"/>
             </a:lvl8pPr>
-            <a:lvl9pPr indent="-298450" lvl="8" marL="4114800">
+            <a:lvl9pPr marL="4114800" lvl="8" indent="-298450">
               <a:spcBef>
                 <a:spcPts val="0"/>
               </a:spcBef>
@@ -441,14 +459,16 @@
               <a:defRPr sz="1100"/>
             </a:lvl9pPr>
           </a:lstStyle>
-          <a:p/>
+          <a:p>
+            <a:endParaRPr/>
+          </a:p>
         </p:txBody>
       </p:sp>
     </p:spTree>
   </p:cSld>
-  <p:clrMap accent1="accent1" accent2="accent2" accent3="accent3" accent4="accent4" accent5="accent5" accent6="accent6" bg1="lt1" bg2="dk2" tx1="dk1" tx2="lt2" folHlink="folHlink" hlink="hlink"/>
+  <p:clrMap bg1="lt1" tx1="dk1" bg2="dk2" tx2="lt2" accent1="accent1" accent2="accent2" accent3="accent3" accent4="accent4" accent5="accent5" accent6="accent6" hlink="hlink" folHlink="folHlink"/>
   <p:notesStyle>
-    <a:defPPr lvl="0" marR="0" rtl="0" algn="l">
+    <a:defPPr marR="0" lvl="0" algn="l" rtl="0">
       <a:lnSpc>
         <a:spcPct val="100000"/>
       </a:lnSpc>
@@ -459,7 +479,7 @@
         <a:spcPts val="0"/>
       </a:spcAft>
     </a:defPPr>
-    <a:lvl1pPr lvl="0" marR="0" rtl="0" algn="l">
+    <a:lvl1pPr marR="0" lvl="0" algn="l" rtl="0">
       <a:lnSpc>
         <a:spcPct val="100000"/>
       </a:lnSpc>
@@ -473,7 +493,7 @@
         <a:srgbClr val="000000"/>
       </a:buClr>
       <a:buFont typeface="Arial"/>
-      <a:defRPr b="0" i="0" sz="1400" u="none" cap="none" strike="noStrike">
+      <a:defRPr sz="1400" b="0" i="0" u="none" strike="noStrike" cap="none">
         <a:solidFill>
           <a:srgbClr val="000000"/>
         </a:solidFill>
@@ -483,7 +503,7 @@
         <a:sym typeface="Arial"/>
       </a:defRPr>
     </a:lvl1pPr>
-    <a:lvl2pPr lvl="1" marR="0" rtl="0" algn="l">
+    <a:lvl2pPr marR="0" lvl="1" algn="l" rtl="0">
       <a:lnSpc>
         <a:spcPct val="100000"/>
       </a:lnSpc>
@@ -497,7 +517,7 @@
         <a:srgbClr val="000000"/>
       </a:buClr>
       <a:buFont typeface="Arial"/>
-      <a:defRPr b="0" i="0" sz="1400" u="none" cap="none" strike="noStrike">
+      <a:defRPr sz="1400" b="0" i="0" u="none" strike="noStrike" cap="none">
         <a:solidFill>
           <a:srgbClr val="000000"/>
         </a:solidFill>
@@ -507,7 +527,7 @@
         <a:sym typeface="Arial"/>
       </a:defRPr>
     </a:lvl2pPr>
-    <a:lvl3pPr lvl="2" marR="0" rtl="0" algn="l">
+    <a:lvl3pPr marR="0" lvl="2" algn="l" rtl="0">
       <a:lnSpc>
         <a:spcPct val="100000"/>
       </a:lnSpc>
@@ -521,7 +541,7 @@
         <a:srgbClr val="000000"/>
       </a:buClr>
       <a:buFont typeface="Arial"/>
-      <a:defRPr b="0" i="0" sz="1400" u="none" cap="none" strike="noStrike">
+      <a:defRPr sz="1400" b="0" i="0" u="none" strike="noStrike" cap="none">
         <a:solidFill>
           <a:srgbClr val="000000"/>
         </a:solidFill>
@@ -531,7 +551,7 @@
         <a:sym typeface="Arial"/>
       </a:defRPr>
     </a:lvl3pPr>
-    <a:lvl4pPr lvl="3" marR="0" rtl="0" algn="l">
+    <a:lvl4pPr marR="0" lvl="3" algn="l" rtl="0">
       <a:lnSpc>
         <a:spcPct val="100000"/>
       </a:lnSpc>
@@ -545,7 +565,7 @@
         <a:srgbClr val="000000"/>
       </a:buClr>
       <a:buFont typeface="Arial"/>
-      <a:defRPr b="0" i="0" sz="1400" u="none" cap="none" strike="noStrike">
+      <a:defRPr sz="1400" b="0" i="0" u="none" strike="noStrike" cap="none">
         <a:solidFill>
           <a:srgbClr val="000000"/>
         </a:solidFill>
@@ -555,7 +575,7 @@
         <a:sym typeface="Arial"/>
       </a:defRPr>
     </a:lvl4pPr>
-    <a:lvl5pPr lvl="4" marR="0" rtl="0" algn="l">
+    <a:lvl5pPr marR="0" lvl="4" algn="l" rtl="0">
       <a:lnSpc>
         <a:spcPct val="100000"/>
       </a:lnSpc>
@@ -569,7 +589,7 @@
         <a:srgbClr val="000000"/>
       </a:buClr>
       <a:buFont typeface="Arial"/>
-      <a:defRPr b="0" i="0" sz="1400" u="none" cap="none" strike="noStrike">
+      <a:defRPr sz="1400" b="0" i="0" u="none" strike="noStrike" cap="none">
         <a:solidFill>
           <a:srgbClr val="000000"/>
         </a:solidFill>
@@ -579,7 +599,7 @@
         <a:sym typeface="Arial"/>
       </a:defRPr>
     </a:lvl5pPr>
-    <a:lvl6pPr lvl="5" marR="0" rtl="0" algn="l">
+    <a:lvl6pPr marR="0" lvl="5" algn="l" rtl="0">
       <a:lnSpc>
         <a:spcPct val="100000"/>
       </a:lnSpc>
@@ -593,7 +613,7 @@
         <a:srgbClr val="000000"/>
       </a:buClr>
       <a:buFont typeface="Arial"/>
-      <a:defRPr b="0" i="0" sz="1400" u="none" cap="none" strike="noStrike">
+      <a:defRPr sz="1400" b="0" i="0" u="none" strike="noStrike" cap="none">
         <a:solidFill>
           <a:srgbClr val="000000"/>
         </a:solidFill>
@@ -603,7 +623,7 @@
         <a:sym typeface="Arial"/>
       </a:defRPr>
     </a:lvl6pPr>
-    <a:lvl7pPr lvl="6" marR="0" rtl="0" algn="l">
+    <a:lvl7pPr marR="0" lvl="6" algn="l" rtl="0">
       <a:lnSpc>
         <a:spcPct val="100000"/>
       </a:lnSpc>
@@ -617,7 +637,7 @@
         <a:srgbClr val="000000"/>
       </a:buClr>
       <a:buFont typeface="Arial"/>
-      <a:defRPr b="0" i="0" sz="1400" u="none" cap="none" strike="noStrike">
+      <a:defRPr sz="1400" b="0" i="0" u="none" strike="noStrike" cap="none">
         <a:solidFill>
           <a:srgbClr val="000000"/>
         </a:solidFill>
@@ -627,7 +647,7 @@
         <a:sym typeface="Arial"/>
       </a:defRPr>
     </a:lvl7pPr>
-    <a:lvl8pPr lvl="7" marR="0" rtl="0" algn="l">
+    <a:lvl8pPr marR="0" lvl="7" algn="l" rtl="0">
       <a:lnSpc>
         <a:spcPct val="100000"/>
       </a:lnSpc>
@@ -641,7 +661,7 @@
         <a:srgbClr val="000000"/>
       </a:buClr>
       <a:buFont typeface="Arial"/>
-      <a:defRPr b="0" i="0" sz="1400" u="none" cap="none" strike="noStrike">
+      <a:defRPr sz="1400" b="0" i="0" u="none" strike="noStrike" cap="none">
         <a:solidFill>
           <a:srgbClr val="000000"/>
         </a:solidFill>
@@ -651,7 +671,7 @@
         <a:sym typeface="Arial"/>
       </a:defRPr>
     </a:lvl8pPr>
-    <a:lvl9pPr lvl="8" marR="0" rtl="0" algn="l">
+    <a:lvl9pPr marR="0" lvl="8" algn="l" rtl="0">
       <a:lnSpc>
         <a:spcPct val="100000"/>
       </a:lnSpc>
@@ -665,7 +685,7 @@
         <a:srgbClr val="000000"/>
       </a:buClr>
       <a:buFont typeface="Arial"/>
-      <a:defRPr b="0" i="0" sz="1400" u="none" cap="none" strike="noStrike">
+      <a:defRPr sz="1400" b="0" i="0" u="none" strike="noStrike" cap="none">
         <a:solidFill>
           <a:srgbClr val="000000"/>
         </a:solidFill>
@@ -680,11 +700,427 @@
 </file>
 
 <file path=ppt/notesSlides/notesSlide1.xml><?xml version="1.0" encoding="utf-8"?>
-<p:notes xmlns:a="http://schemas.openxmlformats.org/drawingml/2006/main" xmlns:r="http://schemas.openxmlformats.org/officeDocument/2006/relationships" xmlns:mc="http://schemas.openxmlformats.org/markup-compatibility/2006" xmlns:mv="urn:schemas-microsoft-com:mac:vml" xmlns:p="http://schemas.openxmlformats.org/presentationml/2006/main" xmlns:c="http://schemas.openxmlformats.org/drawingml/2006/chart" xmlns:dgm="http://schemas.openxmlformats.org/drawingml/2006/diagram" xmlns:o="urn:schemas-microsoft-com:office:office" xmlns:v="urn:schemas-microsoft-com:vml" xmlns:pvml="urn:schemas-microsoft-com:office:powerpoint" xmlns:com="http://schemas.openxmlformats.org/drawingml/2006/compatibility" xmlns:p14="http://schemas.microsoft.com/office/powerpoint/2010/main" xmlns:p15="http://schemas.microsoft.com/office/powerpoint/2012/main" xmlns:ahyp="http://schemas.microsoft.com/office/drawing/2018/hyperlinkcolor" showMasterPhAnim="0" showMasterSp="0">
+<p:notes xmlns:a="http://schemas.openxmlformats.org/drawingml/2006/main" xmlns:r="http://schemas.openxmlformats.org/officeDocument/2006/relationships" xmlns:p="http://schemas.openxmlformats.org/presentationml/2006/main" showMasterSp="0" showMasterPhAnim="0">
   <p:cSld>
     <p:spTree>
       <p:nvGrpSpPr>
-        <p:cNvPr id="50" name="Shape 50"/>
+        <p:cNvPr id="1" name="Shape 107"/>
+        <p:cNvGrpSpPr/>
+        <p:nvPr/>
+      </p:nvGrpSpPr>
+      <p:grpSpPr>
+        <a:xfrm>
+          <a:off x="0" y="0"/>
+          <a:ext cx="0" cy="0"/>
+          <a:chOff x="0" y="0"/>
+          <a:chExt cx="0" cy="0"/>
+        </a:xfrm>
+      </p:grpSpPr>
+      <p:sp>
+        <p:nvSpPr>
+          <p:cNvPr id="108" name="Google Shape;108;g2a0cc9454a_0_54:notes"/>
+          <p:cNvSpPr>
+            <a:spLocks noGrp="1" noRot="1" noChangeAspect="1"/>
+          </p:cNvSpPr>
+          <p:nvPr>
+            <p:ph type="sldImg" idx="2"/>
+          </p:nvPr>
+        </p:nvSpPr>
+        <p:spPr>
+          <a:xfrm>
+            <a:off x="1714500" y="685800"/>
+            <a:ext cx="3429000" cy="3429000"/>
+          </a:xfrm>
+          <a:custGeom>
+            <a:avLst/>
+            <a:gdLst/>
+            <a:ahLst/>
+            <a:cxnLst/>
+            <a:rect l="l" t="t" r="r" b="b"/>
+            <a:pathLst>
+              <a:path w="120000" h="120000" extrusionOk="0">
+                <a:moveTo>
+                  <a:pt x="0" y="0"/>
+                </a:moveTo>
+                <a:lnTo>
+                  <a:pt x="120000" y="0"/>
+                </a:lnTo>
+                <a:lnTo>
+                  <a:pt x="120000" y="120000"/>
+                </a:lnTo>
+                <a:lnTo>
+                  <a:pt x="0" y="120000"/>
+                </a:lnTo>
+                <a:close/>
+              </a:path>
+            </a:pathLst>
+          </a:custGeom>
+        </p:spPr>
+      </p:sp>
+      <p:sp>
+        <p:nvSpPr>
+          <p:cNvPr id="109" name="Google Shape;109;g2a0cc9454a_0_54:notes"/>
+          <p:cNvSpPr txBox="1">
+            <a:spLocks noGrp="1"/>
+          </p:cNvSpPr>
+          <p:nvPr>
+            <p:ph type="body" idx="1"/>
+          </p:nvPr>
+        </p:nvSpPr>
+        <p:spPr>
+          <a:xfrm>
+            <a:off x="685800" y="4343400"/>
+            <a:ext cx="5486400" cy="4114800"/>
+          </a:xfrm>
+          <a:prstGeom prst="rect">
+            <a:avLst/>
+          </a:prstGeom>
+        </p:spPr>
+        <p:txBody>
+          <a:bodyPr spcFirstLastPara="1" wrap="square" lIns="91425" tIns="91425" rIns="91425" bIns="91425" anchor="t" anchorCtr="0">
+            <a:noAutofit/>
+          </a:bodyPr>
+          <a:lstStyle/>
+          <a:p>
+            <a:pPr marL="0" lvl="0" indent="0" algn="l" rtl="0">
+              <a:spcBef>
+                <a:spcPts val="0"/>
+              </a:spcBef>
+              <a:spcAft>
+                <a:spcPts val="0"/>
+              </a:spcAft>
+              <a:buNone/>
+            </a:pPr>
+            <a:endParaRPr/>
+          </a:p>
+        </p:txBody>
+      </p:sp>
+    </p:spTree>
+  </p:cSld>
+  <p:clrMapOvr>
+    <a:masterClrMapping/>
+  </p:clrMapOvr>
+</p:notes>
+</file>
+
+<file path=ppt/notesSlides/notesSlide10.xml><?xml version="1.0" encoding="utf-8"?>
+<p:notes xmlns:a="http://schemas.openxmlformats.org/drawingml/2006/main" xmlns:r="http://schemas.openxmlformats.org/officeDocument/2006/relationships" xmlns:p="http://schemas.openxmlformats.org/presentationml/2006/main" showMasterSp="0" showMasterPhAnim="0">
+  <p:cSld>
+    <p:spTree>
+      <p:nvGrpSpPr>
+        <p:cNvPr id="1" name="Shape 114"/>
+        <p:cNvGrpSpPr/>
+        <p:nvPr/>
+      </p:nvGrpSpPr>
+      <p:grpSpPr>
+        <a:xfrm>
+          <a:off x="0" y="0"/>
+          <a:ext cx="0" cy="0"/>
+          <a:chOff x="0" y="0"/>
+          <a:chExt cx="0" cy="0"/>
+        </a:xfrm>
+      </p:grpSpPr>
+      <p:sp>
+        <p:nvSpPr>
+          <p:cNvPr id="115" name="Google Shape;115;g2a0cc9454a_0_60:notes"/>
+          <p:cNvSpPr>
+            <a:spLocks noGrp="1" noRot="1" noChangeAspect="1"/>
+          </p:cNvSpPr>
+          <p:nvPr>
+            <p:ph type="sldImg" idx="2"/>
+          </p:nvPr>
+        </p:nvSpPr>
+        <p:spPr>
+          <a:xfrm>
+            <a:off x="1714816" y="685800"/>
+            <a:ext cx="3429000" cy="3429000"/>
+          </a:xfrm>
+          <a:custGeom>
+            <a:avLst/>
+            <a:gdLst/>
+            <a:ahLst/>
+            <a:cxnLst/>
+            <a:rect l="l" t="t" r="r" b="b"/>
+            <a:pathLst>
+              <a:path w="120000" h="120000" extrusionOk="0">
+                <a:moveTo>
+                  <a:pt x="0" y="0"/>
+                </a:moveTo>
+                <a:lnTo>
+                  <a:pt x="120000" y="0"/>
+                </a:lnTo>
+                <a:lnTo>
+                  <a:pt x="120000" y="120000"/>
+                </a:lnTo>
+                <a:lnTo>
+                  <a:pt x="0" y="120000"/>
+                </a:lnTo>
+                <a:close/>
+              </a:path>
+            </a:pathLst>
+          </a:custGeom>
+        </p:spPr>
+      </p:sp>
+      <p:sp>
+        <p:nvSpPr>
+          <p:cNvPr id="116" name="Google Shape;116;g2a0cc9454a_0_60:notes"/>
+          <p:cNvSpPr txBox="1">
+            <a:spLocks noGrp="1"/>
+          </p:cNvSpPr>
+          <p:nvPr>
+            <p:ph type="body" idx="1"/>
+          </p:nvPr>
+        </p:nvSpPr>
+        <p:spPr>
+          <a:xfrm>
+            <a:off x="685800" y="4343400"/>
+            <a:ext cx="5486400" cy="4114800"/>
+          </a:xfrm>
+          <a:prstGeom prst="rect">
+            <a:avLst/>
+          </a:prstGeom>
+        </p:spPr>
+        <p:txBody>
+          <a:bodyPr spcFirstLastPara="1" wrap="square" lIns="91425" tIns="91425" rIns="91425" bIns="91425" anchor="t" anchorCtr="0">
+            <a:noAutofit/>
+          </a:bodyPr>
+          <a:lstStyle/>
+          <a:p>
+            <a:pPr marL="0" lvl="0" indent="0" algn="l" rtl="0">
+              <a:spcBef>
+                <a:spcPts val="0"/>
+              </a:spcBef>
+              <a:spcAft>
+                <a:spcPts val="0"/>
+              </a:spcAft>
+              <a:buNone/>
+            </a:pPr>
+            <a:endParaRPr/>
+          </a:p>
+        </p:txBody>
+      </p:sp>
+    </p:spTree>
+  </p:cSld>
+  <p:clrMapOvr>
+    <a:masterClrMapping/>
+  </p:clrMapOvr>
+</p:notes>
+</file>
+
+<file path=ppt/notesSlides/notesSlide2.xml><?xml version="1.0" encoding="utf-8"?>
+<p:notes xmlns:a="http://schemas.openxmlformats.org/drawingml/2006/main" xmlns:r="http://schemas.openxmlformats.org/officeDocument/2006/relationships" xmlns:p="http://schemas.openxmlformats.org/presentationml/2006/main" showMasterSp="0" showMasterPhAnim="0">
+  <p:cSld>
+    <p:spTree>
+      <p:nvGrpSpPr>
+        <p:cNvPr id="1" name="Shape 71"/>
+        <p:cNvGrpSpPr/>
+        <p:nvPr/>
+      </p:nvGrpSpPr>
+      <p:grpSpPr>
+        <a:xfrm>
+          <a:off x="0" y="0"/>
+          <a:ext cx="0" cy="0"/>
+          <a:chOff x="0" y="0"/>
+          <a:chExt cx="0" cy="0"/>
+        </a:xfrm>
+      </p:grpSpPr>
+      <p:sp>
+        <p:nvSpPr>
+          <p:cNvPr id="72" name="Google Shape;72;g2a0cc9454a_0_24:notes"/>
+          <p:cNvSpPr>
+            <a:spLocks noGrp="1" noRot="1" noChangeAspect="1"/>
+          </p:cNvSpPr>
+          <p:nvPr>
+            <p:ph type="sldImg" idx="2"/>
+          </p:nvPr>
+        </p:nvSpPr>
+        <p:spPr>
+          <a:xfrm>
+            <a:off x="1714816" y="685800"/>
+            <a:ext cx="3429000" cy="3429000"/>
+          </a:xfrm>
+          <a:custGeom>
+            <a:avLst/>
+            <a:gdLst/>
+            <a:ahLst/>
+            <a:cxnLst/>
+            <a:rect l="l" t="t" r="r" b="b"/>
+            <a:pathLst>
+              <a:path w="120000" h="120000" extrusionOk="0">
+                <a:moveTo>
+                  <a:pt x="0" y="0"/>
+                </a:moveTo>
+                <a:lnTo>
+                  <a:pt x="120000" y="0"/>
+                </a:lnTo>
+                <a:lnTo>
+                  <a:pt x="120000" y="120000"/>
+                </a:lnTo>
+                <a:lnTo>
+                  <a:pt x="0" y="120000"/>
+                </a:lnTo>
+                <a:close/>
+              </a:path>
+            </a:pathLst>
+          </a:custGeom>
+        </p:spPr>
+      </p:sp>
+      <p:sp>
+        <p:nvSpPr>
+          <p:cNvPr id="73" name="Google Shape;73;g2a0cc9454a_0_24:notes"/>
+          <p:cNvSpPr txBox="1">
+            <a:spLocks noGrp="1"/>
+          </p:cNvSpPr>
+          <p:nvPr>
+            <p:ph type="body" idx="1"/>
+          </p:nvPr>
+        </p:nvSpPr>
+        <p:spPr>
+          <a:xfrm>
+            <a:off x="685800" y="4343400"/>
+            <a:ext cx="5486400" cy="4114800"/>
+          </a:xfrm>
+          <a:prstGeom prst="rect">
+            <a:avLst/>
+          </a:prstGeom>
+        </p:spPr>
+        <p:txBody>
+          <a:bodyPr spcFirstLastPara="1" wrap="square" lIns="91425" tIns="91425" rIns="91425" bIns="91425" anchor="t" anchorCtr="0">
+            <a:noAutofit/>
+          </a:bodyPr>
+          <a:lstStyle/>
+          <a:p>
+            <a:pPr marL="0" lvl="0" indent="0" algn="l" rtl="0">
+              <a:spcBef>
+                <a:spcPts val="0"/>
+              </a:spcBef>
+              <a:spcAft>
+                <a:spcPts val="0"/>
+              </a:spcAft>
+              <a:buNone/>
+            </a:pPr>
+            <a:endParaRPr/>
+          </a:p>
+        </p:txBody>
+      </p:sp>
+    </p:spTree>
+  </p:cSld>
+  <p:clrMapOvr>
+    <a:masterClrMapping/>
+  </p:clrMapOvr>
+</p:notes>
+</file>
+
+<file path=ppt/notesSlides/notesSlide3.xml><?xml version="1.0" encoding="utf-8"?>
+<p:notes xmlns:a="http://schemas.openxmlformats.org/drawingml/2006/main" xmlns:r="http://schemas.openxmlformats.org/officeDocument/2006/relationships" xmlns:p="http://schemas.openxmlformats.org/presentationml/2006/main" showMasterSp="0" showMasterPhAnim="0">
+  <p:cSld>
+    <p:spTree>
+      <p:nvGrpSpPr>
+        <p:cNvPr id="1" name="Shape 57"/>
+        <p:cNvGrpSpPr/>
+        <p:nvPr/>
+      </p:nvGrpSpPr>
+      <p:grpSpPr>
+        <a:xfrm>
+          <a:off x="0" y="0"/>
+          <a:ext cx="0" cy="0"/>
+          <a:chOff x="0" y="0"/>
+          <a:chExt cx="0" cy="0"/>
+        </a:xfrm>
+      </p:grpSpPr>
+      <p:sp>
+        <p:nvSpPr>
+          <p:cNvPr id="58" name="Google Shape;58;g26ac29a325_0_110:notes"/>
+          <p:cNvSpPr>
+            <a:spLocks noGrp="1" noRot="1" noChangeAspect="1"/>
+          </p:cNvSpPr>
+          <p:nvPr>
+            <p:ph type="sldImg" idx="2"/>
+          </p:nvPr>
+        </p:nvSpPr>
+        <p:spPr>
+          <a:xfrm>
+            <a:off x="1714816" y="685800"/>
+            <a:ext cx="3429000" cy="3429000"/>
+          </a:xfrm>
+          <a:custGeom>
+            <a:avLst/>
+            <a:gdLst/>
+            <a:ahLst/>
+            <a:cxnLst/>
+            <a:rect l="l" t="t" r="r" b="b"/>
+            <a:pathLst>
+              <a:path w="120000" h="120000" extrusionOk="0">
+                <a:moveTo>
+                  <a:pt x="0" y="0"/>
+                </a:moveTo>
+                <a:lnTo>
+                  <a:pt x="120000" y="0"/>
+                </a:lnTo>
+                <a:lnTo>
+                  <a:pt x="120000" y="120000"/>
+                </a:lnTo>
+                <a:lnTo>
+                  <a:pt x="0" y="120000"/>
+                </a:lnTo>
+                <a:close/>
+              </a:path>
+            </a:pathLst>
+          </a:custGeom>
+        </p:spPr>
+      </p:sp>
+      <p:sp>
+        <p:nvSpPr>
+          <p:cNvPr id="59" name="Google Shape;59;g26ac29a325_0_110:notes"/>
+          <p:cNvSpPr txBox="1">
+            <a:spLocks noGrp="1"/>
+          </p:cNvSpPr>
+          <p:nvPr>
+            <p:ph type="body" idx="1"/>
+          </p:nvPr>
+        </p:nvSpPr>
+        <p:spPr>
+          <a:xfrm>
+            <a:off x="685800" y="4343400"/>
+            <a:ext cx="5486400" cy="4114800"/>
+          </a:xfrm>
+          <a:prstGeom prst="rect">
+            <a:avLst/>
+          </a:prstGeom>
+        </p:spPr>
+        <p:txBody>
+          <a:bodyPr spcFirstLastPara="1" wrap="square" lIns="91425" tIns="91425" rIns="91425" bIns="91425" anchor="t" anchorCtr="0">
+            <a:noAutofit/>
+          </a:bodyPr>
+          <a:lstStyle/>
+          <a:p>
+            <a:pPr marL="0" lvl="0" indent="0" algn="l" rtl="0">
+              <a:spcBef>
+                <a:spcPts val="0"/>
+              </a:spcBef>
+              <a:spcAft>
+                <a:spcPts val="0"/>
+              </a:spcAft>
+              <a:buNone/>
+            </a:pPr>
+            <a:endParaRPr/>
+          </a:p>
+        </p:txBody>
+      </p:sp>
+    </p:spTree>
+  </p:cSld>
+  <p:clrMapOvr>
+    <a:masterClrMapping/>
+  </p:clrMapOvr>
+</p:notes>
+</file>
+
+<file path=ppt/notesSlides/notesSlide4.xml><?xml version="1.0" encoding="utf-8"?>
+<p:notes xmlns:a="http://schemas.openxmlformats.org/drawingml/2006/main" xmlns:r="http://schemas.openxmlformats.org/officeDocument/2006/relationships" xmlns:p="http://schemas.openxmlformats.org/presentationml/2006/main" showMasterSp="0" showMasterPhAnim="0">
+  <p:cSld>
+    <p:spTree>
+      <p:nvGrpSpPr>
+        <p:cNvPr id="1" name="Shape 50"/>
         <p:cNvGrpSpPr/>
         <p:nvPr/>
       </p:nvGrpSpPr>
@@ -699,9 +1135,11 @@
       <p:sp>
         <p:nvSpPr>
           <p:cNvPr id="51" name="Google Shape;51;g2a0cc9454a_0_6:notes"/>
-          <p:cNvSpPr/>
+          <p:cNvSpPr>
+            <a:spLocks noGrp="1" noRot="1" noChangeAspect="1"/>
+          </p:cNvSpPr>
           <p:nvPr>
-            <p:ph idx="2" type="sldImg"/>
+            <p:ph type="sldImg" idx="2"/>
           </p:nvPr>
         </p:nvSpPr>
         <p:spPr>
@@ -710,9 +1148,13 @@
             <a:ext cx="3429000" cy="3429000"/>
           </a:xfrm>
           <a:custGeom>
-            <a:rect b="b" l="l" r="r" t="t"/>
+            <a:avLst/>
+            <a:gdLst/>
+            <a:ahLst/>
+            <a:cxnLst/>
+            <a:rect l="l" t="t" r="r" b="b"/>
             <a:pathLst>
-              <a:path extrusionOk="0" h="120000" w="120000">
+              <a:path w="120000" h="120000" extrusionOk="0">
                 <a:moveTo>
                   <a:pt x="0" y="0"/>
                 </a:moveTo>
@@ -734,9 +1176,11 @@
       <p:sp>
         <p:nvSpPr>
           <p:cNvPr id="52" name="Google Shape;52;g2a0cc9454a_0_6:notes"/>
-          <p:cNvSpPr txBox="1"/>
+          <p:cNvSpPr txBox="1">
+            <a:spLocks noGrp="1"/>
+          </p:cNvSpPr>
           <p:nvPr>
-            <p:ph idx="1" type="body"/>
+            <p:ph type="body" idx="1"/>
           </p:nvPr>
         </p:nvSpPr>
         <p:spPr>
@@ -749,23 +1193,20 @@
           </a:prstGeom>
         </p:spPr>
         <p:txBody>
-          <a:bodyPr anchorCtr="0" anchor="t" bIns="91425" lIns="91425" spcFirstLastPara="1" rIns="91425" wrap="square" tIns="91425">
+          <a:bodyPr spcFirstLastPara="1" wrap="square" lIns="91425" tIns="91425" rIns="91425" bIns="91425" anchor="t" anchorCtr="0">
             <a:noAutofit/>
           </a:bodyPr>
           <a:lstStyle/>
           <a:p>
-            <a:pPr indent="0" lvl="0" marL="0" rtl="0" algn="l">
-              <a:spcBef>
-                <a:spcPts val="0"/>
-              </a:spcBef>
-              <a:spcAft>
-                <a:spcPts val="0"/>
-              </a:spcAft>
-              <a:buNone/>
-            </a:pPr>
-            <a:r>
-              <a:t/>
-            </a:r>
+            <a:pPr marL="0" lvl="0" indent="0" algn="l" rtl="0">
+              <a:spcBef>
+                <a:spcPts val="0"/>
+              </a:spcBef>
+              <a:spcAft>
+                <a:spcPts val="0"/>
+              </a:spcAft>
+              <a:buNone/>
+            </a:pPr>
             <a:endParaRPr/>
           </a:p>
         </p:txBody>
@@ -778,12 +1219,12 @@
 </p:notes>
 </file>
 
-<file path=ppt/notesSlides/notesSlide10.xml><?xml version="1.0" encoding="utf-8"?>
-<p:notes xmlns:a="http://schemas.openxmlformats.org/drawingml/2006/main" xmlns:r="http://schemas.openxmlformats.org/officeDocument/2006/relationships" xmlns:mc="http://schemas.openxmlformats.org/markup-compatibility/2006" xmlns:mv="urn:schemas-microsoft-com:mac:vml" xmlns:p="http://schemas.openxmlformats.org/presentationml/2006/main" xmlns:c="http://schemas.openxmlformats.org/drawingml/2006/chart" xmlns:dgm="http://schemas.openxmlformats.org/drawingml/2006/diagram" xmlns:o="urn:schemas-microsoft-com:office:office" xmlns:v="urn:schemas-microsoft-com:vml" xmlns:pvml="urn:schemas-microsoft-com:office:powerpoint" xmlns:com="http://schemas.openxmlformats.org/drawingml/2006/compatibility" xmlns:p14="http://schemas.microsoft.com/office/powerpoint/2010/main" xmlns:p15="http://schemas.microsoft.com/office/powerpoint/2012/main" xmlns:ahyp="http://schemas.microsoft.com/office/drawing/2018/hyperlinkcolor" showMasterPhAnim="0" showMasterSp="0">
+<file path=ppt/notesSlides/notesSlide5.xml><?xml version="1.0" encoding="utf-8"?>
+<p:notes xmlns:a="http://schemas.openxmlformats.org/drawingml/2006/main" xmlns:r="http://schemas.openxmlformats.org/officeDocument/2006/relationships" xmlns:p="http://schemas.openxmlformats.org/presentationml/2006/main" showMasterSp="0" showMasterPhAnim="0">
   <p:cSld>
     <p:spTree>
       <p:nvGrpSpPr>
-        <p:cNvPr id="114" name="Shape 114"/>
+        <p:cNvPr id="1" name="Shape 78"/>
         <p:cNvGrpSpPr/>
         <p:nvPr/>
       </p:nvGrpSpPr>
@@ -797,10 +1238,12 @@
       </p:grpSpPr>
       <p:sp>
         <p:nvSpPr>
-          <p:cNvPr id="115" name="Google Shape;115;g2a0cc9454a_0_60:notes"/>
-          <p:cNvSpPr/>
+          <p:cNvPr id="79" name="Google Shape;79;g2a0cc9454a_0_30:notes"/>
+          <p:cNvSpPr>
+            <a:spLocks noGrp="1" noRot="1" noChangeAspect="1"/>
+          </p:cNvSpPr>
           <p:nvPr>
-            <p:ph idx="2" type="sldImg"/>
+            <p:ph type="sldImg" idx="2"/>
           </p:nvPr>
         </p:nvSpPr>
         <p:spPr>
@@ -809,9 +1252,13 @@
             <a:ext cx="3429000" cy="3429000"/>
           </a:xfrm>
           <a:custGeom>
-            <a:rect b="b" l="l" r="r" t="t"/>
+            <a:avLst/>
+            <a:gdLst/>
+            <a:ahLst/>
+            <a:cxnLst/>
+            <a:rect l="l" t="t" r="r" b="b"/>
             <a:pathLst>
-              <a:path extrusionOk="0" h="120000" w="120000">
+              <a:path w="120000" h="120000" extrusionOk="0">
                 <a:moveTo>
                   <a:pt x="0" y="0"/>
                 </a:moveTo>
@@ -832,10 +1279,12 @@
       </p:sp>
       <p:sp>
         <p:nvSpPr>
-          <p:cNvPr id="116" name="Google Shape;116;g2a0cc9454a_0_60:notes"/>
-          <p:cNvSpPr txBox="1"/>
+          <p:cNvPr id="80" name="Google Shape;80;g2a0cc9454a_0_30:notes"/>
+          <p:cNvSpPr txBox="1">
+            <a:spLocks noGrp="1"/>
+          </p:cNvSpPr>
           <p:nvPr>
-            <p:ph idx="1" type="body"/>
+            <p:ph type="body" idx="1"/>
           </p:nvPr>
         </p:nvSpPr>
         <p:spPr>
@@ -848,23 +1297,20 @@
           </a:prstGeom>
         </p:spPr>
         <p:txBody>
-          <a:bodyPr anchorCtr="0" anchor="t" bIns="91425" lIns="91425" spcFirstLastPara="1" rIns="91425" wrap="square" tIns="91425">
+          <a:bodyPr spcFirstLastPara="1" wrap="square" lIns="91425" tIns="91425" rIns="91425" bIns="91425" anchor="t" anchorCtr="0">
             <a:noAutofit/>
           </a:bodyPr>
           <a:lstStyle/>
           <a:p>
-            <a:pPr indent="0" lvl="0" marL="0" rtl="0" algn="l">
-              <a:spcBef>
-                <a:spcPts val="0"/>
-              </a:spcBef>
-              <a:spcAft>
-                <a:spcPts val="0"/>
-              </a:spcAft>
-              <a:buNone/>
-            </a:pPr>
-            <a:r>
-              <a:t/>
-            </a:r>
+            <a:pPr marL="0" lvl="0" indent="0" algn="l" rtl="0">
+              <a:spcBef>
+                <a:spcPts val="0"/>
+              </a:spcBef>
+              <a:spcAft>
+                <a:spcPts val="0"/>
+              </a:spcAft>
+              <a:buNone/>
+            </a:pPr>
             <a:endParaRPr/>
           </a:p>
         </p:txBody>
@@ -877,111 +1323,12 @@
 </p:notes>
 </file>
 
-<file path=ppt/notesSlides/notesSlide2.xml><?xml version="1.0" encoding="utf-8"?>
-<p:notes xmlns:a="http://schemas.openxmlformats.org/drawingml/2006/main" xmlns:r="http://schemas.openxmlformats.org/officeDocument/2006/relationships" xmlns:mc="http://schemas.openxmlformats.org/markup-compatibility/2006" xmlns:mv="urn:schemas-microsoft-com:mac:vml" xmlns:p="http://schemas.openxmlformats.org/presentationml/2006/main" xmlns:c="http://schemas.openxmlformats.org/drawingml/2006/chart" xmlns:dgm="http://schemas.openxmlformats.org/drawingml/2006/diagram" xmlns:o="urn:schemas-microsoft-com:office:office" xmlns:v="urn:schemas-microsoft-com:vml" xmlns:pvml="urn:schemas-microsoft-com:office:powerpoint" xmlns:com="http://schemas.openxmlformats.org/drawingml/2006/compatibility" xmlns:p14="http://schemas.microsoft.com/office/powerpoint/2010/main" xmlns:p15="http://schemas.microsoft.com/office/powerpoint/2012/main" xmlns:ahyp="http://schemas.microsoft.com/office/drawing/2018/hyperlinkcolor" showMasterPhAnim="0" showMasterSp="0">
+<file path=ppt/notesSlides/notesSlide6.xml><?xml version="1.0" encoding="utf-8"?>
+<p:notes xmlns:a="http://schemas.openxmlformats.org/drawingml/2006/main" xmlns:r="http://schemas.openxmlformats.org/officeDocument/2006/relationships" xmlns:p="http://schemas.openxmlformats.org/presentationml/2006/main" showMasterSp="0" showMasterPhAnim="0">
   <p:cSld>
     <p:spTree>
       <p:nvGrpSpPr>
-        <p:cNvPr id="57" name="Shape 57"/>
-        <p:cNvGrpSpPr/>
-        <p:nvPr/>
-      </p:nvGrpSpPr>
-      <p:grpSpPr>
-        <a:xfrm>
-          <a:off x="0" y="0"/>
-          <a:ext cx="0" cy="0"/>
-          <a:chOff x="0" y="0"/>
-          <a:chExt cx="0" cy="0"/>
-        </a:xfrm>
-      </p:grpSpPr>
-      <p:sp>
-        <p:nvSpPr>
-          <p:cNvPr id="58" name="Google Shape;58;g26ac29a325_0_110:notes"/>
-          <p:cNvSpPr/>
-          <p:nvPr>
-            <p:ph idx="2" type="sldImg"/>
-          </p:nvPr>
-        </p:nvSpPr>
-        <p:spPr>
-          <a:xfrm>
-            <a:off x="1714816" y="685800"/>
-            <a:ext cx="3429000" cy="3429000"/>
-          </a:xfrm>
-          <a:custGeom>
-            <a:rect b="b" l="l" r="r" t="t"/>
-            <a:pathLst>
-              <a:path extrusionOk="0" h="120000" w="120000">
-                <a:moveTo>
-                  <a:pt x="0" y="0"/>
-                </a:moveTo>
-                <a:lnTo>
-                  <a:pt x="120000" y="0"/>
-                </a:lnTo>
-                <a:lnTo>
-                  <a:pt x="120000" y="120000"/>
-                </a:lnTo>
-                <a:lnTo>
-                  <a:pt x="0" y="120000"/>
-                </a:lnTo>
-                <a:close/>
-              </a:path>
-            </a:pathLst>
-          </a:custGeom>
-        </p:spPr>
-      </p:sp>
-      <p:sp>
-        <p:nvSpPr>
-          <p:cNvPr id="59" name="Google Shape;59;g26ac29a325_0_110:notes"/>
-          <p:cNvSpPr txBox="1"/>
-          <p:nvPr>
-            <p:ph idx="1" type="body"/>
-          </p:nvPr>
-        </p:nvSpPr>
-        <p:spPr>
-          <a:xfrm>
-            <a:off x="685800" y="4343400"/>
-            <a:ext cx="5486400" cy="4114800"/>
-          </a:xfrm>
-          <a:prstGeom prst="rect">
-            <a:avLst/>
-          </a:prstGeom>
-        </p:spPr>
-        <p:txBody>
-          <a:bodyPr anchorCtr="0" anchor="t" bIns="91425" lIns="91425" spcFirstLastPara="1" rIns="91425" wrap="square" tIns="91425">
-            <a:noAutofit/>
-          </a:bodyPr>
-          <a:lstStyle/>
-          <a:p>
-            <a:pPr indent="0" lvl="0" marL="0" rtl="0" algn="l">
-              <a:spcBef>
-                <a:spcPts val="0"/>
-              </a:spcBef>
-              <a:spcAft>
-                <a:spcPts val="0"/>
-              </a:spcAft>
-              <a:buNone/>
-            </a:pPr>
-            <a:r>
-              <a:t/>
-            </a:r>
-            <a:endParaRPr/>
-          </a:p>
-        </p:txBody>
-      </p:sp>
-    </p:spTree>
-  </p:cSld>
-  <p:clrMapOvr>
-    <a:masterClrMapping/>
-  </p:clrMapOvr>
-</p:notes>
-</file>
-
-<file path=ppt/notesSlides/notesSlide3.xml><?xml version="1.0" encoding="utf-8"?>
-<p:notes xmlns:a="http://schemas.openxmlformats.org/drawingml/2006/main" xmlns:r="http://schemas.openxmlformats.org/officeDocument/2006/relationships" xmlns:mc="http://schemas.openxmlformats.org/markup-compatibility/2006" xmlns:mv="urn:schemas-microsoft-com:mac:vml" xmlns:p="http://schemas.openxmlformats.org/presentationml/2006/main" xmlns:c="http://schemas.openxmlformats.org/drawingml/2006/chart" xmlns:dgm="http://schemas.openxmlformats.org/drawingml/2006/diagram" xmlns:o="urn:schemas-microsoft-com:office:office" xmlns:v="urn:schemas-microsoft-com:vml" xmlns:pvml="urn:schemas-microsoft-com:office:powerpoint" xmlns:com="http://schemas.openxmlformats.org/drawingml/2006/compatibility" xmlns:p14="http://schemas.microsoft.com/office/powerpoint/2010/main" xmlns:p15="http://schemas.microsoft.com/office/powerpoint/2012/main" xmlns:ahyp="http://schemas.microsoft.com/office/drawing/2018/hyperlinkcolor" showMasterPhAnim="0" showMasterSp="0">
-  <p:cSld>
-    <p:spTree>
-      <p:nvGrpSpPr>
-        <p:cNvPr id="64" name="Shape 64"/>
+        <p:cNvPr id="1" name="Shape 64"/>
         <p:cNvGrpSpPr/>
         <p:nvPr/>
       </p:nvGrpSpPr>
@@ -996,9 +1343,11 @@
       <p:sp>
         <p:nvSpPr>
           <p:cNvPr id="65" name="Google Shape;65;g2a0cc9454a_0_18:notes"/>
-          <p:cNvSpPr/>
+          <p:cNvSpPr>
+            <a:spLocks noGrp="1" noRot="1" noChangeAspect="1"/>
+          </p:cNvSpPr>
           <p:nvPr>
-            <p:ph idx="2" type="sldImg"/>
+            <p:ph type="sldImg" idx="2"/>
           </p:nvPr>
         </p:nvSpPr>
         <p:spPr>
@@ -1007,9 +1356,13 @@
             <a:ext cx="3429000" cy="3429000"/>
           </a:xfrm>
           <a:custGeom>
-            <a:rect b="b" l="l" r="r" t="t"/>
+            <a:avLst/>
+            <a:gdLst/>
+            <a:ahLst/>
+            <a:cxnLst/>
+            <a:rect l="l" t="t" r="r" b="b"/>
             <a:pathLst>
-              <a:path extrusionOk="0" h="120000" w="120000">
+              <a:path w="120000" h="120000" extrusionOk="0">
                 <a:moveTo>
                   <a:pt x="0" y="0"/>
                 </a:moveTo>
@@ -1031,9 +1384,11 @@
       <p:sp>
         <p:nvSpPr>
           <p:cNvPr id="66" name="Google Shape;66;g2a0cc9454a_0_18:notes"/>
-          <p:cNvSpPr txBox="1"/>
+          <p:cNvSpPr txBox="1">
+            <a:spLocks noGrp="1"/>
+          </p:cNvSpPr>
           <p:nvPr>
-            <p:ph idx="1" type="body"/>
+            <p:ph type="body" idx="1"/>
           </p:nvPr>
         </p:nvSpPr>
         <p:spPr>
@@ -1046,23 +1401,20 @@
           </a:prstGeom>
         </p:spPr>
         <p:txBody>
-          <a:bodyPr anchorCtr="0" anchor="t" bIns="91425" lIns="91425" spcFirstLastPara="1" rIns="91425" wrap="square" tIns="91425">
+          <a:bodyPr spcFirstLastPara="1" wrap="square" lIns="91425" tIns="91425" rIns="91425" bIns="91425" anchor="t" anchorCtr="0">
             <a:noAutofit/>
           </a:bodyPr>
           <a:lstStyle/>
           <a:p>
-            <a:pPr indent="0" lvl="0" marL="0" rtl="0" algn="l">
-              <a:spcBef>
-                <a:spcPts val="0"/>
-              </a:spcBef>
-              <a:spcAft>
-                <a:spcPts val="0"/>
-              </a:spcAft>
-              <a:buNone/>
-            </a:pPr>
-            <a:r>
-              <a:t/>
-            </a:r>
+            <a:pPr marL="0" lvl="0" indent="0" algn="l" rtl="0">
+              <a:spcBef>
+                <a:spcPts val="0"/>
+              </a:spcBef>
+              <a:spcAft>
+                <a:spcPts val="0"/>
+              </a:spcAft>
+              <a:buNone/>
+            </a:pPr>
             <a:endParaRPr/>
           </a:p>
         </p:txBody>
@@ -1075,210 +1427,12 @@
 </p:notes>
 </file>
 
-<file path=ppt/notesSlides/notesSlide4.xml><?xml version="1.0" encoding="utf-8"?>
-<p:notes xmlns:a="http://schemas.openxmlformats.org/drawingml/2006/main" xmlns:r="http://schemas.openxmlformats.org/officeDocument/2006/relationships" xmlns:mc="http://schemas.openxmlformats.org/markup-compatibility/2006" xmlns:mv="urn:schemas-microsoft-com:mac:vml" xmlns:p="http://schemas.openxmlformats.org/presentationml/2006/main" xmlns:c="http://schemas.openxmlformats.org/drawingml/2006/chart" xmlns:dgm="http://schemas.openxmlformats.org/drawingml/2006/diagram" xmlns:o="urn:schemas-microsoft-com:office:office" xmlns:v="urn:schemas-microsoft-com:vml" xmlns:pvml="urn:schemas-microsoft-com:office:powerpoint" xmlns:com="http://schemas.openxmlformats.org/drawingml/2006/compatibility" xmlns:p14="http://schemas.microsoft.com/office/powerpoint/2010/main" xmlns:p15="http://schemas.microsoft.com/office/powerpoint/2012/main" xmlns:ahyp="http://schemas.microsoft.com/office/drawing/2018/hyperlinkcolor" showMasterPhAnim="0" showMasterSp="0">
+<file path=ppt/notesSlides/notesSlide7.xml><?xml version="1.0" encoding="utf-8"?>
+<p:notes xmlns:a="http://schemas.openxmlformats.org/drawingml/2006/main" xmlns:r="http://schemas.openxmlformats.org/officeDocument/2006/relationships" xmlns:p="http://schemas.openxmlformats.org/presentationml/2006/main" showMasterSp="0" showMasterPhAnim="0">
   <p:cSld>
     <p:spTree>
       <p:nvGrpSpPr>
-        <p:cNvPr id="71" name="Shape 71"/>
-        <p:cNvGrpSpPr/>
-        <p:nvPr/>
-      </p:nvGrpSpPr>
-      <p:grpSpPr>
-        <a:xfrm>
-          <a:off x="0" y="0"/>
-          <a:ext cx="0" cy="0"/>
-          <a:chOff x="0" y="0"/>
-          <a:chExt cx="0" cy="0"/>
-        </a:xfrm>
-      </p:grpSpPr>
-      <p:sp>
-        <p:nvSpPr>
-          <p:cNvPr id="72" name="Google Shape;72;g2a0cc9454a_0_24:notes"/>
-          <p:cNvSpPr/>
-          <p:nvPr>
-            <p:ph idx="2" type="sldImg"/>
-          </p:nvPr>
-        </p:nvSpPr>
-        <p:spPr>
-          <a:xfrm>
-            <a:off x="1714816" y="685800"/>
-            <a:ext cx="3429000" cy="3429000"/>
-          </a:xfrm>
-          <a:custGeom>
-            <a:rect b="b" l="l" r="r" t="t"/>
-            <a:pathLst>
-              <a:path extrusionOk="0" h="120000" w="120000">
-                <a:moveTo>
-                  <a:pt x="0" y="0"/>
-                </a:moveTo>
-                <a:lnTo>
-                  <a:pt x="120000" y="0"/>
-                </a:lnTo>
-                <a:lnTo>
-                  <a:pt x="120000" y="120000"/>
-                </a:lnTo>
-                <a:lnTo>
-                  <a:pt x="0" y="120000"/>
-                </a:lnTo>
-                <a:close/>
-              </a:path>
-            </a:pathLst>
-          </a:custGeom>
-        </p:spPr>
-      </p:sp>
-      <p:sp>
-        <p:nvSpPr>
-          <p:cNvPr id="73" name="Google Shape;73;g2a0cc9454a_0_24:notes"/>
-          <p:cNvSpPr txBox="1"/>
-          <p:nvPr>
-            <p:ph idx="1" type="body"/>
-          </p:nvPr>
-        </p:nvSpPr>
-        <p:spPr>
-          <a:xfrm>
-            <a:off x="685800" y="4343400"/>
-            <a:ext cx="5486400" cy="4114800"/>
-          </a:xfrm>
-          <a:prstGeom prst="rect">
-            <a:avLst/>
-          </a:prstGeom>
-        </p:spPr>
-        <p:txBody>
-          <a:bodyPr anchorCtr="0" anchor="t" bIns="91425" lIns="91425" spcFirstLastPara="1" rIns="91425" wrap="square" tIns="91425">
-            <a:noAutofit/>
-          </a:bodyPr>
-          <a:lstStyle/>
-          <a:p>
-            <a:pPr indent="0" lvl="0" marL="0" rtl="0" algn="l">
-              <a:spcBef>
-                <a:spcPts val="0"/>
-              </a:spcBef>
-              <a:spcAft>
-                <a:spcPts val="0"/>
-              </a:spcAft>
-              <a:buNone/>
-            </a:pPr>
-            <a:r>
-              <a:t/>
-            </a:r>
-            <a:endParaRPr/>
-          </a:p>
-        </p:txBody>
-      </p:sp>
-    </p:spTree>
-  </p:cSld>
-  <p:clrMapOvr>
-    <a:masterClrMapping/>
-  </p:clrMapOvr>
-</p:notes>
-</file>
-
-<file path=ppt/notesSlides/notesSlide5.xml><?xml version="1.0" encoding="utf-8"?>
-<p:notes xmlns:a="http://schemas.openxmlformats.org/drawingml/2006/main" xmlns:r="http://schemas.openxmlformats.org/officeDocument/2006/relationships" xmlns:mc="http://schemas.openxmlformats.org/markup-compatibility/2006" xmlns:mv="urn:schemas-microsoft-com:mac:vml" xmlns:p="http://schemas.openxmlformats.org/presentationml/2006/main" xmlns:c="http://schemas.openxmlformats.org/drawingml/2006/chart" xmlns:dgm="http://schemas.openxmlformats.org/drawingml/2006/diagram" xmlns:o="urn:schemas-microsoft-com:office:office" xmlns:v="urn:schemas-microsoft-com:vml" xmlns:pvml="urn:schemas-microsoft-com:office:powerpoint" xmlns:com="http://schemas.openxmlformats.org/drawingml/2006/compatibility" xmlns:p14="http://schemas.microsoft.com/office/powerpoint/2010/main" xmlns:p15="http://schemas.microsoft.com/office/powerpoint/2012/main" xmlns:ahyp="http://schemas.microsoft.com/office/drawing/2018/hyperlinkcolor" showMasterPhAnim="0" showMasterSp="0">
-  <p:cSld>
-    <p:spTree>
-      <p:nvGrpSpPr>
-        <p:cNvPr id="78" name="Shape 78"/>
-        <p:cNvGrpSpPr/>
-        <p:nvPr/>
-      </p:nvGrpSpPr>
-      <p:grpSpPr>
-        <a:xfrm>
-          <a:off x="0" y="0"/>
-          <a:ext cx="0" cy="0"/>
-          <a:chOff x="0" y="0"/>
-          <a:chExt cx="0" cy="0"/>
-        </a:xfrm>
-      </p:grpSpPr>
-      <p:sp>
-        <p:nvSpPr>
-          <p:cNvPr id="79" name="Google Shape;79;g2a0cc9454a_0_30:notes"/>
-          <p:cNvSpPr/>
-          <p:nvPr>
-            <p:ph idx="2" type="sldImg"/>
-          </p:nvPr>
-        </p:nvSpPr>
-        <p:spPr>
-          <a:xfrm>
-            <a:off x="1714816" y="685800"/>
-            <a:ext cx="3429000" cy="3429000"/>
-          </a:xfrm>
-          <a:custGeom>
-            <a:rect b="b" l="l" r="r" t="t"/>
-            <a:pathLst>
-              <a:path extrusionOk="0" h="120000" w="120000">
-                <a:moveTo>
-                  <a:pt x="0" y="0"/>
-                </a:moveTo>
-                <a:lnTo>
-                  <a:pt x="120000" y="0"/>
-                </a:lnTo>
-                <a:lnTo>
-                  <a:pt x="120000" y="120000"/>
-                </a:lnTo>
-                <a:lnTo>
-                  <a:pt x="0" y="120000"/>
-                </a:lnTo>
-                <a:close/>
-              </a:path>
-            </a:pathLst>
-          </a:custGeom>
-        </p:spPr>
-      </p:sp>
-      <p:sp>
-        <p:nvSpPr>
-          <p:cNvPr id="80" name="Google Shape;80;g2a0cc9454a_0_30:notes"/>
-          <p:cNvSpPr txBox="1"/>
-          <p:nvPr>
-            <p:ph idx="1" type="body"/>
-          </p:nvPr>
-        </p:nvSpPr>
-        <p:spPr>
-          <a:xfrm>
-            <a:off x="685800" y="4343400"/>
-            <a:ext cx="5486400" cy="4114800"/>
-          </a:xfrm>
-          <a:prstGeom prst="rect">
-            <a:avLst/>
-          </a:prstGeom>
-        </p:spPr>
-        <p:txBody>
-          <a:bodyPr anchorCtr="0" anchor="t" bIns="91425" lIns="91425" spcFirstLastPara="1" rIns="91425" wrap="square" tIns="91425">
-            <a:noAutofit/>
-          </a:bodyPr>
-          <a:lstStyle/>
-          <a:p>
-            <a:pPr indent="0" lvl="0" marL="0" rtl="0" algn="l">
-              <a:spcBef>
-                <a:spcPts val="0"/>
-              </a:spcBef>
-              <a:spcAft>
-                <a:spcPts val="0"/>
-              </a:spcAft>
-              <a:buNone/>
-            </a:pPr>
-            <a:r>
-              <a:t/>
-            </a:r>
-            <a:endParaRPr/>
-          </a:p>
-        </p:txBody>
-      </p:sp>
-    </p:spTree>
-  </p:cSld>
-  <p:clrMapOvr>
-    <a:masterClrMapping/>
-  </p:clrMapOvr>
-</p:notes>
-</file>
-
-<file path=ppt/notesSlides/notesSlide6.xml><?xml version="1.0" encoding="utf-8"?>
-<p:notes xmlns:a="http://schemas.openxmlformats.org/drawingml/2006/main" xmlns:r="http://schemas.openxmlformats.org/officeDocument/2006/relationships" xmlns:mc="http://schemas.openxmlformats.org/markup-compatibility/2006" xmlns:mv="urn:schemas-microsoft-com:mac:vml" xmlns:p="http://schemas.openxmlformats.org/presentationml/2006/main" xmlns:c="http://schemas.openxmlformats.org/drawingml/2006/chart" xmlns:dgm="http://schemas.openxmlformats.org/drawingml/2006/diagram" xmlns:o="urn:schemas-microsoft-com:office:office" xmlns:v="urn:schemas-microsoft-com:vml" xmlns:pvml="urn:schemas-microsoft-com:office:powerpoint" xmlns:com="http://schemas.openxmlformats.org/drawingml/2006/compatibility" xmlns:p14="http://schemas.microsoft.com/office/powerpoint/2010/main" xmlns:p15="http://schemas.microsoft.com/office/powerpoint/2012/main" xmlns:ahyp="http://schemas.microsoft.com/office/drawing/2018/hyperlinkcolor" showMasterPhAnim="0" showMasterSp="0">
-  <p:cSld>
-    <p:spTree>
-      <p:nvGrpSpPr>
-        <p:cNvPr id="85" name="Shape 85"/>
+        <p:cNvPr id="1" name="Shape 85"/>
         <p:cNvGrpSpPr/>
         <p:nvPr/>
       </p:nvGrpSpPr>
@@ -1293,9 +1447,11 @@
       <p:sp>
         <p:nvSpPr>
           <p:cNvPr id="86" name="Google Shape;86;g2a0cc9454a_0_36:notes"/>
-          <p:cNvSpPr/>
+          <p:cNvSpPr>
+            <a:spLocks noGrp="1" noRot="1" noChangeAspect="1"/>
+          </p:cNvSpPr>
           <p:nvPr>
-            <p:ph idx="2" type="sldImg"/>
+            <p:ph type="sldImg" idx="2"/>
           </p:nvPr>
         </p:nvSpPr>
         <p:spPr>
@@ -1304,9 +1460,13 @@
             <a:ext cx="3429000" cy="3429000"/>
           </a:xfrm>
           <a:custGeom>
-            <a:rect b="b" l="l" r="r" t="t"/>
+            <a:avLst/>
+            <a:gdLst/>
+            <a:ahLst/>
+            <a:cxnLst/>
+            <a:rect l="l" t="t" r="r" b="b"/>
             <a:pathLst>
-              <a:path extrusionOk="0" h="120000" w="120000">
+              <a:path w="120000" h="120000" extrusionOk="0">
                 <a:moveTo>
                   <a:pt x="0" y="0"/>
                 </a:moveTo>
@@ -1328,9 +1488,11 @@
       <p:sp>
         <p:nvSpPr>
           <p:cNvPr id="87" name="Google Shape;87;g2a0cc9454a_0_36:notes"/>
-          <p:cNvSpPr txBox="1"/>
+          <p:cNvSpPr txBox="1">
+            <a:spLocks noGrp="1"/>
+          </p:cNvSpPr>
           <p:nvPr>
-            <p:ph idx="1" type="body"/>
+            <p:ph type="body" idx="1"/>
           </p:nvPr>
         </p:nvSpPr>
         <p:spPr>
@@ -1343,23 +1505,20 @@
           </a:prstGeom>
         </p:spPr>
         <p:txBody>
-          <a:bodyPr anchorCtr="0" anchor="t" bIns="91425" lIns="91425" spcFirstLastPara="1" rIns="91425" wrap="square" tIns="91425">
+          <a:bodyPr spcFirstLastPara="1" wrap="square" lIns="91425" tIns="91425" rIns="91425" bIns="91425" anchor="t" anchorCtr="0">
             <a:noAutofit/>
           </a:bodyPr>
           <a:lstStyle/>
           <a:p>
-            <a:pPr indent="0" lvl="0" marL="0" rtl="0" algn="l">
-              <a:spcBef>
-                <a:spcPts val="0"/>
-              </a:spcBef>
-              <a:spcAft>
-                <a:spcPts val="0"/>
-              </a:spcAft>
-              <a:buNone/>
-            </a:pPr>
-            <a:r>
-              <a:t/>
-            </a:r>
+            <a:pPr marL="0" lvl="0" indent="0" algn="l" rtl="0">
+              <a:spcBef>
+                <a:spcPts val="0"/>
+              </a:spcBef>
+              <a:spcAft>
+                <a:spcPts val="0"/>
+              </a:spcAft>
+              <a:buNone/>
+            </a:pPr>
             <a:endParaRPr/>
           </a:p>
         </p:txBody>
@@ -1372,12 +1531,116 @@
 </p:notes>
 </file>
 
-<file path=ppt/notesSlides/notesSlide7.xml><?xml version="1.0" encoding="utf-8"?>
-<p:notes xmlns:a="http://schemas.openxmlformats.org/drawingml/2006/main" xmlns:r="http://schemas.openxmlformats.org/officeDocument/2006/relationships" xmlns:mc="http://schemas.openxmlformats.org/markup-compatibility/2006" xmlns:mv="urn:schemas-microsoft-com:mac:vml" xmlns:p="http://schemas.openxmlformats.org/presentationml/2006/main" xmlns:c="http://schemas.openxmlformats.org/drawingml/2006/chart" xmlns:dgm="http://schemas.openxmlformats.org/drawingml/2006/diagram" xmlns:o="urn:schemas-microsoft-com:office:office" xmlns:v="urn:schemas-microsoft-com:vml" xmlns:pvml="urn:schemas-microsoft-com:office:powerpoint" xmlns:com="http://schemas.openxmlformats.org/drawingml/2006/compatibility" xmlns:p14="http://schemas.microsoft.com/office/powerpoint/2010/main" xmlns:p15="http://schemas.microsoft.com/office/powerpoint/2012/main" xmlns:ahyp="http://schemas.microsoft.com/office/drawing/2018/hyperlinkcolor" showMasterPhAnim="0" showMasterSp="0">
+<file path=ppt/notesSlides/notesSlide8.xml><?xml version="1.0" encoding="utf-8"?>
+<p:notes xmlns:a="http://schemas.openxmlformats.org/drawingml/2006/main" xmlns:r="http://schemas.openxmlformats.org/officeDocument/2006/relationships" xmlns:p="http://schemas.openxmlformats.org/presentationml/2006/main" showMasterSp="0" showMasterPhAnim="0">
   <p:cSld>
     <p:spTree>
       <p:nvGrpSpPr>
-        <p:cNvPr id="92" name="Shape 92"/>
+        <p:cNvPr id="1" name="Shape 99"/>
+        <p:cNvGrpSpPr/>
+        <p:nvPr/>
+      </p:nvGrpSpPr>
+      <p:grpSpPr>
+        <a:xfrm>
+          <a:off x="0" y="0"/>
+          <a:ext cx="0" cy="0"/>
+          <a:chOff x="0" y="0"/>
+          <a:chExt cx="0" cy="0"/>
+        </a:xfrm>
+      </p:grpSpPr>
+      <p:sp>
+        <p:nvSpPr>
+          <p:cNvPr id="100" name="Google Shape;100;g2a0cc9454a_0_48:notes"/>
+          <p:cNvSpPr>
+            <a:spLocks noGrp="1" noRot="1" noChangeAspect="1"/>
+          </p:cNvSpPr>
+          <p:nvPr>
+            <p:ph type="sldImg" idx="2"/>
+          </p:nvPr>
+        </p:nvSpPr>
+        <p:spPr>
+          <a:xfrm>
+            <a:off x="1714816" y="685800"/>
+            <a:ext cx="3429000" cy="3429000"/>
+          </a:xfrm>
+          <a:custGeom>
+            <a:avLst/>
+            <a:gdLst/>
+            <a:ahLst/>
+            <a:cxnLst/>
+            <a:rect l="l" t="t" r="r" b="b"/>
+            <a:pathLst>
+              <a:path w="120000" h="120000" extrusionOk="0">
+                <a:moveTo>
+                  <a:pt x="0" y="0"/>
+                </a:moveTo>
+                <a:lnTo>
+                  <a:pt x="120000" y="0"/>
+                </a:lnTo>
+                <a:lnTo>
+                  <a:pt x="120000" y="120000"/>
+                </a:lnTo>
+                <a:lnTo>
+                  <a:pt x="0" y="120000"/>
+                </a:lnTo>
+                <a:close/>
+              </a:path>
+            </a:pathLst>
+          </a:custGeom>
+        </p:spPr>
+      </p:sp>
+      <p:sp>
+        <p:nvSpPr>
+          <p:cNvPr id="101" name="Google Shape;101;g2a0cc9454a_0_48:notes"/>
+          <p:cNvSpPr txBox="1">
+            <a:spLocks noGrp="1"/>
+          </p:cNvSpPr>
+          <p:nvPr>
+            <p:ph type="body" idx="1"/>
+          </p:nvPr>
+        </p:nvSpPr>
+        <p:spPr>
+          <a:xfrm>
+            <a:off x="685800" y="4343400"/>
+            <a:ext cx="5486400" cy="4114800"/>
+          </a:xfrm>
+          <a:prstGeom prst="rect">
+            <a:avLst/>
+          </a:prstGeom>
+        </p:spPr>
+        <p:txBody>
+          <a:bodyPr spcFirstLastPara="1" wrap="square" lIns="91425" tIns="91425" rIns="91425" bIns="91425" anchor="t" anchorCtr="0">
+            <a:noAutofit/>
+          </a:bodyPr>
+          <a:lstStyle/>
+          <a:p>
+            <a:pPr marL="0" lvl="0" indent="0" algn="l" rtl="0">
+              <a:spcBef>
+                <a:spcPts val="0"/>
+              </a:spcBef>
+              <a:spcAft>
+                <a:spcPts val="0"/>
+              </a:spcAft>
+              <a:buNone/>
+            </a:pPr>
+            <a:endParaRPr/>
+          </a:p>
+        </p:txBody>
+      </p:sp>
+    </p:spTree>
+  </p:cSld>
+  <p:clrMapOvr>
+    <a:masterClrMapping/>
+  </p:clrMapOvr>
+</p:notes>
+</file>
+
+<file path=ppt/notesSlides/notesSlide9.xml><?xml version="1.0" encoding="utf-8"?>
+<p:notes xmlns:a="http://schemas.openxmlformats.org/drawingml/2006/main" xmlns:r="http://schemas.openxmlformats.org/officeDocument/2006/relationships" xmlns:p="http://schemas.openxmlformats.org/presentationml/2006/main" showMasterSp="0" showMasterPhAnim="0">
+  <p:cSld>
+    <p:spTree>
+      <p:nvGrpSpPr>
+        <p:cNvPr id="1" name="Shape 92"/>
         <p:cNvGrpSpPr/>
         <p:nvPr/>
       </p:nvGrpSpPr>
@@ -1392,9 +1655,11 @@
       <p:sp>
         <p:nvSpPr>
           <p:cNvPr id="93" name="Google Shape;93;g2a0cc9454a_0_42:notes"/>
-          <p:cNvSpPr/>
+          <p:cNvSpPr>
+            <a:spLocks noGrp="1" noRot="1" noChangeAspect="1"/>
+          </p:cNvSpPr>
           <p:nvPr>
-            <p:ph idx="2" type="sldImg"/>
+            <p:ph type="sldImg" idx="2"/>
           </p:nvPr>
         </p:nvSpPr>
         <p:spPr>
@@ -1403,9 +1668,13 @@
             <a:ext cx="3429000" cy="3429000"/>
           </a:xfrm>
           <a:custGeom>
-            <a:rect b="b" l="l" r="r" t="t"/>
+            <a:avLst/>
+            <a:gdLst/>
+            <a:ahLst/>
+            <a:cxnLst/>
+            <a:rect l="l" t="t" r="r" b="b"/>
             <a:pathLst>
-              <a:path extrusionOk="0" h="120000" w="120000">
+              <a:path w="120000" h="120000" extrusionOk="0">
                 <a:moveTo>
                   <a:pt x="0" y="0"/>
                 </a:moveTo>
@@ -1427,9 +1696,11 @@
       <p:sp>
         <p:nvSpPr>
           <p:cNvPr id="94" name="Google Shape;94;g2a0cc9454a_0_42:notes"/>
-          <p:cNvSpPr txBox="1"/>
+          <p:cNvSpPr txBox="1">
+            <a:spLocks noGrp="1"/>
+          </p:cNvSpPr>
           <p:nvPr>
-            <p:ph idx="1" type="body"/>
+            <p:ph type="body" idx="1"/>
           </p:nvPr>
         </p:nvSpPr>
         <p:spPr>
@@ -1442,221 +1713,20 @@
           </a:prstGeom>
         </p:spPr>
         <p:txBody>
-          <a:bodyPr anchorCtr="0" anchor="t" bIns="91425" lIns="91425" spcFirstLastPara="1" rIns="91425" wrap="square" tIns="91425">
+          <a:bodyPr spcFirstLastPara="1" wrap="square" lIns="91425" tIns="91425" rIns="91425" bIns="91425" anchor="t" anchorCtr="0">
             <a:noAutofit/>
           </a:bodyPr>
           <a:lstStyle/>
           <a:p>
-            <a:pPr indent="0" lvl="0" marL="0" rtl="0" algn="l">
-              <a:spcBef>
-                <a:spcPts val="0"/>
-              </a:spcBef>
-              <a:spcAft>
-                <a:spcPts val="0"/>
-              </a:spcAft>
-              <a:buNone/>
-            </a:pPr>
-            <a:r>
-              <a:t/>
-            </a:r>
-            <a:endParaRPr/>
-          </a:p>
-        </p:txBody>
-      </p:sp>
-    </p:spTree>
-  </p:cSld>
-  <p:clrMapOvr>
-    <a:masterClrMapping/>
-  </p:clrMapOvr>
-</p:notes>
-</file>
-
-<file path=ppt/notesSlides/notesSlide8.xml><?xml version="1.0" encoding="utf-8"?>
-<p:notes xmlns:a="http://schemas.openxmlformats.org/drawingml/2006/main" xmlns:r="http://schemas.openxmlformats.org/officeDocument/2006/relationships" xmlns:mc="http://schemas.openxmlformats.org/markup-compatibility/2006" xmlns:mv="urn:schemas-microsoft-com:mac:vml" xmlns:p="http://schemas.openxmlformats.org/presentationml/2006/main" xmlns:c="http://schemas.openxmlformats.org/drawingml/2006/chart" xmlns:dgm="http://schemas.openxmlformats.org/drawingml/2006/diagram" xmlns:o="urn:schemas-microsoft-com:office:office" xmlns:v="urn:schemas-microsoft-com:vml" xmlns:pvml="urn:schemas-microsoft-com:office:powerpoint" xmlns:com="http://schemas.openxmlformats.org/drawingml/2006/compatibility" xmlns:p14="http://schemas.microsoft.com/office/powerpoint/2010/main" xmlns:p15="http://schemas.microsoft.com/office/powerpoint/2012/main" xmlns:ahyp="http://schemas.microsoft.com/office/drawing/2018/hyperlinkcolor" showMasterPhAnim="0" showMasterSp="0">
-  <p:cSld>
-    <p:spTree>
-      <p:nvGrpSpPr>
-        <p:cNvPr id="99" name="Shape 99"/>
-        <p:cNvGrpSpPr/>
-        <p:nvPr/>
-      </p:nvGrpSpPr>
-      <p:grpSpPr>
-        <a:xfrm>
-          <a:off x="0" y="0"/>
-          <a:ext cx="0" cy="0"/>
-          <a:chOff x="0" y="0"/>
-          <a:chExt cx="0" cy="0"/>
-        </a:xfrm>
-      </p:grpSpPr>
-      <p:sp>
-        <p:nvSpPr>
-          <p:cNvPr id="100" name="Google Shape;100;g2a0cc9454a_0_48:notes"/>
-          <p:cNvSpPr/>
-          <p:nvPr>
-            <p:ph idx="2" type="sldImg"/>
-          </p:nvPr>
-        </p:nvSpPr>
-        <p:spPr>
-          <a:xfrm>
-            <a:off x="1714816" y="685800"/>
-            <a:ext cx="3429000" cy="3429000"/>
-          </a:xfrm>
-          <a:custGeom>
-            <a:rect b="b" l="l" r="r" t="t"/>
-            <a:pathLst>
-              <a:path extrusionOk="0" h="120000" w="120000">
-                <a:moveTo>
-                  <a:pt x="0" y="0"/>
-                </a:moveTo>
-                <a:lnTo>
-                  <a:pt x="120000" y="0"/>
-                </a:lnTo>
-                <a:lnTo>
-                  <a:pt x="120000" y="120000"/>
-                </a:lnTo>
-                <a:lnTo>
-                  <a:pt x="0" y="120000"/>
-                </a:lnTo>
-                <a:close/>
-              </a:path>
-            </a:pathLst>
-          </a:custGeom>
-        </p:spPr>
-      </p:sp>
-      <p:sp>
-        <p:nvSpPr>
-          <p:cNvPr id="101" name="Google Shape;101;g2a0cc9454a_0_48:notes"/>
-          <p:cNvSpPr txBox="1"/>
-          <p:nvPr>
-            <p:ph idx="1" type="body"/>
-          </p:nvPr>
-        </p:nvSpPr>
-        <p:spPr>
-          <a:xfrm>
-            <a:off x="685800" y="4343400"/>
-            <a:ext cx="5486400" cy="4114800"/>
-          </a:xfrm>
-          <a:prstGeom prst="rect">
-            <a:avLst/>
-          </a:prstGeom>
-        </p:spPr>
-        <p:txBody>
-          <a:bodyPr anchorCtr="0" anchor="t" bIns="91425" lIns="91425" spcFirstLastPara="1" rIns="91425" wrap="square" tIns="91425">
-            <a:noAutofit/>
-          </a:bodyPr>
-          <a:lstStyle/>
-          <a:p>
-            <a:pPr indent="0" lvl="0" marL="0" rtl="0" algn="l">
-              <a:spcBef>
-                <a:spcPts val="0"/>
-              </a:spcBef>
-              <a:spcAft>
-                <a:spcPts val="0"/>
-              </a:spcAft>
-              <a:buNone/>
-            </a:pPr>
-            <a:r>
-              <a:t/>
-            </a:r>
-            <a:endParaRPr/>
-          </a:p>
-        </p:txBody>
-      </p:sp>
-    </p:spTree>
-  </p:cSld>
-  <p:clrMapOvr>
-    <a:masterClrMapping/>
-  </p:clrMapOvr>
-</p:notes>
-</file>
-
-<file path=ppt/notesSlides/notesSlide9.xml><?xml version="1.0" encoding="utf-8"?>
-<p:notes xmlns:a="http://schemas.openxmlformats.org/drawingml/2006/main" xmlns:r="http://schemas.openxmlformats.org/officeDocument/2006/relationships" xmlns:mc="http://schemas.openxmlformats.org/markup-compatibility/2006" xmlns:mv="urn:schemas-microsoft-com:mac:vml" xmlns:p="http://schemas.openxmlformats.org/presentationml/2006/main" xmlns:c="http://schemas.openxmlformats.org/drawingml/2006/chart" xmlns:dgm="http://schemas.openxmlformats.org/drawingml/2006/diagram" xmlns:o="urn:schemas-microsoft-com:office:office" xmlns:v="urn:schemas-microsoft-com:vml" xmlns:pvml="urn:schemas-microsoft-com:office:powerpoint" xmlns:com="http://schemas.openxmlformats.org/drawingml/2006/compatibility" xmlns:p14="http://schemas.microsoft.com/office/powerpoint/2010/main" xmlns:p15="http://schemas.microsoft.com/office/powerpoint/2012/main" xmlns:ahyp="http://schemas.microsoft.com/office/drawing/2018/hyperlinkcolor" showMasterPhAnim="0" showMasterSp="0">
-  <p:cSld>
-    <p:spTree>
-      <p:nvGrpSpPr>
-        <p:cNvPr id="107" name="Shape 107"/>
-        <p:cNvGrpSpPr/>
-        <p:nvPr/>
-      </p:nvGrpSpPr>
-      <p:grpSpPr>
-        <a:xfrm>
-          <a:off x="0" y="0"/>
-          <a:ext cx="0" cy="0"/>
-          <a:chOff x="0" y="0"/>
-          <a:chExt cx="0" cy="0"/>
-        </a:xfrm>
-      </p:grpSpPr>
-      <p:sp>
-        <p:nvSpPr>
-          <p:cNvPr id="108" name="Google Shape;108;g2a0cc9454a_0_54:notes"/>
-          <p:cNvSpPr/>
-          <p:nvPr>
-            <p:ph idx="2" type="sldImg"/>
-          </p:nvPr>
-        </p:nvSpPr>
-        <p:spPr>
-          <a:xfrm>
-            <a:off x="1714816" y="685800"/>
-            <a:ext cx="3429000" cy="3429000"/>
-          </a:xfrm>
-          <a:custGeom>
-            <a:rect b="b" l="l" r="r" t="t"/>
-            <a:pathLst>
-              <a:path extrusionOk="0" h="120000" w="120000">
-                <a:moveTo>
-                  <a:pt x="0" y="0"/>
-                </a:moveTo>
-                <a:lnTo>
-                  <a:pt x="120000" y="0"/>
-                </a:lnTo>
-                <a:lnTo>
-                  <a:pt x="120000" y="120000"/>
-                </a:lnTo>
-                <a:lnTo>
-                  <a:pt x="0" y="120000"/>
-                </a:lnTo>
-                <a:close/>
-              </a:path>
-            </a:pathLst>
-          </a:custGeom>
-        </p:spPr>
-      </p:sp>
-      <p:sp>
-        <p:nvSpPr>
-          <p:cNvPr id="109" name="Google Shape;109;g2a0cc9454a_0_54:notes"/>
-          <p:cNvSpPr txBox="1"/>
-          <p:nvPr>
-            <p:ph idx="1" type="body"/>
-          </p:nvPr>
-        </p:nvSpPr>
-        <p:spPr>
-          <a:xfrm>
-            <a:off x="685800" y="4343400"/>
-            <a:ext cx="5486400" cy="4114800"/>
-          </a:xfrm>
-          <a:prstGeom prst="rect">
-            <a:avLst/>
-          </a:prstGeom>
-        </p:spPr>
-        <p:txBody>
-          <a:bodyPr anchorCtr="0" anchor="t" bIns="91425" lIns="91425" spcFirstLastPara="1" rIns="91425" wrap="square" tIns="91425">
-            <a:noAutofit/>
-          </a:bodyPr>
-          <a:lstStyle/>
-          <a:p>
-            <a:pPr indent="0" lvl="0" marL="0" rtl="0" algn="l">
-              <a:spcBef>
-                <a:spcPts val="0"/>
-              </a:spcBef>
-              <a:spcAft>
-                <a:spcPts val="0"/>
-              </a:spcAft>
-              <a:buNone/>
-            </a:pPr>
-            <a:r>
-              <a:t/>
-            </a:r>
+            <a:pPr marL="0" lvl="0" indent="0" algn="l" rtl="0">
+              <a:spcBef>
+                <a:spcPts val="0"/>
+              </a:spcBef>
+              <a:spcAft>
+                <a:spcPts val="0"/>
+              </a:spcAft>
+              <a:buNone/>
+            </a:pPr>
             <a:endParaRPr/>
           </a:p>
         </p:txBody>
@@ -1670,11 +1740,11 @@
 </file>
 
 <file path=ppt/slideLayouts/slideLayout1.xml><?xml version="1.0" encoding="utf-8"?>
-<p:sldLayout xmlns:a="http://schemas.openxmlformats.org/drawingml/2006/main" xmlns:r="http://schemas.openxmlformats.org/officeDocument/2006/relationships" xmlns:mc="http://schemas.openxmlformats.org/markup-compatibility/2006" xmlns:mv="urn:schemas-microsoft-com:mac:vml" xmlns:p="http://schemas.openxmlformats.org/presentationml/2006/main" xmlns:c="http://schemas.openxmlformats.org/drawingml/2006/chart" xmlns:dgm="http://schemas.openxmlformats.org/drawingml/2006/diagram" xmlns:o="urn:schemas-microsoft-com:office:office" xmlns:v="urn:schemas-microsoft-com:vml" xmlns:pvml="urn:schemas-microsoft-com:office:powerpoint" xmlns:com="http://schemas.openxmlformats.org/drawingml/2006/compatibility" xmlns:p14="http://schemas.microsoft.com/office/powerpoint/2010/main" xmlns:p15="http://schemas.microsoft.com/office/powerpoint/2012/main" xmlns:ahyp="http://schemas.microsoft.com/office/drawing/2018/hyperlinkcolor" matchingName="Title slide" type="title">
+<p:sldLayout xmlns:a="http://schemas.openxmlformats.org/drawingml/2006/main" xmlns:r="http://schemas.openxmlformats.org/officeDocument/2006/relationships" xmlns:p="http://schemas.openxmlformats.org/presentationml/2006/main" matchingName="Title slide" type="title">
   <p:cSld name="TITLE">
     <p:spTree>
       <p:nvGrpSpPr>
-        <p:cNvPr id="9" name="Shape 9"/>
+        <p:cNvPr id="1" name="Shape 9"/>
         <p:cNvGrpSpPr/>
         <p:nvPr/>
       </p:nvGrpSpPr>
@@ -1689,7 +1759,9 @@
       <p:sp>
         <p:nvSpPr>
           <p:cNvPr id="10" name="Google Shape;10;p2"/>
-          <p:cNvSpPr txBox="1"/>
+          <p:cNvSpPr txBox="1">
+            <a:spLocks noGrp="1"/>
+          </p:cNvSpPr>
           <p:nvPr>
             <p:ph type="ctrTitle"/>
           </p:nvPr>
@@ -1704,7 +1776,7 @@
           </a:prstGeom>
         </p:spPr>
         <p:txBody>
-          <a:bodyPr anchorCtr="0" anchor="b" bIns="91425" lIns="91425" spcFirstLastPara="1" rIns="91425" wrap="square" tIns="91425">
+          <a:bodyPr spcFirstLastPara="1" wrap="square" lIns="91425" tIns="91425" rIns="91425" bIns="91425" anchor="b" anchorCtr="0">
             <a:noAutofit/>
           </a:bodyPr>
           <a:lstStyle>
@@ -1808,15 +1880,19 @@
               <a:defRPr sz="5200"/>
             </a:lvl9pPr>
           </a:lstStyle>
-          <a:p/>
+          <a:p>
+            <a:endParaRPr/>
+          </a:p>
         </p:txBody>
       </p:sp>
       <p:sp>
         <p:nvSpPr>
           <p:cNvPr id="11" name="Google Shape;11;p2"/>
-          <p:cNvSpPr txBox="1"/>
+          <p:cNvSpPr txBox="1">
+            <a:spLocks noGrp="1"/>
+          </p:cNvSpPr>
           <p:nvPr>
-            <p:ph idx="1" type="subTitle"/>
+            <p:ph type="subTitle" idx="1"/>
           </p:nvPr>
         </p:nvSpPr>
         <p:spPr>
@@ -1829,7 +1905,7 @@
           </a:prstGeom>
         </p:spPr>
         <p:txBody>
-          <a:bodyPr anchorCtr="0" anchor="t" bIns="91425" lIns="91425" spcFirstLastPara="1" rIns="91425" wrap="square" tIns="91425">
+          <a:bodyPr spcFirstLastPara="1" wrap="square" lIns="91425" tIns="91425" rIns="91425" bIns="91425" anchor="t" anchorCtr="0">
             <a:noAutofit/>
           </a:bodyPr>
           <a:lstStyle>
@@ -1960,15 +2036,19 @@
               <a:defRPr sz="2800"/>
             </a:lvl9pPr>
           </a:lstStyle>
-          <a:p/>
+          <a:p>
+            <a:endParaRPr/>
+          </a:p>
         </p:txBody>
       </p:sp>
       <p:sp>
         <p:nvSpPr>
           <p:cNvPr id="12" name="Google Shape;12;p2"/>
-          <p:cNvSpPr txBox="1"/>
+          <p:cNvSpPr txBox="1">
+            <a:spLocks noGrp="1"/>
+          </p:cNvSpPr>
           <p:nvPr>
-            <p:ph idx="12" type="sldNum"/>
+            <p:ph type="sldNum" idx="12"/>
           </p:nvPr>
         </p:nvSpPr>
         <p:spPr>
@@ -1981,7 +2061,7 @@
           </a:prstGeom>
         </p:spPr>
         <p:txBody>
-          <a:bodyPr anchorCtr="0" anchor="ctr" bIns="91425" lIns="91425" spcFirstLastPara="1" rIns="91425" wrap="square" tIns="91425">
+          <a:bodyPr spcFirstLastPara="1" wrap="square" lIns="91425" tIns="91425" rIns="91425" bIns="91425" anchor="ctr" anchorCtr="0">
             <a:noAutofit/>
           </a:bodyPr>
           <a:lstStyle>
@@ -2023,7 +2103,7 @@
             </a:lvl9pPr>
           </a:lstStyle>
           <a:p>
-            <a:pPr indent="0" lvl="0" marL="0" rtl="0" algn="r">
+            <a:pPr marL="0" lvl="0" indent="0" algn="r" rtl="0">
               <a:spcBef>
                 <a:spcPts val="0"/>
               </a:spcBef>
@@ -2049,11 +2129,11 @@
 </file>
 
 <file path=ppt/slideLayouts/slideLayout10.xml><?xml version="1.0" encoding="utf-8"?>
-<p:sldLayout xmlns:a="http://schemas.openxmlformats.org/drawingml/2006/main" xmlns:r="http://schemas.openxmlformats.org/officeDocument/2006/relationships" xmlns:mc="http://schemas.openxmlformats.org/markup-compatibility/2006" xmlns:mv="urn:schemas-microsoft-com:mac:vml" xmlns:p="http://schemas.openxmlformats.org/presentationml/2006/main" xmlns:c="http://schemas.openxmlformats.org/drawingml/2006/chart" xmlns:dgm="http://schemas.openxmlformats.org/drawingml/2006/diagram" xmlns:o="urn:schemas-microsoft-com:office:office" xmlns:v="urn:schemas-microsoft-com:vml" xmlns:pvml="urn:schemas-microsoft-com:office:powerpoint" xmlns:com="http://schemas.openxmlformats.org/drawingml/2006/compatibility" xmlns:p14="http://schemas.microsoft.com/office/powerpoint/2010/main" xmlns:p15="http://schemas.microsoft.com/office/powerpoint/2012/main" xmlns:ahyp="http://schemas.microsoft.com/office/drawing/2018/hyperlinkcolor" matchingName="Big number">
+<p:sldLayout xmlns:a="http://schemas.openxmlformats.org/drawingml/2006/main" xmlns:r="http://schemas.openxmlformats.org/officeDocument/2006/relationships" xmlns:p="http://schemas.openxmlformats.org/presentationml/2006/main" matchingName="Big number">
   <p:cSld name="BIG_NUMBER">
     <p:spTree>
       <p:nvGrpSpPr>
-        <p:cNvPr id="44" name="Shape 44"/>
+        <p:cNvPr id="1" name="Shape 44"/>
         <p:cNvGrpSpPr/>
         <p:nvPr/>
       </p:nvGrpSpPr>
@@ -2068,9 +2148,11 @@
       <p:sp>
         <p:nvSpPr>
           <p:cNvPr id="45" name="Google Shape;45;p11"/>
-          <p:cNvSpPr txBox="1"/>
+          <p:cNvSpPr txBox="1">
+            <a:spLocks noGrp="1"/>
+          </p:cNvSpPr>
           <p:nvPr>
-            <p:ph hasCustomPrompt="1" type="title"/>
+            <p:ph type="title" hasCustomPrompt="1"/>
           </p:nvPr>
         </p:nvSpPr>
         <p:spPr>
@@ -2083,7 +2165,7 @@
           </a:prstGeom>
         </p:spPr>
         <p:txBody>
-          <a:bodyPr anchorCtr="0" anchor="b" bIns="91425" lIns="91425" spcFirstLastPara="1" rIns="91425" wrap="square" tIns="91425">
+          <a:bodyPr spcFirstLastPara="1" wrap="square" lIns="91425" tIns="91425" rIns="91425" bIns="91425" anchor="b" anchorCtr="0">
             <a:noAutofit/>
           </a:bodyPr>
           <a:lstStyle>
@@ -2197,9 +2279,11 @@
       <p:sp>
         <p:nvSpPr>
           <p:cNvPr id="46" name="Google Shape;46;p11"/>
-          <p:cNvSpPr txBox="1"/>
+          <p:cNvSpPr txBox="1">
+            <a:spLocks noGrp="1"/>
+          </p:cNvSpPr>
           <p:nvPr>
-            <p:ph idx="1" type="body"/>
+            <p:ph type="body" idx="1"/>
           </p:nvPr>
         </p:nvSpPr>
         <p:spPr>
@@ -2212,11 +2296,11 @@
           </a:prstGeom>
         </p:spPr>
         <p:txBody>
-          <a:bodyPr anchorCtr="0" anchor="t" bIns="91425" lIns="91425" spcFirstLastPara="1" rIns="91425" wrap="square" tIns="91425">
+          <a:bodyPr spcFirstLastPara="1" wrap="square" lIns="91425" tIns="91425" rIns="91425" bIns="91425" anchor="t" anchorCtr="0">
             <a:noAutofit/>
           </a:bodyPr>
           <a:lstStyle>
-            <a:lvl1pPr indent="-342900" lvl="0" marL="457200" algn="ctr">
+            <a:lvl1pPr marL="457200" lvl="0" indent="-342900" algn="ctr">
               <a:spcBef>
                 <a:spcPts val="0"/>
               </a:spcBef>
@@ -2227,7 +2311,7 @@
               <a:buChar char="●"/>
               <a:defRPr/>
             </a:lvl1pPr>
-            <a:lvl2pPr indent="-317500" lvl="1" marL="914400" algn="ctr">
+            <a:lvl2pPr marL="914400" lvl="1" indent="-317500" algn="ctr">
               <a:spcBef>
                 <a:spcPts val="1600"/>
               </a:spcBef>
@@ -2238,7 +2322,7 @@
               <a:buChar char="○"/>
               <a:defRPr/>
             </a:lvl2pPr>
-            <a:lvl3pPr indent="-317500" lvl="2" marL="1371600" algn="ctr">
+            <a:lvl3pPr marL="1371600" lvl="2" indent="-317500" algn="ctr">
               <a:spcBef>
                 <a:spcPts val="1600"/>
               </a:spcBef>
@@ -2249,7 +2333,7 @@
               <a:buChar char="■"/>
               <a:defRPr/>
             </a:lvl3pPr>
-            <a:lvl4pPr indent="-317500" lvl="3" marL="1828800" algn="ctr">
+            <a:lvl4pPr marL="1828800" lvl="3" indent="-317500" algn="ctr">
               <a:spcBef>
                 <a:spcPts val="1600"/>
               </a:spcBef>
@@ -2260,7 +2344,7 @@
               <a:buChar char="●"/>
               <a:defRPr/>
             </a:lvl4pPr>
-            <a:lvl5pPr indent="-317500" lvl="4" marL="2286000" algn="ctr">
+            <a:lvl5pPr marL="2286000" lvl="4" indent="-317500" algn="ctr">
               <a:spcBef>
                 <a:spcPts val="1600"/>
               </a:spcBef>
@@ -2271,7 +2355,7 @@
               <a:buChar char="○"/>
               <a:defRPr/>
             </a:lvl5pPr>
-            <a:lvl6pPr indent="-317500" lvl="5" marL="2743200" algn="ctr">
+            <a:lvl6pPr marL="2743200" lvl="5" indent="-317500" algn="ctr">
               <a:spcBef>
                 <a:spcPts val="1600"/>
               </a:spcBef>
@@ -2282,7 +2366,7 @@
               <a:buChar char="■"/>
               <a:defRPr/>
             </a:lvl6pPr>
-            <a:lvl7pPr indent="-317500" lvl="6" marL="3200400" algn="ctr">
+            <a:lvl7pPr marL="3200400" lvl="6" indent="-317500" algn="ctr">
               <a:spcBef>
                 <a:spcPts val="1600"/>
               </a:spcBef>
@@ -2293,7 +2377,7 @@
               <a:buChar char="●"/>
               <a:defRPr/>
             </a:lvl7pPr>
-            <a:lvl8pPr indent="-317500" lvl="7" marL="3657600" algn="ctr">
+            <a:lvl8pPr marL="3657600" lvl="7" indent="-317500" algn="ctr">
               <a:spcBef>
                 <a:spcPts val="1600"/>
               </a:spcBef>
@@ -2304,7 +2388,7 @@
               <a:buChar char="○"/>
               <a:defRPr/>
             </a:lvl8pPr>
-            <a:lvl9pPr indent="-317500" lvl="8" marL="4114800" algn="ctr">
+            <a:lvl9pPr marL="4114800" lvl="8" indent="-317500" algn="ctr">
               <a:spcBef>
                 <a:spcPts val="1600"/>
               </a:spcBef>
@@ -2316,15 +2400,19 @@
               <a:defRPr/>
             </a:lvl9pPr>
           </a:lstStyle>
-          <a:p/>
+          <a:p>
+            <a:endParaRPr/>
+          </a:p>
         </p:txBody>
       </p:sp>
       <p:sp>
         <p:nvSpPr>
           <p:cNvPr id="47" name="Google Shape;47;p11"/>
-          <p:cNvSpPr txBox="1"/>
+          <p:cNvSpPr txBox="1">
+            <a:spLocks noGrp="1"/>
+          </p:cNvSpPr>
           <p:nvPr>
-            <p:ph idx="12" type="sldNum"/>
+            <p:ph type="sldNum" idx="12"/>
           </p:nvPr>
         </p:nvSpPr>
         <p:spPr>
@@ -2337,7 +2425,7 @@
           </a:prstGeom>
         </p:spPr>
         <p:txBody>
-          <a:bodyPr anchorCtr="0" anchor="ctr" bIns="91425" lIns="91425" spcFirstLastPara="1" rIns="91425" wrap="square" tIns="91425">
+          <a:bodyPr spcFirstLastPara="1" wrap="square" lIns="91425" tIns="91425" rIns="91425" bIns="91425" anchor="ctr" anchorCtr="0">
             <a:noAutofit/>
           </a:bodyPr>
           <a:lstStyle>
@@ -2379,7 +2467,7 @@
             </a:lvl9pPr>
           </a:lstStyle>
           <a:p>
-            <a:pPr indent="0" lvl="0" marL="0" rtl="0" algn="r">
+            <a:pPr marL="0" lvl="0" indent="0" algn="r" rtl="0">
               <a:spcBef>
                 <a:spcPts val="0"/>
               </a:spcBef>
@@ -2405,11 +2493,11 @@
 </file>
 
 <file path=ppt/slideLayouts/slideLayout11.xml><?xml version="1.0" encoding="utf-8"?>
-<p:sldLayout xmlns:a="http://schemas.openxmlformats.org/drawingml/2006/main" xmlns:r="http://schemas.openxmlformats.org/officeDocument/2006/relationships" xmlns:mc="http://schemas.openxmlformats.org/markup-compatibility/2006" xmlns:mv="urn:schemas-microsoft-com:mac:vml" xmlns:p="http://schemas.openxmlformats.org/presentationml/2006/main" xmlns:c="http://schemas.openxmlformats.org/drawingml/2006/chart" xmlns:dgm="http://schemas.openxmlformats.org/drawingml/2006/diagram" xmlns:o="urn:schemas-microsoft-com:office:office" xmlns:v="urn:schemas-microsoft-com:vml" xmlns:pvml="urn:schemas-microsoft-com:office:powerpoint" xmlns:com="http://schemas.openxmlformats.org/drawingml/2006/compatibility" xmlns:p14="http://schemas.microsoft.com/office/powerpoint/2010/main" xmlns:p15="http://schemas.microsoft.com/office/powerpoint/2012/main" xmlns:ahyp="http://schemas.microsoft.com/office/drawing/2018/hyperlinkcolor" matchingName="Blank" type="blank">
+<p:sldLayout xmlns:a="http://schemas.openxmlformats.org/drawingml/2006/main" xmlns:r="http://schemas.openxmlformats.org/officeDocument/2006/relationships" xmlns:p="http://schemas.openxmlformats.org/presentationml/2006/main" matchingName="Blank" type="blank">
   <p:cSld name="BLANK">
     <p:spTree>
       <p:nvGrpSpPr>
-        <p:cNvPr id="48" name="Shape 48"/>
+        <p:cNvPr id="1" name="Shape 48"/>
         <p:cNvGrpSpPr/>
         <p:nvPr/>
       </p:nvGrpSpPr>
@@ -2424,9 +2512,11 @@
       <p:sp>
         <p:nvSpPr>
           <p:cNvPr id="49" name="Google Shape;49;p12"/>
-          <p:cNvSpPr txBox="1"/>
+          <p:cNvSpPr txBox="1">
+            <a:spLocks noGrp="1"/>
+          </p:cNvSpPr>
           <p:nvPr>
-            <p:ph idx="12" type="sldNum"/>
+            <p:ph type="sldNum" idx="12"/>
           </p:nvPr>
         </p:nvSpPr>
         <p:spPr>
@@ -2439,7 +2529,7 @@
           </a:prstGeom>
         </p:spPr>
         <p:txBody>
-          <a:bodyPr anchorCtr="0" anchor="ctr" bIns="91425" lIns="91425" spcFirstLastPara="1" rIns="91425" wrap="square" tIns="91425">
+          <a:bodyPr spcFirstLastPara="1" wrap="square" lIns="91425" tIns="91425" rIns="91425" bIns="91425" anchor="ctr" anchorCtr="0">
             <a:noAutofit/>
           </a:bodyPr>
           <a:lstStyle>
@@ -2481,7 +2571,7 @@
             </a:lvl9pPr>
           </a:lstStyle>
           <a:p>
-            <a:pPr indent="0" lvl="0" marL="0" rtl="0" algn="r">
+            <a:pPr marL="0" lvl="0" indent="0" algn="r" rtl="0">
               <a:spcBef>
                 <a:spcPts val="0"/>
               </a:spcBef>
@@ -2507,11 +2597,11 @@
 </file>
 
 <file path=ppt/slideLayouts/slideLayout2.xml><?xml version="1.0" encoding="utf-8"?>
-<p:sldLayout xmlns:a="http://schemas.openxmlformats.org/drawingml/2006/main" xmlns:r="http://schemas.openxmlformats.org/officeDocument/2006/relationships" xmlns:mc="http://schemas.openxmlformats.org/markup-compatibility/2006" xmlns:mv="urn:schemas-microsoft-com:mac:vml" xmlns:p="http://schemas.openxmlformats.org/presentationml/2006/main" xmlns:c="http://schemas.openxmlformats.org/drawingml/2006/chart" xmlns:dgm="http://schemas.openxmlformats.org/drawingml/2006/diagram" xmlns:o="urn:schemas-microsoft-com:office:office" xmlns:v="urn:schemas-microsoft-com:vml" xmlns:pvml="urn:schemas-microsoft-com:office:powerpoint" xmlns:com="http://schemas.openxmlformats.org/drawingml/2006/compatibility" xmlns:p14="http://schemas.microsoft.com/office/powerpoint/2010/main" xmlns:p15="http://schemas.microsoft.com/office/powerpoint/2012/main" xmlns:ahyp="http://schemas.microsoft.com/office/drawing/2018/hyperlinkcolor" matchingName="Section header" type="secHead">
+<p:sldLayout xmlns:a="http://schemas.openxmlformats.org/drawingml/2006/main" xmlns:r="http://schemas.openxmlformats.org/officeDocument/2006/relationships" xmlns:p="http://schemas.openxmlformats.org/presentationml/2006/main" matchingName="Section header" type="secHead">
   <p:cSld name="SECTION_HEADER">
     <p:spTree>
       <p:nvGrpSpPr>
-        <p:cNvPr id="13" name="Shape 13"/>
+        <p:cNvPr id="1" name="Shape 13"/>
         <p:cNvGrpSpPr/>
         <p:nvPr/>
       </p:nvGrpSpPr>
@@ -2526,7 +2616,9 @@
       <p:sp>
         <p:nvSpPr>
           <p:cNvPr id="14" name="Google Shape;14;p3"/>
-          <p:cNvSpPr txBox="1"/>
+          <p:cNvSpPr txBox="1">
+            <a:spLocks noGrp="1"/>
+          </p:cNvSpPr>
           <p:nvPr>
             <p:ph type="title"/>
           </p:nvPr>
@@ -2541,7 +2633,7 @@
           </a:prstGeom>
         </p:spPr>
         <p:txBody>
-          <a:bodyPr anchorCtr="0" anchor="ctr" bIns="91425" lIns="91425" spcFirstLastPara="1" rIns="91425" wrap="square" tIns="91425">
+          <a:bodyPr spcFirstLastPara="1" wrap="square" lIns="91425" tIns="91425" rIns="91425" bIns="91425" anchor="ctr" anchorCtr="0">
             <a:noAutofit/>
           </a:bodyPr>
           <a:lstStyle>
@@ -2645,15 +2737,19 @@
               <a:defRPr sz="3600"/>
             </a:lvl9pPr>
           </a:lstStyle>
-          <a:p/>
+          <a:p>
+            <a:endParaRPr/>
+          </a:p>
         </p:txBody>
       </p:sp>
       <p:sp>
         <p:nvSpPr>
           <p:cNvPr id="15" name="Google Shape;15;p3"/>
-          <p:cNvSpPr txBox="1"/>
+          <p:cNvSpPr txBox="1">
+            <a:spLocks noGrp="1"/>
+          </p:cNvSpPr>
           <p:nvPr>
-            <p:ph idx="12" type="sldNum"/>
+            <p:ph type="sldNum" idx="12"/>
           </p:nvPr>
         </p:nvSpPr>
         <p:spPr>
@@ -2666,7 +2762,7 @@
           </a:prstGeom>
         </p:spPr>
         <p:txBody>
-          <a:bodyPr anchorCtr="0" anchor="ctr" bIns="91425" lIns="91425" spcFirstLastPara="1" rIns="91425" wrap="square" tIns="91425">
+          <a:bodyPr spcFirstLastPara="1" wrap="square" lIns="91425" tIns="91425" rIns="91425" bIns="91425" anchor="ctr" anchorCtr="0">
             <a:noAutofit/>
           </a:bodyPr>
           <a:lstStyle>
@@ -2708,7 +2804,7 @@
             </a:lvl9pPr>
           </a:lstStyle>
           <a:p>
-            <a:pPr indent="0" lvl="0" marL="0" rtl="0" algn="r">
+            <a:pPr marL="0" lvl="0" indent="0" algn="r" rtl="0">
               <a:spcBef>
                 <a:spcPts val="0"/>
               </a:spcBef>
@@ -2734,11 +2830,11 @@
 </file>
 
 <file path=ppt/slideLayouts/slideLayout3.xml><?xml version="1.0" encoding="utf-8"?>
-<p:sldLayout xmlns:a="http://schemas.openxmlformats.org/drawingml/2006/main" xmlns:r="http://schemas.openxmlformats.org/officeDocument/2006/relationships" xmlns:mc="http://schemas.openxmlformats.org/markup-compatibility/2006" xmlns:mv="urn:schemas-microsoft-com:mac:vml" xmlns:p="http://schemas.openxmlformats.org/presentationml/2006/main" xmlns:c="http://schemas.openxmlformats.org/drawingml/2006/chart" xmlns:dgm="http://schemas.openxmlformats.org/drawingml/2006/diagram" xmlns:o="urn:schemas-microsoft-com:office:office" xmlns:v="urn:schemas-microsoft-com:vml" xmlns:pvml="urn:schemas-microsoft-com:office:powerpoint" xmlns:com="http://schemas.openxmlformats.org/drawingml/2006/compatibility" xmlns:p14="http://schemas.microsoft.com/office/powerpoint/2010/main" xmlns:p15="http://schemas.microsoft.com/office/powerpoint/2012/main" xmlns:ahyp="http://schemas.microsoft.com/office/drawing/2018/hyperlinkcolor" matchingName="Title and body" type="tx">
+<p:sldLayout xmlns:a="http://schemas.openxmlformats.org/drawingml/2006/main" xmlns:r="http://schemas.openxmlformats.org/officeDocument/2006/relationships" xmlns:p="http://schemas.openxmlformats.org/presentationml/2006/main" matchingName="Title and body" type="tx">
   <p:cSld name="TITLE_AND_BODY">
     <p:spTree>
       <p:nvGrpSpPr>
-        <p:cNvPr id="16" name="Shape 16"/>
+        <p:cNvPr id="1" name="Shape 16"/>
         <p:cNvGrpSpPr/>
         <p:nvPr/>
       </p:nvGrpSpPr>
@@ -2753,7 +2849,9 @@
       <p:sp>
         <p:nvSpPr>
           <p:cNvPr id="17" name="Google Shape;17;p4"/>
-          <p:cNvSpPr txBox="1"/>
+          <p:cNvSpPr txBox="1">
+            <a:spLocks noGrp="1"/>
+          </p:cNvSpPr>
           <p:nvPr>
             <p:ph type="title"/>
           </p:nvPr>
@@ -2768,7 +2866,7 @@
           </a:prstGeom>
         </p:spPr>
         <p:txBody>
-          <a:bodyPr anchorCtr="0" anchor="t" bIns="91425" lIns="91425" spcFirstLastPara="1" rIns="91425" wrap="square" tIns="91425">
+          <a:bodyPr spcFirstLastPara="1" wrap="square" lIns="91425" tIns="91425" rIns="91425" bIns="91425" anchor="t" anchorCtr="0">
             <a:noAutofit/>
           </a:bodyPr>
           <a:lstStyle>
@@ -2872,15 +2970,19 @@
               <a:defRPr/>
             </a:lvl9pPr>
           </a:lstStyle>
-          <a:p/>
+          <a:p>
+            <a:endParaRPr/>
+          </a:p>
         </p:txBody>
       </p:sp>
       <p:sp>
         <p:nvSpPr>
           <p:cNvPr id="18" name="Google Shape;18;p4"/>
-          <p:cNvSpPr txBox="1"/>
+          <p:cNvSpPr txBox="1">
+            <a:spLocks noGrp="1"/>
+          </p:cNvSpPr>
           <p:nvPr>
-            <p:ph idx="1" type="body"/>
+            <p:ph type="body" idx="1"/>
           </p:nvPr>
         </p:nvSpPr>
         <p:spPr>
@@ -2893,11 +2995,11 @@
           </a:prstGeom>
         </p:spPr>
         <p:txBody>
-          <a:bodyPr anchorCtr="0" anchor="t" bIns="91425" lIns="91425" spcFirstLastPara="1" rIns="91425" wrap="square" tIns="91425">
+          <a:bodyPr spcFirstLastPara="1" wrap="square" lIns="91425" tIns="91425" rIns="91425" bIns="91425" anchor="t" anchorCtr="0">
             <a:noAutofit/>
           </a:bodyPr>
           <a:lstStyle>
-            <a:lvl1pPr indent="-342900" lvl="0" marL="457200">
+            <a:lvl1pPr marL="457200" lvl="0" indent="-342900">
               <a:spcBef>
                 <a:spcPts val="0"/>
               </a:spcBef>
@@ -2908,7 +3010,7 @@
               <a:buChar char="●"/>
               <a:defRPr/>
             </a:lvl1pPr>
-            <a:lvl2pPr indent="-317500" lvl="1" marL="914400">
+            <a:lvl2pPr marL="914400" lvl="1" indent="-317500">
               <a:spcBef>
                 <a:spcPts val="1600"/>
               </a:spcBef>
@@ -2919,7 +3021,7 @@
               <a:buChar char="○"/>
               <a:defRPr/>
             </a:lvl2pPr>
-            <a:lvl3pPr indent="-317500" lvl="2" marL="1371600">
+            <a:lvl3pPr marL="1371600" lvl="2" indent="-317500">
               <a:spcBef>
                 <a:spcPts val="1600"/>
               </a:spcBef>
@@ -2930,7 +3032,7 @@
               <a:buChar char="■"/>
               <a:defRPr/>
             </a:lvl3pPr>
-            <a:lvl4pPr indent="-317500" lvl="3" marL="1828800">
+            <a:lvl4pPr marL="1828800" lvl="3" indent="-317500">
               <a:spcBef>
                 <a:spcPts val="1600"/>
               </a:spcBef>
@@ -2941,7 +3043,7 @@
               <a:buChar char="●"/>
               <a:defRPr/>
             </a:lvl4pPr>
-            <a:lvl5pPr indent="-317500" lvl="4" marL="2286000">
+            <a:lvl5pPr marL="2286000" lvl="4" indent="-317500">
               <a:spcBef>
                 <a:spcPts val="1600"/>
               </a:spcBef>
@@ -2952,7 +3054,7 @@
               <a:buChar char="○"/>
               <a:defRPr/>
             </a:lvl5pPr>
-            <a:lvl6pPr indent="-317500" lvl="5" marL="2743200">
+            <a:lvl6pPr marL="2743200" lvl="5" indent="-317500">
               <a:spcBef>
                 <a:spcPts val="1600"/>
               </a:spcBef>
@@ -2963,7 +3065,7 @@
               <a:buChar char="■"/>
               <a:defRPr/>
             </a:lvl6pPr>
-            <a:lvl7pPr indent="-317500" lvl="6" marL="3200400">
+            <a:lvl7pPr marL="3200400" lvl="6" indent="-317500">
               <a:spcBef>
                 <a:spcPts val="1600"/>
               </a:spcBef>
@@ -2974,7 +3076,7 @@
               <a:buChar char="●"/>
               <a:defRPr/>
             </a:lvl7pPr>
-            <a:lvl8pPr indent="-317500" lvl="7" marL="3657600">
+            <a:lvl8pPr marL="3657600" lvl="7" indent="-317500">
               <a:spcBef>
                 <a:spcPts val="1600"/>
               </a:spcBef>
@@ -2985,7 +3087,7 @@
               <a:buChar char="○"/>
               <a:defRPr/>
             </a:lvl8pPr>
-            <a:lvl9pPr indent="-317500" lvl="8" marL="4114800">
+            <a:lvl9pPr marL="4114800" lvl="8" indent="-317500">
               <a:spcBef>
                 <a:spcPts val="1600"/>
               </a:spcBef>
@@ -2997,15 +3099,19 @@
               <a:defRPr/>
             </a:lvl9pPr>
           </a:lstStyle>
-          <a:p/>
+          <a:p>
+            <a:endParaRPr/>
+          </a:p>
         </p:txBody>
       </p:sp>
       <p:sp>
         <p:nvSpPr>
           <p:cNvPr id="19" name="Google Shape;19;p4"/>
-          <p:cNvSpPr txBox="1"/>
+          <p:cNvSpPr txBox="1">
+            <a:spLocks noGrp="1"/>
+          </p:cNvSpPr>
           <p:nvPr>
-            <p:ph idx="12" type="sldNum"/>
+            <p:ph type="sldNum" idx="12"/>
           </p:nvPr>
         </p:nvSpPr>
         <p:spPr>
@@ -3018,7 +3124,7 @@
           </a:prstGeom>
         </p:spPr>
         <p:txBody>
-          <a:bodyPr anchorCtr="0" anchor="ctr" bIns="91425" lIns="91425" spcFirstLastPara="1" rIns="91425" wrap="square" tIns="91425">
+          <a:bodyPr spcFirstLastPara="1" wrap="square" lIns="91425" tIns="91425" rIns="91425" bIns="91425" anchor="ctr" anchorCtr="0">
             <a:noAutofit/>
           </a:bodyPr>
           <a:lstStyle>
@@ -3060,7 +3166,7 @@
             </a:lvl9pPr>
           </a:lstStyle>
           <a:p>
-            <a:pPr indent="0" lvl="0" marL="0" rtl="0" algn="r">
+            <a:pPr marL="0" lvl="0" indent="0" algn="r" rtl="0">
               <a:spcBef>
                 <a:spcPts val="0"/>
               </a:spcBef>
@@ -3086,11 +3192,11 @@
 </file>
 
 <file path=ppt/slideLayouts/slideLayout4.xml><?xml version="1.0" encoding="utf-8"?>
-<p:sldLayout xmlns:a="http://schemas.openxmlformats.org/drawingml/2006/main" xmlns:r="http://schemas.openxmlformats.org/officeDocument/2006/relationships" xmlns:mc="http://schemas.openxmlformats.org/markup-compatibility/2006" xmlns:mv="urn:schemas-microsoft-com:mac:vml" xmlns:p="http://schemas.openxmlformats.org/presentationml/2006/main" xmlns:c="http://schemas.openxmlformats.org/drawingml/2006/chart" xmlns:dgm="http://schemas.openxmlformats.org/drawingml/2006/diagram" xmlns:o="urn:schemas-microsoft-com:office:office" xmlns:v="urn:schemas-microsoft-com:vml" xmlns:pvml="urn:schemas-microsoft-com:office:powerpoint" xmlns:com="http://schemas.openxmlformats.org/drawingml/2006/compatibility" xmlns:p14="http://schemas.microsoft.com/office/powerpoint/2010/main" xmlns:p15="http://schemas.microsoft.com/office/powerpoint/2012/main" xmlns:ahyp="http://schemas.microsoft.com/office/drawing/2018/hyperlinkcolor" matchingName="Title and two columns" type="twoColTx">
+<p:sldLayout xmlns:a="http://schemas.openxmlformats.org/drawingml/2006/main" xmlns:r="http://schemas.openxmlformats.org/officeDocument/2006/relationships" xmlns:p="http://schemas.openxmlformats.org/presentationml/2006/main" matchingName="Title and two columns" type="twoColTx">
   <p:cSld name="TITLE_AND_TWO_COLUMNS">
     <p:spTree>
       <p:nvGrpSpPr>
-        <p:cNvPr id="20" name="Shape 20"/>
+        <p:cNvPr id="1" name="Shape 20"/>
         <p:cNvGrpSpPr/>
         <p:nvPr/>
       </p:nvGrpSpPr>
@@ -3105,7 +3211,9 @@
       <p:sp>
         <p:nvSpPr>
           <p:cNvPr id="21" name="Google Shape;21;p5"/>
-          <p:cNvSpPr txBox="1"/>
+          <p:cNvSpPr txBox="1">
+            <a:spLocks noGrp="1"/>
+          </p:cNvSpPr>
           <p:nvPr>
             <p:ph type="title"/>
           </p:nvPr>
@@ -3120,7 +3228,7 @@
           </a:prstGeom>
         </p:spPr>
         <p:txBody>
-          <a:bodyPr anchorCtr="0" anchor="t" bIns="91425" lIns="91425" spcFirstLastPara="1" rIns="91425" wrap="square" tIns="91425">
+          <a:bodyPr spcFirstLastPara="1" wrap="square" lIns="91425" tIns="91425" rIns="91425" bIns="91425" anchor="t" anchorCtr="0">
             <a:noAutofit/>
           </a:bodyPr>
           <a:lstStyle>
@@ -3224,15 +3332,19 @@
               <a:defRPr/>
             </a:lvl9pPr>
           </a:lstStyle>
-          <a:p/>
+          <a:p>
+            <a:endParaRPr/>
+          </a:p>
         </p:txBody>
       </p:sp>
       <p:sp>
         <p:nvSpPr>
           <p:cNvPr id="22" name="Google Shape;22;p5"/>
-          <p:cNvSpPr txBox="1"/>
+          <p:cNvSpPr txBox="1">
+            <a:spLocks noGrp="1"/>
+          </p:cNvSpPr>
           <p:nvPr>
-            <p:ph idx="1" type="body"/>
+            <p:ph type="body" idx="1"/>
           </p:nvPr>
         </p:nvSpPr>
         <p:spPr>
@@ -3245,11 +3357,11 @@
           </a:prstGeom>
         </p:spPr>
         <p:txBody>
-          <a:bodyPr anchorCtr="0" anchor="t" bIns="91425" lIns="91425" spcFirstLastPara="1" rIns="91425" wrap="square" tIns="91425">
+          <a:bodyPr spcFirstLastPara="1" wrap="square" lIns="91425" tIns="91425" rIns="91425" bIns="91425" anchor="t" anchorCtr="0">
             <a:noAutofit/>
           </a:bodyPr>
           <a:lstStyle>
-            <a:lvl1pPr indent="-317500" lvl="0" marL="457200">
+            <a:lvl1pPr marL="457200" lvl="0" indent="-317500">
               <a:spcBef>
                 <a:spcPts val="0"/>
               </a:spcBef>
@@ -3260,7 +3372,7 @@
               <a:buChar char="●"/>
               <a:defRPr sz="1400"/>
             </a:lvl1pPr>
-            <a:lvl2pPr indent="-304800" lvl="1" marL="914400">
+            <a:lvl2pPr marL="914400" lvl="1" indent="-304800">
               <a:spcBef>
                 <a:spcPts val="1600"/>
               </a:spcBef>
@@ -3271,7 +3383,7 @@
               <a:buChar char="○"/>
               <a:defRPr sz="1200"/>
             </a:lvl2pPr>
-            <a:lvl3pPr indent="-304800" lvl="2" marL="1371600">
+            <a:lvl3pPr marL="1371600" lvl="2" indent="-304800">
               <a:spcBef>
                 <a:spcPts val="1600"/>
               </a:spcBef>
@@ -3282,7 +3394,7 @@
               <a:buChar char="■"/>
               <a:defRPr sz="1200"/>
             </a:lvl3pPr>
-            <a:lvl4pPr indent="-304800" lvl="3" marL="1828800">
+            <a:lvl4pPr marL="1828800" lvl="3" indent="-304800">
               <a:spcBef>
                 <a:spcPts val="1600"/>
               </a:spcBef>
@@ -3293,7 +3405,7 @@
               <a:buChar char="●"/>
               <a:defRPr sz="1200"/>
             </a:lvl4pPr>
-            <a:lvl5pPr indent="-304800" lvl="4" marL="2286000">
+            <a:lvl5pPr marL="2286000" lvl="4" indent="-304800">
               <a:spcBef>
                 <a:spcPts val="1600"/>
               </a:spcBef>
@@ -3304,7 +3416,7 @@
               <a:buChar char="○"/>
               <a:defRPr sz="1200"/>
             </a:lvl5pPr>
-            <a:lvl6pPr indent="-304800" lvl="5" marL="2743200">
+            <a:lvl6pPr marL="2743200" lvl="5" indent="-304800">
               <a:spcBef>
                 <a:spcPts val="1600"/>
               </a:spcBef>
@@ -3315,7 +3427,7 @@
               <a:buChar char="■"/>
               <a:defRPr sz="1200"/>
             </a:lvl6pPr>
-            <a:lvl7pPr indent="-304800" lvl="6" marL="3200400">
+            <a:lvl7pPr marL="3200400" lvl="6" indent="-304800">
               <a:spcBef>
                 <a:spcPts val="1600"/>
               </a:spcBef>
@@ -3326,7 +3438,7 @@
               <a:buChar char="●"/>
               <a:defRPr sz="1200"/>
             </a:lvl7pPr>
-            <a:lvl8pPr indent="-304800" lvl="7" marL="3657600">
+            <a:lvl8pPr marL="3657600" lvl="7" indent="-304800">
               <a:spcBef>
                 <a:spcPts val="1600"/>
               </a:spcBef>
@@ -3337,7 +3449,7 @@
               <a:buChar char="○"/>
               <a:defRPr sz="1200"/>
             </a:lvl8pPr>
-            <a:lvl9pPr indent="-304800" lvl="8" marL="4114800">
+            <a:lvl9pPr marL="4114800" lvl="8" indent="-304800">
               <a:spcBef>
                 <a:spcPts val="1600"/>
               </a:spcBef>
@@ -3349,15 +3461,19 @@
               <a:defRPr sz="1200"/>
             </a:lvl9pPr>
           </a:lstStyle>
-          <a:p/>
+          <a:p>
+            <a:endParaRPr/>
+          </a:p>
         </p:txBody>
       </p:sp>
       <p:sp>
         <p:nvSpPr>
           <p:cNvPr id="23" name="Google Shape;23;p5"/>
-          <p:cNvSpPr txBox="1"/>
+          <p:cNvSpPr txBox="1">
+            <a:spLocks noGrp="1"/>
+          </p:cNvSpPr>
           <p:nvPr>
-            <p:ph idx="2" type="body"/>
+            <p:ph type="body" idx="2"/>
           </p:nvPr>
         </p:nvSpPr>
         <p:spPr>
@@ -3370,11 +3486,11 @@
           </a:prstGeom>
         </p:spPr>
         <p:txBody>
-          <a:bodyPr anchorCtr="0" anchor="t" bIns="91425" lIns="91425" spcFirstLastPara="1" rIns="91425" wrap="square" tIns="91425">
+          <a:bodyPr spcFirstLastPara="1" wrap="square" lIns="91425" tIns="91425" rIns="91425" bIns="91425" anchor="t" anchorCtr="0">
             <a:noAutofit/>
           </a:bodyPr>
           <a:lstStyle>
-            <a:lvl1pPr indent="-317500" lvl="0" marL="457200">
+            <a:lvl1pPr marL="457200" lvl="0" indent="-317500">
               <a:spcBef>
                 <a:spcPts val="0"/>
               </a:spcBef>
@@ -3385,7 +3501,7 @@
               <a:buChar char="●"/>
               <a:defRPr sz="1400"/>
             </a:lvl1pPr>
-            <a:lvl2pPr indent="-304800" lvl="1" marL="914400">
+            <a:lvl2pPr marL="914400" lvl="1" indent="-304800">
               <a:spcBef>
                 <a:spcPts val="1600"/>
               </a:spcBef>
@@ -3396,7 +3512,7 @@
               <a:buChar char="○"/>
               <a:defRPr sz="1200"/>
             </a:lvl2pPr>
-            <a:lvl3pPr indent="-304800" lvl="2" marL="1371600">
+            <a:lvl3pPr marL="1371600" lvl="2" indent="-304800">
               <a:spcBef>
                 <a:spcPts val="1600"/>
               </a:spcBef>
@@ -3407,7 +3523,7 @@
               <a:buChar char="■"/>
               <a:defRPr sz="1200"/>
             </a:lvl3pPr>
-            <a:lvl4pPr indent="-304800" lvl="3" marL="1828800">
+            <a:lvl4pPr marL="1828800" lvl="3" indent="-304800">
               <a:spcBef>
                 <a:spcPts val="1600"/>
               </a:spcBef>
@@ -3418,7 +3534,7 @@
               <a:buChar char="●"/>
               <a:defRPr sz="1200"/>
             </a:lvl4pPr>
-            <a:lvl5pPr indent="-304800" lvl="4" marL="2286000">
+            <a:lvl5pPr marL="2286000" lvl="4" indent="-304800">
               <a:spcBef>
                 <a:spcPts val="1600"/>
               </a:spcBef>
@@ -3429,7 +3545,7 @@
               <a:buChar char="○"/>
               <a:defRPr sz="1200"/>
             </a:lvl5pPr>
-            <a:lvl6pPr indent="-304800" lvl="5" marL="2743200">
+            <a:lvl6pPr marL="2743200" lvl="5" indent="-304800">
               <a:spcBef>
                 <a:spcPts val="1600"/>
               </a:spcBef>
@@ -3440,7 +3556,7 @@
               <a:buChar char="■"/>
               <a:defRPr sz="1200"/>
             </a:lvl6pPr>
-            <a:lvl7pPr indent="-304800" lvl="6" marL="3200400">
+            <a:lvl7pPr marL="3200400" lvl="6" indent="-304800">
               <a:spcBef>
                 <a:spcPts val="1600"/>
               </a:spcBef>
@@ -3451,7 +3567,7 @@
               <a:buChar char="●"/>
               <a:defRPr sz="1200"/>
             </a:lvl7pPr>
-            <a:lvl8pPr indent="-304800" lvl="7" marL="3657600">
+            <a:lvl8pPr marL="3657600" lvl="7" indent="-304800">
               <a:spcBef>
                 <a:spcPts val="1600"/>
               </a:spcBef>
@@ -3462,7 +3578,7 @@
               <a:buChar char="○"/>
               <a:defRPr sz="1200"/>
             </a:lvl8pPr>
-            <a:lvl9pPr indent="-304800" lvl="8" marL="4114800">
+            <a:lvl9pPr marL="4114800" lvl="8" indent="-304800">
               <a:spcBef>
                 <a:spcPts val="1600"/>
               </a:spcBef>
@@ -3474,15 +3590,19 @@
               <a:defRPr sz="1200"/>
             </a:lvl9pPr>
           </a:lstStyle>
-          <a:p/>
+          <a:p>
+            <a:endParaRPr/>
+          </a:p>
         </p:txBody>
       </p:sp>
       <p:sp>
         <p:nvSpPr>
           <p:cNvPr id="24" name="Google Shape;24;p5"/>
-          <p:cNvSpPr txBox="1"/>
+          <p:cNvSpPr txBox="1">
+            <a:spLocks noGrp="1"/>
+          </p:cNvSpPr>
           <p:nvPr>
-            <p:ph idx="12" type="sldNum"/>
+            <p:ph type="sldNum" idx="12"/>
           </p:nvPr>
         </p:nvSpPr>
         <p:spPr>
@@ -3495,7 +3615,7 @@
           </a:prstGeom>
         </p:spPr>
         <p:txBody>
-          <a:bodyPr anchorCtr="0" anchor="ctr" bIns="91425" lIns="91425" spcFirstLastPara="1" rIns="91425" wrap="square" tIns="91425">
+          <a:bodyPr spcFirstLastPara="1" wrap="square" lIns="91425" tIns="91425" rIns="91425" bIns="91425" anchor="ctr" anchorCtr="0">
             <a:noAutofit/>
           </a:bodyPr>
           <a:lstStyle>
@@ -3537,7 +3657,7 @@
             </a:lvl9pPr>
           </a:lstStyle>
           <a:p>
-            <a:pPr indent="0" lvl="0" marL="0" rtl="0" algn="r">
+            <a:pPr marL="0" lvl="0" indent="0" algn="r" rtl="0">
               <a:spcBef>
                 <a:spcPts val="0"/>
               </a:spcBef>
@@ -3563,11 +3683,11 @@
 </file>
 
 <file path=ppt/slideLayouts/slideLayout5.xml><?xml version="1.0" encoding="utf-8"?>
-<p:sldLayout xmlns:a="http://schemas.openxmlformats.org/drawingml/2006/main" xmlns:r="http://schemas.openxmlformats.org/officeDocument/2006/relationships" xmlns:mc="http://schemas.openxmlformats.org/markup-compatibility/2006" xmlns:mv="urn:schemas-microsoft-com:mac:vml" xmlns:p="http://schemas.openxmlformats.org/presentationml/2006/main" xmlns:c="http://schemas.openxmlformats.org/drawingml/2006/chart" xmlns:dgm="http://schemas.openxmlformats.org/drawingml/2006/diagram" xmlns:o="urn:schemas-microsoft-com:office:office" xmlns:v="urn:schemas-microsoft-com:vml" xmlns:pvml="urn:schemas-microsoft-com:office:powerpoint" xmlns:com="http://schemas.openxmlformats.org/drawingml/2006/compatibility" xmlns:p14="http://schemas.microsoft.com/office/powerpoint/2010/main" xmlns:p15="http://schemas.microsoft.com/office/powerpoint/2012/main" xmlns:ahyp="http://schemas.microsoft.com/office/drawing/2018/hyperlinkcolor" matchingName="Title only" type="titleOnly">
+<p:sldLayout xmlns:a="http://schemas.openxmlformats.org/drawingml/2006/main" xmlns:r="http://schemas.openxmlformats.org/officeDocument/2006/relationships" xmlns:p="http://schemas.openxmlformats.org/presentationml/2006/main" matchingName="Title only" type="titleOnly">
   <p:cSld name="TITLE_ONLY">
     <p:spTree>
       <p:nvGrpSpPr>
-        <p:cNvPr id="25" name="Shape 25"/>
+        <p:cNvPr id="1" name="Shape 25"/>
         <p:cNvGrpSpPr/>
         <p:nvPr/>
       </p:nvGrpSpPr>
@@ -3582,7 +3702,9 @@
       <p:sp>
         <p:nvSpPr>
           <p:cNvPr id="26" name="Google Shape;26;p6"/>
-          <p:cNvSpPr txBox="1"/>
+          <p:cNvSpPr txBox="1">
+            <a:spLocks noGrp="1"/>
+          </p:cNvSpPr>
           <p:nvPr>
             <p:ph type="title"/>
           </p:nvPr>
@@ -3597,7 +3719,7 @@
           </a:prstGeom>
         </p:spPr>
         <p:txBody>
-          <a:bodyPr anchorCtr="0" anchor="t" bIns="91425" lIns="91425" spcFirstLastPara="1" rIns="91425" wrap="square" tIns="91425">
+          <a:bodyPr spcFirstLastPara="1" wrap="square" lIns="91425" tIns="91425" rIns="91425" bIns="91425" anchor="t" anchorCtr="0">
             <a:noAutofit/>
           </a:bodyPr>
           <a:lstStyle>
@@ -3701,15 +3823,19 @@
               <a:defRPr/>
             </a:lvl9pPr>
           </a:lstStyle>
-          <a:p/>
+          <a:p>
+            <a:endParaRPr/>
+          </a:p>
         </p:txBody>
       </p:sp>
       <p:sp>
         <p:nvSpPr>
           <p:cNvPr id="27" name="Google Shape;27;p6"/>
-          <p:cNvSpPr txBox="1"/>
+          <p:cNvSpPr txBox="1">
+            <a:spLocks noGrp="1"/>
+          </p:cNvSpPr>
           <p:nvPr>
-            <p:ph idx="12" type="sldNum"/>
+            <p:ph type="sldNum" idx="12"/>
           </p:nvPr>
         </p:nvSpPr>
         <p:spPr>
@@ -3722,7 +3848,7 @@
           </a:prstGeom>
         </p:spPr>
         <p:txBody>
-          <a:bodyPr anchorCtr="0" anchor="ctr" bIns="91425" lIns="91425" spcFirstLastPara="1" rIns="91425" wrap="square" tIns="91425">
+          <a:bodyPr spcFirstLastPara="1" wrap="square" lIns="91425" tIns="91425" rIns="91425" bIns="91425" anchor="ctr" anchorCtr="0">
             <a:noAutofit/>
           </a:bodyPr>
           <a:lstStyle>
@@ -3764,7 +3890,7 @@
             </a:lvl9pPr>
           </a:lstStyle>
           <a:p>
-            <a:pPr indent="0" lvl="0" marL="0" rtl="0" algn="r">
+            <a:pPr marL="0" lvl="0" indent="0" algn="r" rtl="0">
               <a:spcBef>
                 <a:spcPts val="0"/>
               </a:spcBef>
@@ -3790,11 +3916,11 @@
 </file>
 
 <file path=ppt/slideLayouts/slideLayout6.xml><?xml version="1.0" encoding="utf-8"?>
-<p:sldLayout xmlns:a="http://schemas.openxmlformats.org/drawingml/2006/main" xmlns:r="http://schemas.openxmlformats.org/officeDocument/2006/relationships" xmlns:mc="http://schemas.openxmlformats.org/markup-compatibility/2006" xmlns:mv="urn:schemas-microsoft-com:mac:vml" xmlns:p="http://schemas.openxmlformats.org/presentationml/2006/main" xmlns:c="http://schemas.openxmlformats.org/drawingml/2006/chart" xmlns:dgm="http://schemas.openxmlformats.org/drawingml/2006/diagram" xmlns:o="urn:schemas-microsoft-com:office:office" xmlns:v="urn:schemas-microsoft-com:vml" xmlns:pvml="urn:schemas-microsoft-com:office:powerpoint" xmlns:com="http://schemas.openxmlformats.org/drawingml/2006/compatibility" xmlns:p14="http://schemas.microsoft.com/office/powerpoint/2010/main" xmlns:p15="http://schemas.microsoft.com/office/powerpoint/2012/main" xmlns:ahyp="http://schemas.microsoft.com/office/drawing/2018/hyperlinkcolor" matchingName="One column text">
+<p:sldLayout xmlns:a="http://schemas.openxmlformats.org/drawingml/2006/main" xmlns:r="http://schemas.openxmlformats.org/officeDocument/2006/relationships" xmlns:p="http://schemas.openxmlformats.org/presentationml/2006/main" matchingName="One column text">
   <p:cSld name="ONE_COLUMN_TEXT">
     <p:spTree>
       <p:nvGrpSpPr>
-        <p:cNvPr id="28" name="Shape 28"/>
+        <p:cNvPr id="1" name="Shape 28"/>
         <p:cNvGrpSpPr/>
         <p:nvPr/>
       </p:nvGrpSpPr>
@@ -3809,7 +3935,9 @@
       <p:sp>
         <p:nvSpPr>
           <p:cNvPr id="29" name="Google Shape;29;p7"/>
-          <p:cNvSpPr txBox="1"/>
+          <p:cNvSpPr txBox="1">
+            <a:spLocks noGrp="1"/>
+          </p:cNvSpPr>
           <p:nvPr>
             <p:ph type="title"/>
           </p:nvPr>
@@ -3824,7 +3952,7 @@
           </a:prstGeom>
         </p:spPr>
         <p:txBody>
-          <a:bodyPr anchorCtr="0" anchor="b" bIns="91425" lIns="91425" spcFirstLastPara="1" rIns="91425" wrap="square" tIns="91425">
+          <a:bodyPr spcFirstLastPara="1" wrap="square" lIns="91425" tIns="91425" rIns="91425" bIns="91425" anchor="b" anchorCtr="0">
             <a:noAutofit/>
           </a:bodyPr>
           <a:lstStyle>
@@ -3928,15 +4056,19 @@
               <a:defRPr sz="2400"/>
             </a:lvl9pPr>
           </a:lstStyle>
-          <a:p/>
+          <a:p>
+            <a:endParaRPr/>
+          </a:p>
         </p:txBody>
       </p:sp>
       <p:sp>
         <p:nvSpPr>
           <p:cNvPr id="30" name="Google Shape;30;p7"/>
-          <p:cNvSpPr txBox="1"/>
+          <p:cNvSpPr txBox="1">
+            <a:spLocks noGrp="1"/>
+          </p:cNvSpPr>
           <p:nvPr>
-            <p:ph idx="1" type="body"/>
+            <p:ph type="body" idx="1"/>
           </p:nvPr>
         </p:nvSpPr>
         <p:spPr>
@@ -3949,11 +4081,11 @@
           </a:prstGeom>
         </p:spPr>
         <p:txBody>
-          <a:bodyPr anchorCtr="0" anchor="t" bIns="91425" lIns="91425" spcFirstLastPara="1" rIns="91425" wrap="square" tIns="91425">
+          <a:bodyPr spcFirstLastPara="1" wrap="square" lIns="91425" tIns="91425" rIns="91425" bIns="91425" anchor="t" anchorCtr="0">
             <a:noAutofit/>
           </a:bodyPr>
           <a:lstStyle>
-            <a:lvl1pPr indent="-304800" lvl="0" marL="457200">
+            <a:lvl1pPr marL="457200" lvl="0" indent="-304800">
               <a:spcBef>
                 <a:spcPts val="0"/>
               </a:spcBef>
@@ -3964,7 +4096,7 @@
               <a:buChar char="●"/>
               <a:defRPr sz="1200"/>
             </a:lvl1pPr>
-            <a:lvl2pPr indent="-304800" lvl="1" marL="914400">
+            <a:lvl2pPr marL="914400" lvl="1" indent="-304800">
               <a:spcBef>
                 <a:spcPts val="1600"/>
               </a:spcBef>
@@ -3975,7 +4107,7 @@
               <a:buChar char="○"/>
               <a:defRPr sz="1200"/>
             </a:lvl2pPr>
-            <a:lvl3pPr indent="-304800" lvl="2" marL="1371600">
+            <a:lvl3pPr marL="1371600" lvl="2" indent="-304800">
               <a:spcBef>
                 <a:spcPts val="1600"/>
               </a:spcBef>
@@ -3986,7 +4118,7 @@
               <a:buChar char="■"/>
               <a:defRPr sz="1200"/>
             </a:lvl3pPr>
-            <a:lvl4pPr indent="-304800" lvl="3" marL="1828800">
+            <a:lvl4pPr marL="1828800" lvl="3" indent="-304800">
               <a:spcBef>
                 <a:spcPts val="1600"/>
               </a:spcBef>
@@ -3997,7 +4129,7 @@
               <a:buChar char="●"/>
               <a:defRPr sz="1200"/>
             </a:lvl4pPr>
-            <a:lvl5pPr indent="-304800" lvl="4" marL="2286000">
+            <a:lvl5pPr marL="2286000" lvl="4" indent="-304800">
               <a:spcBef>
                 <a:spcPts val="1600"/>
               </a:spcBef>
@@ -4008,7 +4140,7 @@
               <a:buChar char="○"/>
               <a:defRPr sz="1200"/>
             </a:lvl5pPr>
-            <a:lvl6pPr indent="-304800" lvl="5" marL="2743200">
+            <a:lvl6pPr marL="2743200" lvl="5" indent="-304800">
               <a:spcBef>
                 <a:spcPts val="1600"/>
               </a:spcBef>
@@ -4019,7 +4151,7 @@
               <a:buChar char="■"/>
               <a:defRPr sz="1200"/>
             </a:lvl6pPr>
-            <a:lvl7pPr indent="-304800" lvl="6" marL="3200400">
+            <a:lvl7pPr marL="3200400" lvl="6" indent="-304800">
               <a:spcBef>
                 <a:spcPts val="1600"/>
               </a:spcBef>
@@ -4030,7 +4162,7 @@
               <a:buChar char="●"/>
               <a:defRPr sz="1200"/>
             </a:lvl7pPr>
-            <a:lvl8pPr indent="-304800" lvl="7" marL="3657600">
+            <a:lvl8pPr marL="3657600" lvl="7" indent="-304800">
               <a:spcBef>
                 <a:spcPts val="1600"/>
               </a:spcBef>
@@ -4041,7 +4173,7 @@
               <a:buChar char="○"/>
               <a:defRPr sz="1200"/>
             </a:lvl8pPr>
-            <a:lvl9pPr indent="-304800" lvl="8" marL="4114800">
+            <a:lvl9pPr marL="4114800" lvl="8" indent="-304800">
               <a:spcBef>
                 <a:spcPts val="1600"/>
               </a:spcBef>
@@ -4053,15 +4185,19 @@
               <a:defRPr sz="1200"/>
             </a:lvl9pPr>
           </a:lstStyle>
-          <a:p/>
+          <a:p>
+            <a:endParaRPr/>
+          </a:p>
         </p:txBody>
       </p:sp>
       <p:sp>
         <p:nvSpPr>
           <p:cNvPr id="31" name="Google Shape;31;p7"/>
-          <p:cNvSpPr txBox="1"/>
+          <p:cNvSpPr txBox="1">
+            <a:spLocks noGrp="1"/>
+          </p:cNvSpPr>
           <p:nvPr>
-            <p:ph idx="12" type="sldNum"/>
+            <p:ph type="sldNum" idx="12"/>
           </p:nvPr>
         </p:nvSpPr>
         <p:spPr>
@@ -4074,7 +4210,7 @@
           </a:prstGeom>
         </p:spPr>
         <p:txBody>
-          <a:bodyPr anchorCtr="0" anchor="ctr" bIns="91425" lIns="91425" spcFirstLastPara="1" rIns="91425" wrap="square" tIns="91425">
+          <a:bodyPr spcFirstLastPara="1" wrap="square" lIns="91425" tIns="91425" rIns="91425" bIns="91425" anchor="ctr" anchorCtr="0">
             <a:noAutofit/>
           </a:bodyPr>
           <a:lstStyle>
@@ -4116,7 +4252,7 @@
             </a:lvl9pPr>
           </a:lstStyle>
           <a:p>
-            <a:pPr indent="0" lvl="0" marL="0" rtl="0" algn="r">
+            <a:pPr marL="0" lvl="0" indent="0" algn="r" rtl="0">
               <a:spcBef>
                 <a:spcPts val="0"/>
               </a:spcBef>
@@ -4142,11 +4278,11 @@
 </file>
 
 <file path=ppt/slideLayouts/slideLayout7.xml><?xml version="1.0" encoding="utf-8"?>
-<p:sldLayout xmlns:a="http://schemas.openxmlformats.org/drawingml/2006/main" xmlns:r="http://schemas.openxmlformats.org/officeDocument/2006/relationships" xmlns:mc="http://schemas.openxmlformats.org/markup-compatibility/2006" xmlns:mv="urn:schemas-microsoft-com:mac:vml" xmlns:p="http://schemas.openxmlformats.org/presentationml/2006/main" xmlns:c="http://schemas.openxmlformats.org/drawingml/2006/chart" xmlns:dgm="http://schemas.openxmlformats.org/drawingml/2006/diagram" xmlns:o="urn:schemas-microsoft-com:office:office" xmlns:v="urn:schemas-microsoft-com:vml" xmlns:pvml="urn:schemas-microsoft-com:office:powerpoint" xmlns:com="http://schemas.openxmlformats.org/drawingml/2006/compatibility" xmlns:p14="http://schemas.microsoft.com/office/powerpoint/2010/main" xmlns:p15="http://schemas.microsoft.com/office/powerpoint/2012/main" xmlns:ahyp="http://schemas.microsoft.com/office/drawing/2018/hyperlinkcolor" matchingName="Main point">
+<p:sldLayout xmlns:a="http://schemas.openxmlformats.org/drawingml/2006/main" xmlns:r="http://schemas.openxmlformats.org/officeDocument/2006/relationships" xmlns:p="http://schemas.openxmlformats.org/presentationml/2006/main" matchingName="Main point">
   <p:cSld name="MAIN_POINT">
     <p:spTree>
       <p:nvGrpSpPr>
-        <p:cNvPr id="32" name="Shape 32"/>
+        <p:cNvPr id="1" name="Shape 32"/>
         <p:cNvGrpSpPr/>
         <p:nvPr/>
       </p:nvGrpSpPr>
@@ -4161,7 +4297,9 @@
       <p:sp>
         <p:nvSpPr>
           <p:cNvPr id="33" name="Google Shape;33;p8"/>
-          <p:cNvSpPr txBox="1"/>
+          <p:cNvSpPr txBox="1">
+            <a:spLocks noGrp="1"/>
+          </p:cNvSpPr>
           <p:nvPr>
             <p:ph type="title"/>
           </p:nvPr>
@@ -4176,7 +4314,7 @@
           </a:prstGeom>
         </p:spPr>
         <p:txBody>
-          <a:bodyPr anchorCtr="0" anchor="ctr" bIns="91425" lIns="91425" spcFirstLastPara="1" rIns="91425" wrap="square" tIns="91425">
+          <a:bodyPr spcFirstLastPara="1" wrap="square" lIns="91425" tIns="91425" rIns="91425" bIns="91425" anchor="ctr" anchorCtr="0">
             <a:noAutofit/>
           </a:bodyPr>
           <a:lstStyle>
@@ -4280,15 +4418,19 @@
               <a:defRPr sz="4800"/>
             </a:lvl9pPr>
           </a:lstStyle>
-          <a:p/>
+          <a:p>
+            <a:endParaRPr/>
+          </a:p>
         </p:txBody>
       </p:sp>
       <p:sp>
         <p:nvSpPr>
           <p:cNvPr id="34" name="Google Shape;34;p8"/>
-          <p:cNvSpPr txBox="1"/>
+          <p:cNvSpPr txBox="1">
+            <a:spLocks noGrp="1"/>
+          </p:cNvSpPr>
           <p:nvPr>
-            <p:ph idx="12" type="sldNum"/>
+            <p:ph type="sldNum" idx="12"/>
           </p:nvPr>
         </p:nvSpPr>
         <p:spPr>
@@ -4301,7 +4443,7 @@
           </a:prstGeom>
         </p:spPr>
         <p:txBody>
-          <a:bodyPr anchorCtr="0" anchor="ctr" bIns="91425" lIns="91425" spcFirstLastPara="1" rIns="91425" wrap="square" tIns="91425">
+          <a:bodyPr spcFirstLastPara="1" wrap="square" lIns="91425" tIns="91425" rIns="91425" bIns="91425" anchor="ctr" anchorCtr="0">
             <a:noAutofit/>
           </a:bodyPr>
           <a:lstStyle>
@@ -4343,7 +4485,7 @@
             </a:lvl9pPr>
           </a:lstStyle>
           <a:p>
-            <a:pPr indent="0" lvl="0" marL="0" rtl="0" algn="r">
+            <a:pPr marL="0" lvl="0" indent="0" algn="r" rtl="0">
               <a:spcBef>
                 <a:spcPts val="0"/>
               </a:spcBef>
@@ -4369,11 +4511,11 @@
 </file>
 
 <file path=ppt/slideLayouts/slideLayout8.xml><?xml version="1.0" encoding="utf-8"?>
-<p:sldLayout xmlns:a="http://schemas.openxmlformats.org/drawingml/2006/main" xmlns:r="http://schemas.openxmlformats.org/officeDocument/2006/relationships" xmlns:mc="http://schemas.openxmlformats.org/markup-compatibility/2006" xmlns:mv="urn:schemas-microsoft-com:mac:vml" xmlns:p="http://schemas.openxmlformats.org/presentationml/2006/main" xmlns:c="http://schemas.openxmlformats.org/drawingml/2006/chart" xmlns:dgm="http://schemas.openxmlformats.org/drawingml/2006/diagram" xmlns:o="urn:schemas-microsoft-com:office:office" xmlns:v="urn:schemas-microsoft-com:vml" xmlns:pvml="urn:schemas-microsoft-com:office:powerpoint" xmlns:com="http://schemas.openxmlformats.org/drawingml/2006/compatibility" xmlns:p14="http://schemas.microsoft.com/office/powerpoint/2010/main" xmlns:p15="http://schemas.microsoft.com/office/powerpoint/2012/main" xmlns:ahyp="http://schemas.microsoft.com/office/drawing/2018/hyperlinkcolor" matchingName="Section title and description">
+<p:sldLayout xmlns:a="http://schemas.openxmlformats.org/drawingml/2006/main" xmlns:r="http://schemas.openxmlformats.org/officeDocument/2006/relationships" xmlns:p="http://schemas.openxmlformats.org/presentationml/2006/main" matchingName="Section title and description">
   <p:cSld name="SECTION_TITLE_AND_DESCRIPTION">
     <p:spTree>
       <p:nvGrpSpPr>
-        <p:cNvPr id="35" name="Shape 35"/>
+        <p:cNvPr id="1" name="Shape 35"/>
         <p:cNvGrpSpPr/>
         <p:nvPr/>
       </p:nvGrpSpPr>
@@ -4407,23 +4549,20 @@
           </a:ln>
         </p:spPr>
         <p:txBody>
-          <a:bodyPr anchorCtr="0" anchor="ctr" bIns="91425" lIns="91425" spcFirstLastPara="1" rIns="91425" wrap="square" tIns="91425">
+          <a:bodyPr spcFirstLastPara="1" wrap="square" lIns="91425" tIns="91425" rIns="91425" bIns="91425" anchor="ctr" anchorCtr="0">
             <a:noAutofit/>
           </a:bodyPr>
           <a:lstStyle/>
           <a:p>
-            <a:pPr indent="0" lvl="0" marL="0" rtl="0" algn="l">
-              <a:spcBef>
-                <a:spcPts val="0"/>
-              </a:spcBef>
-              <a:spcAft>
-                <a:spcPts val="0"/>
-              </a:spcAft>
-              <a:buNone/>
-            </a:pPr>
-            <a:r>
-              <a:t/>
-            </a:r>
+            <a:pPr marL="0" lvl="0" indent="0" algn="l" rtl="0">
+              <a:spcBef>
+                <a:spcPts val="0"/>
+              </a:spcBef>
+              <a:spcAft>
+                <a:spcPts val="0"/>
+              </a:spcAft>
+              <a:buNone/>
+            </a:pPr>
             <a:endParaRPr/>
           </a:p>
         </p:txBody>
@@ -4431,7 +4570,9 @@
       <p:sp>
         <p:nvSpPr>
           <p:cNvPr id="37" name="Google Shape;37;p9"/>
-          <p:cNvSpPr txBox="1"/>
+          <p:cNvSpPr txBox="1">
+            <a:spLocks noGrp="1"/>
+          </p:cNvSpPr>
           <p:nvPr>
             <p:ph type="title"/>
           </p:nvPr>
@@ -4446,7 +4587,7 @@
           </a:prstGeom>
         </p:spPr>
         <p:txBody>
-          <a:bodyPr anchorCtr="0" anchor="b" bIns="91425" lIns="91425" spcFirstLastPara="1" rIns="91425" wrap="square" tIns="91425">
+          <a:bodyPr spcFirstLastPara="1" wrap="square" lIns="91425" tIns="91425" rIns="91425" bIns="91425" anchor="b" anchorCtr="0">
             <a:noAutofit/>
           </a:bodyPr>
           <a:lstStyle>
@@ -4550,15 +4691,19 @@
               <a:defRPr sz="4200"/>
             </a:lvl9pPr>
           </a:lstStyle>
-          <a:p/>
+          <a:p>
+            <a:endParaRPr/>
+          </a:p>
         </p:txBody>
       </p:sp>
       <p:sp>
         <p:nvSpPr>
           <p:cNvPr id="38" name="Google Shape;38;p9"/>
-          <p:cNvSpPr txBox="1"/>
+          <p:cNvSpPr txBox="1">
+            <a:spLocks noGrp="1"/>
+          </p:cNvSpPr>
           <p:nvPr>
-            <p:ph idx="1" type="subTitle"/>
+            <p:ph type="subTitle" idx="1"/>
           </p:nvPr>
         </p:nvSpPr>
         <p:spPr>
@@ -4571,7 +4716,7 @@
           </a:prstGeom>
         </p:spPr>
         <p:txBody>
-          <a:bodyPr anchorCtr="0" anchor="t" bIns="91425" lIns="91425" spcFirstLastPara="1" rIns="91425" wrap="square" tIns="91425">
+          <a:bodyPr spcFirstLastPara="1" wrap="square" lIns="91425" tIns="91425" rIns="91425" bIns="91425" anchor="t" anchorCtr="0">
             <a:noAutofit/>
           </a:bodyPr>
           <a:lstStyle>
@@ -4702,15 +4847,19 @@
               <a:defRPr sz="2100"/>
             </a:lvl9pPr>
           </a:lstStyle>
-          <a:p/>
+          <a:p>
+            <a:endParaRPr/>
+          </a:p>
         </p:txBody>
       </p:sp>
       <p:sp>
         <p:nvSpPr>
           <p:cNvPr id="39" name="Google Shape;39;p9"/>
-          <p:cNvSpPr txBox="1"/>
+          <p:cNvSpPr txBox="1">
+            <a:spLocks noGrp="1"/>
+          </p:cNvSpPr>
           <p:nvPr>
-            <p:ph idx="2" type="body"/>
+            <p:ph type="body" idx="2"/>
           </p:nvPr>
         </p:nvSpPr>
         <p:spPr>
@@ -4723,11 +4872,11 @@
           </a:prstGeom>
         </p:spPr>
         <p:txBody>
-          <a:bodyPr anchorCtr="0" anchor="ctr" bIns="91425" lIns="91425" spcFirstLastPara="1" rIns="91425" wrap="square" tIns="91425">
+          <a:bodyPr spcFirstLastPara="1" wrap="square" lIns="91425" tIns="91425" rIns="91425" bIns="91425" anchor="ctr" anchorCtr="0">
             <a:noAutofit/>
           </a:bodyPr>
           <a:lstStyle>
-            <a:lvl1pPr indent="-342900" lvl="0" marL="457200">
+            <a:lvl1pPr marL="457200" lvl="0" indent="-342900">
               <a:spcBef>
                 <a:spcPts val="0"/>
               </a:spcBef>
@@ -4738,7 +4887,7 @@
               <a:buChar char="●"/>
               <a:defRPr/>
             </a:lvl1pPr>
-            <a:lvl2pPr indent="-317500" lvl="1" marL="914400">
+            <a:lvl2pPr marL="914400" lvl="1" indent="-317500">
               <a:spcBef>
                 <a:spcPts val="1600"/>
               </a:spcBef>
@@ -4749,7 +4898,7 @@
               <a:buChar char="○"/>
               <a:defRPr/>
             </a:lvl2pPr>
-            <a:lvl3pPr indent="-317500" lvl="2" marL="1371600">
+            <a:lvl3pPr marL="1371600" lvl="2" indent="-317500">
               <a:spcBef>
                 <a:spcPts val="1600"/>
               </a:spcBef>
@@ -4760,7 +4909,7 @@
               <a:buChar char="■"/>
               <a:defRPr/>
             </a:lvl3pPr>
-            <a:lvl4pPr indent="-317500" lvl="3" marL="1828800">
+            <a:lvl4pPr marL="1828800" lvl="3" indent="-317500">
               <a:spcBef>
                 <a:spcPts val="1600"/>
               </a:spcBef>
@@ -4771,7 +4920,7 @@
               <a:buChar char="●"/>
               <a:defRPr/>
             </a:lvl4pPr>
-            <a:lvl5pPr indent="-317500" lvl="4" marL="2286000">
+            <a:lvl5pPr marL="2286000" lvl="4" indent="-317500">
               <a:spcBef>
                 <a:spcPts val="1600"/>
               </a:spcBef>
@@ -4782,7 +4931,7 @@
               <a:buChar char="○"/>
               <a:defRPr/>
             </a:lvl5pPr>
-            <a:lvl6pPr indent="-317500" lvl="5" marL="2743200">
+            <a:lvl6pPr marL="2743200" lvl="5" indent="-317500">
               <a:spcBef>
                 <a:spcPts val="1600"/>
               </a:spcBef>
@@ -4793,7 +4942,7 @@
               <a:buChar char="■"/>
               <a:defRPr/>
             </a:lvl6pPr>
-            <a:lvl7pPr indent="-317500" lvl="6" marL="3200400">
+            <a:lvl7pPr marL="3200400" lvl="6" indent="-317500">
               <a:spcBef>
                 <a:spcPts val="1600"/>
               </a:spcBef>
@@ -4804,7 +4953,7 @@
               <a:buChar char="●"/>
               <a:defRPr/>
             </a:lvl7pPr>
-            <a:lvl8pPr indent="-317500" lvl="7" marL="3657600">
+            <a:lvl8pPr marL="3657600" lvl="7" indent="-317500">
               <a:spcBef>
                 <a:spcPts val="1600"/>
               </a:spcBef>
@@ -4815,7 +4964,7 @@
               <a:buChar char="○"/>
               <a:defRPr/>
             </a:lvl8pPr>
-            <a:lvl9pPr indent="-317500" lvl="8" marL="4114800">
+            <a:lvl9pPr marL="4114800" lvl="8" indent="-317500">
               <a:spcBef>
                 <a:spcPts val="1600"/>
               </a:spcBef>
@@ -4827,15 +4976,19 @@
               <a:defRPr/>
             </a:lvl9pPr>
           </a:lstStyle>
-          <a:p/>
+          <a:p>
+            <a:endParaRPr/>
+          </a:p>
         </p:txBody>
       </p:sp>
       <p:sp>
         <p:nvSpPr>
           <p:cNvPr id="40" name="Google Shape;40;p9"/>
-          <p:cNvSpPr txBox="1"/>
+          <p:cNvSpPr txBox="1">
+            <a:spLocks noGrp="1"/>
+          </p:cNvSpPr>
           <p:nvPr>
-            <p:ph idx="12" type="sldNum"/>
+            <p:ph type="sldNum" idx="12"/>
           </p:nvPr>
         </p:nvSpPr>
         <p:spPr>
@@ -4848,7 +5001,7 @@
           </a:prstGeom>
         </p:spPr>
         <p:txBody>
-          <a:bodyPr anchorCtr="0" anchor="ctr" bIns="91425" lIns="91425" spcFirstLastPara="1" rIns="91425" wrap="square" tIns="91425">
+          <a:bodyPr spcFirstLastPara="1" wrap="square" lIns="91425" tIns="91425" rIns="91425" bIns="91425" anchor="ctr" anchorCtr="0">
             <a:noAutofit/>
           </a:bodyPr>
           <a:lstStyle>
@@ -4890,7 +5043,7 @@
             </a:lvl9pPr>
           </a:lstStyle>
           <a:p>
-            <a:pPr indent="0" lvl="0" marL="0" rtl="0" algn="r">
+            <a:pPr marL="0" lvl="0" indent="0" algn="r" rtl="0">
               <a:spcBef>
                 <a:spcPts val="0"/>
               </a:spcBef>
@@ -4916,11 +5069,11 @@
 </file>
 
 <file path=ppt/slideLayouts/slideLayout9.xml><?xml version="1.0" encoding="utf-8"?>
-<p:sldLayout xmlns:a="http://schemas.openxmlformats.org/drawingml/2006/main" xmlns:r="http://schemas.openxmlformats.org/officeDocument/2006/relationships" xmlns:mc="http://schemas.openxmlformats.org/markup-compatibility/2006" xmlns:mv="urn:schemas-microsoft-com:mac:vml" xmlns:p="http://schemas.openxmlformats.org/presentationml/2006/main" xmlns:c="http://schemas.openxmlformats.org/drawingml/2006/chart" xmlns:dgm="http://schemas.openxmlformats.org/drawingml/2006/diagram" xmlns:o="urn:schemas-microsoft-com:office:office" xmlns:v="urn:schemas-microsoft-com:vml" xmlns:pvml="urn:schemas-microsoft-com:office:powerpoint" xmlns:com="http://schemas.openxmlformats.org/drawingml/2006/compatibility" xmlns:p14="http://schemas.microsoft.com/office/powerpoint/2010/main" xmlns:p15="http://schemas.microsoft.com/office/powerpoint/2012/main" xmlns:ahyp="http://schemas.microsoft.com/office/drawing/2018/hyperlinkcolor" matchingName="Caption">
+<p:sldLayout xmlns:a="http://schemas.openxmlformats.org/drawingml/2006/main" xmlns:r="http://schemas.openxmlformats.org/officeDocument/2006/relationships" xmlns:p="http://schemas.openxmlformats.org/presentationml/2006/main" matchingName="Caption">
   <p:cSld name="CAPTION_ONLY">
     <p:spTree>
       <p:nvGrpSpPr>
-        <p:cNvPr id="41" name="Shape 41"/>
+        <p:cNvPr id="1" name="Shape 41"/>
         <p:cNvGrpSpPr/>
         <p:nvPr/>
       </p:nvGrpSpPr>
@@ -4935,9 +5088,11 @@
       <p:sp>
         <p:nvSpPr>
           <p:cNvPr id="42" name="Google Shape;42;p10"/>
-          <p:cNvSpPr txBox="1"/>
+          <p:cNvSpPr txBox="1">
+            <a:spLocks noGrp="1"/>
+          </p:cNvSpPr>
           <p:nvPr>
-            <p:ph idx="1" type="body"/>
+            <p:ph type="body" idx="1"/>
           </p:nvPr>
         </p:nvSpPr>
         <p:spPr>
@@ -4950,11 +5105,11 @@
           </a:prstGeom>
         </p:spPr>
         <p:txBody>
-          <a:bodyPr anchorCtr="0" anchor="ctr" bIns="91425" lIns="91425" spcFirstLastPara="1" rIns="91425" wrap="square" tIns="91425">
+          <a:bodyPr spcFirstLastPara="1" wrap="square" lIns="91425" tIns="91425" rIns="91425" bIns="91425" anchor="ctr" anchorCtr="0">
             <a:noAutofit/>
           </a:bodyPr>
           <a:lstStyle>
-            <a:lvl1pPr indent="-228600" lvl="0" marL="457200">
+            <a:lvl1pPr marL="457200" lvl="0" indent="-228600">
               <a:lnSpc>
                 <a:spcPct val="100000"/>
               </a:lnSpc>
@@ -4969,15 +5124,19 @@
               <a:defRPr/>
             </a:lvl1pPr>
           </a:lstStyle>
-          <a:p/>
+          <a:p>
+            <a:endParaRPr/>
+          </a:p>
         </p:txBody>
       </p:sp>
       <p:sp>
         <p:nvSpPr>
           <p:cNvPr id="43" name="Google Shape;43;p10"/>
-          <p:cNvSpPr txBox="1"/>
+          <p:cNvSpPr txBox="1">
+            <a:spLocks noGrp="1"/>
+          </p:cNvSpPr>
           <p:nvPr>
-            <p:ph idx="12" type="sldNum"/>
+            <p:ph type="sldNum" idx="12"/>
           </p:nvPr>
         </p:nvSpPr>
         <p:spPr>
@@ -4990,7 +5149,7 @@
           </a:prstGeom>
         </p:spPr>
         <p:txBody>
-          <a:bodyPr anchorCtr="0" anchor="ctr" bIns="91425" lIns="91425" spcFirstLastPara="1" rIns="91425" wrap="square" tIns="91425">
+          <a:bodyPr spcFirstLastPara="1" wrap="square" lIns="91425" tIns="91425" rIns="91425" bIns="91425" anchor="ctr" anchorCtr="0">
             <a:noAutofit/>
           </a:bodyPr>
           <a:lstStyle>
@@ -5032,7 +5191,7 @@
             </a:lvl9pPr>
           </a:lstStyle>
           <a:p>
-            <a:pPr indent="0" lvl="0" marL="0" rtl="0" algn="r">
+            <a:pPr marL="0" lvl="0" indent="0" algn="r" rtl="0">
               <a:spcBef>
                 <a:spcPts val="0"/>
               </a:spcBef>
@@ -5058,18 +5217,19 @@
 </file>
 
 <file path=ppt/slideMasters/slideMaster1.xml><?xml version="1.0" encoding="utf-8"?>
-<p:sldMaster xmlns:a="http://schemas.openxmlformats.org/drawingml/2006/main" xmlns:r="http://schemas.openxmlformats.org/officeDocument/2006/relationships" xmlns:mc="http://schemas.openxmlformats.org/markup-compatibility/2006" xmlns:mv="urn:schemas-microsoft-com:mac:vml" xmlns:p="http://schemas.openxmlformats.org/presentationml/2006/main" xmlns:c="http://schemas.openxmlformats.org/drawingml/2006/chart" xmlns:dgm="http://schemas.openxmlformats.org/drawingml/2006/diagram" xmlns:o="urn:schemas-microsoft-com:office:office" xmlns:v="urn:schemas-microsoft-com:vml" xmlns:pvml="urn:schemas-microsoft-com:office:powerpoint" xmlns:com="http://schemas.openxmlformats.org/drawingml/2006/compatibility" xmlns:p14="http://schemas.microsoft.com/office/powerpoint/2010/main" xmlns:p15="http://schemas.microsoft.com/office/powerpoint/2012/main" xmlns:ahyp="http://schemas.microsoft.com/office/drawing/2018/hyperlinkcolor">
+<p:sldMaster xmlns:a="http://schemas.openxmlformats.org/drawingml/2006/main" xmlns:r="http://schemas.openxmlformats.org/officeDocument/2006/relationships" xmlns:p="http://schemas.openxmlformats.org/presentationml/2006/main">
   <p:cSld name="simple-light-2">
     <p:bg>
       <p:bgPr>
         <a:solidFill>
           <a:schemeClr val="lt1"/>
         </a:solidFill>
+        <a:effectLst/>
       </p:bgPr>
     </p:bg>
     <p:spTree>
       <p:nvGrpSpPr>
-        <p:cNvPr id="5" name="Shape 5"/>
+        <p:cNvPr id="1" name="Shape 5"/>
         <p:cNvGrpSpPr/>
         <p:nvPr/>
       </p:nvGrpSpPr>
@@ -5084,7 +5244,9 @@
       <p:sp>
         <p:nvSpPr>
           <p:cNvPr id="6" name="Google Shape;6;p1"/>
-          <p:cNvSpPr txBox="1"/>
+          <p:cNvSpPr txBox="1">
+            <a:spLocks noGrp="1"/>
+          </p:cNvSpPr>
           <p:nvPr>
             <p:ph type="title"/>
           </p:nvPr>
@@ -5103,7 +5265,7 @@
           </a:ln>
         </p:spPr>
         <p:txBody>
-          <a:bodyPr anchorCtr="0" anchor="t" bIns="91425" lIns="91425" spcFirstLastPara="1" rIns="91425" wrap="square" tIns="91425">
+          <a:bodyPr spcFirstLastPara="1" wrap="square" lIns="91425" tIns="91425" rIns="91425" bIns="91425" anchor="t" anchorCtr="0">
             <a:noAutofit/>
           </a:bodyPr>
           <a:lstStyle>
@@ -5270,15 +5432,19 @@
               </a:defRPr>
             </a:lvl9pPr>
           </a:lstStyle>
-          <a:p/>
+          <a:p>
+            <a:endParaRPr/>
+          </a:p>
         </p:txBody>
       </p:sp>
       <p:sp>
         <p:nvSpPr>
           <p:cNvPr id="7" name="Google Shape;7;p1"/>
-          <p:cNvSpPr txBox="1"/>
+          <p:cNvSpPr txBox="1">
+            <a:spLocks noGrp="1"/>
+          </p:cNvSpPr>
           <p:nvPr>
-            <p:ph idx="1" type="body"/>
+            <p:ph type="body" idx="1"/>
           </p:nvPr>
         </p:nvSpPr>
         <p:spPr>
@@ -5295,11 +5461,11 @@
           </a:ln>
         </p:spPr>
         <p:txBody>
-          <a:bodyPr anchorCtr="0" anchor="t" bIns="91425" lIns="91425" spcFirstLastPara="1" rIns="91425" wrap="square" tIns="91425">
+          <a:bodyPr spcFirstLastPara="1" wrap="square" lIns="91425" tIns="91425" rIns="91425" bIns="91425" anchor="t" anchorCtr="0">
             <a:noAutofit/>
           </a:bodyPr>
           <a:lstStyle>
-            <a:lvl1pPr indent="-342900" lvl="0" marL="457200">
+            <a:lvl1pPr marL="457200" lvl="0" indent="-342900">
               <a:lnSpc>
                 <a:spcPct val="115000"/>
               </a:lnSpc>
@@ -5320,7 +5486,7 @@
                 </a:solidFill>
               </a:defRPr>
             </a:lvl1pPr>
-            <a:lvl2pPr indent="-317500" lvl="1" marL="914400">
+            <a:lvl2pPr marL="914400" lvl="1" indent="-317500">
               <a:lnSpc>
                 <a:spcPct val="115000"/>
               </a:lnSpc>
@@ -5341,7 +5507,7 @@
                 </a:solidFill>
               </a:defRPr>
             </a:lvl2pPr>
-            <a:lvl3pPr indent="-317500" lvl="2" marL="1371600">
+            <a:lvl3pPr marL="1371600" lvl="2" indent="-317500">
               <a:lnSpc>
                 <a:spcPct val="115000"/>
               </a:lnSpc>
@@ -5362,7 +5528,7 @@
                 </a:solidFill>
               </a:defRPr>
             </a:lvl3pPr>
-            <a:lvl4pPr indent="-317500" lvl="3" marL="1828800">
+            <a:lvl4pPr marL="1828800" lvl="3" indent="-317500">
               <a:lnSpc>
                 <a:spcPct val="115000"/>
               </a:lnSpc>
@@ -5383,7 +5549,7 @@
                 </a:solidFill>
               </a:defRPr>
             </a:lvl4pPr>
-            <a:lvl5pPr indent="-317500" lvl="4" marL="2286000">
+            <a:lvl5pPr marL="2286000" lvl="4" indent="-317500">
               <a:lnSpc>
                 <a:spcPct val="115000"/>
               </a:lnSpc>
@@ -5404,7 +5570,7 @@
                 </a:solidFill>
               </a:defRPr>
             </a:lvl5pPr>
-            <a:lvl6pPr indent="-317500" lvl="5" marL="2743200">
+            <a:lvl6pPr marL="2743200" lvl="5" indent="-317500">
               <a:lnSpc>
                 <a:spcPct val="115000"/>
               </a:lnSpc>
@@ -5425,7 +5591,7 @@
                 </a:solidFill>
               </a:defRPr>
             </a:lvl6pPr>
-            <a:lvl7pPr indent="-317500" lvl="6" marL="3200400">
+            <a:lvl7pPr marL="3200400" lvl="6" indent="-317500">
               <a:lnSpc>
                 <a:spcPct val="115000"/>
               </a:lnSpc>
@@ -5446,7 +5612,7 @@
                 </a:solidFill>
               </a:defRPr>
             </a:lvl7pPr>
-            <a:lvl8pPr indent="-317500" lvl="7" marL="3657600">
+            <a:lvl8pPr marL="3657600" lvl="7" indent="-317500">
               <a:lnSpc>
                 <a:spcPct val="115000"/>
               </a:lnSpc>
@@ -5467,7 +5633,7 @@
                 </a:solidFill>
               </a:defRPr>
             </a:lvl8pPr>
-            <a:lvl9pPr indent="-317500" lvl="8" marL="4114800">
+            <a:lvl9pPr marL="4114800" lvl="8" indent="-317500">
               <a:lnSpc>
                 <a:spcPct val="115000"/>
               </a:lnSpc>
@@ -5489,15 +5655,19 @@
               </a:defRPr>
             </a:lvl9pPr>
           </a:lstStyle>
-          <a:p/>
+          <a:p>
+            <a:endParaRPr/>
+          </a:p>
         </p:txBody>
       </p:sp>
       <p:sp>
         <p:nvSpPr>
           <p:cNvPr id="8" name="Google Shape;8;p1"/>
-          <p:cNvSpPr txBox="1"/>
+          <p:cNvSpPr txBox="1">
+            <a:spLocks noGrp="1"/>
+          </p:cNvSpPr>
           <p:nvPr>
-            <p:ph idx="12" type="sldNum"/>
+            <p:ph type="sldNum" idx="12"/>
           </p:nvPr>
         </p:nvSpPr>
         <p:spPr>
@@ -5514,7 +5684,7 @@
           </a:ln>
         </p:spPr>
         <p:txBody>
-          <a:bodyPr anchorCtr="0" anchor="ctr" bIns="91425" lIns="91425" spcFirstLastPara="1" rIns="91425" wrap="square" tIns="91425">
+          <a:bodyPr spcFirstLastPara="1" wrap="square" lIns="91425" tIns="91425" rIns="91425" bIns="91425" anchor="ctr" anchorCtr="0">
             <a:noAutofit/>
           </a:bodyPr>
           <a:lstStyle>
@@ -5592,7 +5762,7 @@
             </a:lvl9pPr>
           </a:lstStyle>
           <a:p>
-            <a:pPr indent="0" lvl="0" marL="0" rtl="0" algn="r">
+            <a:pPr marL="0" lvl="0" indent="0" algn="r" rtl="0">
               <a:spcBef>
                 <a:spcPts val="0"/>
               </a:spcBef>
@@ -5611,7 +5781,7 @@
       </p:sp>
     </p:spTree>
   </p:cSld>
-  <p:clrMap accent1="accent1" accent2="accent2" accent3="accent3" accent4="accent4" accent5="accent5" accent6="accent6" bg1="lt1" bg2="dk2" tx1="dk1" tx2="lt2" folHlink="folHlink" hlink="hlink"/>
+  <p:clrMap bg1="lt1" tx1="dk1" bg2="dk2" tx2="lt2" accent1="accent1" accent2="accent2" accent3="accent3" accent4="accent4" accent5="accent5" accent6="accent6" hlink="hlink" folHlink="folHlink"/>
   <p:sldLayoutIdLst>
     <p:sldLayoutId id="2147483648" r:id="rId1"/>
     <p:sldLayoutId id="2147483649" r:id="rId2"/>
@@ -5625,10 +5795,10 @@
     <p:sldLayoutId id="2147483657" r:id="rId10"/>
     <p:sldLayoutId id="2147483658" r:id="rId11"/>
   </p:sldLayoutIdLst>
-  <p:hf dt="0" ftr="0" hdr="0" sldNum="0"/>
+  <p:hf sldNum="0" hdr="0" ftr="0" dt="0"/>
   <p:txStyles>
     <p:titleStyle>
-      <a:defPPr lvl="0" marR="0" rtl="0" algn="l">
+      <a:defPPr marR="0" lvl="0" algn="l" rtl="0">
         <a:lnSpc>
           <a:spcPct val="100000"/>
         </a:lnSpc>
@@ -5639,7 +5809,7 @@
           <a:spcPts val="0"/>
         </a:spcAft>
       </a:defPPr>
-      <a:lvl1pPr lvl="0" marR="0" rtl="0" algn="l">
+      <a:lvl1pPr marR="0" lvl="0" algn="l" rtl="0">
         <a:lnSpc>
           <a:spcPct val="100000"/>
         </a:lnSpc>
@@ -5653,7 +5823,7 @@
           <a:srgbClr val="000000"/>
         </a:buClr>
         <a:buFont typeface="Arial"/>
-        <a:defRPr b="0" i="0" sz="1400" u="none" cap="none" strike="noStrike">
+        <a:defRPr sz="1400" b="0" i="0" u="none" strike="noStrike" cap="none">
           <a:solidFill>
             <a:srgbClr val="000000"/>
           </a:solidFill>
@@ -5663,7 +5833,7 @@
           <a:sym typeface="Arial"/>
         </a:defRPr>
       </a:lvl1pPr>
-      <a:lvl2pPr lvl="1" marR="0" rtl="0" algn="l">
+      <a:lvl2pPr marR="0" lvl="1" algn="l" rtl="0">
         <a:lnSpc>
           <a:spcPct val="100000"/>
         </a:lnSpc>
@@ -5677,7 +5847,7 @@
           <a:srgbClr val="000000"/>
         </a:buClr>
         <a:buFont typeface="Arial"/>
-        <a:defRPr b="0" i="0" sz="1400" u="none" cap="none" strike="noStrike">
+        <a:defRPr sz="1400" b="0" i="0" u="none" strike="noStrike" cap="none">
           <a:solidFill>
             <a:srgbClr val="000000"/>
           </a:solidFill>
@@ -5687,7 +5857,7 @@
           <a:sym typeface="Arial"/>
         </a:defRPr>
       </a:lvl2pPr>
-      <a:lvl3pPr lvl="2" marR="0" rtl="0" algn="l">
+      <a:lvl3pPr marR="0" lvl="2" algn="l" rtl="0">
         <a:lnSpc>
           <a:spcPct val="100000"/>
         </a:lnSpc>
@@ -5701,7 +5871,7 @@
           <a:srgbClr val="000000"/>
         </a:buClr>
         <a:buFont typeface="Arial"/>
-        <a:defRPr b="0" i="0" sz="1400" u="none" cap="none" strike="noStrike">
+        <a:defRPr sz="1400" b="0" i="0" u="none" strike="noStrike" cap="none">
           <a:solidFill>
             <a:srgbClr val="000000"/>
           </a:solidFill>
@@ -5711,7 +5881,7 @@
           <a:sym typeface="Arial"/>
         </a:defRPr>
       </a:lvl3pPr>
-      <a:lvl4pPr lvl="3" marR="0" rtl="0" algn="l">
+      <a:lvl4pPr marR="0" lvl="3" algn="l" rtl="0">
         <a:lnSpc>
           <a:spcPct val="100000"/>
         </a:lnSpc>
@@ -5725,7 +5895,7 @@
           <a:srgbClr val="000000"/>
         </a:buClr>
         <a:buFont typeface="Arial"/>
-        <a:defRPr b="0" i="0" sz="1400" u="none" cap="none" strike="noStrike">
+        <a:defRPr sz="1400" b="0" i="0" u="none" strike="noStrike" cap="none">
           <a:solidFill>
             <a:srgbClr val="000000"/>
           </a:solidFill>
@@ -5735,7 +5905,7 @@
           <a:sym typeface="Arial"/>
         </a:defRPr>
       </a:lvl4pPr>
-      <a:lvl5pPr lvl="4" marR="0" rtl="0" algn="l">
+      <a:lvl5pPr marR="0" lvl="4" algn="l" rtl="0">
         <a:lnSpc>
           <a:spcPct val="100000"/>
         </a:lnSpc>
@@ -5749,7 +5919,7 @@
           <a:srgbClr val="000000"/>
         </a:buClr>
         <a:buFont typeface="Arial"/>
-        <a:defRPr b="0" i="0" sz="1400" u="none" cap="none" strike="noStrike">
+        <a:defRPr sz="1400" b="0" i="0" u="none" strike="noStrike" cap="none">
           <a:solidFill>
             <a:srgbClr val="000000"/>
           </a:solidFill>
@@ -5759,7 +5929,7 @@
           <a:sym typeface="Arial"/>
         </a:defRPr>
       </a:lvl5pPr>
-      <a:lvl6pPr lvl="5" marR="0" rtl="0" algn="l">
+      <a:lvl6pPr marR="0" lvl="5" algn="l" rtl="0">
         <a:lnSpc>
           <a:spcPct val="100000"/>
         </a:lnSpc>
@@ -5773,7 +5943,7 @@
           <a:srgbClr val="000000"/>
         </a:buClr>
         <a:buFont typeface="Arial"/>
-        <a:defRPr b="0" i="0" sz="1400" u="none" cap="none" strike="noStrike">
+        <a:defRPr sz="1400" b="0" i="0" u="none" strike="noStrike" cap="none">
           <a:solidFill>
             <a:srgbClr val="000000"/>
           </a:solidFill>
@@ -5783,7 +5953,7 @@
           <a:sym typeface="Arial"/>
         </a:defRPr>
       </a:lvl6pPr>
-      <a:lvl7pPr lvl="6" marR="0" rtl="0" algn="l">
+      <a:lvl7pPr marR="0" lvl="6" algn="l" rtl="0">
         <a:lnSpc>
           <a:spcPct val="100000"/>
         </a:lnSpc>
@@ -5797,7 +5967,7 @@
           <a:srgbClr val="000000"/>
         </a:buClr>
         <a:buFont typeface="Arial"/>
-        <a:defRPr b="0" i="0" sz="1400" u="none" cap="none" strike="noStrike">
+        <a:defRPr sz="1400" b="0" i="0" u="none" strike="noStrike" cap="none">
           <a:solidFill>
             <a:srgbClr val="000000"/>
           </a:solidFill>
@@ -5807,7 +5977,7 @@
           <a:sym typeface="Arial"/>
         </a:defRPr>
       </a:lvl7pPr>
-      <a:lvl8pPr lvl="7" marR="0" rtl="0" algn="l">
+      <a:lvl8pPr marR="0" lvl="7" algn="l" rtl="0">
         <a:lnSpc>
           <a:spcPct val="100000"/>
         </a:lnSpc>
@@ -5821,7 +5991,7 @@
           <a:srgbClr val="000000"/>
         </a:buClr>
         <a:buFont typeface="Arial"/>
-        <a:defRPr b="0" i="0" sz="1400" u="none" cap="none" strike="noStrike">
+        <a:defRPr sz="1400" b="0" i="0" u="none" strike="noStrike" cap="none">
           <a:solidFill>
             <a:srgbClr val="000000"/>
           </a:solidFill>
@@ -5831,7 +6001,7 @@
           <a:sym typeface="Arial"/>
         </a:defRPr>
       </a:lvl8pPr>
-      <a:lvl9pPr lvl="8" marR="0" rtl="0" algn="l">
+      <a:lvl9pPr marR="0" lvl="8" algn="l" rtl="0">
         <a:lnSpc>
           <a:spcPct val="100000"/>
         </a:lnSpc>
@@ -5845,7 +6015,7 @@
           <a:srgbClr val="000000"/>
         </a:buClr>
         <a:buFont typeface="Arial"/>
-        <a:defRPr b="0" i="0" sz="1400" u="none" cap="none" strike="noStrike">
+        <a:defRPr sz="1400" b="0" i="0" u="none" strike="noStrike" cap="none">
           <a:solidFill>
             <a:srgbClr val="000000"/>
           </a:solidFill>
@@ -5857,7 +6027,7 @@
       </a:lvl9pPr>
     </p:titleStyle>
     <p:bodyStyle>
-      <a:defPPr lvl="0" marR="0" rtl="0" algn="l">
+      <a:defPPr marR="0" lvl="0" algn="l" rtl="0">
         <a:lnSpc>
           <a:spcPct val="100000"/>
         </a:lnSpc>
@@ -5868,7 +6038,7 @@
           <a:spcPts val="0"/>
         </a:spcAft>
       </a:defPPr>
-      <a:lvl1pPr lvl="0" marR="0" rtl="0" algn="l">
+      <a:lvl1pPr marR="0" lvl="0" algn="l" rtl="0">
         <a:lnSpc>
           <a:spcPct val="100000"/>
         </a:lnSpc>
@@ -5882,7 +6052,7 @@
           <a:srgbClr val="000000"/>
         </a:buClr>
         <a:buFont typeface="Arial"/>
-        <a:defRPr b="0" i="0" sz="1400" u="none" cap="none" strike="noStrike">
+        <a:defRPr sz="1400" b="0" i="0" u="none" strike="noStrike" cap="none">
           <a:solidFill>
             <a:srgbClr val="000000"/>
           </a:solidFill>
@@ -5892,7 +6062,7 @@
           <a:sym typeface="Arial"/>
         </a:defRPr>
       </a:lvl1pPr>
-      <a:lvl2pPr lvl="1" marR="0" rtl="0" algn="l">
+      <a:lvl2pPr marR="0" lvl="1" algn="l" rtl="0">
         <a:lnSpc>
           <a:spcPct val="100000"/>
         </a:lnSpc>
@@ -5906,7 +6076,7 @@
           <a:srgbClr val="000000"/>
         </a:buClr>
         <a:buFont typeface="Arial"/>
-        <a:defRPr b="0" i="0" sz="1400" u="none" cap="none" strike="noStrike">
+        <a:defRPr sz="1400" b="0" i="0" u="none" strike="noStrike" cap="none">
           <a:solidFill>
             <a:srgbClr val="000000"/>
           </a:solidFill>
@@ -5916,7 +6086,7 @@
           <a:sym typeface="Arial"/>
         </a:defRPr>
       </a:lvl2pPr>
-      <a:lvl3pPr lvl="2" marR="0" rtl="0" algn="l">
+      <a:lvl3pPr marR="0" lvl="2" algn="l" rtl="0">
         <a:lnSpc>
           <a:spcPct val="100000"/>
         </a:lnSpc>
@@ -5930,7 +6100,7 @@
           <a:srgbClr val="000000"/>
         </a:buClr>
         <a:buFont typeface="Arial"/>
-        <a:defRPr b="0" i="0" sz="1400" u="none" cap="none" strike="noStrike">
+        <a:defRPr sz="1400" b="0" i="0" u="none" strike="noStrike" cap="none">
           <a:solidFill>
             <a:srgbClr val="000000"/>
           </a:solidFill>
@@ -5940,7 +6110,7 @@
           <a:sym typeface="Arial"/>
         </a:defRPr>
       </a:lvl3pPr>
-      <a:lvl4pPr lvl="3" marR="0" rtl="0" algn="l">
+      <a:lvl4pPr marR="0" lvl="3" algn="l" rtl="0">
         <a:lnSpc>
           <a:spcPct val="100000"/>
         </a:lnSpc>
@@ -5954,7 +6124,7 @@
           <a:srgbClr val="000000"/>
         </a:buClr>
         <a:buFont typeface="Arial"/>
-        <a:defRPr b="0" i="0" sz="1400" u="none" cap="none" strike="noStrike">
+        <a:defRPr sz="1400" b="0" i="0" u="none" strike="noStrike" cap="none">
           <a:solidFill>
             <a:srgbClr val="000000"/>
           </a:solidFill>
@@ -5964,7 +6134,7 @@
           <a:sym typeface="Arial"/>
         </a:defRPr>
       </a:lvl4pPr>
-      <a:lvl5pPr lvl="4" marR="0" rtl="0" algn="l">
+      <a:lvl5pPr marR="0" lvl="4" algn="l" rtl="0">
         <a:lnSpc>
           <a:spcPct val="100000"/>
         </a:lnSpc>
@@ -5978,7 +6148,7 @@
           <a:srgbClr val="000000"/>
         </a:buClr>
         <a:buFont typeface="Arial"/>
-        <a:defRPr b="0" i="0" sz="1400" u="none" cap="none" strike="noStrike">
+        <a:defRPr sz="1400" b="0" i="0" u="none" strike="noStrike" cap="none">
           <a:solidFill>
             <a:srgbClr val="000000"/>
           </a:solidFill>
@@ -5988,7 +6158,7 @@
           <a:sym typeface="Arial"/>
         </a:defRPr>
       </a:lvl5pPr>
-      <a:lvl6pPr lvl="5" marR="0" rtl="0" algn="l">
+      <a:lvl6pPr marR="0" lvl="5" algn="l" rtl="0">
         <a:lnSpc>
           <a:spcPct val="100000"/>
         </a:lnSpc>
@@ -6002,7 +6172,7 @@
           <a:srgbClr val="000000"/>
         </a:buClr>
         <a:buFont typeface="Arial"/>
-        <a:defRPr b="0" i="0" sz="1400" u="none" cap="none" strike="noStrike">
+        <a:defRPr sz="1400" b="0" i="0" u="none" strike="noStrike" cap="none">
           <a:solidFill>
             <a:srgbClr val="000000"/>
           </a:solidFill>
@@ -6012,7 +6182,7 @@
           <a:sym typeface="Arial"/>
         </a:defRPr>
       </a:lvl6pPr>
-      <a:lvl7pPr lvl="6" marR="0" rtl="0" algn="l">
+      <a:lvl7pPr marR="0" lvl="6" algn="l" rtl="0">
         <a:lnSpc>
           <a:spcPct val="100000"/>
         </a:lnSpc>
@@ -6026,7 +6196,7 @@
           <a:srgbClr val="000000"/>
         </a:buClr>
         <a:buFont typeface="Arial"/>
-        <a:defRPr b="0" i="0" sz="1400" u="none" cap="none" strike="noStrike">
+        <a:defRPr sz="1400" b="0" i="0" u="none" strike="noStrike" cap="none">
           <a:solidFill>
             <a:srgbClr val="000000"/>
           </a:solidFill>
@@ -6036,7 +6206,7 @@
           <a:sym typeface="Arial"/>
         </a:defRPr>
       </a:lvl7pPr>
-      <a:lvl8pPr lvl="7" marR="0" rtl="0" algn="l">
+      <a:lvl8pPr marR="0" lvl="7" algn="l" rtl="0">
         <a:lnSpc>
           <a:spcPct val="100000"/>
         </a:lnSpc>
@@ -6050,7 +6220,7 @@
           <a:srgbClr val="000000"/>
         </a:buClr>
         <a:buFont typeface="Arial"/>
-        <a:defRPr b="0" i="0" sz="1400" u="none" cap="none" strike="noStrike">
+        <a:defRPr sz="1400" b="0" i="0" u="none" strike="noStrike" cap="none">
           <a:solidFill>
             <a:srgbClr val="000000"/>
           </a:solidFill>
@@ -6060,7 +6230,7 @@
           <a:sym typeface="Arial"/>
         </a:defRPr>
       </a:lvl8pPr>
-      <a:lvl9pPr lvl="8" marR="0" rtl="0" algn="l">
+      <a:lvl9pPr marR="0" lvl="8" algn="l" rtl="0">
         <a:lnSpc>
           <a:spcPct val="100000"/>
         </a:lnSpc>
@@ -6074,7 +6244,7 @@
           <a:srgbClr val="000000"/>
         </a:buClr>
         <a:buFont typeface="Arial"/>
-        <a:defRPr b="0" i="0" sz="1400" u="none" cap="none" strike="noStrike">
+        <a:defRPr sz="1400" b="0" i="0" u="none" strike="noStrike" cap="none">
           <a:solidFill>
             <a:srgbClr val="000000"/>
           </a:solidFill>
@@ -6086,7 +6256,7 @@
       </a:lvl9pPr>
     </p:bodyStyle>
     <p:otherStyle>
-      <a:defPPr lvl="0" marR="0" rtl="0" algn="l">
+      <a:defPPr marR="0" lvl="0" algn="l" rtl="0">
         <a:lnSpc>
           <a:spcPct val="100000"/>
         </a:lnSpc>
@@ -6097,7 +6267,7 @@
           <a:spcPts val="0"/>
         </a:spcAft>
       </a:defPPr>
-      <a:lvl1pPr lvl="0" marR="0" rtl="0" algn="l">
+      <a:lvl1pPr marR="0" lvl="0" algn="l" rtl="0">
         <a:lnSpc>
           <a:spcPct val="100000"/>
         </a:lnSpc>
@@ -6111,7 +6281,7 @@
           <a:srgbClr val="000000"/>
         </a:buClr>
         <a:buFont typeface="Arial"/>
-        <a:defRPr b="0" i="0" sz="1400" u="none" cap="none" strike="noStrike">
+        <a:defRPr sz="1400" b="0" i="0" u="none" strike="noStrike" cap="none">
           <a:solidFill>
             <a:srgbClr val="000000"/>
           </a:solidFill>
@@ -6121,7 +6291,7 @@
           <a:sym typeface="Arial"/>
         </a:defRPr>
       </a:lvl1pPr>
-      <a:lvl2pPr lvl="1" marR="0" rtl="0" algn="l">
+      <a:lvl2pPr marR="0" lvl="1" algn="l" rtl="0">
         <a:lnSpc>
           <a:spcPct val="100000"/>
         </a:lnSpc>
@@ -6135,7 +6305,7 @@
           <a:srgbClr val="000000"/>
         </a:buClr>
         <a:buFont typeface="Arial"/>
-        <a:defRPr b="0" i="0" sz="1400" u="none" cap="none" strike="noStrike">
+        <a:defRPr sz="1400" b="0" i="0" u="none" strike="noStrike" cap="none">
           <a:solidFill>
             <a:srgbClr val="000000"/>
           </a:solidFill>
@@ -6145,7 +6315,7 @@
           <a:sym typeface="Arial"/>
         </a:defRPr>
       </a:lvl2pPr>
-      <a:lvl3pPr lvl="2" marR="0" rtl="0" algn="l">
+      <a:lvl3pPr marR="0" lvl="2" algn="l" rtl="0">
         <a:lnSpc>
           <a:spcPct val="100000"/>
         </a:lnSpc>
@@ -6159,7 +6329,7 @@
           <a:srgbClr val="000000"/>
         </a:buClr>
         <a:buFont typeface="Arial"/>
-        <a:defRPr b="0" i="0" sz="1400" u="none" cap="none" strike="noStrike">
+        <a:defRPr sz="1400" b="0" i="0" u="none" strike="noStrike" cap="none">
           <a:solidFill>
             <a:srgbClr val="000000"/>
           </a:solidFill>
@@ -6169,7 +6339,7 @@
           <a:sym typeface="Arial"/>
         </a:defRPr>
       </a:lvl3pPr>
-      <a:lvl4pPr lvl="3" marR="0" rtl="0" algn="l">
+      <a:lvl4pPr marR="0" lvl="3" algn="l" rtl="0">
         <a:lnSpc>
           <a:spcPct val="100000"/>
         </a:lnSpc>
@@ -6183,7 +6353,7 @@
           <a:srgbClr val="000000"/>
         </a:buClr>
         <a:buFont typeface="Arial"/>
-        <a:defRPr b="0" i="0" sz="1400" u="none" cap="none" strike="noStrike">
+        <a:defRPr sz="1400" b="0" i="0" u="none" strike="noStrike" cap="none">
           <a:solidFill>
             <a:srgbClr val="000000"/>
           </a:solidFill>
@@ -6193,7 +6363,7 @@
           <a:sym typeface="Arial"/>
         </a:defRPr>
       </a:lvl4pPr>
-      <a:lvl5pPr lvl="4" marR="0" rtl="0" algn="l">
+      <a:lvl5pPr marR="0" lvl="4" algn="l" rtl="0">
         <a:lnSpc>
           <a:spcPct val="100000"/>
         </a:lnSpc>
@@ -6207,7 +6377,7 @@
           <a:srgbClr val="000000"/>
         </a:buClr>
         <a:buFont typeface="Arial"/>
-        <a:defRPr b="0" i="0" sz="1400" u="none" cap="none" strike="noStrike">
+        <a:defRPr sz="1400" b="0" i="0" u="none" strike="noStrike" cap="none">
           <a:solidFill>
             <a:srgbClr val="000000"/>
           </a:solidFill>
@@ -6217,7 +6387,7 @@
           <a:sym typeface="Arial"/>
         </a:defRPr>
       </a:lvl5pPr>
-      <a:lvl6pPr lvl="5" marR="0" rtl="0" algn="l">
+      <a:lvl6pPr marR="0" lvl="5" algn="l" rtl="0">
         <a:lnSpc>
           <a:spcPct val="100000"/>
         </a:lnSpc>
@@ -6231,7 +6401,7 @@
           <a:srgbClr val="000000"/>
         </a:buClr>
         <a:buFont typeface="Arial"/>
-        <a:defRPr b="0" i="0" sz="1400" u="none" cap="none" strike="noStrike">
+        <a:defRPr sz="1400" b="0" i="0" u="none" strike="noStrike" cap="none">
           <a:solidFill>
             <a:srgbClr val="000000"/>
           </a:solidFill>
@@ -6241,7 +6411,7 @@
           <a:sym typeface="Arial"/>
         </a:defRPr>
       </a:lvl6pPr>
-      <a:lvl7pPr lvl="6" marR="0" rtl="0" algn="l">
+      <a:lvl7pPr marR="0" lvl="6" algn="l" rtl="0">
         <a:lnSpc>
           <a:spcPct val="100000"/>
         </a:lnSpc>
@@ -6255,7 +6425,7 @@
           <a:srgbClr val="000000"/>
         </a:buClr>
         <a:buFont typeface="Arial"/>
-        <a:defRPr b="0" i="0" sz="1400" u="none" cap="none" strike="noStrike">
+        <a:defRPr sz="1400" b="0" i="0" u="none" strike="noStrike" cap="none">
           <a:solidFill>
             <a:srgbClr val="000000"/>
           </a:solidFill>
@@ -6265,7 +6435,7 @@
           <a:sym typeface="Arial"/>
         </a:defRPr>
       </a:lvl7pPr>
-      <a:lvl8pPr lvl="7" marR="0" rtl="0" algn="l">
+      <a:lvl8pPr marR="0" lvl="7" algn="l" rtl="0">
         <a:lnSpc>
           <a:spcPct val="100000"/>
         </a:lnSpc>
@@ -6279,7 +6449,7 @@
           <a:srgbClr val="000000"/>
         </a:buClr>
         <a:buFont typeface="Arial"/>
-        <a:defRPr b="0" i="0" sz="1400" u="none" cap="none" strike="noStrike">
+        <a:defRPr sz="1400" b="0" i="0" u="none" strike="noStrike" cap="none">
           <a:solidFill>
             <a:srgbClr val="000000"/>
           </a:solidFill>
@@ -6289,7 +6459,7 @@
           <a:sym typeface="Arial"/>
         </a:defRPr>
       </a:lvl8pPr>
-      <a:lvl9pPr lvl="8" marR="0" rtl="0" algn="l">
+      <a:lvl9pPr marR="0" lvl="8" algn="l" rtl="0">
         <a:lnSpc>
           <a:spcPct val="100000"/>
         </a:lnSpc>
@@ -6303,7 +6473,7 @@
           <a:srgbClr val="000000"/>
         </a:buClr>
         <a:buFont typeface="Arial"/>
-        <a:defRPr b="0" i="0" sz="1400" u="none" cap="none" strike="noStrike">
+        <a:defRPr sz="1400" b="0" i="0" u="none" strike="noStrike" cap="none">
           <a:solidFill>
             <a:srgbClr val="000000"/>
           </a:solidFill>
@@ -6319,11 +6489,1653 @@
 </file>
 
 <file path=ppt/slides/slide1.xml><?xml version="1.0" encoding="utf-8"?>
-<p:sld xmlns:a="http://schemas.openxmlformats.org/drawingml/2006/main" xmlns:r="http://schemas.openxmlformats.org/officeDocument/2006/relationships" xmlns:mc="http://schemas.openxmlformats.org/markup-compatibility/2006" xmlns:mv="urn:schemas-microsoft-com:mac:vml" xmlns:p="http://schemas.openxmlformats.org/presentationml/2006/main" xmlns:c="http://schemas.openxmlformats.org/drawingml/2006/chart" xmlns:dgm="http://schemas.openxmlformats.org/drawingml/2006/diagram" xmlns:o="urn:schemas-microsoft-com:office:office" xmlns:v="urn:schemas-microsoft-com:vml" xmlns:pvml="urn:schemas-microsoft-com:office:powerpoint" xmlns:com="http://schemas.openxmlformats.org/drawingml/2006/compatibility" xmlns:p14="http://schemas.microsoft.com/office/powerpoint/2010/main" xmlns:p15="http://schemas.microsoft.com/office/powerpoint/2012/main" xmlns:ahyp="http://schemas.microsoft.com/office/drawing/2018/hyperlinkcolor">
+<p:sld xmlns:a="http://schemas.openxmlformats.org/drawingml/2006/main" xmlns:r="http://schemas.openxmlformats.org/officeDocument/2006/relationships" xmlns:p="http://schemas.openxmlformats.org/presentationml/2006/main">
   <p:cSld>
     <p:spTree>
       <p:nvGrpSpPr>
-        <p:cNvPr id="53" name="Shape 53"/>
+        <p:cNvPr id="1" name="Shape 110"/>
+        <p:cNvGrpSpPr/>
+        <p:nvPr/>
+      </p:nvGrpSpPr>
+      <p:grpSpPr>
+        <a:xfrm>
+          <a:off x="0" y="0"/>
+          <a:ext cx="0" cy="0"/>
+          <a:chOff x="0" y="0"/>
+          <a:chExt cx="0" cy="0"/>
+        </a:xfrm>
+      </p:grpSpPr>
+      <p:sp>
+        <p:nvSpPr>
+          <p:cNvPr id="111" name="Google Shape;111;p21"/>
+          <p:cNvSpPr txBox="1">
+            <a:spLocks noGrp="1"/>
+          </p:cNvSpPr>
+          <p:nvPr>
+            <p:ph type="title"/>
+          </p:nvPr>
+        </p:nvSpPr>
+        <p:spPr>
+          <a:xfrm>
+            <a:off x="311700" y="791156"/>
+            <a:ext cx="8520600" cy="1018200"/>
+          </a:xfrm>
+          <a:prstGeom prst="rect">
+            <a:avLst/>
+          </a:prstGeom>
+        </p:spPr>
+        <p:txBody>
+          <a:bodyPr spcFirstLastPara="1" wrap="square" lIns="91425" tIns="91425" rIns="91425" bIns="91425" anchor="t" anchorCtr="0">
+            <a:noAutofit/>
+          </a:bodyPr>
+          <a:lstStyle/>
+          <a:p>
+            <a:pPr marL="0" lvl="0" indent="0" algn="l" rtl="0">
+              <a:spcBef>
+                <a:spcPts val="0"/>
+              </a:spcBef>
+              <a:spcAft>
+                <a:spcPts val="0"/>
+              </a:spcAft>
+              <a:buNone/>
+            </a:pPr>
+            <a:r>
+              <a:rPr lang="en-GB" sz="3000"/>
+              <a:t>Анатомия веб-сервиса</a:t>
+            </a:r>
+            <a:endParaRPr sz="3000"/>
+          </a:p>
+        </p:txBody>
+      </p:sp>
+      <p:sp>
+        <p:nvSpPr>
+          <p:cNvPr id="112" name="Google Shape;112;p21"/>
+          <p:cNvSpPr txBox="1">
+            <a:spLocks noGrp="1"/>
+          </p:cNvSpPr>
+          <p:nvPr>
+            <p:ph type="body" idx="1"/>
+          </p:nvPr>
+        </p:nvSpPr>
+        <p:spPr>
+          <a:xfrm>
+            <a:off x="311700" y="2048844"/>
+            <a:ext cx="8520600" cy="6073500"/>
+          </a:xfrm>
+          <a:prstGeom prst="rect">
+            <a:avLst/>
+          </a:prstGeom>
+        </p:spPr>
+        <p:txBody>
+          <a:bodyPr spcFirstLastPara="1" wrap="square" lIns="91425" tIns="91425" rIns="91425" bIns="91425" anchor="t" anchorCtr="0">
+            <a:noAutofit/>
+          </a:bodyPr>
+          <a:lstStyle/>
+          <a:p>
+            <a:pPr marL="457200" lvl="0" indent="-419100" algn="l" rtl="0">
+              <a:spcBef>
+                <a:spcPts val="0"/>
+              </a:spcBef>
+              <a:spcAft>
+                <a:spcPts val="0"/>
+              </a:spcAft>
+              <a:buSzPts val="3000"/>
+              <a:buChar char="●"/>
+            </a:pPr>
+            <a:r>
+              <a:rPr lang="en-GB" sz="3000"/>
+              <a:t>Middleware / фреймворки</a:t>
+            </a:r>
+            <a:endParaRPr sz="3000"/>
+          </a:p>
+          <a:p>
+            <a:pPr marL="0" lvl="0" indent="0" algn="l" rtl="0">
+              <a:spcBef>
+                <a:spcPts val="1600"/>
+              </a:spcBef>
+              <a:spcAft>
+                <a:spcPts val="1600"/>
+              </a:spcAft>
+              <a:buNone/>
+            </a:pPr>
+            <a:endParaRPr sz="3000"/>
+          </a:p>
+        </p:txBody>
+      </p:sp>
+      <p:sp>
+        <p:nvSpPr>
+          <p:cNvPr id="113" name="Google Shape;113;p21"/>
+          <p:cNvSpPr txBox="1"/>
+          <p:nvPr/>
+        </p:nvSpPr>
+        <p:spPr>
+          <a:xfrm>
+            <a:off x="708825" y="3237025"/>
+            <a:ext cx="7797300" cy="4885200"/>
+          </a:xfrm>
+          <a:prstGeom prst="rect">
+            <a:avLst/>
+          </a:prstGeom>
+          <a:noFill/>
+          <a:ln>
+            <a:noFill/>
+          </a:ln>
+        </p:spPr>
+        <p:txBody>
+          <a:bodyPr spcFirstLastPara="1" wrap="square" lIns="91425" tIns="91425" rIns="91425" bIns="91425" anchor="t" anchorCtr="0">
+            <a:noAutofit/>
+          </a:bodyPr>
+          <a:lstStyle/>
+          <a:p>
+            <a:pPr marL="0" lvl="0" indent="0" algn="l" rtl="0">
+              <a:spcBef>
+                <a:spcPts val="0"/>
+              </a:spcBef>
+              <a:spcAft>
+                <a:spcPts val="0"/>
+              </a:spcAft>
+              <a:buNone/>
+            </a:pPr>
+            <a:r>
+              <a:rPr lang="en-GB" sz="3000" dirty="0">
+                <a:latin typeface="Consolas"/>
+                <a:ea typeface="Consolas"/>
+                <a:cs typeface="Consolas"/>
+                <a:sym typeface="Consolas"/>
+              </a:rPr>
+              <a:t>Site := </a:t>
+            </a:r>
+            <a:r>
+              <a:rPr lang="en-GB" sz="3000" dirty="0" err="1">
+                <a:latin typeface="Consolas"/>
+                <a:ea typeface="Consolas"/>
+                <a:cs typeface="Consolas"/>
+                <a:sym typeface="Consolas"/>
+              </a:rPr>
+              <a:t>myServeMux</a:t>
+            </a:r>
+            <a:endParaRPr sz="3000" dirty="0">
+              <a:latin typeface="Consolas"/>
+              <a:ea typeface="Consolas"/>
+              <a:cs typeface="Consolas"/>
+              <a:sym typeface="Consolas"/>
+            </a:endParaRPr>
+          </a:p>
+          <a:p>
+            <a:pPr lvl="0"/>
+            <a:r>
+              <a:rPr lang="en-GB" sz="3000" dirty="0">
+                <a:solidFill>
+                  <a:schemeClr val="dk1"/>
+                </a:solidFill>
+                <a:latin typeface="Consolas"/>
+                <a:ea typeface="Consolas"/>
+                <a:cs typeface="Consolas"/>
+                <a:sym typeface="Consolas"/>
+              </a:rPr>
+              <a:t>Site </a:t>
+            </a:r>
+            <a:r>
+              <a:rPr lang="en-GB" sz="3000" dirty="0">
+                <a:latin typeface="Consolas"/>
+                <a:ea typeface="Consolas"/>
+                <a:cs typeface="Consolas"/>
+                <a:sym typeface="Consolas"/>
+              </a:rPr>
+              <a:t>= </a:t>
+            </a:r>
+            <a:r>
+              <a:rPr lang="en-GB" sz="3000" dirty="0" err="1">
+                <a:latin typeface="Consolas"/>
+                <a:ea typeface="Consolas"/>
+                <a:cs typeface="Consolas"/>
+                <a:sym typeface="Consolas"/>
+              </a:rPr>
+              <a:t>checkAuth</a:t>
+            </a:r>
+            <a:r>
+              <a:rPr lang="en-GB" sz="3000" dirty="0">
+                <a:latin typeface="Consolas"/>
+                <a:ea typeface="Consolas"/>
+                <a:cs typeface="Consolas"/>
+                <a:sym typeface="Consolas"/>
+              </a:rPr>
+              <a:t>(Site</a:t>
+            </a:r>
+            <a:r>
+              <a:rPr lang="en-GB" sz="3000" dirty="0">
+                <a:solidFill>
+                  <a:schemeClr val="dk1"/>
+                </a:solidFill>
+                <a:latin typeface="Consolas"/>
+                <a:ea typeface="Consolas"/>
+                <a:cs typeface="Consolas"/>
+                <a:sym typeface="Consolas"/>
+              </a:rPr>
+              <a:t>)</a:t>
+            </a:r>
+            <a:endParaRPr sz="3000" dirty="0">
+              <a:solidFill>
+                <a:schemeClr val="dk1"/>
+              </a:solidFill>
+              <a:latin typeface="Consolas"/>
+              <a:ea typeface="Consolas"/>
+              <a:cs typeface="Consolas"/>
+              <a:sym typeface="Consolas"/>
+            </a:endParaRPr>
+          </a:p>
+          <a:p>
+            <a:pPr lvl="0">
+              <a:buClr>
+                <a:schemeClr val="dk1"/>
+              </a:buClr>
+              <a:buSzPts val="1100"/>
+            </a:pPr>
+            <a:r>
+              <a:rPr lang="en-GB" sz="3000" dirty="0">
+                <a:solidFill>
+                  <a:schemeClr val="dk1"/>
+                </a:solidFill>
+                <a:latin typeface="Consolas"/>
+                <a:ea typeface="Consolas"/>
+                <a:cs typeface="Consolas"/>
+                <a:sym typeface="Consolas"/>
+              </a:rPr>
+              <a:t>Site = </a:t>
+            </a:r>
+            <a:r>
+              <a:rPr lang="en-GB" sz="3000" dirty="0" err="1">
+                <a:solidFill>
+                  <a:schemeClr val="dk1"/>
+                </a:solidFill>
+                <a:latin typeface="Consolas"/>
+                <a:ea typeface="Consolas"/>
+                <a:cs typeface="Consolas"/>
+                <a:sym typeface="Consolas"/>
+              </a:rPr>
+              <a:t>accessLog</a:t>
+            </a:r>
+            <a:r>
+              <a:rPr lang="en-GB" sz="3000" dirty="0">
+                <a:solidFill>
+                  <a:schemeClr val="dk1"/>
+                </a:solidFill>
+                <a:latin typeface="Consolas"/>
+                <a:ea typeface="Consolas"/>
+                <a:cs typeface="Consolas"/>
+                <a:sym typeface="Consolas"/>
+              </a:rPr>
+              <a:t>(</a:t>
+            </a:r>
+            <a:r>
+              <a:rPr lang="en-GB" sz="3000" dirty="0">
+                <a:latin typeface="Consolas"/>
+                <a:ea typeface="Consolas"/>
+                <a:cs typeface="Consolas"/>
+                <a:sym typeface="Consolas"/>
+              </a:rPr>
+              <a:t>Site</a:t>
+            </a:r>
+            <a:r>
+              <a:rPr lang="en-GB" sz="3000" dirty="0">
+                <a:solidFill>
+                  <a:schemeClr val="dk1"/>
+                </a:solidFill>
+                <a:latin typeface="Consolas"/>
+                <a:ea typeface="Consolas"/>
+                <a:cs typeface="Consolas"/>
+                <a:sym typeface="Consolas"/>
+              </a:rPr>
+              <a:t>)</a:t>
+            </a:r>
+            <a:endParaRPr sz="3000" dirty="0">
+              <a:solidFill>
+                <a:schemeClr val="dk1"/>
+              </a:solidFill>
+              <a:latin typeface="Consolas"/>
+              <a:ea typeface="Consolas"/>
+              <a:cs typeface="Consolas"/>
+              <a:sym typeface="Consolas"/>
+            </a:endParaRPr>
+          </a:p>
+          <a:p>
+            <a:pPr lvl="0">
+              <a:buClr>
+                <a:schemeClr val="dk1"/>
+              </a:buClr>
+              <a:buSzPts val="1100"/>
+            </a:pPr>
+            <a:r>
+              <a:rPr lang="en-GB" sz="3000" dirty="0">
+                <a:solidFill>
+                  <a:schemeClr val="dk1"/>
+                </a:solidFill>
+                <a:latin typeface="Consolas"/>
+                <a:ea typeface="Consolas"/>
+                <a:cs typeface="Consolas"/>
+                <a:sym typeface="Consolas"/>
+              </a:rPr>
+              <a:t>Site = </a:t>
+            </a:r>
+            <a:r>
+              <a:rPr lang="en-GB" sz="3000" dirty="0" err="1">
+                <a:solidFill>
+                  <a:schemeClr val="dk1"/>
+                </a:solidFill>
+                <a:latin typeface="Consolas"/>
+                <a:ea typeface="Consolas"/>
+                <a:cs typeface="Consolas"/>
+                <a:sym typeface="Consolas"/>
+              </a:rPr>
+              <a:t>avoidPanic</a:t>
+            </a:r>
+            <a:r>
+              <a:rPr lang="en-GB" sz="3000" dirty="0">
+                <a:solidFill>
+                  <a:schemeClr val="dk1"/>
+                </a:solidFill>
+                <a:latin typeface="Consolas"/>
+                <a:ea typeface="Consolas"/>
+                <a:cs typeface="Consolas"/>
+                <a:sym typeface="Consolas"/>
+              </a:rPr>
+              <a:t>(</a:t>
+            </a:r>
+            <a:r>
+              <a:rPr lang="en-GB" sz="3000" dirty="0">
+                <a:latin typeface="Consolas"/>
+                <a:ea typeface="Consolas"/>
+                <a:cs typeface="Consolas"/>
+                <a:sym typeface="Consolas"/>
+              </a:rPr>
+              <a:t>Site</a:t>
+            </a:r>
+            <a:r>
+              <a:rPr lang="en-GB" sz="3000" dirty="0">
+                <a:solidFill>
+                  <a:schemeClr val="dk1"/>
+                </a:solidFill>
+                <a:latin typeface="Consolas"/>
+                <a:ea typeface="Consolas"/>
+                <a:cs typeface="Consolas"/>
+                <a:sym typeface="Consolas"/>
+              </a:rPr>
+              <a:t>)</a:t>
+            </a:r>
+            <a:endParaRPr sz="3000" dirty="0">
+              <a:solidFill>
+                <a:schemeClr val="dk1"/>
+              </a:solidFill>
+              <a:latin typeface="Consolas"/>
+              <a:ea typeface="Consolas"/>
+              <a:cs typeface="Consolas"/>
+              <a:sym typeface="Consolas"/>
+            </a:endParaRPr>
+          </a:p>
+          <a:p>
+            <a:pPr marL="0" lvl="0" indent="0" algn="l" rtl="0">
+              <a:spcBef>
+                <a:spcPts val="0"/>
+              </a:spcBef>
+              <a:spcAft>
+                <a:spcPts val="0"/>
+              </a:spcAft>
+              <a:buNone/>
+            </a:pPr>
+            <a:endParaRPr sz="3000" dirty="0">
+              <a:solidFill>
+                <a:schemeClr val="dk1"/>
+              </a:solidFill>
+              <a:latin typeface="Consolas"/>
+              <a:ea typeface="Consolas"/>
+              <a:cs typeface="Consolas"/>
+              <a:sym typeface="Consolas"/>
+            </a:endParaRPr>
+          </a:p>
+          <a:p>
+            <a:pPr marL="0" lvl="0" indent="0" algn="l" rtl="0">
+              <a:lnSpc>
+                <a:spcPct val="135714"/>
+              </a:lnSpc>
+              <a:spcBef>
+                <a:spcPts val="0"/>
+              </a:spcBef>
+              <a:spcAft>
+                <a:spcPts val="0"/>
+              </a:spcAft>
+              <a:buClr>
+                <a:schemeClr val="dk1"/>
+              </a:buClr>
+              <a:buSzPts val="1100"/>
+              <a:buFont typeface="Arial"/>
+              <a:buNone/>
+            </a:pPr>
+            <a:r>
+              <a:rPr lang="en-GB" sz="3000" dirty="0" err="1">
+                <a:solidFill>
+                  <a:schemeClr val="dk1"/>
+                </a:solidFill>
+                <a:highlight>
+                  <a:srgbClr val="FFFFFF"/>
+                </a:highlight>
+                <a:latin typeface="Consolas"/>
+                <a:ea typeface="Consolas"/>
+                <a:cs typeface="Consolas"/>
+                <a:sym typeface="Consolas"/>
+              </a:rPr>
+              <a:t>http.ListenAndServe</a:t>
+            </a:r>
+            <a:r>
+              <a:rPr lang="en-GB" sz="3000" dirty="0">
+                <a:solidFill>
+                  <a:schemeClr val="dk1"/>
+                </a:solidFill>
+                <a:highlight>
+                  <a:srgbClr val="FFFFFF"/>
+                </a:highlight>
+                <a:latin typeface="Consolas"/>
+                <a:ea typeface="Consolas"/>
+                <a:cs typeface="Consolas"/>
+                <a:sym typeface="Consolas"/>
+              </a:rPr>
+              <a:t>(</a:t>
+            </a:r>
+            <a:r>
+              <a:rPr lang="en-GB" sz="3000" dirty="0">
+                <a:solidFill>
+                  <a:srgbClr val="A31515"/>
+                </a:solidFill>
+                <a:highlight>
+                  <a:srgbClr val="FFFFFF"/>
+                </a:highlight>
+                <a:latin typeface="Consolas"/>
+                <a:ea typeface="Consolas"/>
+                <a:cs typeface="Consolas"/>
+                <a:sym typeface="Consolas"/>
+              </a:rPr>
+              <a:t>":8080"</a:t>
+            </a:r>
+            <a:r>
+              <a:rPr lang="en-GB" sz="3000" dirty="0">
+                <a:solidFill>
+                  <a:schemeClr val="dk1"/>
+                </a:solidFill>
+                <a:highlight>
+                  <a:srgbClr val="FFFFFF"/>
+                </a:highlight>
+                <a:latin typeface="Consolas"/>
+                <a:ea typeface="Consolas"/>
+                <a:cs typeface="Consolas"/>
+                <a:sym typeface="Consolas"/>
+              </a:rPr>
+              <a:t>, </a:t>
+            </a:r>
+            <a:r>
+              <a:rPr lang="en-GB" sz="3000" dirty="0">
+                <a:solidFill>
+                  <a:schemeClr val="dk1"/>
+                </a:solidFill>
+                <a:latin typeface="Consolas"/>
+                <a:ea typeface="Consolas"/>
+                <a:cs typeface="Consolas"/>
+                <a:sym typeface="Consolas"/>
+              </a:rPr>
+              <a:t>Site</a:t>
+            </a:r>
+            <a:r>
+              <a:rPr lang="en-GB" sz="3000" dirty="0">
+                <a:solidFill>
+                  <a:schemeClr val="dk1"/>
+                </a:solidFill>
+                <a:highlight>
+                  <a:srgbClr val="FFFFFF"/>
+                </a:highlight>
+                <a:latin typeface="Consolas"/>
+                <a:ea typeface="Consolas"/>
+                <a:cs typeface="Consolas"/>
+                <a:sym typeface="Consolas"/>
+              </a:rPr>
+              <a:t>)</a:t>
+            </a:r>
+            <a:endParaRPr sz="3000" dirty="0">
+              <a:solidFill>
+                <a:schemeClr val="dk1"/>
+              </a:solidFill>
+              <a:highlight>
+                <a:srgbClr val="FFFFFF"/>
+              </a:highlight>
+              <a:latin typeface="Consolas"/>
+              <a:ea typeface="Consolas"/>
+              <a:cs typeface="Consolas"/>
+              <a:sym typeface="Consolas"/>
+            </a:endParaRPr>
+          </a:p>
+          <a:p>
+            <a:pPr marL="0" lvl="0" indent="0" algn="l" rtl="0">
+              <a:spcBef>
+                <a:spcPts val="0"/>
+              </a:spcBef>
+              <a:spcAft>
+                <a:spcPts val="0"/>
+              </a:spcAft>
+              <a:buNone/>
+            </a:pPr>
+            <a:endParaRPr sz="3000" dirty="0">
+              <a:solidFill>
+                <a:schemeClr val="dk1"/>
+              </a:solidFill>
+              <a:latin typeface="Consolas"/>
+              <a:ea typeface="Consolas"/>
+              <a:cs typeface="Consolas"/>
+              <a:sym typeface="Consolas"/>
+            </a:endParaRPr>
+          </a:p>
+        </p:txBody>
+      </p:sp>
+    </p:spTree>
+  </p:cSld>
+  <p:clrMapOvr>
+    <a:masterClrMapping/>
+  </p:clrMapOvr>
+</p:sld>
+</file>
+
+<file path=ppt/slides/slide10.xml><?xml version="1.0" encoding="utf-8"?>
+<p:sld xmlns:a="http://schemas.openxmlformats.org/drawingml/2006/main" xmlns:r="http://schemas.openxmlformats.org/officeDocument/2006/relationships" xmlns:p="http://schemas.openxmlformats.org/presentationml/2006/main">
+  <p:cSld>
+    <p:spTree>
+      <p:nvGrpSpPr>
+        <p:cNvPr id="1" name="Shape 117"/>
+        <p:cNvGrpSpPr/>
+        <p:nvPr/>
+      </p:nvGrpSpPr>
+      <p:grpSpPr>
+        <a:xfrm>
+          <a:off x="0" y="0"/>
+          <a:ext cx="0" cy="0"/>
+          <a:chOff x="0" y="0"/>
+          <a:chExt cx="0" cy="0"/>
+        </a:xfrm>
+      </p:grpSpPr>
+      <p:sp>
+        <p:nvSpPr>
+          <p:cNvPr id="118" name="Google Shape;118;p22"/>
+          <p:cNvSpPr txBox="1">
+            <a:spLocks noGrp="1"/>
+          </p:cNvSpPr>
+          <p:nvPr>
+            <p:ph type="title"/>
+          </p:nvPr>
+        </p:nvSpPr>
+        <p:spPr>
+          <a:xfrm>
+            <a:off x="311700" y="791156"/>
+            <a:ext cx="8520600" cy="1018200"/>
+          </a:xfrm>
+          <a:prstGeom prst="rect">
+            <a:avLst/>
+          </a:prstGeom>
+        </p:spPr>
+        <p:txBody>
+          <a:bodyPr spcFirstLastPara="1" wrap="square" lIns="91425" tIns="91425" rIns="91425" bIns="91425" anchor="t" anchorCtr="0">
+            <a:noAutofit/>
+          </a:bodyPr>
+          <a:lstStyle/>
+          <a:p>
+            <a:pPr marL="0" lvl="0" indent="0" algn="l" rtl="0">
+              <a:spcBef>
+                <a:spcPts val="0"/>
+              </a:spcBef>
+              <a:spcAft>
+                <a:spcPts val="0"/>
+              </a:spcAft>
+              <a:buNone/>
+            </a:pPr>
+            <a:r>
+              <a:rPr lang="en-GB" sz="3000"/>
+              <a:t>Анатомия веб-сервиса</a:t>
+            </a:r>
+            <a:endParaRPr sz="3000"/>
+          </a:p>
+        </p:txBody>
+      </p:sp>
+      <p:sp>
+        <p:nvSpPr>
+          <p:cNvPr id="119" name="Google Shape;119;p22"/>
+          <p:cNvSpPr txBox="1">
+            <a:spLocks noGrp="1"/>
+          </p:cNvSpPr>
+          <p:nvPr>
+            <p:ph type="body" idx="1"/>
+          </p:nvPr>
+        </p:nvSpPr>
+        <p:spPr>
+          <a:xfrm>
+            <a:off x="311700" y="2048844"/>
+            <a:ext cx="8520600" cy="6073500"/>
+          </a:xfrm>
+          <a:prstGeom prst="rect">
+            <a:avLst/>
+          </a:prstGeom>
+        </p:spPr>
+        <p:txBody>
+          <a:bodyPr spcFirstLastPara="1" wrap="square" lIns="91425" tIns="91425" rIns="91425" bIns="91425" anchor="t" anchorCtr="0">
+            <a:noAutofit/>
+          </a:bodyPr>
+          <a:lstStyle/>
+          <a:p>
+            <a:pPr marL="457200" lvl="0" indent="-419100" algn="l" rtl="0">
+              <a:spcBef>
+                <a:spcPts val="0"/>
+              </a:spcBef>
+              <a:spcAft>
+                <a:spcPts val="0"/>
+              </a:spcAft>
+              <a:buSzPts val="3000"/>
+              <a:buChar char="●"/>
+            </a:pPr>
+            <a:r>
+              <a:rPr lang="en-GB" sz="3000"/>
+              <a:t>Работа с БД и хранилищами</a:t>
+            </a:r>
+            <a:endParaRPr sz="3000"/>
+          </a:p>
+          <a:p>
+            <a:pPr marL="0" lvl="0" indent="0" algn="l" rtl="0">
+              <a:spcBef>
+                <a:spcPts val="1600"/>
+              </a:spcBef>
+              <a:spcAft>
+                <a:spcPts val="1600"/>
+              </a:spcAft>
+              <a:buNone/>
+            </a:pPr>
+            <a:endParaRPr sz="3000"/>
+          </a:p>
+        </p:txBody>
+      </p:sp>
+      <p:sp>
+        <p:nvSpPr>
+          <p:cNvPr id="120" name="Google Shape;120;p22"/>
+          <p:cNvSpPr txBox="1"/>
+          <p:nvPr/>
+        </p:nvSpPr>
+        <p:spPr>
+          <a:xfrm>
+            <a:off x="708825" y="3237025"/>
+            <a:ext cx="7797300" cy="4885200"/>
+          </a:xfrm>
+          <a:prstGeom prst="rect">
+            <a:avLst/>
+          </a:prstGeom>
+          <a:noFill/>
+          <a:ln>
+            <a:noFill/>
+          </a:ln>
+        </p:spPr>
+        <p:txBody>
+          <a:bodyPr spcFirstLastPara="1" wrap="square" lIns="91425" tIns="91425" rIns="91425" bIns="91425" anchor="t" anchorCtr="0">
+            <a:noAutofit/>
+          </a:bodyPr>
+          <a:lstStyle/>
+          <a:p>
+            <a:pPr marL="0" lvl="0" indent="0" algn="l" rtl="0">
+              <a:spcBef>
+                <a:spcPts val="0"/>
+              </a:spcBef>
+              <a:spcAft>
+                <a:spcPts val="0"/>
+              </a:spcAft>
+              <a:buNone/>
+            </a:pPr>
+            <a:r>
+              <a:rPr lang="en-GB" sz="3000">
+                <a:latin typeface="Consolas"/>
+                <a:ea typeface="Consolas"/>
+                <a:cs typeface="Consolas"/>
+                <a:sym typeface="Consolas"/>
+              </a:rPr>
+              <a:t>SELECT COUNT(*), category_id </a:t>
+            </a:r>
+            <a:endParaRPr sz="3000">
+              <a:latin typeface="Consolas"/>
+              <a:ea typeface="Consolas"/>
+              <a:cs typeface="Consolas"/>
+              <a:sym typeface="Consolas"/>
+            </a:endParaRPr>
+          </a:p>
+          <a:p>
+            <a:pPr marL="0" lvl="0" indent="457200" algn="l" rtl="0">
+              <a:spcBef>
+                <a:spcPts val="0"/>
+              </a:spcBef>
+              <a:spcAft>
+                <a:spcPts val="0"/>
+              </a:spcAft>
+              <a:buNone/>
+            </a:pPr>
+            <a:r>
+              <a:rPr lang="en-GB" sz="3000">
+                <a:latin typeface="Consolas"/>
+                <a:ea typeface="Consolas"/>
+                <a:cs typeface="Consolas"/>
+                <a:sym typeface="Consolas"/>
+              </a:rPr>
+              <a:t>FROM products</a:t>
+            </a:r>
+            <a:endParaRPr sz="3000">
+              <a:latin typeface="Consolas"/>
+              <a:ea typeface="Consolas"/>
+              <a:cs typeface="Consolas"/>
+              <a:sym typeface="Consolas"/>
+            </a:endParaRPr>
+          </a:p>
+          <a:p>
+            <a:pPr marL="0" lvl="0" indent="457200" algn="l" rtl="0">
+              <a:spcBef>
+                <a:spcPts val="0"/>
+              </a:spcBef>
+              <a:spcAft>
+                <a:spcPts val="0"/>
+              </a:spcAft>
+              <a:buNone/>
+            </a:pPr>
+            <a:r>
+              <a:rPr lang="en-GB" sz="3000">
+                <a:latin typeface="Consolas"/>
+                <a:ea typeface="Consolas"/>
+                <a:cs typeface="Consolas"/>
+                <a:sym typeface="Consolas"/>
+              </a:rPr>
+              <a:t>WHERE status = 1</a:t>
+            </a:r>
+            <a:endParaRPr sz="3000">
+              <a:latin typeface="Consolas"/>
+              <a:ea typeface="Consolas"/>
+              <a:cs typeface="Consolas"/>
+              <a:sym typeface="Consolas"/>
+            </a:endParaRPr>
+          </a:p>
+          <a:p>
+            <a:pPr marL="0" lvl="0" indent="457200" algn="l" rtl="0">
+              <a:spcBef>
+                <a:spcPts val="0"/>
+              </a:spcBef>
+              <a:spcAft>
+                <a:spcPts val="0"/>
+              </a:spcAft>
+              <a:buNone/>
+            </a:pPr>
+            <a:r>
+              <a:rPr lang="en-GB" sz="3000">
+                <a:latin typeface="Consolas"/>
+                <a:ea typeface="Consolas"/>
+                <a:cs typeface="Consolas"/>
+                <a:sym typeface="Consolas"/>
+              </a:rPr>
+              <a:t>GROUP BY </a:t>
+            </a:r>
+            <a:r>
+              <a:rPr lang="en-GB" sz="3000">
+                <a:solidFill>
+                  <a:schemeClr val="dk1"/>
+                </a:solidFill>
+                <a:latin typeface="Consolas"/>
+                <a:ea typeface="Consolas"/>
+                <a:cs typeface="Consolas"/>
+                <a:sym typeface="Consolas"/>
+              </a:rPr>
+              <a:t>category_id </a:t>
+            </a:r>
+            <a:endParaRPr sz="3000">
+              <a:latin typeface="Consolas"/>
+              <a:ea typeface="Consolas"/>
+              <a:cs typeface="Consolas"/>
+              <a:sym typeface="Consolas"/>
+            </a:endParaRPr>
+          </a:p>
+        </p:txBody>
+      </p:sp>
+    </p:spTree>
+  </p:cSld>
+  <p:clrMapOvr>
+    <a:masterClrMapping/>
+  </p:clrMapOvr>
+</p:sld>
+</file>
+
+<file path=ppt/slides/slide2.xml><?xml version="1.0" encoding="utf-8"?>
+<p:sld xmlns:a="http://schemas.openxmlformats.org/drawingml/2006/main" xmlns:r="http://schemas.openxmlformats.org/officeDocument/2006/relationships" xmlns:p="http://schemas.openxmlformats.org/presentationml/2006/main">
+  <p:cSld>
+    <p:spTree>
+      <p:nvGrpSpPr>
+        <p:cNvPr id="1" name="Shape 74"/>
+        <p:cNvGrpSpPr/>
+        <p:nvPr/>
+      </p:nvGrpSpPr>
+      <p:grpSpPr>
+        <a:xfrm>
+          <a:off x="0" y="0"/>
+          <a:ext cx="0" cy="0"/>
+          <a:chOff x="0" y="0"/>
+          <a:chExt cx="0" cy="0"/>
+        </a:xfrm>
+      </p:grpSpPr>
+      <p:sp>
+        <p:nvSpPr>
+          <p:cNvPr id="75" name="Google Shape;75;p16"/>
+          <p:cNvSpPr txBox="1">
+            <a:spLocks noGrp="1"/>
+          </p:cNvSpPr>
+          <p:nvPr>
+            <p:ph type="title"/>
+          </p:nvPr>
+        </p:nvSpPr>
+        <p:spPr>
+          <a:xfrm>
+            <a:off x="311700" y="791156"/>
+            <a:ext cx="8520600" cy="1018200"/>
+          </a:xfrm>
+          <a:prstGeom prst="rect">
+            <a:avLst/>
+          </a:prstGeom>
+        </p:spPr>
+        <p:txBody>
+          <a:bodyPr spcFirstLastPara="1" wrap="square" lIns="91425" tIns="91425" rIns="91425" bIns="91425" anchor="t" anchorCtr="0">
+            <a:noAutofit/>
+          </a:bodyPr>
+          <a:lstStyle/>
+          <a:p>
+            <a:pPr marL="0" lvl="0" indent="0" algn="l" rtl="0">
+              <a:spcBef>
+                <a:spcPts val="0"/>
+              </a:spcBef>
+              <a:spcAft>
+                <a:spcPts val="0"/>
+              </a:spcAft>
+              <a:buNone/>
+            </a:pPr>
+            <a:r>
+              <a:rPr lang="en-GB" sz="3000"/>
+              <a:t>Анатомия веб-сервиса</a:t>
+            </a:r>
+            <a:endParaRPr sz="3000"/>
+          </a:p>
+        </p:txBody>
+      </p:sp>
+      <p:sp>
+        <p:nvSpPr>
+          <p:cNvPr id="76" name="Google Shape;76;p16"/>
+          <p:cNvSpPr txBox="1">
+            <a:spLocks noGrp="1"/>
+          </p:cNvSpPr>
+          <p:nvPr>
+            <p:ph type="body" idx="1"/>
+          </p:nvPr>
+        </p:nvSpPr>
+        <p:spPr>
+          <a:xfrm>
+            <a:off x="311700" y="2048844"/>
+            <a:ext cx="8520600" cy="6073500"/>
+          </a:xfrm>
+          <a:prstGeom prst="rect">
+            <a:avLst/>
+          </a:prstGeom>
+        </p:spPr>
+        <p:txBody>
+          <a:bodyPr spcFirstLastPara="1" wrap="square" lIns="91425" tIns="91425" rIns="91425" bIns="91425" anchor="t" anchorCtr="0">
+            <a:noAutofit/>
+          </a:bodyPr>
+          <a:lstStyle/>
+          <a:p>
+            <a:pPr marL="457200" lvl="0" indent="-419100" algn="l" rtl="0">
+              <a:spcBef>
+                <a:spcPts val="0"/>
+              </a:spcBef>
+              <a:spcAft>
+                <a:spcPts val="0"/>
+              </a:spcAft>
+              <a:buSzPts val="3000"/>
+              <a:buChar char="●"/>
+            </a:pPr>
+            <a:r>
+              <a:rPr lang="en-GB" sz="3000"/>
+              <a:t>Обработка ошибок</a:t>
+            </a:r>
+            <a:endParaRPr sz="3000"/>
+          </a:p>
+          <a:p>
+            <a:pPr marL="0" lvl="0" indent="0" algn="l" rtl="0">
+              <a:spcBef>
+                <a:spcPts val="1600"/>
+              </a:spcBef>
+              <a:spcAft>
+                <a:spcPts val="1600"/>
+              </a:spcAft>
+              <a:buNone/>
+            </a:pPr>
+            <a:endParaRPr sz="3000"/>
+          </a:p>
+        </p:txBody>
+      </p:sp>
+      <p:sp>
+        <p:nvSpPr>
+          <p:cNvPr id="77" name="Google Shape;77;p16"/>
+          <p:cNvSpPr txBox="1"/>
+          <p:nvPr/>
+        </p:nvSpPr>
+        <p:spPr>
+          <a:xfrm>
+            <a:off x="708825" y="3237025"/>
+            <a:ext cx="7797300" cy="4885200"/>
+          </a:xfrm>
+          <a:prstGeom prst="rect">
+            <a:avLst/>
+          </a:prstGeom>
+          <a:noFill/>
+          <a:ln>
+            <a:noFill/>
+          </a:ln>
+        </p:spPr>
+        <p:txBody>
+          <a:bodyPr spcFirstLastPara="1" wrap="square" lIns="91425" tIns="91425" rIns="91425" bIns="91425" anchor="t" anchorCtr="0">
+            <a:noAutofit/>
+          </a:bodyPr>
+          <a:lstStyle/>
+          <a:p>
+            <a:pPr marL="0" lvl="0" indent="0" algn="l" rtl="0">
+              <a:lnSpc>
+                <a:spcPct val="135714"/>
+              </a:lnSpc>
+              <a:spcBef>
+                <a:spcPts val="0"/>
+              </a:spcBef>
+              <a:spcAft>
+                <a:spcPts val="0"/>
+              </a:spcAft>
+              <a:buClr>
+                <a:schemeClr val="dk1"/>
+              </a:buClr>
+              <a:buSzPts val="1100"/>
+              <a:buFont typeface="Arial"/>
+              <a:buNone/>
+            </a:pPr>
+            <a:r>
+              <a:rPr lang="en-GB" sz="3000">
+                <a:solidFill>
+                  <a:schemeClr val="dk1"/>
+                </a:solidFill>
+                <a:highlight>
+                  <a:srgbClr val="FFFFFF"/>
+                </a:highlight>
+                <a:latin typeface="Consolas"/>
+                <a:ea typeface="Consolas"/>
+                <a:cs typeface="Consolas"/>
+                <a:sym typeface="Consolas"/>
+              </a:rPr>
+              <a:t>    </a:t>
+            </a:r>
+            <a:r>
+              <a:rPr lang="en-GB" sz="3000">
+                <a:solidFill>
+                  <a:srgbClr val="008000"/>
+                </a:solidFill>
+                <a:highlight>
+                  <a:srgbClr val="FFFFFF"/>
+                </a:highlight>
+                <a:latin typeface="Consolas"/>
+                <a:ea typeface="Consolas"/>
+                <a:cs typeface="Consolas"/>
+                <a:sym typeface="Consolas"/>
+              </a:rPr>
+              <a:t>// не делайте так! :)</a:t>
+            </a:r>
+            <a:endParaRPr sz="3000">
+              <a:solidFill>
+                <a:srgbClr val="008000"/>
+              </a:solidFill>
+              <a:highlight>
+                <a:srgbClr val="FFFFFF"/>
+              </a:highlight>
+              <a:latin typeface="Consolas"/>
+              <a:ea typeface="Consolas"/>
+              <a:cs typeface="Consolas"/>
+              <a:sym typeface="Consolas"/>
+            </a:endParaRPr>
+          </a:p>
+          <a:p>
+            <a:pPr marL="0" lvl="0" indent="0" algn="l" rtl="0">
+              <a:lnSpc>
+                <a:spcPct val="135714"/>
+              </a:lnSpc>
+              <a:spcBef>
+                <a:spcPts val="0"/>
+              </a:spcBef>
+              <a:spcAft>
+                <a:spcPts val="0"/>
+              </a:spcAft>
+              <a:buClr>
+                <a:schemeClr val="dk1"/>
+              </a:buClr>
+              <a:buSzPts val="1100"/>
+              <a:buFont typeface="Arial"/>
+              <a:buNone/>
+            </a:pPr>
+            <a:r>
+              <a:rPr lang="en-GB" sz="3000">
+                <a:solidFill>
+                  <a:schemeClr val="dk1"/>
+                </a:solidFill>
+                <a:highlight>
+                  <a:srgbClr val="FFFFFF"/>
+                </a:highlight>
+                <a:latin typeface="Consolas"/>
+                <a:ea typeface="Consolas"/>
+                <a:cs typeface="Consolas"/>
+                <a:sym typeface="Consolas"/>
+              </a:rPr>
+              <a:t>    </a:t>
+            </a:r>
+            <a:r>
+              <a:rPr lang="en-GB" sz="3000">
+                <a:solidFill>
+                  <a:srgbClr val="0000FF"/>
+                </a:solidFill>
+                <a:highlight>
+                  <a:srgbClr val="FFFFFF"/>
+                </a:highlight>
+                <a:latin typeface="Consolas"/>
+                <a:ea typeface="Consolas"/>
+                <a:cs typeface="Consolas"/>
+                <a:sym typeface="Consolas"/>
+              </a:rPr>
+              <a:t>if</a:t>
+            </a:r>
+            <a:r>
+              <a:rPr lang="en-GB" sz="3000">
+                <a:solidFill>
+                  <a:schemeClr val="dk1"/>
+                </a:solidFill>
+                <a:highlight>
+                  <a:srgbClr val="FFFFFF"/>
+                </a:highlight>
+                <a:latin typeface="Consolas"/>
+                <a:ea typeface="Consolas"/>
+                <a:cs typeface="Consolas"/>
+                <a:sym typeface="Consolas"/>
+              </a:rPr>
+              <a:t> err != </a:t>
+            </a:r>
+            <a:r>
+              <a:rPr lang="en-GB" sz="3000">
+                <a:solidFill>
+                  <a:srgbClr val="0000FF"/>
+                </a:solidFill>
+                <a:highlight>
+                  <a:srgbClr val="FFFFFF"/>
+                </a:highlight>
+                <a:latin typeface="Consolas"/>
+                <a:ea typeface="Consolas"/>
+                <a:cs typeface="Consolas"/>
+                <a:sym typeface="Consolas"/>
+              </a:rPr>
+              <a:t>nil</a:t>
+            </a:r>
+            <a:r>
+              <a:rPr lang="en-GB" sz="3000">
+                <a:solidFill>
+                  <a:schemeClr val="dk1"/>
+                </a:solidFill>
+                <a:highlight>
+                  <a:srgbClr val="FFFFFF"/>
+                </a:highlight>
+                <a:latin typeface="Consolas"/>
+                <a:ea typeface="Consolas"/>
+                <a:cs typeface="Consolas"/>
+                <a:sym typeface="Consolas"/>
+              </a:rPr>
+              <a:t> {</a:t>
+            </a:r>
+            <a:endParaRPr sz="3000">
+              <a:solidFill>
+                <a:schemeClr val="dk1"/>
+              </a:solidFill>
+              <a:highlight>
+                <a:srgbClr val="FFFFFF"/>
+              </a:highlight>
+              <a:latin typeface="Consolas"/>
+              <a:ea typeface="Consolas"/>
+              <a:cs typeface="Consolas"/>
+              <a:sym typeface="Consolas"/>
+            </a:endParaRPr>
+          </a:p>
+          <a:p>
+            <a:pPr marL="0" lvl="0" indent="0" algn="l" rtl="0">
+              <a:lnSpc>
+                <a:spcPct val="135714"/>
+              </a:lnSpc>
+              <a:spcBef>
+                <a:spcPts val="0"/>
+              </a:spcBef>
+              <a:spcAft>
+                <a:spcPts val="0"/>
+              </a:spcAft>
+              <a:buClr>
+                <a:schemeClr val="dk1"/>
+              </a:buClr>
+              <a:buSzPts val="1100"/>
+              <a:buFont typeface="Arial"/>
+              <a:buNone/>
+            </a:pPr>
+            <a:r>
+              <a:rPr lang="en-GB" sz="3000">
+                <a:solidFill>
+                  <a:schemeClr val="dk1"/>
+                </a:solidFill>
+                <a:highlight>
+                  <a:srgbClr val="FFFFFF"/>
+                </a:highlight>
+                <a:latin typeface="Consolas"/>
+                <a:ea typeface="Consolas"/>
+                <a:cs typeface="Consolas"/>
+                <a:sym typeface="Consolas"/>
+              </a:rPr>
+              <a:t>        panic(err)</a:t>
+            </a:r>
+            <a:endParaRPr sz="3000">
+              <a:solidFill>
+                <a:schemeClr val="dk1"/>
+              </a:solidFill>
+              <a:highlight>
+                <a:srgbClr val="FFFFFF"/>
+              </a:highlight>
+              <a:latin typeface="Consolas"/>
+              <a:ea typeface="Consolas"/>
+              <a:cs typeface="Consolas"/>
+              <a:sym typeface="Consolas"/>
+            </a:endParaRPr>
+          </a:p>
+          <a:p>
+            <a:pPr marL="0" lvl="0" indent="0" algn="l" rtl="0">
+              <a:lnSpc>
+                <a:spcPct val="135714"/>
+              </a:lnSpc>
+              <a:spcBef>
+                <a:spcPts val="0"/>
+              </a:spcBef>
+              <a:spcAft>
+                <a:spcPts val="0"/>
+              </a:spcAft>
+              <a:buNone/>
+            </a:pPr>
+            <a:r>
+              <a:rPr lang="en-GB" sz="3000">
+                <a:solidFill>
+                  <a:schemeClr val="dk1"/>
+                </a:solidFill>
+                <a:highlight>
+                  <a:srgbClr val="FFFFFF"/>
+                </a:highlight>
+                <a:latin typeface="Consolas"/>
+                <a:ea typeface="Consolas"/>
+                <a:cs typeface="Consolas"/>
+                <a:sym typeface="Consolas"/>
+              </a:rPr>
+              <a:t>    }</a:t>
+            </a:r>
+            <a:endParaRPr sz="3000">
+              <a:latin typeface="Consolas"/>
+              <a:ea typeface="Consolas"/>
+              <a:cs typeface="Consolas"/>
+              <a:sym typeface="Consolas"/>
+            </a:endParaRPr>
+          </a:p>
+        </p:txBody>
+      </p:sp>
+    </p:spTree>
+  </p:cSld>
+  <p:clrMapOvr>
+    <a:masterClrMapping/>
+  </p:clrMapOvr>
+</p:sld>
+</file>
+
+<file path=ppt/slides/slide3.xml><?xml version="1.0" encoding="utf-8"?>
+<p:sld xmlns:a="http://schemas.openxmlformats.org/drawingml/2006/main" xmlns:r="http://schemas.openxmlformats.org/officeDocument/2006/relationships" xmlns:p="http://schemas.openxmlformats.org/presentationml/2006/main">
+  <p:cSld>
+    <p:spTree>
+      <p:nvGrpSpPr>
+        <p:cNvPr id="1" name="Shape 60"/>
+        <p:cNvGrpSpPr/>
+        <p:nvPr/>
+      </p:nvGrpSpPr>
+      <p:grpSpPr>
+        <a:xfrm>
+          <a:off x="0" y="0"/>
+          <a:ext cx="0" cy="0"/>
+          <a:chOff x="0" y="0"/>
+          <a:chExt cx="0" cy="0"/>
+        </a:xfrm>
+      </p:grpSpPr>
+      <p:sp>
+        <p:nvSpPr>
+          <p:cNvPr id="61" name="Google Shape;61;p14"/>
+          <p:cNvSpPr txBox="1">
+            <a:spLocks noGrp="1"/>
+          </p:cNvSpPr>
+          <p:nvPr>
+            <p:ph type="title"/>
+          </p:nvPr>
+        </p:nvSpPr>
+        <p:spPr>
+          <a:xfrm>
+            <a:off x="311700" y="791156"/>
+            <a:ext cx="8520600" cy="1018200"/>
+          </a:xfrm>
+          <a:prstGeom prst="rect">
+            <a:avLst/>
+          </a:prstGeom>
+        </p:spPr>
+        <p:txBody>
+          <a:bodyPr spcFirstLastPara="1" wrap="square" lIns="91425" tIns="91425" rIns="91425" bIns="91425" anchor="t" anchorCtr="0">
+            <a:noAutofit/>
+          </a:bodyPr>
+          <a:lstStyle/>
+          <a:p>
+            <a:pPr marL="0" lvl="0" indent="0" algn="l" rtl="0">
+              <a:spcBef>
+                <a:spcPts val="0"/>
+              </a:spcBef>
+              <a:spcAft>
+                <a:spcPts val="0"/>
+              </a:spcAft>
+              <a:buNone/>
+            </a:pPr>
+            <a:r>
+              <a:rPr lang="en-GB" sz="3000"/>
+              <a:t>Анатомия веб-сервиса</a:t>
+            </a:r>
+            <a:endParaRPr sz="3000"/>
+          </a:p>
+        </p:txBody>
+      </p:sp>
+      <p:sp>
+        <p:nvSpPr>
+          <p:cNvPr id="62" name="Google Shape;62;p14"/>
+          <p:cNvSpPr txBox="1">
+            <a:spLocks noGrp="1"/>
+          </p:cNvSpPr>
+          <p:nvPr>
+            <p:ph type="body" idx="1"/>
+          </p:nvPr>
+        </p:nvSpPr>
+        <p:spPr>
+          <a:xfrm>
+            <a:off x="311700" y="2048844"/>
+            <a:ext cx="8520600" cy="6073500"/>
+          </a:xfrm>
+          <a:prstGeom prst="rect">
+            <a:avLst/>
+          </a:prstGeom>
+        </p:spPr>
+        <p:txBody>
+          <a:bodyPr spcFirstLastPara="1" wrap="square" lIns="91425" tIns="91425" rIns="91425" bIns="91425" anchor="t" anchorCtr="0">
+            <a:noAutofit/>
+          </a:bodyPr>
+          <a:lstStyle/>
+          <a:p>
+            <a:pPr marL="457200" lvl="0" indent="-419100" algn="l" rtl="0">
+              <a:spcBef>
+                <a:spcPts val="0"/>
+              </a:spcBef>
+              <a:spcAft>
+                <a:spcPts val="0"/>
+              </a:spcAft>
+              <a:buSzPts val="3000"/>
+              <a:buChar char="●"/>
+            </a:pPr>
+            <a:r>
+              <a:rPr lang="en-GB" sz="3000"/>
+              <a:t>Авторизация / аутентификация</a:t>
+            </a:r>
+            <a:endParaRPr sz="3000"/>
+          </a:p>
+          <a:p>
+            <a:pPr marL="0" lvl="0" indent="0" algn="l" rtl="0">
+              <a:spcBef>
+                <a:spcPts val="1600"/>
+              </a:spcBef>
+              <a:spcAft>
+                <a:spcPts val="1600"/>
+              </a:spcAft>
+              <a:buNone/>
+            </a:pPr>
+            <a:endParaRPr sz="3000"/>
+          </a:p>
+        </p:txBody>
+      </p:sp>
+      <p:sp>
+        <p:nvSpPr>
+          <p:cNvPr id="63" name="Google Shape;63;p14"/>
+          <p:cNvSpPr txBox="1"/>
+          <p:nvPr/>
+        </p:nvSpPr>
+        <p:spPr>
+          <a:xfrm>
+            <a:off x="708825" y="3237025"/>
+            <a:ext cx="7797300" cy="4885200"/>
+          </a:xfrm>
+          <a:prstGeom prst="rect">
+            <a:avLst/>
+          </a:prstGeom>
+          <a:noFill/>
+          <a:ln>
+            <a:noFill/>
+          </a:ln>
+        </p:spPr>
+        <p:txBody>
+          <a:bodyPr spcFirstLastPara="1" wrap="square" lIns="91425" tIns="91425" rIns="91425" bIns="91425" anchor="t" anchorCtr="0">
+            <a:noAutofit/>
+          </a:bodyPr>
+          <a:lstStyle/>
+          <a:p>
+            <a:pPr marL="0" lvl="0" indent="0" algn="l" rtl="0">
+              <a:spcBef>
+                <a:spcPts val="0"/>
+              </a:spcBef>
+              <a:spcAft>
+                <a:spcPts val="0"/>
+              </a:spcAft>
+              <a:buClr>
+                <a:schemeClr val="dk1"/>
+              </a:buClr>
+              <a:buSzPts val="1100"/>
+              <a:buFont typeface="Arial"/>
+              <a:buNone/>
+            </a:pPr>
+            <a:r>
+              <a:rPr lang="en-GB" sz="3000">
+                <a:latin typeface="Consolas"/>
+                <a:ea typeface="Consolas"/>
+                <a:cs typeface="Consolas"/>
+                <a:sym typeface="Consolas"/>
+              </a:rPr>
+              <a:t>&gt; GET /secret_url HTTP/1.1</a:t>
+            </a:r>
+            <a:endParaRPr sz="3000">
+              <a:latin typeface="Consolas"/>
+              <a:ea typeface="Consolas"/>
+              <a:cs typeface="Consolas"/>
+              <a:sym typeface="Consolas"/>
+            </a:endParaRPr>
+          </a:p>
+          <a:p>
+            <a:pPr marL="0" lvl="0" indent="0" algn="l" rtl="0">
+              <a:spcBef>
+                <a:spcPts val="0"/>
+              </a:spcBef>
+              <a:spcAft>
+                <a:spcPts val="0"/>
+              </a:spcAft>
+              <a:buClr>
+                <a:schemeClr val="dk1"/>
+              </a:buClr>
+              <a:buSzPts val="1100"/>
+              <a:buFont typeface="Arial"/>
+              <a:buNone/>
+            </a:pPr>
+            <a:r>
+              <a:rPr lang="en-GB" sz="3000">
+                <a:latin typeface="Consolas"/>
+                <a:ea typeface="Consolas"/>
+                <a:cs typeface="Consolas"/>
+                <a:sym typeface="Consolas"/>
+              </a:rPr>
+              <a:t>&gt; Host: localhost:8081</a:t>
+            </a:r>
+            <a:endParaRPr sz="3000">
+              <a:latin typeface="Consolas"/>
+              <a:ea typeface="Consolas"/>
+              <a:cs typeface="Consolas"/>
+              <a:sym typeface="Consolas"/>
+            </a:endParaRPr>
+          </a:p>
+          <a:p>
+            <a:pPr marL="0" lvl="0" indent="0" algn="l" rtl="0">
+              <a:spcBef>
+                <a:spcPts val="0"/>
+              </a:spcBef>
+              <a:spcAft>
+                <a:spcPts val="0"/>
+              </a:spcAft>
+              <a:buClr>
+                <a:schemeClr val="dk1"/>
+              </a:buClr>
+              <a:buSzPts val="1100"/>
+              <a:buFont typeface="Arial"/>
+              <a:buNone/>
+            </a:pPr>
+            <a:r>
+              <a:rPr lang="en-GB" sz="3000">
+                <a:latin typeface="Consolas"/>
+                <a:ea typeface="Consolas"/>
+                <a:cs typeface="Consolas"/>
+                <a:sym typeface="Consolas"/>
+              </a:rPr>
+              <a:t>&gt; Accept: */*</a:t>
+            </a:r>
+            <a:endParaRPr sz="3000">
+              <a:latin typeface="Consolas"/>
+              <a:ea typeface="Consolas"/>
+              <a:cs typeface="Consolas"/>
+              <a:sym typeface="Consolas"/>
+            </a:endParaRPr>
+          </a:p>
+          <a:p>
+            <a:pPr marL="0" lvl="0" indent="0" algn="l" rtl="0">
+              <a:spcBef>
+                <a:spcPts val="0"/>
+              </a:spcBef>
+              <a:spcAft>
+                <a:spcPts val="0"/>
+              </a:spcAft>
+              <a:buClr>
+                <a:schemeClr val="dk1"/>
+              </a:buClr>
+              <a:buSzPts val="1100"/>
+              <a:buFont typeface="Arial"/>
+              <a:buNone/>
+            </a:pPr>
+            <a:r>
+              <a:rPr lang="en-GB" sz="3000">
+                <a:latin typeface="Consolas"/>
+                <a:ea typeface="Consolas"/>
+                <a:cs typeface="Consolas"/>
+                <a:sym typeface="Consolas"/>
+              </a:rPr>
+              <a:t>&gt; Content-Type: application/json</a:t>
+            </a:r>
+            <a:endParaRPr sz="3000">
+              <a:latin typeface="Consolas"/>
+              <a:ea typeface="Consolas"/>
+              <a:cs typeface="Consolas"/>
+              <a:sym typeface="Consolas"/>
+            </a:endParaRPr>
+          </a:p>
+          <a:p>
+            <a:pPr marL="0" lvl="0" indent="0" algn="l" rtl="0">
+              <a:spcBef>
+                <a:spcPts val="0"/>
+              </a:spcBef>
+              <a:spcAft>
+                <a:spcPts val="0"/>
+              </a:spcAft>
+              <a:buClr>
+                <a:schemeClr val="dk1"/>
+              </a:buClr>
+              <a:buSzPts val="1100"/>
+              <a:buFont typeface="Arial"/>
+              <a:buNone/>
+            </a:pPr>
+            <a:r>
+              <a:rPr lang="en-GB" sz="3000">
+                <a:latin typeface="Consolas"/>
+                <a:ea typeface="Consolas"/>
+                <a:cs typeface="Consolas"/>
+                <a:sym typeface="Consolas"/>
+              </a:rPr>
+              <a:t>&gt; X-Access-Token: 695a19177a2760MzY3</a:t>
+            </a:r>
+            <a:endParaRPr sz="3000">
+              <a:latin typeface="Consolas"/>
+              <a:ea typeface="Consolas"/>
+              <a:cs typeface="Consolas"/>
+              <a:sym typeface="Consolas"/>
+            </a:endParaRPr>
+          </a:p>
+          <a:p>
+            <a:pPr marL="0" lvl="0" indent="0" algn="l" rtl="0">
+              <a:spcBef>
+                <a:spcPts val="0"/>
+              </a:spcBef>
+              <a:spcAft>
+                <a:spcPts val="0"/>
+              </a:spcAft>
+              <a:buClr>
+                <a:schemeClr val="dk1"/>
+              </a:buClr>
+              <a:buSzPts val="1100"/>
+              <a:buFont typeface="Arial"/>
+              <a:buNone/>
+            </a:pPr>
+            <a:endParaRPr sz="3000">
+              <a:latin typeface="Consolas"/>
+              <a:ea typeface="Consolas"/>
+              <a:cs typeface="Consolas"/>
+              <a:sym typeface="Consolas"/>
+            </a:endParaRPr>
+          </a:p>
+          <a:p>
+            <a:pPr marL="0" lvl="0" indent="0" algn="l" rtl="0">
+              <a:spcBef>
+                <a:spcPts val="0"/>
+              </a:spcBef>
+              <a:spcAft>
+                <a:spcPts val="0"/>
+              </a:spcAft>
+              <a:buClr>
+                <a:schemeClr val="dk1"/>
+              </a:buClr>
+              <a:buSzPts val="1100"/>
+              <a:buFont typeface="Arial"/>
+              <a:buNone/>
+            </a:pPr>
+            <a:r>
+              <a:rPr lang="en-GB" sz="3000">
+                <a:latin typeface="Consolas"/>
+                <a:ea typeface="Consolas"/>
+                <a:cs typeface="Consolas"/>
+                <a:sym typeface="Consolas"/>
+              </a:rPr>
+              <a:t>&lt; HTTP/1.1 401 Unauthorized</a:t>
+            </a:r>
+            <a:endParaRPr sz="3000">
+              <a:latin typeface="Consolas"/>
+              <a:ea typeface="Consolas"/>
+              <a:cs typeface="Consolas"/>
+              <a:sym typeface="Consolas"/>
+            </a:endParaRPr>
+          </a:p>
+          <a:p>
+            <a:pPr marL="0" lvl="0" indent="0" algn="l" rtl="0">
+              <a:spcBef>
+                <a:spcPts val="0"/>
+              </a:spcBef>
+              <a:spcAft>
+                <a:spcPts val="0"/>
+              </a:spcAft>
+              <a:buClr>
+                <a:schemeClr val="dk1"/>
+              </a:buClr>
+              <a:buSzPts val="1100"/>
+              <a:buFont typeface="Arial"/>
+              <a:buNone/>
+            </a:pPr>
+            <a:r>
+              <a:rPr lang="en-GB" sz="3000">
+                <a:latin typeface="Consolas"/>
+                <a:ea typeface="Consolas"/>
+                <a:cs typeface="Consolas"/>
+                <a:sym typeface="Consolas"/>
+              </a:rPr>
+              <a:t>&lt; Content-Type: application/json</a:t>
+            </a:r>
+            <a:endParaRPr sz="3000">
+              <a:latin typeface="Consolas"/>
+              <a:ea typeface="Consolas"/>
+              <a:cs typeface="Consolas"/>
+              <a:sym typeface="Consolas"/>
+            </a:endParaRPr>
+          </a:p>
+          <a:p>
+            <a:pPr marL="0" lvl="0" indent="0" algn="l" rtl="0">
+              <a:spcBef>
+                <a:spcPts val="0"/>
+              </a:spcBef>
+              <a:spcAft>
+                <a:spcPts val="0"/>
+              </a:spcAft>
+              <a:buClr>
+                <a:schemeClr val="dk1"/>
+              </a:buClr>
+              <a:buSzPts val="1100"/>
+              <a:buFont typeface="Arial"/>
+              <a:buNone/>
+            </a:pPr>
+            <a:r>
+              <a:rPr lang="en-GB" sz="3000">
+                <a:latin typeface="Consolas"/>
+                <a:ea typeface="Consolas"/>
+                <a:cs typeface="Consolas"/>
+                <a:sym typeface="Consolas"/>
+              </a:rPr>
+              <a:t>{"error":"invalid token"}</a:t>
+            </a:r>
+            <a:endParaRPr sz="3000">
+              <a:latin typeface="Consolas"/>
+              <a:ea typeface="Consolas"/>
+              <a:cs typeface="Consolas"/>
+              <a:sym typeface="Consolas"/>
+            </a:endParaRPr>
+          </a:p>
+          <a:p>
+            <a:pPr marL="0" lvl="0" indent="0" algn="l" rtl="0">
+              <a:spcBef>
+                <a:spcPts val="0"/>
+              </a:spcBef>
+              <a:spcAft>
+                <a:spcPts val="0"/>
+              </a:spcAft>
+              <a:buNone/>
+            </a:pPr>
+            <a:endParaRPr/>
+          </a:p>
+        </p:txBody>
+      </p:sp>
+    </p:spTree>
+  </p:cSld>
+  <p:clrMapOvr>
+    <a:masterClrMapping/>
+  </p:clrMapOvr>
+</p:sld>
+</file>
+
+<file path=ppt/slides/slide4.xml><?xml version="1.0" encoding="utf-8"?>
+<p:sld xmlns:a="http://schemas.openxmlformats.org/drawingml/2006/main" xmlns:r="http://schemas.openxmlformats.org/officeDocument/2006/relationships" xmlns:p="http://schemas.openxmlformats.org/presentationml/2006/main">
+  <p:cSld>
+    <p:spTree>
+      <p:nvGrpSpPr>
+        <p:cNvPr id="1" name="Shape 53"/>
         <p:cNvGrpSpPr/>
         <p:nvPr/>
       </p:nvGrpSpPr>
@@ -6338,7 +8150,9 @@
       <p:sp>
         <p:nvSpPr>
           <p:cNvPr id="54" name="Google Shape;54;p13"/>
-          <p:cNvSpPr txBox="1"/>
+          <p:cNvSpPr txBox="1">
+            <a:spLocks noGrp="1"/>
+          </p:cNvSpPr>
           <p:nvPr>
             <p:ph type="title"/>
           </p:nvPr>
@@ -6353,12 +8167,12 @@
           </a:prstGeom>
         </p:spPr>
         <p:txBody>
-          <a:bodyPr anchorCtr="0" anchor="t" bIns="91425" lIns="91425" spcFirstLastPara="1" rIns="91425" wrap="square" tIns="91425">
+          <a:bodyPr spcFirstLastPara="1" wrap="square" lIns="91425" tIns="91425" rIns="91425" bIns="91425" anchor="t" anchorCtr="0">
             <a:noAutofit/>
           </a:bodyPr>
           <a:lstStyle/>
           <a:p>
-            <a:pPr indent="0" lvl="0" marL="0" rtl="0" algn="l">
+            <a:pPr marL="0" lvl="0" indent="0" algn="l" rtl="0">
               <a:spcBef>
                 <a:spcPts val="0"/>
               </a:spcBef>
@@ -6378,9 +8192,11 @@
       <p:sp>
         <p:nvSpPr>
           <p:cNvPr id="55" name="Google Shape;55;p13"/>
-          <p:cNvSpPr txBox="1"/>
+          <p:cNvSpPr txBox="1">
+            <a:spLocks noGrp="1"/>
+          </p:cNvSpPr>
           <p:nvPr>
-            <p:ph idx="1" type="body"/>
+            <p:ph type="body" idx="1"/>
           </p:nvPr>
         </p:nvSpPr>
         <p:spPr>
@@ -6393,12 +8209,12 @@
           </a:prstGeom>
         </p:spPr>
         <p:txBody>
-          <a:bodyPr anchorCtr="0" anchor="t" bIns="91425" lIns="91425" spcFirstLastPara="1" rIns="91425" wrap="square" tIns="91425">
+          <a:bodyPr spcFirstLastPara="1" wrap="square" lIns="91425" tIns="91425" rIns="91425" bIns="91425" anchor="t" anchorCtr="0">
             <a:noAutofit/>
           </a:bodyPr>
           <a:lstStyle/>
           <a:p>
-            <a:pPr indent="-419100" lvl="0" marL="457200" rtl="0" algn="l">
+            <a:pPr marL="457200" lvl="0" indent="-419100" algn="l" rtl="0">
               <a:spcBef>
                 <a:spcPts val="0"/>
               </a:spcBef>
@@ -6415,7 +8231,7 @@
             <a:endParaRPr sz="3000"/>
           </a:p>
           <a:p>
-            <a:pPr indent="0" lvl="0" marL="0" rtl="0" algn="l">
+            <a:pPr marL="0" lvl="0" indent="0" algn="l" rtl="0">
               <a:spcBef>
                 <a:spcPts val="1600"/>
               </a:spcBef>
@@ -6424,9 +8240,6 @@
               </a:spcAft>
               <a:buNone/>
             </a:pPr>
-            <a:r>
-              <a:t/>
-            </a:r>
             <a:endParaRPr sz="3000"/>
           </a:p>
         </p:txBody>
@@ -6451,12 +8264,12 @@
           </a:ln>
         </p:spPr>
         <p:txBody>
-          <a:bodyPr anchorCtr="0" anchor="t" bIns="91425" lIns="91425" spcFirstLastPara="1" rIns="91425" wrap="square" tIns="91425">
+          <a:bodyPr spcFirstLastPara="1" wrap="square" lIns="91425" tIns="91425" rIns="91425" bIns="91425" anchor="t" anchorCtr="0">
             <a:noAutofit/>
           </a:bodyPr>
           <a:lstStyle/>
           <a:p>
-            <a:pPr indent="0" lvl="0" marL="0" rtl="0" algn="l">
+            <a:pPr marL="0" lvl="0" indent="0" algn="l" rtl="0">
               <a:lnSpc>
                 <a:spcPct val="135714"/>
               </a:lnSpc>
@@ -6497,7 +8310,7 @@
             </a:endParaRPr>
           </a:p>
           <a:p>
-            <a:pPr indent="457200" lvl="0" marL="0" rtl="0" algn="l">
+            <a:pPr marL="0" lvl="0" indent="457200" algn="l" rtl="0">
               <a:lnSpc>
                 <a:spcPct val="135714"/>
               </a:lnSpc>
@@ -6538,7 +8351,7 @@
             </a:endParaRPr>
           </a:p>
           <a:p>
-            <a:pPr indent="0" lvl="0" marL="0" rtl="0" algn="l">
+            <a:pPr marL="0" lvl="0" indent="0" algn="l" rtl="0">
               <a:lnSpc>
                 <a:spcPct val="135714"/>
               </a:lnSpc>
@@ -6550,9 +8363,6 @@
               </a:spcAft>
               <a:buNone/>
             </a:pPr>
-            <a:r>
-              <a:t/>
-            </a:r>
             <a:endParaRPr sz="3000">
               <a:solidFill>
                 <a:schemeClr val="dk1"/>
@@ -6567,7 +8377,7 @@
             </a:endParaRPr>
           </a:p>
           <a:p>
-            <a:pPr indent="0" lvl="0" marL="0" rtl="0" algn="l">
+            <a:pPr marL="0" lvl="0" indent="0" algn="l" rtl="0">
               <a:lnSpc>
                 <a:spcPct val="135714"/>
               </a:lnSpc>
@@ -6608,7 +8418,7 @@
             </a:endParaRPr>
           </a:p>
           <a:p>
-            <a:pPr indent="457200" lvl="0" marL="0" rtl="0" algn="l">
+            <a:pPr marL="0" lvl="0" indent="457200" algn="l" rtl="0">
               <a:lnSpc>
                 <a:spcPct val="135714"/>
               </a:lnSpc>
@@ -6664,7 +8474,7 @@
             </a:endParaRPr>
           </a:p>
           <a:p>
-            <a:pPr indent="457200" lvl="0" marL="0" rtl="0" algn="l">
+            <a:pPr marL="0" lvl="0" indent="457200" algn="l" rtl="0">
               <a:lnSpc>
                 <a:spcPct val="135714"/>
               </a:lnSpc>
@@ -6705,7 +8515,7 @@
             </a:endParaRPr>
           </a:p>
           <a:p>
-            <a:pPr indent="0" lvl="0" marL="0" rtl="0" algn="l">
+            <a:pPr marL="0" lvl="0" indent="0" algn="l" rtl="0">
               <a:lnSpc>
                 <a:spcPct val="135714"/>
               </a:lnSpc>
@@ -6749,12 +8559,12 @@
 </p:sld>
 </file>
 
-<file path=ppt/slides/slide10.xml><?xml version="1.0" encoding="utf-8"?>
-<p:sld xmlns:a="http://schemas.openxmlformats.org/drawingml/2006/main" xmlns:r="http://schemas.openxmlformats.org/officeDocument/2006/relationships" xmlns:mc="http://schemas.openxmlformats.org/markup-compatibility/2006" xmlns:mv="urn:schemas-microsoft-com:mac:vml" xmlns:p="http://schemas.openxmlformats.org/presentationml/2006/main" xmlns:c="http://schemas.openxmlformats.org/drawingml/2006/chart" xmlns:dgm="http://schemas.openxmlformats.org/drawingml/2006/diagram" xmlns:o="urn:schemas-microsoft-com:office:office" xmlns:v="urn:schemas-microsoft-com:vml" xmlns:pvml="urn:schemas-microsoft-com:office:powerpoint" xmlns:com="http://schemas.openxmlformats.org/drawingml/2006/compatibility" xmlns:p14="http://schemas.microsoft.com/office/powerpoint/2010/main" xmlns:p15="http://schemas.microsoft.com/office/powerpoint/2012/main" xmlns:ahyp="http://schemas.microsoft.com/office/drawing/2018/hyperlinkcolor">
+<file path=ppt/slides/slide5.xml><?xml version="1.0" encoding="utf-8"?>
+<p:sld xmlns:a="http://schemas.openxmlformats.org/drawingml/2006/main" xmlns:r="http://schemas.openxmlformats.org/officeDocument/2006/relationships" xmlns:p="http://schemas.openxmlformats.org/presentationml/2006/main">
   <p:cSld>
     <p:spTree>
       <p:nvGrpSpPr>
-        <p:cNvPr id="117" name="Shape 117"/>
+        <p:cNvPr id="1" name="Shape 81"/>
         <p:cNvGrpSpPr/>
         <p:nvPr/>
       </p:nvGrpSpPr>
@@ -6768,8 +8578,10 @@
       </p:grpSpPr>
       <p:sp>
         <p:nvSpPr>
-          <p:cNvPr id="118" name="Google Shape;118;p22"/>
-          <p:cNvSpPr txBox="1"/>
+          <p:cNvPr id="82" name="Google Shape;82;p17"/>
+          <p:cNvSpPr txBox="1">
+            <a:spLocks noGrp="1"/>
+          </p:cNvSpPr>
           <p:nvPr>
             <p:ph type="title"/>
           </p:nvPr>
@@ -6784,12 +8596,12 @@
           </a:prstGeom>
         </p:spPr>
         <p:txBody>
-          <a:bodyPr anchorCtr="0" anchor="t" bIns="91425" lIns="91425" spcFirstLastPara="1" rIns="91425" wrap="square" tIns="91425">
+          <a:bodyPr spcFirstLastPara="1" wrap="square" lIns="91425" tIns="91425" rIns="91425" bIns="91425" anchor="t" anchorCtr="0">
             <a:noAutofit/>
           </a:bodyPr>
           <a:lstStyle/>
           <a:p>
-            <a:pPr indent="0" lvl="0" marL="0" rtl="0" algn="l">
+            <a:pPr marL="0" lvl="0" indent="0" algn="l" rtl="0">
               <a:spcBef>
                 <a:spcPts val="0"/>
               </a:spcBef>
@@ -6808,10 +8620,12 @@
       </p:sp>
       <p:sp>
         <p:nvSpPr>
-          <p:cNvPr id="119" name="Google Shape;119;p22"/>
-          <p:cNvSpPr txBox="1"/>
+          <p:cNvPr id="83" name="Google Shape;83;p17"/>
+          <p:cNvSpPr txBox="1">
+            <a:spLocks noGrp="1"/>
+          </p:cNvSpPr>
           <p:nvPr>
-            <p:ph idx="1" type="body"/>
+            <p:ph type="body" idx="1"/>
           </p:nvPr>
         </p:nvSpPr>
         <p:spPr>
@@ -6824,12 +8638,12 @@
           </a:prstGeom>
         </p:spPr>
         <p:txBody>
-          <a:bodyPr anchorCtr="0" anchor="t" bIns="91425" lIns="91425" spcFirstLastPara="1" rIns="91425" wrap="square" tIns="91425">
+          <a:bodyPr spcFirstLastPara="1" wrap="square" lIns="91425" tIns="91425" rIns="91425" bIns="91425" anchor="t" anchorCtr="0">
             <a:noAutofit/>
           </a:bodyPr>
           <a:lstStyle/>
           <a:p>
-            <a:pPr indent="-419100" lvl="0" marL="457200" rtl="0" algn="l">
+            <a:pPr marL="457200" lvl="0" indent="-419100" algn="l" rtl="0">
               <a:spcBef>
                 <a:spcPts val="0"/>
               </a:spcBef>
@@ -6841,12 +8655,12 @@
             </a:pPr>
             <a:r>
               <a:rPr lang="en-GB" sz="3000"/>
-              <a:t>Работа с БД и хранилищами</a:t>
+              <a:t>Валидация входных параметров</a:t>
             </a:r>
             <a:endParaRPr sz="3000"/>
           </a:p>
           <a:p>
-            <a:pPr indent="0" lvl="0" marL="0" rtl="0" algn="l">
+            <a:pPr marL="0" lvl="0" indent="0" algn="l" rtl="0">
               <a:spcBef>
                 <a:spcPts val="1600"/>
               </a:spcBef>
@@ -6855,16 +8669,13 @@
               </a:spcAft>
               <a:buNone/>
             </a:pPr>
-            <a:r>
-              <a:t/>
-            </a:r>
             <a:endParaRPr sz="3000"/>
           </a:p>
         </p:txBody>
       </p:sp>
       <p:sp>
         <p:nvSpPr>
-          <p:cNvPr id="120" name="Google Shape;120;p22"/>
+          <p:cNvPr id="84" name="Google Shape;84;p17"/>
           <p:cNvSpPr txBox="1"/>
           <p:nvPr/>
         </p:nvSpPr>
@@ -6882,18 +8693,23 @@
           </a:ln>
         </p:spPr>
         <p:txBody>
-          <a:bodyPr anchorCtr="0" anchor="t" bIns="91425" lIns="91425" spcFirstLastPara="1" rIns="91425" wrap="square" tIns="91425">
+          <a:bodyPr spcFirstLastPara="1" wrap="square" lIns="91425" tIns="91425" rIns="91425" bIns="91425" anchor="t" anchorCtr="0">
             <a:noAutofit/>
           </a:bodyPr>
           <a:lstStyle/>
           <a:p>
-            <a:pPr indent="0" lvl="0" marL="0" rtl="0" algn="l">
-              <a:spcBef>
-                <a:spcPts val="0"/>
-              </a:spcBef>
-              <a:spcAft>
-                <a:spcPts val="0"/>
-              </a:spcAft>
+            <a:pPr marL="0" lvl="0" indent="0" algn="l" rtl="0">
+              <a:spcBef>
+                <a:spcPts val="0"/>
+              </a:spcBef>
+              <a:spcAft>
+                <a:spcPts val="0"/>
+              </a:spcAft>
+              <a:buClr>
+                <a:schemeClr val="dk1"/>
+              </a:buClr>
+              <a:buSzPts val="1100"/>
+              <a:buFont typeface="Arial"/>
               <a:buNone/>
             </a:pPr>
             <a:r>
@@ -6903,7 +8719,7 @@
                 <a:cs typeface="Consolas"/>
                 <a:sym typeface="Consolas"/>
               </a:rPr>
-              <a:t>SELECT COUNT(*), category_id </a:t>
+              <a:t>&gt; GET /post?id=’ddfr</a:t>
             </a:r>
             <a:endParaRPr sz="3000">
               <a:latin typeface="Consolas"/>
@@ -6913,7 +8729,7 @@
             </a:endParaRPr>
           </a:p>
           <a:p>
-            <a:pPr indent="457200" lvl="0" marL="0" rtl="0" algn="l">
+            <a:pPr marL="0" lvl="0" indent="0" algn="l" rtl="0">
               <a:spcBef>
                 <a:spcPts val="0"/>
               </a:spcBef>
@@ -6929,7 +8745,7 @@
                 <a:cs typeface="Consolas"/>
                 <a:sym typeface="Consolas"/>
               </a:rPr>
-              <a:t>FROM products</a:t>
+              <a:t>&lt; {"error":"id invalid, want int"}</a:t>
             </a:r>
             <a:endParaRPr sz="3000">
               <a:latin typeface="Consolas"/>
@@ -6939,24 +8755,15 @@
             </a:endParaRPr>
           </a:p>
           <a:p>
-            <a:pPr indent="457200" lvl="0" marL="0" rtl="0" algn="l">
-              <a:spcBef>
-                <a:spcPts val="0"/>
-              </a:spcBef>
-              <a:spcAft>
-                <a:spcPts val="0"/>
-              </a:spcAft>
-              <a:buNone/>
-            </a:pPr>
-            <a:r>
-              <a:rPr lang="en-GB" sz="3000">
-                <a:latin typeface="Consolas"/>
-                <a:ea typeface="Consolas"/>
-                <a:cs typeface="Consolas"/>
-                <a:sym typeface="Consolas"/>
-              </a:rPr>
-              <a:t>WHERE status = 1</a:t>
-            </a:r>
+            <a:pPr marL="0" lvl="0" indent="0" algn="l" rtl="0">
+              <a:spcBef>
+                <a:spcPts val="0"/>
+              </a:spcBef>
+              <a:spcAft>
+                <a:spcPts val="0"/>
+              </a:spcAft>
+              <a:buNone/>
+            </a:pPr>
             <a:endParaRPr sz="3000">
               <a:latin typeface="Consolas"/>
               <a:ea typeface="Consolas"/>
@@ -6965,7 +8772,24 @@
             </a:endParaRPr>
           </a:p>
           <a:p>
-            <a:pPr indent="457200" lvl="0" marL="0" rtl="0" algn="l">
+            <a:pPr marL="0" lvl="0" indent="0" algn="l" rtl="0">
+              <a:spcBef>
+                <a:spcPts val="0"/>
+              </a:spcBef>
+              <a:spcAft>
+                <a:spcPts val="0"/>
+              </a:spcAft>
+              <a:buNone/>
+            </a:pPr>
+            <a:endParaRPr sz="3000">
+              <a:latin typeface="Consolas"/>
+              <a:ea typeface="Consolas"/>
+              <a:cs typeface="Consolas"/>
+              <a:sym typeface="Consolas"/>
+            </a:endParaRPr>
+          </a:p>
+          <a:p>
+            <a:pPr marL="0" lvl="0" indent="0" algn="l" rtl="0">
               <a:spcBef>
                 <a:spcPts val="0"/>
               </a:spcBef>
@@ -6976,13 +8800,36 @@
             </a:pPr>
             <a:r>
               <a:rPr lang="en-GB" sz="3000">
+                <a:solidFill>
+                  <a:schemeClr val="dk1"/>
+                </a:solidFill>
                 <a:latin typeface="Consolas"/>
                 <a:ea typeface="Consolas"/>
                 <a:cs typeface="Consolas"/>
                 <a:sym typeface="Consolas"/>
               </a:rPr>
-              <a:t>GROUP BY </a:t>
-            </a:r>
+              <a:t>&gt; GET /post?id=123</a:t>
+            </a:r>
+            <a:endParaRPr sz="3000">
+              <a:solidFill>
+                <a:schemeClr val="dk1"/>
+              </a:solidFill>
+              <a:latin typeface="Consolas"/>
+              <a:ea typeface="Consolas"/>
+              <a:cs typeface="Consolas"/>
+              <a:sym typeface="Consolas"/>
+            </a:endParaRPr>
+          </a:p>
+          <a:p>
+            <a:pPr marL="0" lvl="0" indent="457200" algn="l" rtl="0">
+              <a:spcBef>
+                <a:spcPts val="0"/>
+              </a:spcBef>
+              <a:spcAft>
+                <a:spcPts val="0"/>
+              </a:spcAft>
+              <a:buNone/>
+            </a:pPr>
             <a:r>
               <a:rPr lang="en-GB" sz="3000">
                 <a:solidFill>
@@ -6993,9 +8840,96 @@
                 <a:cs typeface="Consolas"/>
                 <a:sym typeface="Consolas"/>
               </a:rPr>
-              <a:t>category_id </a:t>
+              <a:t>post := new(Post)</a:t>
             </a:r>
             <a:endParaRPr sz="3000">
+              <a:solidFill>
+                <a:schemeClr val="dk1"/>
+              </a:solidFill>
+              <a:latin typeface="Consolas"/>
+              <a:ea typeface="Consolas"/>
+              <a:cs typeface="Consolas"/>
+              <a:sym typeface="Consolas"/>
+            </a:endParaRPr>
+          </a:p>
+          <a:p>
+            <a:pPr marL="0" lvl="0" indent="0" algn="l" rtl="0">
+              <a:spcBef>
+                <a:spcPts val="0"/>
+              </a:spcBef>
+              <a:spcAft>
+                <a:spcPts val="0"/>
+              </a:spcAft>
+              <a:buNone/>
+            </a:pPr>
+            <a:r>
+              <a:rPr lang="en-GB" sz="3000">
+                <a:solidFill>
+                  <a:schemeClr val="dk1"/>
+                </a:solidFill>
+                <a:latin typeface="Consolas"/>
+                <a:ea typeface="Consolas"/>
+                <a:cs typeface="Consolas"/>
+                <a:sym typeface="Consolas"/>
+              </a:rPr>
+              <a:t>	schema.Parse(&amp;post, r.URL)</a:t>
+            </a:r>
+            <a:endParaRPr sz="3000">
+              <a:solidFill>
+                <a:schemeClr val="dk1"/>
+              </a:solidFill>
+              <a:latin typeface="Consolas"/>
+              <a:ea typeface="Consolas"/>
+              <a:cs typeface="Consolas"/>
+              <a:sym typeface="Consolas"/>
+            </a:endParaRPr>
+          </a:p>
+          <a:p>
+            <a:pPr marL="0" lvl="0" indent="0" algn="l" rtl="0">
+              <a:spcBef>
+                <a:spcPts val="0"/>
+              </a:spcBef>
+              <a:spcAft>
+                <a:spcPts val="0"/>
+              </a:spcAft>
+              <a:buNone/>
+            </a:pPr>
+            <a:r>
+              <a:rPr lang="en-GB" sz="3000">
+                <a:solidFill>
+                  <a:schemeClr val="dk1"/>
+                </a:solidFill>
+                <a:latin typeface="Consolas"/>
+                <a:ea typeface="Consolas"/>
+                <a:cs typeface="Consolas"/>
+                <a:sym typeface="Consolas"/>
+              </a:rPr>
+              <a:t>&lt; {"post":{"id":123}}</a:t>
+            </a:r>
+            <a:endParaRPr sz="3000">
+              <a:solidFill>
+                <a:schemeClr val="dk1"/>
+              </a:solidFill>
+              <a:latin typeface="Consolas"/>
+              <a:ea typeface="Consolas"/>
+              <a:cs typeface="Consolas"/>
+              <a:sym typeface="Consolas"/>
+            </a:endParaRPr>
+          </a:p>
+          <a:p>
+            <a:pPr marL="0" lvl="0" indent="0" algn="l" rtl="0">
+              <a:spcBef>
+                <a:spcPts val="0"/>
+              </a:spcBef>
+              <a:spcAft>
+                <a:spcPts val="0"/>
+              </a:spcAft>
+              <a:buNone/>
+            </a:pPr>
+            <a:endParaRPr sz="3000">
+              <a:solidFill>
+                <a:schemeClr val="dk1"/>
+              </a:solidFill>
               <a:latin typeface="Consolas"/>
               <a:ea typeface="Consolas"/>
               <a:cs typeface="Consolas"/>
@@ -7012,12 +8946,12 @@
 </p:sld>
 </file>
 
-<file path=ppt/slides/slide2.xml><?xml version="1.0" encoding="utf-8"?>
-<p:sld xmlns:a="http://schemas.openxmlformats.org/drawingml/2006/main" xmlns:r="http://schemas.openxmlformats.org/officeDocument/2006/relationships" xmlns:mc="http://schemas.openxmlformats.org/markup-compatibility/2006" xmlns:mv="urn:schemas-microsoft-com:mac:vml" xmlns:p="http://schemas.openxmlformats.org/presentationml/2006/main" xmlns:c="http://schemas.openxmlformats.org/drawingml/2006/chart" xmlns:dgm="http://schemas.openxmlformats.org/drawingml/2006/diagram" xmlns:o="urn:schemas-microsoft-com:office:office" xmlns:v="urn:schemas-microsoft-com:vml" xmlns:pvml="urn:schemas-microsoft-com:office:powerpoint" xmlns:com="http://schemas.openxmlformats.org/drawingml/2006/compatibility" xmlns:p14="http://schemas.microsoft.com/office/powerpoint/2010/main" xmlns:p15="http://schemas.microsoft.com/office/powerpoint/2012/main" xmlns:ahyp="http://schemas.microsoft.com/office/drawing/2018/hyperlinkcolor">
+<file path=ppt/slides/slide6.xml><?xml version="1.0" encoding="utf-8"?>
+<p:sld xmlns:a="http://schemas.openxmlformats.org/drawingml/2006/main" xmlns:r="http://schemas.openxmlformats.org/officeDocument/2006/relationships" xmlns:p="http://schemas.openxmlformats.org/presentationml/2006/main">
   <p:cSld>
     <p:spTree>
       <p:nvGrpSpPr>
-        <p:cNvPr id="60" name="Shape 60"/>
+        <p:cNvPr id="1" name="Shape 67"/>
         <p:cNvGrpSpPr/>
         <p:nvPr/>
       </p:nvGrpSpPr>
@@ -7031,8 +8965,10 @@
       </p:grpSpPr>
       <p:sp>
         <p:nvSpPr>
-          <p:cNvPr id="61" name="Google Shape;61;p14"/>
-          <p:cNvSpPr txBox="1"/>
+          <p:cNvPr id="68" name="Google Shape;68;p15"/>
+          <p:cNvSpPr txBox="1">
+            <a:spLocks noGrp="1"/>
+          </p:cNvSpPr>
           <p:nvPr>
             <p:ph type="title"/>
           </p:nvPr>
@@ -7047,12 +8983,12 @@
           </a:prstGeom>
         </p:spPr>
         <p:txBody>
-          <a:bodyPr anchorCtr="0" anchor="t" bIns="91425" lIns="91425" spcFirstLastPara="1" rIns="91425" wrap="square" tIns="91425">
+          <a:bodyPr spcFirstLastPara="1" wrap="square" lIns="91425" tIns="91425" rIns="91425" bIns="91425" anchor="t" anchorCtr="0">
             <a:noAutofit/>
           </a:bodyPr>
           <a:lstStyle/>
           <a:p>
-            <a:pPr indent="0" lvl="0" marL="0" rtl="0" algn="l">
+            <a:pPr marL="0" lvl="0" indent="0" algn="l" rtl="0">
               <a:spcBef>
                 <a:spcPts val="0"/>
               </a:spcBef>
@@ -7071,10 +9007,12 @@
       </p:sp>
       <p:sp>
         <p:nvSpPr>
-          <p:cNvPr id="62" name="Google Shape;62;p14"/>
-          <p:cNvSpPr txBox="1"/>
+          <p:cNvPr id="69" name="Google Shape;69;p15"/>
+          <p:cNvSpPr txBox="1">
+            <a:spLocks noGrp="1"/>
+          </p:cNvSpPr>
           <p:nvPr>
-            <p:ph idx="1" type="body"/>
+            <p:ph type="body" idx="1"/>
           </p:nvPr>
         </p:nvSpPr>
         <p:spPr>
@@ -7087,12 +9025,12 @@
           </a:prstGeom>
         </p:spPr>
         <p:txBody>
-          <a:bodyPr anchorCtr="0" anchor="t" bIns="91425" lIns="91425" spcFirstLastPara="1" rIns="91425" wrap="square" tIns="91425">
+          <a:bodyPr spcFirstLastPara="1" wrap="square" lIns="91425" tIns="91425" rIns="91425" bIns="91425" anchor="t" anchorCtr="0">
             <a:noAutofit/>
           </a:bodyPr>
           <a:lstStyle/>
           <a:p>
-            <a:pPr indent="-419100" lvl="0" marL="457200" rtl="0" algn="l">
+            <a:pPr marL="457200" lvl="0" indent="-419100" algn="l" rtl="0">
               <a:spcBef>
                 <a:spcPts val="0"/>
               </a:spcBef>
@@ -7104,12 +9042,12 @@
             </a:pPr>
             <a:r>
               <a:rPr lang="en-GB" sz="3000"/>
-              <a:t>Авторизация / аутентификация</a:t>
+              <a:t>Логирование</a:t>
             </a:r>
             <a:endParaRPr sz="3000"/>
           </a:p>
           <a:p>
-            <a:pPr indent="0" lvl="0" marL="0" rtl="0" algn="l">
+            <a:pPr marL="0" lvl="0" indent="0" algn="l" rtl="0">
               <a:spcBef>
                 <a:spcPts val="1600"/>
               </a:spcBef>
@@ -7118,444 +9056,6 @@
               </a:spcAft>
               <a:buNone/>
             </a:pPr>
-            <a:r>
-              <a:t/>
-            </a:r>
-            <a:endParaRPr sz="3000"/>
-          </a:p>
-        </p:txBody>
-      </p:sp>
-      <p:sp>
-        <p:nvSpPr>
-          <p:cNvPr id="63" name="Google Shape;63;p14"/>
-          <p:cNvSpPr txBox="1"/>
-          <p:nvPr/>
-        </p:nvSpPr>
-        <p:spPr>
-          <a:xfrm>
-            <a:off x="708825" y="3237025"/>
-            <a:ext cx="7797300" cy="4885200"/>
-          </a:xfrm>
-          <a:prstGeom prst="rect">
-            <a:avLst/>
-          </a:prstGeom>
-          <a:noFill/>
-          <a:ln>
-            <a:noFill/>
-          </a:ln>
-        </p:spPr>
-        <p:txBody>
-          <a:bodyPr anchorCtr="0" anchor="t" bIns="91425" lIns="91425" spcFirstLastPara="1" rIns="91425" wrap="square" tIns="91425">
-            <a:noAutofit/>
-          </a:bodyPr>
-          <a:lstStyle/>
-          <a:p>
-            <a:pPr indent="0" lvl="0" marL="0" rtl="0" algn="l">
-              <a:spcBef>
-                <a:spcPts val="0"/>
-              </a:spcBef>
-              <a:spcAft>
-                <a:spcPts val="0"/>
-              </a:spcAft>
-              <a:buClr>
-                <a:schemeClr val="dk1"/>
-              </a:buClr>
-              <a:buSzPts val="1100"/>
-              <a:buFont typeface="Arial"/>
-              <a:buNone/>
-            </a:pPr>
-            <a:r>
-              <a:rPr lang="en-GB" sz="3000">
-                <a:latin typeface="Consolas"/>
-                <a:ea typeface="Consolas"/>
-                <a:cs typeface="Consolas"/>
-                <a:sym typeface="Consolas"/>
-              </a:rPr>
-              <a:t>&gt; GET /secret_url HTTP/1.1</a:t>
-            </a:r>
-            <a:endParaRPr sz="3000">
-              <a:latin typeface="Consolas"/>
-              <a:ea typeface="Consolas"/>
-              <a:cs typeface="Consolas"/>
-              <a:sym typeface="Consolas"/>
-            </a:endParaRPr>
-          </a:p>
-          <a:p>
-            <a:pPr indent="0" lvl="0" marL="0" rtl="0" algn="l">
-              <a:spcBef>
-                <a:spcPts val="0"/>
-              </a:spcBef>
-              <a:spcAft>
-                <a:spcPts val="0"/>
-              </a:spcAft>
-              <a:buClr>
-                <a:schemeClr val="dk1"/>
-              </a:buClr>
-              <a:buSzPts val="1100"/>
-              <a:buFont typeface="Arial"/>
-              <a:buNone/>
-            </a:pPr>
-            <a:r>
-              <a:rPr lang="en-GB" sz="3000">
-                <a:latin typeface="Consolas"/>
-                <a:ea typeface="Consolas"/>
-                <a:cs typeface="Consolas"/>
-                <a:sym typeface="Consolas"/>
-              </a:rPr>
-              <a:t>&gt; Host: localhost:8081</a:t>
-            </a:r>
-            <a:endParaRPr sz="3000">
-              <a:latin typeface="Consolas"/>
-              <a:ea typeface="Consolas"/>
-              <a:cs typeface="Consolas"/>
-              <a:sym typeface="Consolas"/>
-            </a:endParaRPr>
-          </a:p>
-          <a:p>
-            <a:pPr indent="0" lvl="0" marL="0" rtl="0" algn="l">
-              <a:spcBef>
-                <a:spcPts val="0"/>
-              </a:spcBef>
-              <a:spcAft>
-                <a:spcPts val="0"/>
-              </a:spcAft>
-              <a:buClr>
-                <a:schemeClr val="dk1"/>
-              </a:buClr>
-              <a:buSzPts val="1100"/>
-              <a:buFont typeface="Arial"/>
-              <a:buNone/>
-            </a:pPr>
-            <a:r>
-              <a:rPr lang="en-GB" sz="3000">
-                <a:latin typeface="Consolas"/>
-                <a:ea typeface="Consolas"/>
-                <a:cs typeface="Consolas"/>
-                <a:sym typeface="Consolas"/>
-              </a:rPr>
-              <a:t>&gt; Accept: */*</a:t>
-            </a:r>
-            <a:endParaRPr sz="3000">
-              <a:latin typeface="Consolas"/>
-              <a:ea typeface="Consolas"/>
-              <a:cs typeface="Consolas"/>
-              <a:sym typeface="Consolas"/>
-            </a:endParaRPr>
-          </a:p>
-          <a:p>
-            <a:pPr indent="0" lvl="0" marL="0" rtl="0" algn="l">
-              <a:spcBef>
-                <a:spcPts val="0"/>
-              </a:spcBef>
-              <a:spcAft>
-                <a:spcPts val="0"/>
-              </a:spcAft>
-              <a:buClr>
-                <a:schemeClr val="dk1"/>
-              </a:buClr>
-              <a:buSzPts val="1100"/>
-              <a:buFont typeface="Arial"/>
-              <a:buNone/>
-            </a:pPr>
-            <a:r>
-              <a:rPr lang="en-GB" sz="3000">
-                <a:latin typeface="Consolas"/>
-                <a:ea typeface="Consolas"/>
-                <a:cs typeface="Consolas"/>
-                <a:sym typeface="Consolas"/>
-              </a:rPr>
-              <a:t>&gt; Content-Type: application/json</a:t>
-            </a:r>
-            <a:endParaRPr sz="3000">
-              <a:latin typeface="Consolas"/>
-              <a:ea typeface="Consolas"/>
-              <a:cs typeface="Consolas"/>
-              <a:sym typeface="Consolas"/>
-            </a:endParaRPr>
-          </a:p>
-          <a:p>
-            <a:pPr indent="0" lvl="0" marL="0" rtl="0" algn="l">
-              <a:spcBef>
-                <a:spcPts val="0"/>
-              </a:spcBef>
-              <a:spcAft>
-                <a:spcPts val="0"/>
-              </a:spcAft>
-              <a:buClr>
-                <a:schemeClr val="dk1"/>
-              </a:buClr>
-              <a:buSzPts val="1100"/>
-              <a:buFont typeface="Arial"/>
-              <a:buNone/>
-            </a:pPr>
-            <a:r>
-              <a:rPr lang="en-GB" sz="3000">
-                <a:latin typeface="Consolas"/>
-                <a:ea typeface="Consolas"/>
-                <a:cs typeface="Consolas"/>
-                <a:sym typeface="Consolas"/>
-              </a:rPr>
-              <a:t>&gt; X-Access-Token: 695a19177a2760MzY3</a:t>
-            </a:r>
-            <a:endParaRPr sz="3000">
-              <a:latin typeface="Consolas"/>
-              <a:ea typeface="Consolas"/>
-              <a:cs typeface="Consolas"/>
-              <a:sym typeface="Consolas"/>
-            </a:endParaRPr>
-          </a:p>
-          <a:p>
-            <a:pPr indent="0" lvl="0" marL="0" rtl="0" algn="l">
-              <a:spcBef>
-                <a:spcPts val="0"/>
-              </a:spcBef>
-              <a:spcAft>
-                <a:spcPts val="0"/>
-              </a:spcAft>
-              <a:buClr>
-                <a:schemeClr val="dk1"/>
-              </a:buClr>
-              <a:buSzPts val="1100"/>
-              <a:buFont typeface="Arial"/>
-              <a:buNone/>
-            </a:pPr>
-            <a:r>
-              <a:t/>
-            </a:r>
-            <a:endParaRPr sz="3000">
-              <a:latin typeface="Consolas"/>
-              <a:ea typeface="Consolas"/>
-              <a:cs typeface="Consolas"/>
-              <a:sym typeface="Consolas"/>
-            </a:endParaRPr>
-          </a:p>
-          <a:p>
-            <a:pPr indent="0" lvl="0" marL="0" rtl="0" algn="l">
-              <a:spcBef>
-                <a:spcPts val="0"/>
-              </a:spcBef>
-              <a:spcAft>
-                <a:spcPts val="0"/>
-              </a:spcAft>
-              <a:buClr>
-                <a:schemeClr val="dk1"/>
-              </a:buClr>
-              <a:buSzPts val="1100"/>
-              <a:buFont typeface="Arial"/>
-              <a:buNone/>
-            </a:pPr>
-            <a:r>
-              <a:rPr lang="en-GB" sz="3000">
-                <a:latin typeface="Consolas"/>
-                <a:ea typeface="Consolas"/>
-                <a:cs typeface="Consolas"/>
-                <a:sym typeface="Consolas"/>
-              </a:rPr>
-              <a:t>&lt; HTTP/1.1 401 Unauthorized</a:t>
-            </a:r>
-            <a:endParaRPr sz="3000">
-              <a:latin typeface="Consolas"/>
-              <a:ea typeface="Consolas"/>
-              <a:cs typeface="Consolas"/>
-              <a:sym typeface="Consolas"/>
-            </a:endParaRPr>
-          </a:p>
-          <a:p>
-            <a:pPr indent="0" lvl="0" marL="0" rtl="0" algn="l">
-              <a:spcBef>
-                <a:spcPts val="0"/>
-              </a:spcBef>
-              <a:spcAft>
-                <a:spcPts val="0"/>
-              </a:spcAft>
-              <a:buClr>
-                <a:schemeClr val="dk1"/>
-              </a:buClr>
-              <a:buSzPts val="1100"/>
-              <a:buFont typeface="Arial"/>
-              <a:buNone/>
-            </a:pPr>
-            <a:r>
-              <a:rPr lang="en-GB" sz="3000">
-                <a:latin typeface="Consolas"/>
-                <a:ea typeface="Consolas"/>
-                <a:cs typeface="Consolas"/>
-                <a:sym typeface="Consolas"/>
-              </a:rPr>
-              <a:t>&lt; Content-Type: application/json</a:t>
-            </a:r>
-            <a:endParaRPr sz="3000">
-              <a:latin typeface="Consolas"/>
-              <a:ea typeface="Consolas"/>
-              <a:cs typeface="Consolas"/>
-              <a:sym typeface="Consolas"/>
-            </a:endParaRPr>
-          </a:p>
-          <a:p>
-            <a:pPr indent="0" lvl="0" marL="0" rtl="0" algn="l">
-              <a:spcBef>
-                <a:spcPts val="0"/>
-              </a:spcBef>
-              <a:spcAft>
-                <a:spcPts val="0"/>
-              </a:spcAft>
-              <a:buClr>
-                <a:schemeClr val="dk1"/>
-              </a:buClr>
-              <a:buSzPts val="1100"/>
-              <a:buFont typeface="Arial"/>
-              <a:buNone/>
-            </a:pPr>
-            <a:r>
-              <a:rPr lang="en-GB" sz="3000">
-                <a:latin typeface="Consolas"/>
-                <a:ea typeface="Consolas"/>
-                <a:cs typeface="Consolas"/>
-                <a:sym typeface="Consolas"/>
-              </a:rPr>
-              <a:t>{"error":"invalid token"}</a:t>
-            </a:r>
-            <a:endParaRPr sz="3000">
-              <a:latin typeface="Consolas"/>
-              <a:ea typeface="Consolas"/>
-              <a:cs typeface="Consolas"/>
-              <a:sym typeface="Consolas"/>
-            </a:endParaRPr>
-          </a:p>
-          <a:p>
-            <a:pPr indent="0" lvl="0" marL="0" rtl="0" algn="l">
-              <a:spcBef>
-                <a:spcPts val="0"/>
-              </a:spcBef>
-              <a:spcAft>
-                <a:spcPts val="0"/>
-              </a:spcAft>
-              <a:buNone/>
-            </a:pPr>
-            <a:r>
-              <a:t/>
-            </a:r>
-            <a:endParaRPr/>
-          </a:p>
-        </p:txBody>
-      </p:sp>
-    </p:spTree>
-  </p:cSld>
-  <p:clrMapOvr>
-    <a:masterClrMapping/>
-  </p:clrMapOvr>
-</p:sld>
-</file>
-
-<file path=ppt/slides/slide3.xml><?xml version="1.0" encoding="utf-8"?>
-<p:sld xmlns:a="http://schemas.openxmlformats.org/drawingml/2006/main" xmlns:r="http://schemas.openxmlformats.org/officeDocument/2006/relationships" xmlns:mc="http://schemas.openxmlformats.org/markup-compatibility/2006" xmlns:mv="urn:schemas-microsoft-com:mac:vml" xmlns:p="http://schemas.openxmlformats.org/presentationml/2006/main" xmlns:c="http://schemas.openxmlformats.org/drawingml/2006/chart" xmlns:dgm="http://schemas.openxmlformats.org/drawingml/2006/diagram" xmlns:o="urn:schemas-microsoft-com:office:office" xmlns:v="urn:schemas-microsoft-com:vml" xmlns:pvml="urn:schemas-microsoft-com:office:powerpoint" xmlns:com="http://schemas.openxmlformats.org/drawingml/2006/compatibility" xmlns:p14="http://schemas.microsoft.com/office/powerpoint/2010/main" xmlns:p15="http://schemas.microsoft.com/office/powerpoint/2012/main" xmlns:ahyp="http://schemas.microsoft.com/office/drawing/2018/hyperlinkcolor">
-  <p:cSld>
-    <p:spTree>
-      <p:nvGrpSpPr>
-        <p:cNvPr id="67" name="Shape 67"/>
-        <p:cNvGrpSpPr/>
-        <p:nvPr/>
-      </p:nvGrpSpPr>
-      <p:grpSpPr>
-        <a:xfrm>
-          <a:off x="0" y="0"/>
-          <a:ext cx="0" cy="0"/>
-          <a:chOff x="0" y="0"/>
-          <a:chExt cx="0" cy="0"/>
-        </a:xfrm>
-      </p:grpSpPr>
-      <p:sp>
-        <p:nvSpPr>
-          <p:cNvPr id="68" name="Google Shape;68;p15"/>
-          <p:cNvSpPr txBox="1"/>
-          <p:nvPr>
-            <p:ph type="title"/>
-          </p:nvPr>
-        </p:nvSpPr>
-        <p:spPr>
-          <a:xfrm>
-            <a:off x="311700" y="791156"/>
-            <a:ext cx="8520600" cy="1018200"/>
-          </a:xfrm>
-          <a:prstGeom prst="rect">
-            <a:avLst/>
-          </a:prstGeom>
-        </p:spPr>
-        <p:txBody>
-          <a:bodyPr anchorCtr="0" anchor="t" bIns="91425" lIns="91425" spcFirstLastPara="1" rIns="91425" wrap="square" tIns="91425">
-            <a:noAutofit/>
-          </a:bodyPr>
-          <a:lstStyle/>
-          <a:p>
-            <a:pPr indent="0" lvl="0" marL="0" rtl="0" algn="l">
-              <a:spcBef>
-                <a:spcPts val="0"/>
-              </a:spcBef>
-              <a:spcAft>
-                <a:spcPts val="0"/>
-              </a:spcAft>
-              <a:buNone/>
-            </a:pPr>
-            <a:r>
-              <a:rPr lang="en-GB" sz="3000"/>
-              <a:t>Анатомия веб-сервиса</a:t>
-            </a:r>
-            <a:endParaRPr sz="3000"/>
-          </a:p>
-        </p:txBody>
-      </p:sp>
-      <p:sp>
-        <p:nvSpPr>
-          <p:cNvPr id="69" name="Google Shape;69;p15"/>
-          <p:cNvSpPr txBox="1"/>
-          <p:nvPr>
-            <p:ph idx="1" type="body"/>
-          </p:nvPr>
-        </p:nvSpPr>
-        <p:spPr>
-          <a:xfrm>
-            <a:off x="311700" y="2048844"/>
-            <a:ext cx="8520600" cy="6073500"/>
-          </a:xfrm>
-          <a:prstGeom prst="rect">
-            <a:avLst/>
-          </a:prstGeom>
-        </p:spPr>
-        <p:txBody>
-          <a:bodyPr anchorCtr="0" anchor="t" bIns="91425" lIns="91425" spcFirstLastPara="1" rIns="91425" wrap="square" tIns="91425">
-            <a:noAutofit/>
-          </a:bodyPr>
-          <a:lstStyle/>
-          <a:p>
-            <a:pPr indent="-419100" lvl="0" marL="457200" rtl="0" algn="l">
-              <a:spcBef>
-                <a:spcPts val="0"/>
-              </a:spcBef>
-              <a:spcAft>
-                <a:spcPts val="0"/>
-              </a:spcAft>
-              <a:buSzPts val="3000"/>
-              <a:buChar char="●"/>
-            </a:pPr>
-            <a:r>
-              <a:rPr lang="en-GB" sz="3000"/>
-              <a:t>Логирование</a:t>
-            </a:r>
-            <a:endParaRPr sz="3000"/>
-          </a:p>
-          <a:p>
-            <a:pPr indent="0" lvl="0" marL="0" rtl="0" algn="l">
-              <a:spcBef>
-                <a:spcPts val="1600"/>
-              </a:spcBef>
-              <a:spcAft>
-                <a:spcPts val="1600"/>
-              </a:spcAft>
-              <a:buNone/>
-            </a:pPr>
-            <a:r>
-              <a:t/>
-            </a:r>
             <a:endParaRPr sz="3000"/>
           </a:p>
         </p:txBody>
@@ -7580,12 +9080,12 @@
           </a:ln>
         </p:spPr>
         <p:txBody>
-          <a:bodyPr anchorCtr="0" anchor="t" bIns="91425" lIns="91425" spcFirstLastPara="1" rIns="91425" wrap="square" tIns="91425">
+          <a:bodyPr spcFirstLastPara="1" wrap="square" lIns="91425" tIns="91425" rIns="91425" bIns="91425" anchor="t" anchorCtr="0">
             <a:noAutofit/>
           </a:bodyPr>
           <a:lstStyle/>
           <a:p>
-            <a:pPr indent="0" lvl="0" marL="0" rtl="0" algn="l">
+            <a:pPr marL="0" lvl="0" indent="0" algn="l" rtl="0">
               <a:spcBef>
                 <a:spcPts val="0"/>
               </a:spcBef>
@@ -7622,7 +9122,7 @@
             </a:endParaRPr>
           </a:p>
           <a:p>
-            <a:pPr indent="0" lvl="0" marL="0" rtl="0" algn="l">
+            <a:pPr marL="0" lvl="0" indent="0" algn="l" rtl="0">
               <a:spcBef>
                 <a:spcPts val="0"/>
               </a:spcBef>
@@ -7707,7 +9207,7 @@
             </a:endParaRPr>
           </a:p>
           <a:p>
-            <a:pPr indent="0" lvl="0" marL="0" rtl="0" algn="l">
+            <a:pPr marL="0" lvl="0" indent="0" algn="l" rtl="0">
               <a:spcBef>
                 <a:spcPts val="0"/>
               </a:spcBef>
@@ -7792,7 +9292,7 @@
             </a:endParaRPr>
           </a:p>
           <a:p>
-            <a:pPr indent="0" lvl="0" marL="0" rtl="0" algn="l">
+            <a:pPr marL="0" lvl="0" indent="0" algn="l" rtl="0">
               <a:spcBef>
                 <a:spcPts val="0"/>
               </a:spcBef>
@@ -7877,7 +9377,7 @@
             </a:endParaRPr>
           </a:p>
           <a:p>
-            <a:pPr indent="0" lvl="0" marL="0" rtl="0" algn="l">
+            <a:pPr marL="0" lvl="0" indent="0" algn="l" rtl="0">
               <a:spcBef>
                 <a:spcPts val="0"/>
               </a:spcBef>
@@ -7962,7 +9462,7 @@
             </a:endParaRPr>
           </a:p>
           <a:p>
-            <a:pPr indent="0" lvl="0" marL="0" rtl="0" algn="l">
+            <a:pPr marL="0" lvl="0" indent="0" algn="l" rtl="0">
               <a:spcBef>
                 <a:spcPts val="0"/>
               </a:spcBef>
@@ -8047,7 +9547,7 @@
             </a:endParaRPr>
           </a:p>
           <a:p>
-            <a:pPr indent="0" lvl="0" marL="0" rtl="0" algn="l">
+            <a:pPr marL="0" lvl="0" indent="0" algn="l" rtl="0">
               <a:spcBef>
                 <a:spcPts val="0"/>
               </a:spcBef>
@@ -8132,7 +9632,7 @@
             </a:endParaRPr>
           </a:p>
           <a:p>
-            <a:pPr indent="0" lvl="0" marL="0" rtl="0" algn="l">
+            <a:pPr marL="0" lvl="0" indent="0" algn="l" rtl="0">
               <a:spcBef>
                 <a:spcPts val="0"/>
               </a:spcBef>
@@ -8205,7 +9705,7 @@
             </a:endParaRPr>
           </a:p>
           <a:p>
-            <a:pPr indent="0" lvl="0" marL="0" rtl="0" algn="l">
+            <a:pPr marL="0" lvl="0" indent="0" algn="l" rtl="0">
               <a:spcBef>
                 <a:spcPts val="0"/>
               </a:spcBef>
@@ -8243,12 +9743,12 @@
 </p:sld>
 </file>
 
-<file path=ppt/slides/slide4.xml><?xml version="1.0" encoding="utf-8"?>
-<p:sld xmlns:a="http://schemas.openxmlformats.org/drawingml/2006/main" xmlns:r="http://schemas.openxmlformats.org/officeDocument/2006/relationships" xmlns:mc="http://schemas.openxmlformats.org/markup-compatibility/2006" xmlns:mv="urn:schemas-microsoft-com:mac:vml" xmlns:p="http://schemas.openxmlformats.org/presentationml/2006/main" xmlns:c="http://schemas.openxmlformats.org/drawingml/2006/chart" xmlns:dgm="http://schemas.openxmlformats.org/drawingml/2006/diagram" xmlns:o="urn:schemas-microsoft-com:office:office" xmlns:v="urn:schemas-microsoft-com:vml" xmlns:pvml="urn:schemas-microsoft-com:office:powerpoint" xmlns:com="http://schemas.openxmlformats.org/drawingml/2006/compatibility" xmlns:p14="http://schemas.microsoft.com/office/powerpoint/2010/main" xmlns:p15="http://schemas.microsoft.com/office/powerpoint/2012/main" xmlns:ahyp="http://schemas.microsoft.com/office/drawing/2018/hyperlinkcolor">
+<file path=ppt/slides/slide7.xml><?xml version="1.0" encoding="utf-8"?>
+<p:sld xmlns:a="http://schemas.openxmlformats.org/drawingml/2006/main" xmlns:r="http://schemas.openxmlformats.org/officeDocument/2006/relationships" xmlns:p="http://schemas.openxmlformats.org/presentationml/2006/main">
   <p:cSld>
     <p:spTree>
       <p:nvGrpSpPr>
-        <p:cNvPr id="74" name="Shape 74"/>
+        <p:cNvPr id="1" name="Shape 88"/>
         <p:cNvGrpSpPr/>
         <p:nvPr/>
       </p:nvGrpSpPr>
@@ -8262,8 +9762,10 @@
       </p:grpSpPr>
       <p:sp>
         <p:nvSpPr>
-          <p:cNvPr id="75" name="Google Shape;75;p16"/>
-          <p:cNvSpPr txBox="1"/>
+          <p:cNvPr id="89" name="Google Shape;89;p18"/>
+          <p:cNvSpPr txBox="1">
+            <a:spLocks noGrp="1"/>
+          </p:cNvSpPr>
           <p:nvPr>
             <p:ph type="title"/>
           </p:nvPr>
@@ -8278,12 +9780,12 @@
           </a:prstGeom>
         </p:spPr>
         <p:txBody>
-          <a:bodyPr anchorCtr="0" anchor="t" bIns="91425" lIns="91425" spcFirstLastPara="1" rIns="91425" wrap="square" tIns="91425">
+          <a:bodyPr spcFirstLastPara="1" wrap="square" lIns="91425" tIns="91425" rIns="91425" bIns="91425" anchor="t" anchorCtr="0">
             <a:noAutofit/>
           </a:bodyPr>
           <a:lstStyle/>
           <a:p>
-            <a:pPr indent="0" lvl="0" marL="0" rtl="0" algn="l">
+            <a:pPr marL="0" lvl="0" indent="0" algn="l" rtl="0">
               <a:spcBef>
                 <a:spcPts val="0"/>
               </a:spcBef>
@@ -8302,10 +9804,12 @@
       </p:sp>
       <p:sp>
         <p:nvSpPr>
-          <p:cNvPr id="76" name="Google Shape;76;p16"/>
-          <p:cNvSpPr txBox="1"/>
+          <p:cNvPr id="90" name="Google Shape;90;p18"/>
+          <p:cNvSpPr txBox="1">
+            <a:spLocks noGrp="1"/>
+          </p:cNvSpPr>
           <p:nvPr>
-            <p:ph idx="1" type="body"/>
+            <p:ph type="body" idx="1"/>
           </p:nvPr>
         </p:nvSpPr>
         <p:spPr>
@@ -8318,12 +9822,12 @@
           </a:prstGeom>
         </p:spPr>
         <p:txBody>
-          <a:bodyPr anchorCtr="0" anchor="t" bIns="91425" lIns="91425" spcFirstLastPara="1" rIns="91425" wrap="square" tIns="91425">
+          <a:bodyPr spcFirstLastPara="1" wrap="square" lIns="91425" tIns="91425" rIns="91425" bIns="91425" anchor="t" anchorCtr="0">
             <a:noAutofit/>
           </a:bodyPr>
           <a:lstStyle/>
           <a:p>
-            <a:pPr indent="-419100" lvl="0" marL="457200" rtl="0" algn="l">
+            <a:pPr marL="457200" lvl="0" indent="-419100" algn="l" rtl="0">
               <a:spcBef>
                 <a:spcPts val="0"/>
               </a:spcBef>
@@ -8335,12 +9839,12 @@
             </a:pPr>
             <a:r>
               <a:rPr lang="en-GB" sz="3000"/>
-              <a:t>Обработка ошибок</a:t>
+              <a:t>Шаблонизация</a:t>
             </a:r>
             <a:endParaRPr sz="3000"/>
           </a:p>
           <a:p>
-            <a:pPr indent="0" lvl="0" marL="0" rtl="0" algn="l">
+            <a:pPr marL="0" lvl="0" indent="0" algn="l" rtl="0">
               <a:spcBef>
                 <a:spcPts val="1600"/>
               </a:spcBef>
@@ -8349,799 +9853,6 @@
               </a:spcAft>
               <a:buNone/>
             </a:pPr>
-            <a:r>
-              <a:t/>
-            </a:r>
-            <a:endParaRPr sz="3000"/>
-          </a:p>
-        </p:txBody>
-      </p:sp>
-      <p:sp>
-        <p:nvSpPr>
-          <p:cNvPr id="77" name="Google Shape;77;p16"/>
-          <p:cNvSpPr txBox="1"/>
-          <p:nvPr/>
-        </p:nvSpPr>
-        <p:spPr>
-          <a:xfrm>
-            <a:off x="708825" y="3237025"/>
-            <a:ext cx="7797300" cy="4885200"/>
-          </a:xfrm>
-          <a:prstGeom prst="rect">
-            <a:avLst/>
-          </a:prstGeom>
-          <a:noFill/>
-          <a:ln>
-            <a:noFill/>
-          </a:ln>
-        </p:spPr>
-        <p:txBody>
-          <a:bodyPr anchorCtr="0" anchor="t" bIns="91425" lIns="91425" spcFirstLastPara="1" rIns="91425" wrap="square" tIns="91425">
-            <a:noAutofit/>
-          </a:bodyPr>
-          <a:lstStyle/>
-          <a:p>
-            <a:pPr indent="0" lvl="0" marL="0" rtl="0" algn="l">
-              <a:lnSpc>
-                <a:spcPct val="135714"/>
-              </a:lnSpc>
-              <a:spcBef>
-                <a:spcPts val="0"/>
-              </a:spcBef>
-              <a:spcAft>
-                <a:spcPts val="0"/>
-              </a:spcAft>
-              <a:buClr>
-                <a:schemeClr val="dk1"/>
-              </a:buClr>
-              <a:buSzPts val="1100"/>
-              <a:buFont typeface="Arial"/>
-              <a:buNone/>
-            </a:pPr>
-            <a:r>
-              <a:rPr lang="en-GB" sz="3000">
-                <a:solidFill>
-                  <a:schemeClr val="dk1"/>
-                </a:solidFill>
-                <a:highlight>
-                  <a:srgbClr val="FFFFFF"/>
-                </a:highlight>
-                <a:latin typeface="Consolas"/>
-                <a:ea typeface="Consolas"/>
-                <a:cs typeface="Consolas"/>
-                <a:sym typeface="Consolas"/>
-              </a:rPr>
-              <a:t>    </a:t>
-            </a:r>
-            <a:r>
-              <a:rPr lang="en-GB" sz="3000">
-                <a:solidFill>
-                  <a:srgbClr val="008000"/>
-                </a:solidFill>
-                <a:highlight>
-                  <a:srgbClr val="FFFFFF"/>
-                </a:highlight>
-                <a:latin typeface="Consolas"/>
-                <a:ea typeface="Consolas"/>
-                <a:cs typeface="Consolas"/>
-                <a:sym typeface="Consolas"/>
-              </a:rPr>
-              <a:t>// не делайте так! :)</a:t>
-            </a:r>
-            <a:endParaRPr sz="3000">
-              <a:solidFill>
-                <a:srgbClr val="008000"/>
-              </a:solidFill>
-              <a:highlight>
-                <a:srgbClr val="FFFFFF"/>
-              </a:highlight>
-              <a:latin typeface="Consolas"/>
-              <a:ea typeface="Consolas"/>
-              <a:cs typeface="Consolas"/>
-              <a:sym typeface="Consolas"/>
-            </a:endParaRPr>
-          </a:p>
-          <a:p>
-            <a:pPr indent="0" lvl="0" marL="0" rtl="0" algn="l">
-              <a:lnSpc>
-                <a:spcPct val="135714"/>
-              </a:lnSpc>
-              <a:spcBef>
-                <a:spcPts val="0"/>
-              </a:spcBef>
-              <a:spcAft>
-                <a:spcPts val="0"/>
-              </a:spcAft>
-              <a:buClr>
-                <a:schemeClr val="dk1"/>
-              </a:buClr>
-              <a:buSzPts val="1100"/>
-              <a:buFont typeface="Arial"/>
-              <a:buNone/>
-            </a:pPr>
-            <a:r>
-              <a:rPr lang="en-GB" sz="3000">
-                <a:solidFill>
-                  <a:schemeClr val="dk1"/>
-                </a:solidFill>
-                <a:highlight>
-                  <a:srgbClr val="FFFFFF"/>
-                </a:highlight>
-                <a:latin typeface="Consolas"/>
-                <a:ea typeface="Consolas"/>
-                <a:cs typeface="Consolas"/>
-                <a:sym typeface="Consolas"/>
-              </a:rPr>
-              <a:t>    </a:t>
-            </a:r>
-            <a:r>
-              <a:rPr lang="en-GB" sz="3000">
-                <a:solidFill>
-                  <a:srgbClr val="0000FF"/>
-                </a:solidFill>
-                <a:highlight>
-                  <a:srgbClr val="FFFFFF"/>
-                </a:highlight>
-                <a:latin typeface="Consolas"/>
-                <a:ea typeface="Consolas"/>
-                <a:cs typeface="Consolas"/>
-                <a:sym typeface="Consolas"/>
-              </a:rPr>
-              <a:t>if</a:t>
-            </a:r>
-            <a:r>
-              <a:rPr lang="en-GB" sz="3000">
-                <a:solidFill>
-                  <a:schemeClr val="dk1"/>
-                </a:solidFill>
-                <a:highlight>
-                  <a:srgbClr val="FFFFFF"/>
-                </a:highlight>
-                <a:latin typeface="Consolas"/>
-                <a:ea typeface="Consolas"/>
-                <a:cs typeface="Consolas"/>
-                <a:sym typeface="Consolas"/>
-              </a:rPr>
-              <a:t> err != </a:t>
-            </a:r>
-            <a:r>
-              <a:rPr lang="en-GB" sz="3000">
-                <a:solidFill>
-                  <a:srgbClr val="0000FF"/>
-                </a:solidFill>
-                <a:highlight>
-                  <a:srgbClr val="FFFFFF"/>
-                </a:highlight>
-                <a:latin typeface="Consolas"/>
-                <a:ea typeface="Consolas"/>
-                <a:cs typeface="Consolas"/>
-                <a:sym typeface="Consolas"/>
-              </a:rPr>
-              <a:t>nil</a:t>
-            </a:r>
-            <a:r>
-              <a:rPr lang="en-GB" sz="3000">
-                <a:solidFill>
-                  <a:schemeClr val="dk1"/>
-                </a:solidFill>
-                <a:highlight>
-                  <a:srgbClr val="FFFFFF"/>
-                </a:highlight>
-                <a:latin typeface="Consolas"/>
-                <a:ea typeface="Consolas"/>
-                <a:cs typeface="Consolas"/>
-                <a:sym typeface="Consolas"/>
-              </a:rPr>
-              <a:t> {</a:t>
-            </a:r>
-            <a:endParaRPr sz="3000">
-              <a:solidFill>
-                <a:schemeClr val="dk1"/>
-              </a:solidFill>
-              <a:highlight>
-                <a:srgbClr val="FFFFFF"/>
-              </a:highlight>
-              <a:latin typeface="Consolas"/>
-              <a:ea typeface="Consolas"/>
-              <a:cs typeface="Consolas"/>
-              <a:sym typeface="Consolas"/>
-            </a:endParaRPr>
-          </a:p>
-          <a:p>
-            <a:pPr indent="0" lvl="0" marL="0" rtl="0" algn="l">
-              <a:lnSpc>
-                <a:spcPct val="135714"/>
-              </a:lnSpc>
-              <a:spcBef>
-                <a:spcPts val="0"/>
-              </a:spcBef>
-              <a:spcAft>
-                <a:spcPts val="0"/>
-              </a:spcAft>
-              <a:buClr>
-                <a:schemeClr val="dk1"/>
-              </a:buClr>
-              <a:buSzPts val="1100"/>
-              <a:buFont typeface="Arial"/>
-              <a:buNone/>
-            </a:pPr>
-            <a:r>
-              <a:rPr lang="en-GB" sz="3000">
-                <a:solidFill>
-                  <a:schemeClr val="dk1"/>
-                </a:solidFill>
-                <a:highlight>
-                  <a:srgbClr val="FFFFFF"/>
-                </a:highlight>
-                <a:latin typeface="Consolas"/>
-                <a:ea typeface="Consolas"/>
-                <a:cs typeface="Consolas"/>
-                <a:sym typeface="Consolas"/>
-              </a:rPr>
-              <a:t>        panic(err)</a:t>
-            </a:r>
-            <a:endParaRPr sz="3000">
-              <a:solidFill>
-                <a:schemeClr val="dk1"/>
-              </a:solidFill>
-              <a:highlight>
-                <a:srgbClr val="FFFFFF"/>
-              </a:highlight>
-              <a:latin typeface="Consolas"/>
-              <a:ea typeface="Consolas"/>
-              <a:cs typeface="Consolas"/>
-              <a:sym typeface="Consolas"/>
-            </a:endParaRPr>
-          </a:p>
-          <a:p>
-            <a:pPr indent="0" lvl="0" marL="0" rtl="0" algn="l">
-              <a:lnSpc>
-                <a:spcPct val="135714"/>
-              </a:lnSpc>
-              <a:spcBef>
-                <a:spcPts val="0"/>
-              </a:spcBef>
-              <a:spcAft>
-                <a:spcPts val="0"/>
-              </a:spcAft>
-              <a:buNone/>
-            </a:pPr>
-            <a:r>
-              <a:rPr lang="en-GB" sz="3000">
-                <a:solidFill>
-                  <a:schemeClr val="dk1"/>
-                </a:solidFill>
-                <a:highlight>
-                  <a:srgbClr val="FFFFFF"/>
-                </a:highlight>
-                <a:latin typeface="Consolas"/>
-                <a:ea typeface="Consolas"/>
-                <a:cs typeface="Consolas"/>
-                <a:sym typeface="Consolas"/>
-              </a:rPr>
-              <a:t>    }</a:t>
-            </a:r>
-            <a:endParaRPr sz="3000">
-              <a:latin typeface="Consolas"/>
-              <a:ea typeface="Consolas"/>
-              <a:cs typeface="Consolas"/>
-              <a:sym typeface="Consolas"/>
-            </a:endParaRPr>
-          </a:p>
-        </p:txBody>
-      </p:sp>
-    </p:spTree>
-  </p:cSld>
-  <p:clrMapOvr>
-    <a:masterClrMapping/>
-  </p:clrMapOvr>
-</p:sld>
-</file>
-
-<file path=ppt/slides/slide5.xml><?xml version="1.0" encoding="utf-8"?>
-<p:sld xmlns:a="http://schemas.openxmlformats.org/drawingml/2006/main" xmlns:r="http://schemas.openxmlformats.org/officeDocument/2006/relationships" xmlns:mc="http://schemas.openxmlformats.org/markup-compatibility/2006" xmlns:mv="urn:schemas-microsoft-com:mac:vml" xmlns:p="http://schemas.openxmlformats.org/presentationml/2006/main" xmlns:c="http://schemas.openxmlformats.org/drawingml/2006/chart" xmlns:dgm="http://schemas.openxmlformats.org/drawingml/2006/diagram" xmlns:o="urn:schemas-microsoft-com:office:office" xmlns:v="urn:schemas-microsoft-com:vml" xmlns:pvml="urn:schemas-microsoft-com:office:powerpoint" xmlns:com="http://schemas.openxmlformats.org/drawingml/2006/compatibility" xmlns:p14="http://schemas.microsoft.com/office/powerpoint/2010/main" xmlns:p15="http://schemas.microsoft.com/office/powerpoint/2012/main" xmlns:ahyp="http://schemas.microsoft.com/office/drawing/2018/hyperlinkcolor">
-  <p:cSld>
-    <p:spTree>
-      <p:nvGrpSpPr>
-        <p:cNvPr id="81" name="Shape 81"/>
-        <p:cNvGrpSpPr/>
-        <p:nvPr/>
-      </p:nvGrpSpPr>
-      <p:grpSpPr>
-        <a:xfrm>
-          <a:off x="0" y="0"/>
-          <a:ext cx="0" cy="0"/>
-          <a:chOff x="0" y="0"/>
-          <a:chExt cx="0" cy="0"/>
-        </a:xfrm>
-      </p:grpSpPr>
-      <p:sp>
-        <p:nvSpPr>
-          <p:cNvPr id="82" name="Google Shape;82;p17"/>
-          <p:cNvSpPr txBox="1"/>
-          <p:nvPr>
-            <p:ph type="title"/>
-          </p:nvPr>
-        </p:nvSpPr>
-        <p:spPr>
-          <a:xfrm>
-            <a:off x="311700" y="791156"/>
-            <a:ext cx="8520600" cy="1018200"/>
-          </a:xfrm>
-          <a:prstGeom prst="rect">
-            <a:avLst/>
-          </a:prstGeom>
-        </p:spPr>
-        <p:txBody>
-          <a:bodyPr anchorCtr="0" anchor="t" bIns="91425" lIns="91425" spcFirstLastPara="1" rIns="91425" wrap="square" tIns="91425">
-            <a:noAutofit/>
-          </a:bodyPr>
-          <a:lstStyle/>
-          <a:p>
-            <a:pPr indent="0" lvl="0" marL="0" rtl="0" algn="l">
-              <a:spcBef>
-                <a:spcPts val="0"/>
-              </a:spcBef>
-              <a:spcAft>
-                <a:spcPts val="0"/>
-              </a:spcAft>
-              <a:buNone/>
-            </a:pPr>
-            <a:r>
-              <a:rPr lang="en-GB" sz="3000"/>
-              <a:t>Анатомия веб-сервиса</a:t>
-            </a:r>
-            <a:endParaRPr sz="3000"/>
-          </a:p>
-        </p:txBody>
-      </p:sp>
-      <p:sp>
-        <p:nvSpPr>
-          <p:cNvPr id="83" name="Google Shape;83;p17"/>
-          <p:cNvSpPr txBox="1"/>
-          <p:nvPr>
-            <p:ph idx="1" type="body"/>
-          </p:nvPr>
-        </p:nvSpPr>
-        <p:spPr>
-          <a:xfrm>
-            <a:off x="311700" y="2048844"/>
-            <a:ext cx="8520600" cy="6073500"/>
-          </a:xfrm>
-          <a:prstGeom prst="rect">
-            <a:avLst/>
-          </a:prstGeom>
-        </p:spPr>
-        <p:txBody>
-          <a:bodyPr anchorCtr="0" anchor="t" bIns="91425" lIns="91425" spcFirstLastPara="1" rIns="91425" wrap="square" tIns="91425">
-            <a:noAutofit/>
-          </a:bodyPr>
-          <a:lstStyle/>
-          <a:p>
-            <a:pPr indent="-419100" lvl="0" marL="457200" rtl="0" algn="l">
-              <a:spcBef>
-                <a:spcPts val="0"/>
-              </a:spcBef>
-              <a:spcAft>
-                <a:spcPts val="0"/>
-              </a:spcAft>
-              <a:buSzPts val="3000"/>
-              <a:buChar char="●"/>
-            </a:pPr>
-            <a:r>
-              <a:rPr lang="en-GB" sz="3000"/>
-              <a:t>Валидация входных параметров</a:t>
-            </a:r>
-            <a:endParaRPr sz="3000"/>
-          </a:p>
-          <a:p>
-            <a:pPr indent="0" lvl="0" marL="0" rtl="0" algn="l">
-              <a:spcBef>
-                <a:spcPts val="1600"/>
-              </a:spcBef>
-              <a:spcAft>
-                <a:spcPts val="1600"/>
-              </a:spcAft>
-              <a:buNone/>
-            </a:pPr>
-            <a:r>
-              <a:t/>
-            </a:r>
-            <a:endParaRPr sz="3000"/>
-          </a:p>
-        </p:txBody>
-      </p:sp>
-      <p:sp>
-        <p:nvSpPr>
-          <p:cNvPr id="84" name="Google Shape;84;p17"/>
-          <p:cNvSpPr txBox="1"/>
-          <p:nvPr/>
-        </p:nvSpPr>
-        <p:spPr>
-          <a:xfrm>
-            <a:off x="708825" y="3237025"/>
-            <a:ext cx="7797300" cy="4885200"/>
-          </a:xfrm>
-          <a:prstGeom prst="rect">
-            <a:avLst/>
-          </a:prstGeom>
-          <a:noFill/>
-          <a:ln>
-            <a:noFill/>
-          </a:ln>
-        </p:spPr>
-        <p:txBody>
-          <a:bodyPr anchorCtr="0" anchor="t" bIns="91425" lIns="91425" spcFirstLastPara="1" rIns="91425" wrap="square" tIns="91425">
-            <a:noAutofit/>
-          </a:bodyPr>
-          <a:lstStyle/>
-          <a:p>
-            <a:pPr indent="0" lvl="0" marL="0" rtl="0" algn="l">
-              <a:spcBef>
-                <a:spcPts val="0"/>
-              </a:spcBef>
-              <a:spcAft>
-                <a:spcPts val="0"/>
-              </a:spcAft>
-              <a:buClr>
-                <a:schemeClr val="dk1"/>
-              </a:buClr>
-              <a:buSzPts val="1100"/>
-              <a:buFont typeface="Arial"/>
-              <a:buNone/>
-            </a:pPr>
-            <a:r>
-              <a:rPr lang="en-GB" sz="3000">
-                <a:latin typeface="Consolas"/>
-                <a:ea typeface="Consolas"/>
-                <a:cs typeface="Consolas"/>
-                <a:sym typeface="Consolas"/>
-              </a:rPr>
-              <a:t>&gt; GET /post?id=’ddfr</a:t>
-            </a:r>
-            <a:endParaRPr sz="3000">
-              <a:latin typeface="Consolas"/>
-              <a:ea typeface="Consolas"/>
-              <a:cs typeface="Consolas"/>
-              <a:sym typeface="Consolas"/>
-            </a:endParaRPr>
-          </a:p>
-          <a:p>
-            <a:pPr indent="0" lvl="0" marL="0" rtl="0" algn="l">
-              <a:spcBef>
-                <a:spcPts val="0"/>
-              </a:spcBef>
-              <a:spcAft>
-                <a:spcPts val="0"/>
-              </a:spcAft>
-              <a:buNone/>
-            </a:pPr>
-            <a:r>
-              <a:rPr lang="en-GB" sz="3000">
-                <a:latin typeface="Consolas"/>
-                <a:ea typeface="Consolas"/>
-                <a:cs typeface="Consolas"/>
-                <a:sym typeface="Consolas"/>
-              </a:rPr>
-              <a:t>&lt; {"error":"id invalid, want int"}</a:t>
-            </a:r>
-            <a:endParaRPr sz="3000">
-              <a:latin typeface="Consolas"/>
-              <a:ea typeface="Consolas"/>
-              <a:cs typeface="Consolas"/>
-              <a:sym typeface="Consolas"/>
-            </a:endParaRPr>
-          </a:p>
-          <a:p>
-            <a:pPr indent="0" lvl="0" marL="0" rtl="0" algn="l">
-              <a:spcBef>
-                <a:spcPts val="0"/>
-              </a:spcBef>
-              <a:spcAft>
-                <a:spcPts val="0"/>
-              </a:spcAft>
-              <a:buNone/>
-            </a:pPr>
-            <a:r>
-              <a:t/>
-            </a:r>
-            <a:endParaRPr sz="3000">
-              <a:latin typeface="Consolas"/>
-              <a:ea typeface="Consolas"/>
-              <a:cs typeface="Consolas"/>
-              <a:sym typeface="Consolas"/>
-            </a:endParaRPr>
-          </a:p>
-          <a:p>
-            <a:pPr indent="0" lvl="0" marL="0" rtl="0" algn="l">
-              <a:spcBef>
-                <a:spcPts val="0"/>
-              </a:spcBef>
-              <a:spcAft>
-                <a:spcPts val="0"/>
-              </a:spcAft>
-              <a:buNone/>
-            </a:pPr>
-            <a:r>
-              <a:t/>
-            </a:r>
-            <a:endParaRPr sz="3000">
-              <a:latin typeface="Consolas"/>
-              <a:ea typeface="Consolas"/>
-              <a:cs typeface="Consolas"/>
-              <a:sym typeface="Consolas"/>
-            </a:endParaRPr>
-          </a:p>
-          <a:p>
-            <a:pPr indent="0" lvl="0" marL="0" rtl="0" algn="l">
-              <a:spcBef>
-                <a:spcPts val="0"/>
-              </a:spcBef>
-              <a:spcAft>
-                <a:spcPts val="0"/>
-              </a:spcAft>
-              <a:buNone/>
-            </a:pPr>
-            <a:r>
-              <a:rPr lang="en-GB" sz="3000">
-                <a:solidFill>
-                  <a:schemeClr val="dk1"/>
-                </a:solidFill>
-                <a:latin typeface="Consolas"/>
-                <a:ea typeface="Consolas"/>
-                <a:cs typeface="Consolas"/>
-                <a:sym typeface="Consolas"/>
-              </a:rPr>
-              <a:t>&gt; GET /post?id=123</a:t>
-            </a:r>
-            <a:endParaRPr sz="3000">
-              <a:solidFill>
-                <a:schemeClr val="dk1"/>
-              </a:solidFill>
-              <a:latin typeface="Consolas"/>
-              <a:ea typeface="Consolas"/>
-              <a:cs typeface="Consolas"/>
-              <a:sym typeface="Consolas"/>
-            </a:endParaRPr>
-          </a:p>
-          <a:p>
-            <a:pPr indent="457200" lvl="0" marL="0" rtl="0" algn="l">
-              <a:spcBef>
-                <a:spcPts val="0"/>
-              </a:spcBef>
-              <a:spcAft>
-                <a:spcPts val="0"/>
-              </a:spcAft>
-              <a:buNone/>
-            </a:pPr>
-            <a:r>
-              <a:rPr lang="en-GB" sz="3000">
-                <a:solidFill>
-                  <a:schemeClr val="dk1"/>
-                </a:solidFill>
-                <a:latin typeface="Consolas"/>
-                <a:ea typeface="Consolas"/>
-                <a:cs typeface="Consolas"/>
-                <a:sym typeface="Consolas"/>
-              </a:rPr>
-              <a:t>post := new(Post)</a:t>
-            </a:r>
-            <a:endParaRPr sz="3000">
-              <a:solidFill>
-                <a:schemeClr val="dk1"/>
-              </a:solidFill>
-              <a:latin typeface="Consolas"/>
-              <a:ea typeface="Consolas"/>
-              <a:cs typeface="Consolas"/>
-              <a:sym typeface="Consolas"/>
-            </a:endParaRPr>
-          </a:p>
-          <a:p>
-            <a:pPr indent="0" lvl="0" marL="0" rtl="0" algn="l">
-              <a:spcBef>
-                <a:spcPts val="0"/>
-              </a:spcBef>
-              <a:spcAft>
-                <a:spcPts val="0"/>
-              </a:spcAft>
-              <a:buNone/>
-            </a:pPr>
-            <a:r>
-              <a:rPr lang="en-GB" sz="3000">
-                <a:solidFill>
-                  <a:schemeClr val="dk1"/>
-                </a:solidFill>
-                <a:latin typeface="Consolas"/>
-                <a:ea typeface="Consolas"/>
-                <a:cs typeface="Consolas"/>
-                <a:sym typeface="Consolas"/>
-              </a:rPr>
-              <a:t>	schema.Parse(&amp;post, r.URL)</a:t>
-            </a:r>
-            <a:endParaRPr sz="3000">
-              <a:solidFill>
-                <a:schemeClr val="dk1"/>
-              </a:solidFill>
-              <a:latin typeface="Consolas"/>
-              <a:ea typeface="Consolas"/>
-              <a:cs typeface="Consolas"/>
-              <a:sym typeface="Consolas"/>
-            </a:endParaRPr>
-          </a:p>
-          <a:p>
-            <a:pPr indent="0" lvl="0" marL="0" rtl="0" algn="l">
-              <a:spcBef>
-                <a:spcPts val="0"/>
-              </a:spcBef>
-              <a:spcAft>
-                <a:spcPts val="0"/>
-              </a:spcAft>
-              <a:buNone/>
-            </a:pPr>
-            <a:r>
-              <a:rPr lang="en-GB" sz="3000">
-                <a:solidFill>
-                  <a:schemeClr val="dk1"/>
-                </a:solidFill>
-                <a:latin typeface="Consolas"/>
-                <a:ea typeface="Consolas"/>
-                <a:cs typeface="Consolas"/>
-                <a:sym typeface="Consolas"/>
-              </a:rPr>
-              <a:t>&lt; {"post":{"id":123}}</a:t>
-            </a:r>
-            <a:endParaRPr sz="3000">
-              <a:solidFill>
-                <a:schemeClr val="dk1"/>
-              </a:solidFill>
-              <a:latin typeface="Consolas"/>
-              <a:ea typeface="Consolas"/>
-              <a:cs typeface="Consolas"/>
-              <a:sym typeface="Consolas"/>
-            </a:endParaRPr>
-          </a:p>
-          <a:p>
-            <a:pPr indent="0" lvl="0" marL="0" rtl="0" algn="l">
-              <a:spcBef>
-                <a:spcPts val="0"/>
-              </a:spcBef>
-              <a:spcAft>
-                <a:spcPts val="0"/>
-              </a:spcAft>
-              <a:buNone/>
-            </a:pPr>
-            <a:r>
-              <a:t/>
-            </a:r>
-            <a:endParaRPr sz="3000">
-              <a:solidFill>
-                <a:schemeClr val="dk1"/>
-              </a:solidFill>
-              <a:latin typeface="Consolas"/>
-              <a:ea typeface="Consolas"/>
-              <a:cs typeface="Consolas"/>
-              <a:sym typeface="Consolas"/>
-            </a:endParaRPr>
-          </a:p>
-        </p:txBody>
-      </p:sp>
-    </p:spTree>
-  </p:cSld>
-  <p:clrMapOvr>
-    <a:masterClrMapping/>
-  </p:clrMapOvr>
-</p:sld>
-</file>
-
-<file path=ppt/slides/slide6.xml><?xml version="1.0" encoding="utf-8"?>
-<p:sld xmlns:a="http://schemas.openxmlformats.org/drawingml/2006/main" xmlns:r="http://schemas.openxmlformats.org/officeDocument/2006/relationships" xmlns:mc="http://schemas.openxmlformats.org/markup-compatibility/2006" xmlns:mv="urn:schemas-microsoft-com:mac:vml" xmlns:p="http://schemas.openxmlformats.org/presentationml/2006/main" xmlns:c="http://schemas.openxmlformats.org/drawingml/2006/chart" xmlns:dgm="http://schemas.openxmlformats.org/drawingml/2006/diagram" xmlns:o="urn:schemas-microsoft-com:office:office" xmlns:v="urn:schemas-microsoft-com:vml" xmlns:pvml="urn:schemas-microsoft-com:office:powerpoint" xmlns:com="http://schemas.openxmlformats.org/drawingml/2006/compatibility" xmlns:p14="http://schemas.microsoft.com/office/powerpoint/2010/main" xmlns:p15="http://schemas.microsoft.com/office/powerpoint/2012/main" xmlns:ahyp="http://schemas.microsoft.com/office/drawing/2018/hyperlinkcolor">
-  <p:cSld>
-    <p:spTree>
-      <p:nvGrpSpPr>
-        <p:cNvPr id="88" name="Shape 88"/>
-        <p:cNvGrpSpPr/>
-        <p:nvPr/>
-      </p:nvGrpSpPr>
-      <p:grpSpPr>
-        <a:xfrm>
-          <a:off x="0" y="0"/>
-          <a:ext cx="0" cy="0"/>
-          <a:chOff x="0" y="0"/>
-          <a:chExt cx="0" cy="0"/>
-        </a:xfrm>
-      </p:grpSpPr>
-      <p:sp>
-        <p:nvSpPr>
-          <p:cNvPr id="89" name="Google Shape;89;p18"/>
-          <p:cNvSpPr txBox="1"/>
-          <p:nvPr>
-            <p:ph type="title"/>
-          </p:nvPr>
-        </p:nvSpPr>
-        <p:spPr>
-          <a:xfrm>
-            <a:off x="311700" y="791156"/>
-            <a:ext cx="8520600" cy="1018200"/>
-          </a:xfrm>
-          <a:prstGeom prst="rect">
-            <a:avLst/>
-          </a:prstGeom>
-        </p:spPr>
-        <p:txBody>
-          <a:bodyPr anchorCtr="0" anchor="t" bIns="91425" lIns="91425" spcFirstLastPara="1" rIns="91425" wrap="square" tIns="91425">
-            <a:noAutofit/>
-          </a:bodyPr>
-          <a:lstStyle/>
-          <a:p>
-            <a:pPr indent="0" lvl="0" marL="0" rtl="0" algn="l">
-              <a:spcBef>
-                <a:spcPts val="0"/>
-              </a:spcBef>
-              <a:spcAft>
-                <a:spcPts val="0"/>
-              </a:spcAft>
-              <a:buNone/>
-            </a:pPr>
-            <a:r>
-              <a:rPr lang="en-GB" sz="3000"/>
-              <a:t>Анатомия веб-сервиса</a:t>
-            </a:r>
-            <a:endParaRPr sz="3000"/>
-          </a:p>
-        </p:txBody>
-      </p:sp>
-      <p:sp>
-        <p:nvSpPr>
-          <p:cNvPr id="90" name="Google Shape;90;p18"/>
-          <p:cNvSpPr txBox="1"/>
-          <p:nvPr>
-            <p:ph idx="1" type="body"/>
-          </p:nvPr>
-        </p:nvSpPr>
-        <p:spPr>
-          <a:xfrm>
-            <a:off x="311700" y="2048844"/>
-            <a:ext cx="8520600" cy="6073500"/>
-          </a:xfrm>
-          <a:prstGeom prst="rect">
-            <a:avLst/>
-          </a:prstGeom>
-        </p:spPr>
-        <p:txBody>
-          <a:bodyPr anchorCtr="0" anchor="t" bIns="91425" lIns="91425" spcFirstLastPara="1" rIns="91425" wrap="square" tIns="91425">
-            <a:noAutofit/>
-          </a:bodyPr>
-          <a:lstStyle/>
-          <a:p>
-            <a:pPr indent="-419100" lvl="0" marL="457200" rtl="0" algn="l">
-              <a:spcBef>
-                <a:spcPts val="0"/>
-              </a:spcBef>
-              <a:spcAft>
-                <a:spcPts val="0"/>
-              </a:spcAft>
-              <a:buSzPts val="3000"/>
-              <a:buChar char="●"/>
-            </a:pPr>
-            <a:r>
-              <a:rPr lang="en-GB" sz="3000"/>
-              <a:t>Шаблонизация</a:t>
-            </a:r>
-            <a:endParaRPr sz="3000"/>
-          </a:p>
-          <a:p>
-            <a:pPr indent="0" lvl="0" marL="0" rtl="0" algn="l">
-              <a:spcBef>
-                <a:spcPts val="1600"/>
-              </a:spcBef>
-              <a:spcAft>
-                <a:spcPts val="1600"/>
-              </a:spcAft>
-              <a:buNone/>
-            </a:pPr>
-            <a:r>
-              <a:t/>
-            </a:r>
             <a:endParaRPr sz="3000"/>
           </a:p>
         </p:txBody>
@@ -9166,12 +9877,12 @@
           </a:ln>
         </p:spPr>
         <p:txBody>
-          <a:bodyPr anchorCtr="0" anchor="t" bIns="91425" lIns="91425" spcFirstLastPara="1" rIns="91425" wrap="square" tIns="91425">
+          <a:bodyPr spcFirstLastPara="1" wrap="square" lIns="91425" tIns="91425" rIns="91425" bIns="91425" anchor="t" anchorCtr="0">
             <a:noAutofit/>
           </a:bodyPr>
           <a:lstStyle/>
           <a:p>
-            <a:pPr indent="0" lvl="0" marL="0" rtl="0" algn="l">
+            <a:pPr marL="0" lvl="0" indent="0" algn="l" rtl="0">
               <a:lnSpc>
                 <a:spcPct val="135714"/>
               </a:lnSpc>
@@ -9232,7 +9943,7 @@
             </a:endParaRPr>
           </a:p>
           <a:p>
-            <a:pPr indent="0" lvl="0" marL="0" rtl="0" algn="l">
+            <a:pPr marL="0" lvl="0" indent="0" algn="l" rtl="0">
               <a:lnSpc>
                 <a:spcPct val="135714"/>
               </a:lnSpc>
@@ -9249,9 +9960,6 @@
               <a:buFont typeface="Arial"/>
               <a:buNone/>
             </a:pPr>
-            <a:r>
-              <a:t/>
-            </a:r>
             <a:endParaRPr sz="3000">
               <a:solidFill>
                 <a:schemeClr val="dk1"/>
@@ -9266,7 +9974,7 @@
             </a:endParaRPr>
           </a:p>
           <a:p>
-            <a:pPr indent="0" lvl="0" marL="0" rtl="0" algn="l">
+            <a:pPr marL="0" lvl="0" indent="0" algn="l" rtl="0">
               <a:lnSpc>
                 <a:spcPct val="135714"/>
               </a:lnSpc>
@@ -9327,7 +10035,7 @@
             </a:endParaRPr>
           </a:p>
           <a:p>
-            <a:pPr indent="0" lvl="0" marL="0" rtl="0" algn="l">
+            <a:pPr marL="0" lvl="0" indent="0" algn="l" rtl="0">
               <a:lnSpc>
                 <a:spcPct val="135714"/>
               </a:lnSpc>
@@ -9344,9 +10052,6 @@
               <a:buFont typeface="Arial"/>
               <a:buNone/>
             </a:pPr>
-            <a:r>
-              <a:t/>
-            </a:r>
             <a:endParaRPr sz="3000">
               <a:solidFill>
                 <a:schemeClr val="dk1"/>
@@ -9361,7 +10066,7 @@
             </a:endParaRPr>
           </a:p>
           <a:p>
-            <a:pPr indent="0" lvl="0" marL="0" rtl="0" algn="l">
+            <a:pPr marL="0" lvl="0" indent="0" algn="l" rtl="0">
               <a:lnSpc>
                 <a:spcPct val="135714"/>
               </a:lnSpc>
@@ -9422,18 +10127,15 @@
             </a:endParaRPr>
           </a:p>
           <a:p>
-            <a:pPr indent="0" lvl="0" marL="0" rtl="0" algn="l">
-              <a:spcBef>
-                <a:spcPts val="0"/>
-              </a:spcBef>
-              <a:spcAft>
-                <a:spcPts val="0"/>
-              </a:spcAft>
-              <a:buNone/>
-            </a:pPr>
-            <a:r>
-              <a:t/>
-            </a:r>
+            <a:pPr marL="0" lvl="0" indent="0" algn="l" rtl="0">
+              <a:spcBef>
+                <a:spcPts val="0"/>
+              </a:spcBef>
+              <a:spcAft>
+                <a:spcPts val="0"/>
+              </a:spcAft>
+              <a:buNone/>
+            </a:pPr>
             <a:endParaRPr sz="3000">
               <a:latin typeface="Consolas"/>
               <a:ea typeface="Consolas"/>
@@ -9442,7 +10144,7 @@
             </a:endParaRPr>
           </a:p>
           <a:p>
-            <a:pPr indent="0" lvl="0" marL="0" rtl="0" algn="l">
+            <a:pPr marL="0" lvl="0" indent="0" algn="l" rtl="0">
               <a:lnSpc>
                 <a:spcPct val="135714"/>
               </a:lnSpc>
@@ -9498,7 +10200,7 @@
             </a:endParaRPr>
           </a:p>
           <a:p>
-            <a:pPr indent="0" lvl="0" marL="0" rtl="0" algn="l">
+            <a:pPr marL="0" lvl="0" indent="0" algn="l" rtl="0">
               <a:lnSpc>
                 <a:spcPct val="135714"/>
               </a:lnSpc>
@@ -9515,9 +10217,6 @@
               <a:buFont typeface="Arial"/>
               <a:buNone/>
             </a:pPr>
-            <a:r>
-              <a:t/>
-            </a:r>
             <a:endParaRPr sz="3000">
               <a:solidFill>
                 <a:srgbClr val="CD3131"/>
@@ -9541,12 +10240,12 @@
 </p:sld>
 </file>
 
-<file path=ppt/slides/slide7.xml><?xml version="1.0" encoding="utf-8"?>
-<p:sld xmlns:a="http://schemas.openxmlformats.org/drawingml/2006/main" xmlns:r="http://schemas.openxmlformats.org/officeDocument/2006/relationships" xmlns:mc="http://schemas.openxmlformats.org/markup-compatibility/2006" xmlns:mv="urn:schemas-microsoft-com:mac:vml" xmlns:p="http://schemas.openxmlformats.org/presentationml/2006/main" xmlns:c="http://schemas.openxmlformats.org/drawingml/2006/chart" xmlns:dgm="http://schemas.openxmlformats.org/drawingml/2006/diagram" xmlns:o="urn:schemas-microsoft-com:office:office" xmlns:v="urn:schemas-microsoft-com:vml" xmlns:pvml="urn:schemas-microsoft-com:office:powerpoint" xmlns:com="http://schemas.openxmlformats.org/drawingml/2006/compatibility" xmlns:p14="http://schemas.microsoft.com/office/powerpoint/2010/main" xmlns:p15="http://schemas.microsoft.com/office/powerpoint/2012/main" xmlns:ahyp="http://schemas.microsoft.com/office/drawing/2018/hyperlinkcolor">
+<file path=ppt/slides/slide8.xml><?xml version="1.0" encoding="utf-8"?>
+<p:sld xmlns:a="http://schemas.openxmlformats.org/drawingml/2006/main" xmlns:r="http://schemas.openxmlformats.org/officeDocument/2006/relationships" xmlns:p="http://schemas.openxmlformats.org/presentationml/2006/main">
   <p:cSld>
     <p:spTree>
       <p:nvGrpSpPr>
-        <p:cNvPr id="95" name="Shape 95"/>
+        <p:cNvPr id="1" name="Shape 102"/>
         <p:cNvGrpSpPr/>
         <p:nvPr/>
       </p:nvGrpSpPr>
@@ -9560,8 +10259,10 @@
       </p:grpSpPr>
       <p:sp>
         <p:nvSpPr>
-          <p:cNvPr id="96" name="Google Shape;96;p19"/>
-          <p:cNvSpPr txBox="1"/>
+          <p:cNvPr id="103" name="Google Shape;103;p20"/>
+          <p:cNvSpPr txBox="1">
+            <a:spLocks noGrp="1"/>
+          </p:cNvSpPr>
           <p:nvPr>
             <p:ph type="title"/>
           </p:nvPr>
@@ -9576,12 +10277,12 @@
           </a:prstGeom>
         </p:spPr>
         <p:txBody>
-          <a:bodyPr anchorCtr="0" anchor="t" bIns="91425" lIns="91425" spcFirstLastPara="1" rIns="91425" wrap="square" tIns="91425">
+          <a:bodyPr spcFirstLastPara="1" wrap="square" lIns="91425" tIns="91425" rIns="91425" bIns="91425" anchor="t" anchorCtr="0">
             <a:noAutofit/>
           </a:bodyPr>
           <a:lstStyle/>
           <a:p>
-            <a:pPr indent="0" lvl="0" marL="0" rtl="0" algn="l">
+            <a:pPr marL="0" lvl="0" indent="0" algn="l" rtl="0">
               <a:spcBef>
                 <a:spcPts val="0"/>
               </a:spcBef>
@@ -9600,10 +10301,12 @@
       </p:sp>
       <p:sp>
         <p:nvSpPr>
-          <p:cNvPr id="97" name="Google Shape;97;p19"/>
-          <p:cNvSpPr txBox="1"/>
+          <p:cNvPr id="104" name="Google Shape;104;p20"/>
+          <p:cNvSpPr txBox="1">
+            <a:spLocks noGrp="1"/>
+          </p:cNvSpPr>
           <p:nvPr>
-            <p:ph idx="1" type="body"/>
+            <p:ph type="body" idx="1"/>
           </p:nvPr>
         </p:nvSpPr>
         <p:spPr>
@@ -9616,12 +10319,12 @@
           </a:prstGeom>
         </p:spPr>
         <p:txBody>
-          <a:bodyPr anchorCtr="0" anchor="t" bIns="91425" lIns="91425" spcFirstLastPara="1" rIns="91425" wrap="square" tIns="91425">
+          <a:bodyPr spcFirstLastPara="1" wrap="square" lIns="91425" tIns="91425" rIns="91425" bIns="91425" anchor="t" anchorCtr="0">
             <a:noAutofit/>
           </a:bodyPr>
           <a:lstStyle/>
           <a:p>
-            <a:pPr indent="-419100" lvl="0" marL="457200" rtl="0" algn="l">
+            <a:pPr marL="457200" lvl="0" indent="-419100" algn="l" rtl="0">
               <a:spcBef>
                 <a:spcPts val="0"/>
               </a:spcBef>
@@ -9633,12 +10336,12 @@
             </a:pPr>
             <a:r>
               <a:rPr lang="en-GB" sz="3000"/>
-              <a:t>Конфигурирование</a:t>
+              <a:t>Мониторинг</a:t>
             </a:r>
             <a:endParaRPr sz="3000"/>
           </a:p>
           <a:p>
-            <a:pPr indent="0" lvl="0" marL="0" rtl="0" algn="l">
+            <a:pPr marL="0" lvl="0" indent="0" algn="l" rtl="0">
               <a:spcBef>
                 <a:spcPts val="1600"/>
               </a:spcBef>
@@ -9647,511 +10350,6 @@
               </a:spcAft>
               <a:buNone/>
             </a:pPr>
-            <a:r>
-              <a:t/>
-            </a:r>
-            <a:endParaRPr sz="3000"/>
-          </a:p>
-        </p:txBody>
-      </p:sp>
-      <p:sp>
-        <p:nvSpPr>
-          <p:cNvPr id="98" name="Google Shape;98;p19"/>
-          <p:cNvSpPr txBox="1"/>
-          <p:nvPr/>
-        </p:nvSpPr>
-        <p:spPr>
-          <a:xfrm>
-            <a:off x="708825" y="3237025"/>
-            <a:ext cx="7797300" cy="4885200"/>
-          </a:xfrm>
-          <a:prstGeom prst="rect">
-            <a:avLst/>
-          </a:prstGeom>
-          <a:noFill/>
-          <a:ln>
-            <a:noFill/>
-          </a:ln>
-        </p:spPr>
-        <p:txBody>
-          <a:bodyPr anchorCtr="0" anchor="t" bIns="91425" lIns="91425" spcFirstLastPara="1" rIns="91425" wrap="square" tIns="91425">
-            <a:noAutofit/>
-          </a:bodyPr>
-          <a:lstStyle/>
-          <a:p>
-            <a:pPr indent="0" lvl="0" marL="0" rtl="0" algn="l">
-              <a:lnSpc>
-                <a:spcPct val="135714"/>
-              </a:lnSpc>
-              <a:spcBef>
-                <a:spcPts val="0"/>
-              </a:spcBef>
-              <a:spcAft>
-                <a:spcPts val="0"/>
-              </a:spcAft>
-              <a:buClr>
-                <a:schemeClr val="dk1"/>
-              </a:buClr>
-              <a:buSzPts val="1100"/>
-              <a:buFont typeface="Arial"/>
-              <a:buNone/>
-            </a:pPr>
-            <a:r>
-              <a:rPr lang="en-GB" sz="3000">
-                <a:solidFill>
-                  <a:srgbClr val="0000FF"/>
-                </a:solidFill>
-                <a:highlight>
-                  <a:srgbClr val="FFFFFF"/>
-                </a:highlight>
-                <a:latin typeface="Consolas"/>
-                <a:ea typeface="Consolas"/>
-                <a:cs typeface="Consolas"/>
-                <a:sym typeface="Consolas"/>
-              </a:rPr>
-              <a:t>appname</a:t>
-            </a:r>
-            <a:r>
-              <a:rPr lang="en-GB" sz="3000">
-                <a:solidFill>
-                  <a:schemeClr val="dk1"/>
-                </a:solidFill>
-                <a:highlight>
-                  <a:srgbClr val="FFFFFF"/>
-                </a:highlight>
-                <a:latin typeface="Consolas"/>
-                <a:ea typeface="Consolas"/>
-                <a:cs typeface="Consolas"/>
-                <a:sym typeface="Consolas"/>
-              </a:rPr>
-              <a:t> = user</a:t>
-            </a:r>
-            <a:endParaRPr sz="3000">
-              <a:solidFill>
-                <a:schemeClr val="dk1"/>
-              </a:solidFill>
-              <a:highlight>
-                <a:srgbClr val="FFFFFF"/>
-              </a:highlight>
-              <a:latin typeface="Consolas"/>
-              <a:ea typeface="Consolas"/>
-              <a:cs typeface="Consolas"/>
-              <a:sym typeface="Consolas"/>
-            </a:endParaRPr>
-          </a:p>
-          <a:p>
-            <a:pPr indent="0" lvl="0" marL="0" rtl="0" algn="l">
-              <a:lnSpc>
-                <a:spcPct val="135714"/>
-              </a:lnSpc>
-              <a:spcBef>
-                <a:spcPts val="0"/>
-              </a:spcBef>
-              <a:spcAft>
-                <a:spcPts val="0"/>
-              </a:spcAft>
-              <a:buClr>
-                <a:schemeClr val="dk1"/>
-              </a:buClr>
-              <a:buSzPts val="1100"/>
-              <a:buFont typeface="Arial"/>
-              <a:buNone/>
-            </a:pPr>
-            <a:r>
-              <a:rPr lang="en-GB" sz="3000">
-                <a:solidFill>
-                  <a:srgbClr val="0000FF"/>
-                </a:solidFill>
-                <a:highlight>
-                  <a:srgbClr val="FFFFFF"/>
-                </a:highlight>
-                <a:latin typeface="Consolas"/>
-                <a:ea typeface="Consolas"/>
-                <a:cs typeface="Consolas"/>
-                <a:sym typeface="Consolas"/>
-              </a:rPr>
-              <a:t>httpport</a:t>
-            </a:r>
-            <a:r>
-              <a:rPr lang="en-GB" sz="3000">
-                <a:solidFill>
-                  <a:schemeClr val="dk1"/>
-                </a:solidFill>
-                <a:highlight>
-                  <a:srgbClr val="FFFFFF"/>
-                </a:highlight>
-                <a:latin typeface="Consolas"/>
-                <a:ea typeface="Consolas"/>
-                <a:cs typeface="Consolas"/>
-                <a:sym typeface="Consolas"/>
-              </a:rPr>
-              <a:t> = 8080</a:t>
-            </a:r>
-            <a:endParaRPr sz="3000">
-              <a:solidFill>
-                <a:schemeClr val="dk1"/>
-              </a:solidFill>
-              <a:highlight>
-                <a:srgbClr val="FFFFFF"/>
-              </a:highlight>
-              <a:latin typeface="Consolas"/>
-              <a:ea typeface="Consolas"/>
-              <a:cs typeface="Consolas"/>
-              <a:sym typeface="Consolas"/>
-            </a:endParaRPr>
-          </a:p>
-          <a:p>
-            <a:pPr indent="0" lvl="0" marL="0" rtl="0" algn="l">
-              <a:lnSpc>
-                <a:spcPct val="135714"/>
-              </a:lnSpc>
-              <a:spcBef>
-                <a:spcPts val="0"/>
-              </a:spcBef>
-              <a:spcAft>
-                <a:spcPts val="0"/>
-              </a:spcAft>
-              <a:buClr>
-                <a:schemeClr val="dk1"/>
-              </a:buClr>
-              <a:buSzPts val="1100"/>
-              <a:buFont typeface="Arial"/>
-              <a:buNone/>
-            </a:pPr>
-            <a:r>
-              <a:rPr lang="en-GB" sz="3000">
-                <a:solidFill>
-                  <a:srgbClr val="0000FF"/>
-                </a:solidFill>
-                <a:highlight>
-                  <a:srgbClr val="FFFFFF"/>
-                </a:highlight>
-                <a:latin typeface="Consolas"/>
-                <a:ea typeface="Consolas"/>
-                <a:cs typeface="Consolas"/>
-                <a:sym typeface="Consolas"/>
-              </a:rPr>
-              <a:t>runmode</a:t>
-            </a:r>
-            <a:r>
-              <a:rPr lang="en-GB" sz="3000">
-                <a:solidFill>
-                  <a:schemeClr val="dk1"/>
-                </a:solidFill>
-                <a:highlight>
-                  <a:srgbClr val="FFFFFF"/>
-                </a:highlight>
-                <a:latin typeface="Consolas"/>
-                <a:ea typeface="Consolas"/>
-                <a:cs typeface="Consolas"/>
-                <a:sym typeface="Consolas"/>
-              </a:rPr>
-              <a:t> = dev</a:t>
-            </a:r>
-            <a:endParaRPr sz="3000">
-              <a:solidFill>
-                <a:schemeClr val="dk1"/>
-              </a:solidFill>
-              <a:highlight>
-                <a:srgbClr val="FFFFFF"/>
-              </a:highlight>
-              <a:latin typeface="Consolas"/>
-              <a:ea typeface="Consolas"/>
-              <a:cs typeface="Consolas"/>
-              <a:sym typeface="Consolas"/>
-            </a:endParaRPr>
-          </a:p>
-          <a:p>
-            <a:pPr indent="0" lvl="0" marL="0" rtl="0" algn="l">
-              <a:lnSpc>
-                <a:spcPct val="135714"/>
-              </a:lnSpc>
-              <a:spcBef>
-                <a:spcPts val="0"/>
-              </a:spcBef>
-              <a:spcAft>
-                <a:spcPts val="0"/>
-              </a:spcAft>
-              <a:buClr>
-                <a:schemeClr val="dk1"/>
-              </a:buClr>
-              <a:buSzPts val="1100"/>
-              <a:buFont typeface="Arial"/>
-              <a:buNone/>
-            </a:pPr>
-            <a:r>
-              <a:rPr lang="en-GB" sz="3000">
-                <a:solidFill>
-                  <a:srgbClr val="0000FF"/>
-                </a:solidFill>
-                <a:highlight>
-                  <a:srgbClr val="FFFFFF"/>
-                </a:highlight>
-                <a:latin typeface="Consolas"/>
-                <a:ea typeface="Consolas"/>
-                <a:cs typeface="Consolas"/>
-                <a:sym typeface="Consolas"/>
-              </a:rPr>
-              <a:t>autorender</a:t>
-            </a:r>
-            <a:r>
-              <a:rPr lang="en-GB" sz="3000">
-                <a:solidFill>
-                  <a:schemeClr val="dk1"/>
-                </a:solidFill>
-                <a:highlight>
-                  <a:srgbClr val="FFFFFF"/>
-                </a:highlight>
-                <a:latin typeface="Consolas"/>
-                <a:ea typeface="Consolas"/>
-                <a:cs typeface="Consolas"/>
-                <a:sym typeface="Consolas"/>
-              </a:rPr>
-              <a:t> = false</a:t>
-            </a:r>
-            <a:endParaRPr sz="3000">
-              <a:solidFill>
-                <a:schemeClr val="dk1"/>
-              </a:solidFill>
-              <a:highlight>
-                <a:srgbClr val="FFFFFF"/>
-              </a:highlight>
-              <a:latin typeface="Consolas"/>
-              <a:ea typeface="Consolas"/>
-              <a:cs typeface="Consolas"/>
-              <a:sym typeface="Consolas"/>
-            </a:endParaRPr>
-          </a:p>
-          <a:p>
-            <a:pPr indent="0" lvl="0" marL="0" rtl="0" algn="l">
-              <a:lnSpc>
-                <a:spcPct val="135714"/>
-              </a:lnSpc>
-              <a:spcBef>
-                <a:spcPts val="0"/>
-              </a:spcBef>
-              <a:spcAft>
-                <a:spcPts val="0"/>
-              </a:spcAft>
-              <a:buClr>
-                <a:schemeClr val="dk1"/>
-              </a:buClr>
-              <a:buSzPts val="1100"/>
-              <a:buFont typeface="Arial"/>
-              <a:buNone/>
-            </a:pPr>
-            <a:r>
-              <a:rPr lang="en-GB" sz="3000">
-                <a:solidFill>
-                  <a:srgbClr val="0000FF"/>
-                </a:solidFill>
-                <a:highlight>
-                  <a:srgbClr val="FFFFFF"/>
-                </a:highlight>
-                <a:latin typeface="Consolas"/>
-                <a:ea typeface="Consolas"/>
-                <a:cs typeface="Consolas"/>
-                <a:sym typeface="Consolas"/>
-              </a:rPr>
-              <a:t>copyrequestbody</a:t>
-            </a:r>
-            <a:r>
-              <a:rPr lang="en-GB" sz="3000">
-                <a:solidFill>
-                  <a:schemeClr val="dk1"/>
-                </a:solidFill>
-                <a:highlight>
-                  <a:srgbClr val="FFFFFF"/>
-                </a:highlight>
-                <a:latin typeface="Consolas"/>
-                <a:ea typeface="Consolas"/>
-                <a:cs typeface="Consolas"/>
-                <a:sym typeface="Consolas"/>
-              </a:rPr>
-              <a:t> = true</a:t>
-            </a:r>
-            <a:endParaRPr sz="3000">
-              <a:solidFill>
-                <a:schemeClr val="dk1"/>
-              </a:solidFill>
-              <a:highlight>
-                <a:srgbClr val="FFFFFF"/>
-              </a:highlight>
-              <a:latin typeface="Consolas"/>
-              <a:ea typeface="Consolas"/>
-              <a:cs typeface="Consolas"/>
-              <a:sym typeface="Consolas"/>
-            </a:endParaRPr>
-          </a:p>
-          <a:p>
-            <a:pPr indent="0" lvl="0" marL="0" rtl="0" algn="l">
-              <a:lnSpc>
-                <a:spcPct val="135714"/>
-              </a:lnSpc>
-              <a:spcBef>
-                <a:spcPts val="0"/>
-              </a:spcBef>
-              <a:spcAft>
-                <a:spcPts val="0"/>
-              </a:spcAft>
-              <a:buNone/>
-            </a:pPr>
-            <a:r>
-              <a:rPr lang="en-GB" sz="3000">
-                <a:solidFill>
-                  <a:srgbClr val="0000FF"/>
-                </a:solidFill>
-                <a:highlight>
-                  <a:srgbClr val="FFFFFF"/>
-                </a:highlight>
-                <a:latin typeface="Consolas"/>
-                <a:ea typeface="Consolas"/>
-                <a:cs typeface="Consolas"/>
-                <a:sym typeface="Consolas"/>
-              </a:rPr>
-              <a:t>EnableDocs</a:t>
-            </a:r>
-            <a:r>
-              <a:rPr lang="en-GB" sz="3000">
-                <a:solidFill>
-                  <a:schemeClr val="dk1"/>
-                </a:solidFill>
-                <a:highlight>
-                  <a:srgbClr val="FFFFFF"/>
-                </a:highlight>
-                <a:latin typeface="Consolas"/>
-                <a:ea typeface="Consolas"/>
-                <a:cs typeface="Consolas"/>
-                <a:sym typeface="Consolas"/>
-              </a:rPr>
-              <a:t> = true</a:t>
-            </a:r>
-            <a:endParaRPr sz="3000">
-              <a:latin typeface="Consolas"/>
-              <a:ea typeface="Consolas"/>
-              <a:cs typeface="Consolas"/>
-              <a:sym typeface="Consolas"/>
-            </a:endParaRPr>
-          </a:p>
-        </p:txBody>
-      </p:sp>
-    </p:spTree>
-  </p:cSld>
-  <p:clrMapOvr>
-    <a:masterClrMapping/>
-  </p:clrMapOvr>
-</p:sld>
-</file>
-
-<file path=ppt/slides/slide8.xml><?xml version="1.0" encoding="utf-8"?>
-<p:sld xmlns:a="http://schemas.openxmlformats.org/drawingml/2006/main" xmlns:r="http://schemas.openxmlformats.org/officeDocument/2006/relationships" xmlns:mc="http://schemas.openxmlformats.org/markup-compatibility/2006" xmlns:mv="urn:schemas-microsoft-com:mac:vml" xmlns:p="http://schemas.openxmlformats.org/presentationml/2006/main" xmlns:c="http://schemas.openxmlformats.org/drawingml/2006/chart" xmlns:dgm="http://schemas.openxmlformats.org/drawingml/2006/diagram" xmlns:o="urn:schemas-microsoft-com:office:office" xmlns:v="urn:schemas-microsoft-com:vml" xmlns:pvml="urn:schemas-microsoft-com:office:powerpoint" xmlns:com="http://schemas.openxmlformats.org/drawingml/2006/compatibility" xmlns:p14="http://schemas.microsoft.com/office/powerpoint/2010/main" xmlns:p15="http://schemas.microsoft.com/office/powerpoint/2012/main" xmlns:ahyp="http://schemas.microsoft.com/office/drawing/2018/hyperlinkcolor">
-  <p:cSld>
-    <p:spTree>
-      <p:nvGrpSpPr>
-        <p:cNvPr id="102" name="Shape 102"/>
-        <p:cNvGrpSpPr/>
-        <p:nvPr/>
-      </p:nvGrpSpPr>
-      <p:grpSpPr>
-        <a:xfrm>
-          <a:off x="0" y="0"/>
-          <a:ext cx="0" cy="0"/>
-          <a:chOff x="0" y="0"/>
-          <a:chExt cx="0" cy="0"/>
-        </a:xfrm>
-      </p:grpSpPr>
-      <p:sp>
-        <p:nvSpPr>
-          <p:cNvPr id="103" name="Google Shape;103;p20"/>
-          <p:cNvSpPr txBox="1"/>
-          <p:nvPr>
-            <p:ph type="title"/>
-          </p:nvPr>
-        </p:nvSpPr>
-        <p:spPr>
-          <a:xfrm>
-            <a:off x="311700" y="791156"/>
-            <a:ext cx="8520600" cy="1018200"/>
-          </a:xfrm>
-          <a:prstGeom prst="rect">
-            <a:avLst/>
-          </a:prstGeom>
-        </p:spPr>
-        <p:txBody>
-          <a:bodyPr anchorCtr="0" anchor="t" bIns="91425" lIns="91425" spcFirstLastPara="1" rIns="91425" wrap="square" tIns="91425">
-            <a:noAutofit/>
-          </a:bodyPr>
-          <a:lstStyle/>
-          <a:p>
-            <a:pPr indent="0" lvl="0" marL="0" rtl="0" algn="l">
-              <a:spcBef>
-                <a:spcPts val="0"/>
-              </a:spcBef>
-              <a:spcAft>
-                <a:spcPts val="0"/>
-              </a:spcAft>
-              <a:buNone/>
-            </a:pPr>
-            <a:r>
-              <a:rPr lang="en-GB" sz="3000"/>
-              <a:t>Анатомия веб-сервиса</a:t>
-            </a:r>
-            <a:endParaRPr sz="3000"/>
-          </a:p>
-        </p:txBody>
-      </p:sp>
-      <p:sp>
-        <p:nvSpPr>
-          <p:cNvPr id="104" name="Google Shape;104;p20"/>
-          <p:cNvSpPr txBox="1"/>
-          <p:nvPr>
-            <p:ph idx="1" type="body"/>
-          </p:nvPr>
-        </p:nvSpPr>
-        <p:spPr>
-          <a:xfrm>
-            <a:off x="311700" y="2048844"/>
-            <a:ext cx="8520600" cy="6073500"/>
-          </a:xfrm>
-          <a:prstGeom prst="rect">
-            <a:avLst/>
-          </a:prstGeom>
-        </p:spPr>
-        <p:txBody>
-          <a:bodyPr anchorCtr="0" anchor="t" bIns="91425" lIns="91425" spcFirstLastPara="1" rIns="91425" wrap="square" tIns="91425">
-            <a:noAutofit/>
-          </a:bodyPr>
-          <a:lstStyle/>
-          <a:p>
-            <a:pPr indent="-419100" lvl="0" marL="457200" rtl="0" algn="l">
-              <a:spcBef>
-                <a:spcPts val="0"/>
-              </a:spcBef>
-              <a:spcAft>
-                <a:spcPts val="0"/>
-              </a:spcAft>
-              <a:buSzPts val="3000"/>
-              <a:buChar char="●"/>
-            </a:pPr>
-            <a:r>
-              <a:rPr lang="en-GB" sz="3000"/>
-              <a:t>Мониторинг</a:t>
-            </a:r>
-            <a:endParaRPr sz="3000"/>
-          </a:p>
-          <a:p>
-            <a:pPr indent="0" lvl="0" marL="0" rtl="0" algn="l">
-              <a:spcBef>
-                <a:spcPts val="1600"/>
-              </a:spcBef>
-              <a:spcAft>
-                <a:spcPts val="1600"/>
-              </a:spcAft>
-              <a:buNone/>
-            </a:pPr>
-            <a:r>
-              <a:t/>
-            </a:r>
             <a:endParaRPr sz="3000"/>
           </a:p>
         </p:txBody>
@@ -10176,23 +10374,20 @@
           </a:ln>
         </p:spPr>
         <p:txBody>
-          <a:bodyPr anchorCtr="0" anchor="t" bIns="91425" lIns="91425" spcFirstLastPara="1" rIns="91425" wrap="square" tIns="91425">
+          <a:bodyPr spcFirstLastPara="1" wrap="square" lIns="91425" tIns="91425" rIns="91425" bIns="91425" anchor="t" anchorCtr="0">
             <a:noAutofit/>
           </a:bodyPr>
           <a:lstStyle/>
           <a:p>
-            <a:pPr indent="0" lvl="0" marL="0" rtl="0" algn="l">
-              <a:spcBef>
-                <a:spcPts val="0"/>
-              </a:spcBef>
-              <a:spcAft>
-                <a:spcPts val="0"/>
-              </a:spcAft>
-              <a:buNone/>
-            </a:pPr>
-            <a:r>
-              <a:t/>
-            </a:r>
+            <a:pPr marL="0" lvl="0" indent="0" algn="l" rtl="0">
+              <a:spcBef>
+                <a:spcPts val="0"/>
+              </a:spcBef>
+              <a:spcAft>
+                <a:spcPts val="0"/>
+              </a:spcAft>
+              <a:buNone/>
+            </a:pPr>
             <a:endParaRPr/>
           </a:p>
         </p:txBody>
@@ -10234,11 +10429,11 @@
 </file>
 
 <file path=ppt/slides/slide9.xml><?xml version="1.0" encoding="utf-8"?>
-<p:sld xmlns:a="http://schemas.openxmlformats.org/drawingml/2006/main" xmlns:r="http://schemas.openxmlformats.org/officeDocument/2006/relationships" xmlns:mc="http://schemas.openxmlformats.org/markup-compatibility/2006" xmlns:mv="urn:schemas-microsoft-com:mac:vml" xmlns:p="http://schemas.openxmlformats.org/presentationml/2006/main" xmlns:c="http://schemas.openxmlformats.org/drawingml/2006/chart" xmlns:dgm="http://schemas.openxmlformats.org/drawingml/2006/diagram" xmlns:o="urn:schemas-microsoft-com:office:office" xmlns:v="urn:schemas-microsoft-com:vml" xmlns:pvml="urn:schemas-microsoft-com:office:powerpoint" xmlns:com="http://schemas.openxmlformats.org/drawingml/2006/compatibility" xmlns:p14="http://schemas.microsoft.com/office/powerpoint/2010/main" xmlns:p15="http://schemas.microsoft.com/office/powerpoint/2012/main" xmlns:ahyp="http://schemas.microsoft.com/office/drawing/2018/hyperlinkcolor">
+<p:sld xmlns:a="http://schemas.openxmlformats.org/drawingml/2006/main" xmlns:r="http://schemas.openxmlformats.org/officeDocument/2006/relationships" xmlns:p="http://schemas.openxmlformats.org/presentationml/2006/main">
   <p:cSld>
     <p:spTree>
       <p:nvGrpSpPr>
-        <p:cNvPr id="110" name="Shape 110"/>
+        <p:cNvPr id="1" name="Shape 95"/>
         <p:cNvGrpSpPr/>
         <p:nvPr/>
       </p:nvGrpSpPr>
@@ -10252,8 +10447,10 @@
       </p:grpSpPr>
       <p:sp>
         <p:nvSpPr>
-          <p:cNvPr id="111" name="Google Shape;111;p21"/>
-          <p:cNvSpPr txBox="1"/>
+          <p:cNvPr id="96" name="Google Shape;96;p19"/>
+          <p:cNvSpPr txBox="1">
+            <a:spLocks noGrp="1"/>
+          </p:cNvSpPr>
           <p:nvPr>
             <p:ph type="title"/>
           </p:nvPr>
@@ -10268,12 +10465,12 @@
           </a:prstGeom>
         </p:spPr>
         <p:txBody>
-          <a:bodyPr anchorCtr="0" anchor="t" bIns="91425" lIns="91425" spcFirstLastPara="1" rIns="91425" wrap="square" tIns="91425">
+          <a:bodyPr spcFirstLastPara="1" wrap="square" lIns="91425" tIns="91425" rIns="91425" bIns="91425" anchor="t" anchorCtr="0">
             <a:noAutofit/>
           </a:bodyPr>
           <a:lstStyle/>
           <a:p>
-            <a:pPr indent="0" lvl="0" marL="0" rtl="0" algn="l">
+            <a:pPr marL="0" lvl="0" indent="0" algn="l" rtl="0">
               <a:spcBef>
                 <a:spcPts val="0"/>
               </a:spcBef>
@@ -10292,10 +10489,12 @@
       </p:sp>
       <p:sp>
         <p:nvSpPr>
-          <p:cNvPr id="112" name="Google Shape;112;p21"/>
-          <p:cNvSpPr txBox="1"/>
+          <p:cNvPr id="97" name="Google Shape;97;p19"/>
+          <p:cNvSpPr txBox="1">
+            <a:spLocks noGrp="1"/>
+          </p:cNvSpPr>
           <p:nvPr>
-            <p:ph idx="1" type="body"/>
+            <p:ph type="body" idx="1"/>
           </p:nvPr>
         </p:nvSpPr>
         <p:spPr>
@@ -10308,12 +10507,12 @@
           </a:prstGeom>
         </p:spPr>
         <p:txBody>
-          <a:bodyPr anchorCtr="0" anchor="t" bIns="91425" lIns="91425" spcFirstLastPara="1" rIns="91425" wrap="square" tIns="91425">
+          <a:bodyPr spcFirstLastPara="1" wrap="square" lIns="91425" tIns="91425" rIns="91425" bIns="91425" anchor="t" anchorCtr="0">
             <a:noAutofit/>
           </a:bodyPr>
           <a:lstStyle/>
           <a:p>
-            <a:pPr indent="-419100" lvl="0" marL="457200" rtl="0" algn="l">
+            <a:pPr marL="457200" lvl="0" indent="-419100" algn="l" rtl="0">
               <a:spcBef>
                 <a:spcPts val="0"/>
               </a:spcBef>
@@ -10325,12 +10524,12 @@
             </a:pPr>
             <a:r>
               <a:rPr lang="en-GB" sz="3000"/>
-              <a:t>Middleware / фреймворки</a:t>
+              <a:t>Конфигурирование</a:t>
             </a:r>
             <a:endParaRPr sz="3000"/>
           </a:p>
           <a:p>
-            <a:pPr indent="0" lvl="0" marL="0" rtl="0" algn="l">
+            <a:pPr marL="0" lvl="0" indent="0" algn="l" rtl="0">
               <a:spcBef>
                 <a:spcPts val="1600"/>
               </a:spcBef>
@@ -10339,16 +10538,13 @@
               </a:spcAft>
               <a:buNone/>
             </a:pPr>
-            <a:r>
-              <a:t/>
-            </a:r>
             <a:endParaRPr sz="3000"/>
           </a:p>
         </p:txBody>
       </p:sp>
       <p:sp>
         <p:nvSpPr>
-          <p:cNvPr id="113" name="Google Shape;113;p21"/>
+          <p:cNvPr id="98" name="Google Shape;98;p19"/>
           <p:cNvSpPr txBox="1"/>
           <p:nvPr/>
         </p:nvSpPr>
@@ -10366,91 +10562,15 @@
           </a:ln>
         </p:spPr>
         <p:txBody>
-          <a:bodyPr anchorCtr="0" anchor="t" bIns="91425" lIns="91425" spcFirstLastPara="1" rIns="91425" wrap="square" tIns="91425">
+          <a:bodyPr spcFirstLastPara="1" wrap="square" lIns="91425" tIns="91425" rIns="91425" bIns="91425" anchor="t" anchorCtr="0">
             <a:noAutofit/>
           </a:bodyPr>
           <a:lstStyle/>
           <a:p>
-            <a:pPr indent="0" lvl="0" marL="0" rtl="0" algn="l">
-              <a:spcBef>
-                <a:spcPts val="0"/>
-              </a:spcBef>
-              <a:spcAft>
-                <a:spcPts val="0"/>
-              </a:spcAft>
-              <a:buNone/>
-            </a:pPr>
-            <a:r>
-              <a:rPr lang="en-GB" sz="3000">
-                <a:latin typeface="Consolas"/>
-                <a:ea typeface="Consolas"/>
-                <a:cs typeface="Consolas"/>
-                <a:sym typeface="Consolas"/>
-              </a:rPr>
-              <a:t>Site := myServeMux</a:t>
-            </a:r>
-            <a:endParaRPr sz="3000">
-              <a:latin typeface="Consolas"/>
-              <a:ea typeface="Consolas"/>
-              <a:cs typeface="Consolas"/>
-              <a:sym typeface="Consolas"/>
-            </a:endParaRPr>
-          </a:p>
-          <a:p>
-            <a:pPr indent="0" lvl="0" marL="0" rtl="0" algn="l">
-              <a:spcBef>
-                <a:spcPts val="0"/>
-              </a:spcBef>
-              <a:spcAft>
-                <a:spcPts val="0"/>
-              </a:spcAft>
-              <a:buNone/>
-            </a:pPr>
-            <a:r>
-              <a:rPr lang="en-GB" sz="3000">
-                <a:solidFill>
-                  <a:schemeClr val="dk1"/>
-                </a:solidFill>
-                <a:latin typeface="Consolas"/>
-                <a:ea typeface="Consolas"/>
-                <a:cs typeface="Consolas"/>
-                <a:sym typeface="Consolas"/>
-              </a:rPr>
-              <a:t>Site </a:t>
-            </a:r>
-            <a:r>
-              <a:rPr lang="en-GB" sz="3000">
-                <a:latin typeface="Consolas"/>
-                <a:ea typeface="Consolas"/>
-                <a:cs typeface="Consolas"/>
-                <a:sym typeface="Consolas"/>
-              </a:rPr>
-              <a:t>= checkAuth(</a:t>
-            </a:r>
-            <a:r>
-              <a:rPr lang="en-GB" sz="3000">
-                <a:solidFill>
-                  <a:schemeClr val="dk1"/>
-                </a:solidFill>
-                <a:latin typeface="Consolas"/>
-                <a:ea typeface="Consolas"/>
-                <a:cs typeface="Consolas"/>
-                <a:sym typeface="Consolas"/>
-              </a:rPr>
-              <a:t>Handler)</a:t>
-            </a:r>
-            <a:endParaRPr sz="3000">
-              <a:solidFill>
-                <a:schemeClr val="dk1"/>
-              </a:solidFill>
-              <a:latin typeface="Consolas"/>
-              <a:ea typeface="Consolas"/>
-              <a:cs typeface="Consolas"/>
-              <a:sym typeface="Consolas"/>
-            </a:endParaRPr>
-          </a:p>
-          <a:p>
-            <a:pPr indent="0" lvl="0" marL="0" rtl="0" algn="l">
+            <a:pPr marL="0" lvl="0" indent="0" algn="l" rtl="0">
+              <a:lnSpc>
+                <a:spcPct val="135714"/>
+              </a:lnSpc>
               <a:spcBef>
                 <a:spcPts val="0"/>
               </a:spcBef>
@@ -10467,107 +10587,7 @@
             <a:r>
               <a:rPr lang="en-GB" sz="3000">
                 <a:solidFill>
-                  <a:schemeClr val="dk1"/>
-                </a:solidFill>
-                <a:latin typeface="Consolas"/>
-                <a:ea typeface="Consolas"/>
-                <a:cs typeface="Consolas"/>
-                <a:sym typeface="Consolas"/>
-              </a:rPr>
-              <a:t>Site = accessLog(Handler)</a:t>
-            </a:r>
-            <a:endParaRPr sz="3000">
-              <a:solidFill>
-                <a:schemeClr val="dk1"/>
-              </a:solidFill>
-              <a:latin typeface="Consolas"/>
-              <a:ea typeface="Consolas"/>
-              <a:cs typeface="Consolas"/>
-              <a:sym typeface="Consolas"/>
-            </a:endParaRPr>
-          </a:p>
-          <a:p>
-            <a:pPr indent="0" lvl="0" marL="0" rtl="0" algn="l">
-              <a:spcBef>
-                <a:spcPts val="0"/>
-              </a:spcBef>
-              <a:spcAft>
-                <a:spcPts val="0"/>
-              </a:spcAft>
-              <a:buClr>
-                <a:schemeClr val="dk1"/>
-              </a:buClr>
-              <a:buSzPts val="1100"/>
-              <a:buFont typeface="Arial"/>
-              <a:buNone/>
-            </a:pPr>
-            <a:r>
-              <a:rPr lang="en-GB" sz="3000">
-                <a:solidFill>
-                  <a:schemeClr val="dk1"/>
-                </a:solidFill>
-                <a:latin typeface="Consolas"/>
-                <a:ea typeface="Consolas"/>
-                <a:cs typeface="Consolas"/>
-                <a:sym typeface="Consolas"/>
-              </a:rPr>
-              <a:t>Site = avoidPanic(Handler)</a:t>
-            </a:r>
-            <a:endParaRPr sz="3000">
-              <a:solidFill>
-                <a:schemeClr val="dk1"/>
-              </a:solidFill>
-              <a:latin typeface="Consolas"/>
-              <a:ea typeface="Consolas"/>
-              <a:cs typeface="Consolas"/>
-              <a:sym typeface="Consolas"/>
-            </a:endParaRPr>
-          </a:p>
-          <a:p>
-            <a:pPr indent="0" lvl="0" marL="0" rtl="0" algn="l">
-              <a:spcBef>
-                <a:spcPts val="0"/>
-              </a:spcBef>
-              <a:spcAft>
-                <a:spcPts val="0"/>
-              </a:spcAft>
-              <a:buNone/>
-            </a:pPr>
-            <a:r>
-              <a:t/>
-            </a:r>
-            <a:endParaRPr sz="3000">
-              <a:solidFill>
-                <a:schemeClr val="dk1"/>
-              </a:solidFill>
-              <a:latin typeface="Consolas"/>
-              <a:ea typeface="Consolas"/>
-              <a:cs typeface="Consolas"/>
-              <a:sym typeface="Consolas"/>
-            </a:endParaRPr>
-          </a:p>
-          <a:p>
-            <a:pPr indent="0" lvl="0" marL="0" rtl="0" algn="l">
-              <a:lnSpc>
-                <a:spcPct val="135714"/>
-              </a:lnSpc>
-              <a:spcBef>
-                <a:spcPts val="0"/>
-              </a:spcBef>
-              <a:spcAft>
-                <a:spcPts val="0"/>
-              </a:spcAft>
-              <a:buClr>
-                <a:schemeClr val="dk1"/>
-              </a:buClr>
-              <a:buSzPts val="1100"/>
-              <a:buFont typeface="Arial"/>
-              <a:buNone/>
-            </a:pPr>
-            <a:r>
-              <a:rPr lang="en-GB" sz="3000">
-                <a:solidFill>
-                  <a:schemeClr val="dk1"/>
+                  <a:srgbClr val="0000FF"/>
                 </a:solidFill>
                 <a:highlight>
                   <a:srgbClr val="FFFFFF"/>
@@ -10577,12 +10597,12 @@
                 <a:cs typeface="Consolas"/>
                 <a:sym typeface="Consolas"/>
               </a:rPr>
-              <a:t>http.ListenAndServe(</a:t>
+              <a:t>appname</a:t>
             </a:r>
             <a:r>
               <a:rPr lang="en-GB" sz="3000">
                 <a:solidFill>
-                  <a:srgbClr val="A31515"/>
+                  <a:schemeClr val="dk1"/>
                 </a:solidFill>
                 <a:highlight>
                   <a:srgbClr val="FFFFFF"/>
@@ -10592,49 +10612,7 @@
                 <a:cs typeface="Consolas"/>
                 <a:sym typeface="Consolas"/>
               </a:rPr>
-              <a:t>":8080"</a:t>
-            </a:r>
-            <a:r>
-              <a:rPr lang="en-GB" sz="3000">
-                <a:solidFill>
-                  <a:schemeClr val="dk1"/>
-                </a:solidFill>
-                <a:highlight>
-                  <a:srgbClr val="FFFFFF"/>
-                </a:highlight>
-                <a:latin typeface="Consolas"/>
-                <a:ea typeface="Consolas"/>
-                <a:cs typeface="Consolas"/>
-                <a:sym typeface="Consolas"/>
-              </a:rPr>
-              <a:t>, </a:t>
-            </a:r>
-            <a:r>
-              <a:rPr lang="en-GB" sz="3000">
-                <a:solidFill>
-                  <a:schemeClr val="dk1"/>
-                </a:solidFill>
-                <a:latin typeface="Consolas"/>
-                <a:ea typeface="Consolas"/>
-                <a:cs typeface="Consolas"/>
-                <a:sym typeface="Consolas"/>
-              </a:rPr>
-              <a:t>Site</a:t>
-            </a:r>
-            <a:r>
-              <a:rPr lang="en-GB" sz="3000">
-                <a:solidFill>
-                  <a:schemeClr val="dk1"/>
-                </a:solidFill>
-                <a:highlight>
-                  <a:srgbClr val="FFFFFF"/>
-                </a:highlight>
-                <a:latin typeface="Consolas"/>
-                <a:ea typeface="Consolas"/>
-                <a:cs typeface="Consolas"/>
-                <a:sym typeface="Consolas"/>
-              </a:rPr>
-              <a:t>)</a:t>
+              <a:t> = user</a:t>
             </a:r>
             <a:endParaRPr sz="3000">
               <a:solidFill>
@@ -10650,22 +10628,293 @@
             </a:endParaRPr>
           </a:p>
           <a:p>
-            <a:pPr indent="0" lvl="0" marL="0" rtl="0" algn="l">
-              <a:spcBef>
-                <a:spcPts val="0"/>
-              </a:spcBef>
-              <a:spcAft>
-                <a:spcPts val="0"/>
-              </a:spcAft>
-              <a:buNone/>
-            </a:pPr>
-            <a:r>
-              <a:t/>
+            <a:pPr marL="0" lvl="0" indent="0" algn="l" rtl="0">
+              <a:lnSpc>
+                <a:spcPct val="135714"/>
+              </a:lnSpc>
+              <a:spcBef>
+                <a:spcPts val="0"/>
+              </a:spcBef>
+              <a:spcAft>
+                <a:spcPts val="0"/>
+              </a:spcAft>
+              <a:buClr>
+                <a:schemeClr val="dk1"/>
+              </a:buClr>
+              <a:buSzPts val="1100"/>
+              <a:buFont typeface="Arial"/>
+              <a:buNone/>
+            </a:pPr>
+            <a:r>
+              <a:rPr lang="en-GB" sz="3000">
+                <a:solidFill>
+                  <a:srgbClr val="0000FF"/>
+                </a:solidFill>
+                <a:highlight>
+                  <a:srgbClr val="FFFFFF"/>
+                </a:highlight>
+                <a:latin typeface="Consolas"/>
+                <a:ea typeface="Consolas"/>
+                <a:cs typeface="Consolas"/>
+                <a:sym typeface="Consolas"/>
+              </a:rPr>
+              <a:t>httpport</a:t>
+            </a:r>
+            <a:r>
+              <a:rPr lang="en-GB" sz="3000">
+                <a:solidFill>
+                  <a:schemeClr val="dk1"/>
+                </a:solidFill>
+                <a:highlight>
+                  <a:srgbClr val="FFFFFF"/>
+                </a:highlight>
+                <a:latin typeface="Consolas"/>
+                <a:ea typeface="Consolas"/>
+                <a:cs typeface="Consolas"/>
+                <a:sym typeface="Consolas"/>
+              </a:rPr>
+              <a:t> = 8080</a:t>
             </a:r>
             <a:endParaRPr sz="3000">
               <a:solidFill>
                 <a:schemeClr val="dk1"/>
               </a:solidFill>
+              <a:highlight>
+                <a:srgbClr val="FFFFFF"/>
+              </a:highlight>
+              <a:latin typeface="Consolas"/>
+              <a:ea typeface="Consolas"/>
+              <a:cs typeface="Consolas"/>
+              <a:sym typeface="Consolas"/>
+            </a:endParaRPr>
+          </a:p>
+          <a:p>
+            <a:pPr marL="0" lvl="0" indent="0" algn="l" rtl="0">
+              <a:lnSpc>
+                <a:spcPct val="135714"/>
+              </a:lnSpc>
+              <a:spcBef>
+                <a:spcPts val="0"/>
+              </a:spcBef>
+              <a:spcAft>
+                <a:spcPts val="0"/>
+              </a:spcAft>
+              <a:buClr>
+                <a:schemeClr val="dk1"/>
+              </a:buClr>
+              <a:buSzPts val="1100"/>
+              <a:buFont typeface="Arial"/>
+              <a:buNone/>
+            </a:pPr>
+            <a:r>
+              <a:rPr lang="en-GB" sz="3000">
+                <a:solidFill>
+                  <a:srgbClr val="0000FF"/>
+                </a:solidFill>
+                <a:highlight>
+                  <a:srgbClr val="FFFFFF"/>
+                </a:highlight>
+                <a:latin typeface="Consolas"/>
+                <a:ea typeface="Consolas"/>
+                <a:cs typeface="Consolas"/>
+                <a:sym typeface="Consolas"/>
+              </a:rPr>
+              <a:t>runmode</a:t>
+            </a:r>
+            <a:r>
+              <a:rPr lang="en-GB" sz="3000">
+                <a:solidFill>
+                  <a:schemeClr val="dk1"/>
+                </a:solidFill>
+                <a:highlight>
+                  <a:srgbClr val="FFFFFF"/>
+                </a:highlight>
+                <a:latin typeface="Consolas"/>
+                <a:ea typeface="Consolas"/>
+                <a:cs typeface="Consolas"/>
+                <a:sym typeface="Consolas"/>
+              </a:rPr>
+              <a:t> = dev</a:t>
+            </a:r>
+            <a:endParaRPr sz="3000">
+              <a:solidFill>
+                <a:schemeClr val="dk1"/>
+              </a:solidFill>
+              <a:highlight>
+                <a:srgbClr val="FFFFFF"/>
+              </a:highlight>
+              <a:latin typeface="Consolas"/>
+              <a:ea typeface="Consolas"/>
+              <a:cs typeface="Consolas"/>
+              <a:sym typeface="Consolas"/>
+            </a:endParaRPr>
+          </a:p>
+          <a:p>
+            <a:pPr marL="0" lvl="0" indent="0" algn="l" rtl="0">
+              <a:lnSpc>
+                <a:spcPct val="135714"/>
+              </a:lnSpc>
+              <a:spcBef>
+                <a:spcPts val="0"/>
+              </a:spcBef>
+              <a:spcAft>
+                <a:spcPts val="0"/>
+              </a:spcAft>
+              <a:buClr>
+                <a:schemeClr val="dk1"/>
+              </a:buClr>
+              <a:buSzPts val="1100"/>
+              <a:buFont typeface="Arial"/>
+              <a:buNone/>
+            </a:pPr>
+            <a:r>
+              <a:rPr lang="en-GB" sz="3000">
+                <a:solidFill>
+                  <a:srgbClr val="0000FF"/>
+                </a:solidFill>
+                <a:highlight>
+                  <a:srgbClr val="FFFFFF"/>
+                </a:highlight>
+                <a:latin typeface="Consolas"/>
+                <a:ea typeface="Consolas"/>
+                <a:cs typeface="Consolas"/>
+                <a:sym typeface="Consolas"/>
+              </a:rPr>
+              <a:t>autorender</a:t>
+            </a:r>
+            <a:r>
+              <a:rPr lang="en-GB" sz="3000">
+                <a:solidFill>
+                  <a:schemeClr val="dk1"/>
+                </a:solidFill>
+                <a:highlight>
+                  <a:srgbClr val="FFFFFF"/>
+                </a:highlight>
+                <a:latin typeface="Consolas"/>
+                <a:ea typeface="Consolas"/>
+                <a:cs typeface="Consolas"/>
+                <a:sym typeface="Consolas"/>
+              </a:rPr>
+              <a:t> = false</a:t>
+            </a:r>
+            <a:endParaRPr sz="3000">
+              <a:solidFill>
+                <a:schemeClr val="dk1"/>
+              </a:solidFill>
+              <a:highlight>
+                <a:srgbClr val="FFFFFF"/>
+              </a:highlight>
+              <a:latin typeface="Consolas"/>
+              <a:ea typeface="Consolas"/>
+              <a:cs typeface="Consolas"/>
+              <a:sym typeface="Consolas"/>
+            </a:endParaRPr>
+          </a:p>
+          <a:p>
+            <a:pPr marL="0" lvl="0" indent="0" algn="l" rtl="0">
+              <a:lnSpc>
+                <a:spcPct val="135714"/>
+              </a:lnSpc>
+              <a:spcBef>
+                <a:spcPts val="0"/>
+              </a:spcBef>
+              <a:spcAft>
+                <a:spcPts val="0"/>
+              </a:spcAft>
+              <a:buClr>
+                <a:schemeClr val="dk1"/>
+              </a:buClr>
+              <a:buSzPts val="1100"/>
+              <a:buFont typeface="Arial"/>
+              <a:buNone/>
+            </a:pPr>
+            <a:r>
+              <a:rPr lang="en-GB" sz="3000">
+                <a:solidFill>
+                  <a:srgbClr val="0000FF"/>
+                </a:solidFill>
+                <a:highlight>
+                  <a:srgbClr val="FFFFFF"/>
+                </a:highlight>
+                <a:latin typeface="Consolas"/>
+                <a:ea typeface="Consolas"/>
+                <a:cs typeface="Consolas"/>
+                <a:sym typeface="Consolas"/>
+              </a:rPr>
+              <a:t>copyrequestbody</a:t>
+            </a:r>
+            <a:r>
+              <a:rPr lang="en-GB" sz="3000">
+                <a:solidFill>
+                  <a:schemeClr val="dk1"/>
+                </a:solidFill>
+                <a:highlight>
+                  <a:srgbClr val="FFFFFF"/>
+                </a:highlight>
+                <a:latin typeface="Consolas"/>
+                <a:ea typeface="Consolas"/>
+                <a:cs typeface="Consolas"/>
+                <a:sym typeface="Consolas"/>
+              </a:rPr>
+              <a:t> = true</a:t>
+            </a:r>
+            <a:endParaRPr sz="3000">
+              <a:solidFill>
+                <a:schemeClr val="dk1"/>
+              </a:solidFill>
+              <a:highlight>
+                <a:srgbClr val="FFFFFF"/>
+              </a:highlight>
+              <a:latin typeface="Consolas"/>
+              <a:ea typeface="Consolas"/>
+              <a:cs typeface="Consolas"/>
+              <a:sym typeface="Consolas"/>
+            </a:endParaRPr>
+          </a:p>
+          <a:p>
+            <a:pPr marL="0" lvl="0" indent="0" algn="l" rtl="0">
+              <a:lnSpc>
+                <a:spcPct val="135714"/>
+              </a:lnSpc>
+              <a:spcBef>
+                <a:spcPts val="0"/>
+              </a:spcBef>
+              <a:spcAft>
+                <a:spcPts val="0"/>
+              </a:spcAft>
+              <a:buNone/>
+            </a:pPr>
+            <a:r>
+              <a:rPr lang="en-GB" sz="3000">
+                <a:solidFill>
+                  <a:srgbClr val="0000FF"/>
+                </a:solidFill>
+                <a:highlight>
+                  <a:srgbClr val="FFFFFF"/>
+                </a:highlight>
+                <a:latin typeface="Consolas"/>
+                <a:ea typeface="Consolas"/>
+                <a:cs typeface="Consolas"/>
+                <a:sym typeface="Consolas"/>
+              </a:rPr>
+              <a:t>EnableDocs</a:t>
+            </a:r>
+            <a:r>
+              <a:rPr lang="en-GB" sz="3000">
+                <a:solidFill>
+                  <a:schemeClr val="dk1"/>
+                </a:solidFill>
+                <a:highlight>
+                  <a:srgbClr val="FFFFFF"/>
+                </a:highlight>
+                <a:latin typeface="Consolas"/>
+                <a:ea typeface="Consolas"/>
+                <a:cs typeface="Consolas"/>
+                <a:sym typeface="Consolas"/>
+              </a:rPr>
+              <a:t> = true</a:t>
+            </a:r>
+            <a:endParaRPr sz="3000">
               <a:latin typeface="Consolas"/>
               <a:ea typeface="Consolas"/>
               <a:cs typeface="Consolas"/>
@@ -10683,7 +10932,7 @@
 </file>
 
 <file path=ppt/theme/theme1.xml><?xml version="1.0" encoding="utf-8"?>
-<a:theme xmlns:a="http://schemas.openxmlformats.org/drawingml/2006/main" xmlns:r="http://schemas.openxmlformats.org/officeDocument/2006/relationships" name="Simple Light">
+<a:theme xmlns:a="http://schemas.openxmlformats.org/drawingml/2006/main" name="Simple Light">
   <a:themeElements>
     <a:clrScheme name="Simple Light">
       <a:dk1>
@@ -10958,11 +11207,13 @@
       </a:bgFillStyleLst>
     </a:fmtScheme>
   </a:themeElements>
+  <a:objectDefaults/>
+  <a:extraClrSchemeLst/>
 </a:theme>
 </file>
 
 <file path=ppt/theme/theme2.xml><?xml version="1.0" encoding="utf-8"?>
-<a:theme xmlns:a="http://schemas.openxmlformats.org/drawingml/2006/main" xmlns:r="http://schemas.openxmlformats.org/officeDocument/2006/relationships">
+<a:theme xmlns:a="http://schemas.openxmlformats.org/drawingml/2006/main">
   <a:themeElements>
     <a:clrScheme name="Default">
       <a:dk1>
@@ -11237,5 +11488,7 @@
       </a:bgFillStyleLst>
     </a:fmtScheme>
   </a:themeElements>
+  <a:objectDefaults/>
+  <a:extraClrSchemeLst/>
 </a:theme>
 </file>